--- a/actividad1/slides/Actividad1_AMR_FOD_Kitting_editable.pptx
+++ b/actividad1/slides/Actividad1_AMR_FOD_Kitting_editable.pptx
@@ -4130,8 +4130,8 @@
         </p:nvSpPr>
         <p:spPr>
           <a:xfrm>
-            <a:off x="2011680" y="5166360"/>
-            <a:ext cx="7863840" cy="274320"/>
+            <a:off x="2286000" y="5047488"/>
+            <a:ext cx="2743200" cy="201168"/>
           </a:xfrm>
           <a:prstGeom prst="rect">
             <a:avLst/>
@@ -4149,6 +4149,47 @@
               <a:buNone/>
             </a:pPr>
             <a:r>
+              <a:rPr lang="en-US" sz="800" b="1" dirty="0">
+                <a:solidFill>
+                  <a:srgbClr val="102033"/>
+                </a:solidFill>
+                <a:latin typeface="Aptos" pitchFamily="34" charset="0"/>
+                <a:ea typeface="Aptos" pitchFamily="34" charset="-122"/>
+                <a:cs typeface="Aptos" pitchFamily="34" charset="-120"/>
+              </a:rPr>
+              <a:t>La misión termina con evidencia:</a:t>
+            </a:r>
+            <a:endParaRPr lang="en-US" sz="800" dirty="0"/>
+          </a:p>
+        </p:txBody>
+      </p:sp>
+      <p:sp>
+        <p:nvSpPr>
+          <p:cNvPr id="36" name="Text 34"/>
+          <p:cNvSpPr/>
+          <p:nvPr/>
+        </p:nvSpPr>
+        <p:spPr>
+          <a:xfrm>
+            <a:off x="4892040" y="5047488"/>
+            <a:ext cx="4937760" cy="201168"/>
+          </a:xfrm>
+          <a:prstGeom prst="rect">
+            <a:avLst/>
+          </a:prstGeom>
+          <a:noFill/>
+          <a:ln/>
+        </p:spPr>
+        <p:txBody>
+          <a:bodyPr wrap="square" lIns="381" tIns="381" rIns="381" bIns="381" rtlCol="0" anchor="ctr">
+            <a:normAutofit/>
+          </a:bodyPr>
+          <a:lstStyle/>
+          <a:p>
+            <a:pPr algn="ctr" indent="0" marL="0">
+              <a:buNone/>
+            </a:pPr>
+            <a:r>
               <a:rPr lang="en-US" sz="800" dirty="0">
                 <a:solidFill>
                   <a:srgbClr val="5D6B7A"/>
@@ -4157,7 +4198,7 @@
                 <a:ea typeface="Aptos" pitchFamily="34" charset="-122"/>
                 <a:cs typeface="Aptos" pitchFamily="34" charset="-120"/>
               </a:rPr>
-              <a:t>La misión termina cuando queda evidencia: entrega confirmada, ruta registrada y excepcion documentada.</a:t>
+              <a:t>entrega confirmada + ruta registrada + excepcion documentada.</a:t>
             </a:r>
             <a:endParaRPr lang="en-US" sz="800" dirty="0"/>
           </a:p>
@@ -4928,8 +4969,8 @@
         </p:nvSpPr>
         <p:spPr>
           <a:xfrm>
-            <a:off x="6446520" y="4773168"/>
-            <a:ext cx="4206240" cy="384048"/>
+            <a:off x="6446520" y="4663440"/>
+            <a:ext cx="2377440" cy="182880"/>
           </a:xfrm>
           <a:prstGeom prst="rect">
             <a:avLst/>
@@ -4947,7 +4988,48 @@
               <a:buNone/>
             </a:pPr>
             <a:r>
-              <a:rPr lang="en-US" sz="720" dirty="0">
+              <a:rPr lang="en-US" sz="720" b="1" dirty="0">
+                <a:solidFill>
+                  <a:srgbClr val="102033"/>
+                </a:solidFill>
+                <a:latin typeface="Aptos" pitchFamily="34" charset="0"/>
+                <a:ea typeface="Aptos" pitchFamily="34" charset="-122"/>
+                <a:cs typeface="Aptos" pitchFamily="34" charset="-120"/>
+              </a:rPr>
+              <a:t>Gate minimo antes de planta:</a:t>
+            </a:r>
+            <a:endParaRPr lang="en-US" sz="720" dirty="0"/>
+          </a:p>
+        </p:txBody>
+      </p:sp>
+      <p:sp>
+        <p:nvSpPr>
+          <p:cNvPr id="26" name="Text 24"/>
+          <p:cNvSpPr/>
+          <p:nvPr/>
+        </p:nvSpPr>
+        <p:spPr>
+          <a:xfrm>
+            <a:off x="6446520" y="4956048"/>
+            <a:ext cx="3474720" cy="182880"/>
+          </a:xfrm>
+          <a:prstGeom prst="rect">
+            <a:avLst/>
+          </a:prstGeom>
+          <a:noFill/>
+          <a:ln/>
+        </p:spPr>
+        <p:txBody>
+          <a:bodyPr wrap="square" lIns="381" tIns="381" rIns="381" bIns="381" rtlCol="0" anchor="ctr">
+            <a:normAutofit/>
+          </a:bodyPr>
+          <a:lstStyle/>
+          <a:p>
+            <a:pPr algn="l" indent="0" marL="0">
+              <a:buNone/>
+            </a:pPr>
+            <a:r>
+              <a:rPr lang="en-US" sz="670" dirty="0">
                 <a:solidFill>
                   <a:srgbClr val="5D6B7A"/>
                 </a:solidFill>
@@ -4955,9 +5037,50 @@
                 <a:ea typeface="Aptos" pitchFamily="34" charset="-122"/>
                 <a:cs typeface="Aptos" pitchFamily="34" charset="-120"/>
               </a:rPr>
-              <a:t>Gate: 95 % misiones entregan, cero contactos, 100 % de misiones cerradas y ensayo de bateria antes de migrar ruta.</a:t>
-            </a:r>
-            <a:endParaRPr lang="en-US" sz="720" dirty="0"/>
+              <a:t>95 % misiones entregan; cero contactos.</a:t>
+            </a:r>
+            <a:endParaRPr lang="en-US" sz="670" dirty="0"/>
+          </a:p>
+        </p:txBody>
+      </p:sp>
+      <p:sp>
+        <p:nvSpPr>
+          <p:cNvPr id="27" name="Text 25"/>
+          <p:cNvSpPr/>
+          <p:nvPr/>
+        </p:nvSpPr>
+        <p:spPr>
+          <a:xfrm>
+            <a:off x="6446520" y="5193792"/>
+            <a:ext cx="3566160" cy="182880"/>
+          </a:xfrm>
+          <a:prstGeom prst="rect">
+            <a:avLst/>
+          </a:prstGeom>
+          <a:noFill/>
+          <a:ln/>
+        </p:spPr>
+        <p:txBody>
+          <a:bodyPr wrap="square" lIns="381" tIns="381" rIns="381" bIns="381" rtlCol="0" anchor="ctr">
+            <a:normAutofit/>
+          </a:bodyPr>
+          <a:lstStyle/>
+          <a:p>
+            <a:pPr algn="l" indent="0" marL="0">
+              <a:buNone/>
+            </a:pPr>
+            <a:r>
+              <a:rPr lang="en-US" sz="670" dirty="0">
+                <a:solidFill>
+                  <a:srgbClr val="5D6B7A"/>
+                </a:solidFill>
+                <a:latin typeface="Aptos" pitchFamily="34" charset="0"/>
+                <a:ea typeface="Aptos" pitchFamily="34" charset="-122"/>
+                <a:cs typeface="Aptos" pitchFamily="34" charset="-120"/>
+              </a:rPr>
+              <a:t>100 % misiones cerradas y bateria validada.</a:t>
+            </a:r>
+            <a:endParaRPr lang="en-US" sz="670" dirty="0"/>
           </a:p>
         </p:txBody>
       </p:sp>
@@ -5090,7 +5213,7 @@
                 <a:ea typeface="Aptos Display" pitchFamily="34" charset="-122"/>
                 <a:cs typeface="Aptos Display" pitchFamily="34" charset="-120"/>
               </a:rPr>
-              <a:t>No se vende una flota grande sin datos del piloto</a:t>
+              <a:t>Tres fases con entregables y criterio de paso</a:t>
             </a:r>
             <a:endParaRPr lang="en-US" sz="2000" dirty="0"/>
           </a:p>
@@ -5221,14 +5344,16 @@
         </p:nvSpPr>
         <p:spPr>
           <a:xfrm>
-            <a:off x="2103120" y="2148840"/>
-            <a:ext cx="182880" cy="182880"/>
-          </a:xfrm>
-          <a:prstGeom prst="ellipse">
-            <a:avLst/>
+            <a:off x="777240" y="1234440"/>
+            <a:ext cx="3337560" cy="4160520"/>
+          </a:xfrm>
+          <a:prstGeom prst="roundRect">
+            <a:avLst>
+              <a:gd name="adj" fmla="val 2192"/>
+            </a:avLst>
           </a:prstGeom>
           <a:solidFill>
-            <a:srgbClr val="1F7A8C"/>
+            <a:srgbClr val="FFFFFF"/>
           </a:solidFill>
           <a:ln w="12700">
             <a:solidFill>
@@ -5246,22 +5371,22 @@
         </p:nvSpPr>
         <p:spPr>
           <a:xfrm>
-            <a:off x="1938528" y="1508760"/>
-            <a:ext cx="512064" cy="384048"/>
-          </a:xfrm>
-          <a:prstGeom prst="rect">
-            <a:avLst/>
-          </a:prstGeom>
-          <a:noFill/>
-          <a:ln/>
-        </p:spPr>
-        <p:txBody>
-          <a:bodyPr wrap="square" lIns="381" tIns="381" rIns="381" bIns="381" rtlCol="0" anchor="ctr">
-            <a:normAutofit/>
-          </a:bodyPr>
-          <a:lstStyle/>
-          <a:p>
-            <a:pPr algn="ctr" indent="0" marL="0">
+            <a:off x="1005840" y="1572768"/>
+            <a:ext cx="502920" cy="347472"/>
+          </a:xfrm>
+          <a:prstGeom prst="rect">
+            <a:avLst/>
+          </a:prstGeom>
+          <a:noFill/>
+          <a:ln/>
+        </p:spPr>
+        <p:txBody>
+          <a:bodyPr wrap="square" lIns="381" tIns="381" rIns="381" bIns="381" rtlCol="0" anchor="ctr">
+            <a:normAutofit/>
+          </a:bodyPr>
+          <a:lstStyle/>
+          <a:p>
+            <a:pPr algn="l" indent="0" marL="0">
               <a:buNone/>
             </a:pPr>
             <a:r>
@@ -5287,26 +5412,26 @@
         </p:nvSpPr>
         <p:spPr>
           <a:xfrm>
-            <a:off x="1691640" y="2487168"/>
-            <a:ext cx="822960" cy="164592"/>
-          </a:xfrm>
-          <a:prstGeom prst="rect">
-            <a:avLst/>
-          </a:prstGeom>
-          <a:noFill/>
-          <a:ln/>
-        </p:spPr>
-        <p:txBody>
-          <a:bodyPr wrap="square" lIns="381" tIns="381" rIns="381" bIns="381" rtlCol="0" anchor="ctr">
-            <a:normAutofit/>
-          </a:bodyPr>
-          <a:lstStyle/>
-          <a:p>
-            <a:pPr algn="ctr" indent="0" marL="0">
-              <a:buNone/>
-            </a:pPr>
-            <a:r>
-              <a:rPr lang="en-US" sz="720" b="1" dirty="0">
+            <a:off x="1645920" y="1664208"/>
+            <a:ext cx="2057400" cy="201168"/>
+          </a:xfrm>
+          <a:prstGeom prst="rect">
+            <a:avLst/>
+          </a:prstGeom>
+          <a:noFill/>
+          <a:ln/>
+        </p:spPr>
+        <p:txBody>
+          <a:bodyPr wrap="square" lIns="381" tIns="381" rIns="381" bIns="381" rtlCol="0" anchor="ctr">
+            <a:normAutofit/>
+          </a:bodyPr>
+          <a:lstStyle/>
+          <a:p>
+            <a:pPr algn="l" indent="0" marL="0">
+              <a:buNone/>
+            </a:pPr>
+            <a:r>
+              <a:rPr lang="en-US" sz="820" b="1" dirty="0">
                 <a:solidFill>
                   <a:srgbClr val="1B2430"/>
                 </a:solidFill>
@@ -5314,9 +5439,9 @@
                 <a:ea typeface="Aptos" pitchFamily="34" charset="-122"/>
                 <a:cs typeface="Aptos" pitchFamily="34" charset="-120"/>
               </a:rPr>
-              <a:t>Piloto</a:t>
-            </a:r>
-            <a:endParaRPr lang="en-US" sz="720" dirty="0"/>
+              <a:t>Piloto controlado</a:t>
+            </a:r>
+            <a:endParaRPr lang="en-US" sz="820" dirty="0"/>
           </a:p>
         </p:txBody>
       </p:sp>
@@ -5328,26 +5453,26 @@
         </p:nvSpPr>
         <p:spPr>
           <a:xfrm>
-            <a:off x="1508760" y="2834640"/>
-            <a:ext cx="1188720" cy="164592"/>
-          </a:xfrm>
-          <a:prstGeom prst="rect">
-            <a:avLst/>
-          </a:prstGeom>
-          <a:noFill/>
-          <a:ln/>
-        </p:spPr>
-        <p:txBody>
-          <a:bodyPr wrap="square" lIns="381" tIns="381" rIns="381" bIns="381" rtlCol="0" anchor="ctr">
-            <a:normAutofit/>
-          </a:bodyPr>
-          <a:lstStyle/>
-          <a:p>
-            <a:pPr algn="ctr" indent="0" marL="0">
-              <a:buNone/>
-            </a:pPr>
-            <a:r>
-              <a:rPr lang="en-US" sz="720" b="1" dirty="0">
+            <a:off x="1033272" y="2212848"/>
+            <a:ext cx="1691640" cy="201168"/>
+          </a:xfrm>
+          <a:prstGeom prst="rect">
+            <a:avLst/>
+          </a:prstGeom>
+          <a:noFill/>
+          <a:ln/>
+        </p:spPr>
+        <p:txBody>
+          <a:bodyPr wrap="square" lIns="381" tIns="381" rIns="381" bIns="381" rtlCol="0" anchor="ctr">
+            <a:normAutofit/>
+          </a:bodyPr>
+          <a:lstStyle/>
+          <a:p>
+            <a:pPr algn="l" indent="0" marL="0">
+              <a:buNone/>
+            </a:pPr>
+            <a:r>
+              <a:rPr lang="en-US" sz="830" b="1" dirty="0">
                 <a:solidFill>
                   <a:srgbClr val="1F7A8C"/>
                 </a:solidFill>
@@ -5355,9 +5480,9 @@
                 <a:ea typeface="Aptos" pitchFamily="34" charset="-122"/>
                 <a:cs typeface="Aptos" pitchFamily="34" charset="-120"/>
               </a:rPr>
-              <a:t>198.688 €</a:t>
-            </a:r>
-            <a:endParaRPr lang="en-US" sz="720" dirty="0"/>
+              <a:t>198.688 € CAPEX</a:t>
+            </a:r>
+            <a:endParaRPr lang="en-US" sz="830" dirty="0"/>
           </a:p>
         </p:txBody>
       </p:sp>
@@ -5369,26 +5494,149 @@
         </p:nvSpPr>
         <p:spPr>
           <a:xfrm>
-            <a:off x="1188720" y="3182112"/>
-            <a:ext cx="1828800" cy="384048"/>
-          </a:xfrm>
-          <a:prstGeom prst="rect">
-            <a:avLst/>
-          </a:prstGeom>
-          <a:noFill/>
-          <a:ln/>
-        </p:spPr>
-        <p:txBody>
-          <a:bodyPr wrap="square" lIns="381" tIns="381" rIns="381" bIns="381" rtlCol="0" anchor="ctr">
-            <a:normAutofit/>
-          </a:bodyPr>
-          <a:lstStyle/>
-          <a:p>
-            <a:pPr algn="ctr" indent="0" marL="0">
-              <a:buNone/>
-            </a:pPr>
-            <a:r>
-              <a:rPr lang="en-US" sz="670" dirty="0">
+            <a:off x="1033272" y="2788920"/>
+            <a:ext cx="2606040" cy="201168"/>
+          </a:xfrm>
+          <a:prstGeom prst="rect">
+            <a:avLst/>
+          </a:prstGeom>
+          <a:noFill/>
+          <a:ln/>
+        </p:spPr>
+        <p:txBody>
+          <a:bodyPr wrap="square" lIns="381" tIns="381" rIns="381" bIns="381" rtlCol="0" anchor="ctr">
+            <a:normAutofit/>
+          </a:bodyPr>
+          <a:lstStyle/>
+          <a:p>
+            <a:pPr algn="l" indent="0" marL="0">
+              <a:buNone/>
+            </a:pPr>
+            <a:r>
+              <a:rPr lang="en-US" sz="640" dirty="0">
+                <a:solidFill>
+                  <a:srgbClr val="1B2430"/>
+                </a:solidFill>
+                <a:latin typeface="Aptos" pitchFamily="34" charset="0"/>
+                <a:ea typeface="Aptos" pitchFamily="34" charset="-122"/>
+                <a:cs typeface="Aptos" pitchFamily="34" charset="-120"/>
+              </a:rPr>
+              <a:t>Zona acotada y 1-2 estaciones.</a:t>
+            </a:r>
+            <a:endParaRPr lang="en-US" sz="640" dirty="0"/>
+          </a:p>
+        </p:txBody>
+      </p:sp>
+      <p:sp>
+        <p:nvSpPr>
+          <p:cNvPr id="13" name="Text 11"/>
+          <p:cNvSpPr/>
+          <p:nvPr/>
+        </p:nvSpPr>
+        <p:spPr>
+          <a:xfrm>
+            <a:off x="1033272" y="3063240"/>
+            <a:ext cx="2651760" cy="201168"/>
+          </a:xfrm>
+          <a:prstGeom prst="rect">
+            <a:avLst/>
+          </a:prstGeom>
+          <a:noFill/>
+          <a:ln/>
+        </p:spPr>
+        <p:txBody>
+          <a:bodyPr wrap="square" lIns="381" tIns="381" rIns="381" bIns="381" rtlCol="0" anchor="ctr">
+            <a:normAutofit/>
+          </a:bodyPr>
+          <a:lstStyle/>
+          <a:p>
+            <a:pPr algn="l" indent="0" marL="0">
+              <a:buNone/>
+            </a:pPr>
+            <a:r>
+              <a:rPr lang="en-US" sz="640" dirty="0">
+                <a:solidFill>
+                  <a:srgbClr val="1B2430"/>
+                </a:solidFill>
+                <a:latin typeface="Aptos" pitchFamily="34" charset="0"/>
+                <a:ea typeface="Aptos" pitchFamily="34" charset="-122"/>
+                <a:cs typeface="Aptos" pitchFamily="34" charset="-120"/>
+              </a:rPr>
+              <a:t>Rutas, RFID-QR y ronda FOD.</a:t>
+            </a:r>
+            <a:endParaRPr lang="en-US" sz="640" dirty="0"/>
+          </a:p>
+        </p:txBody>
+      </p:sp>
+      <p:sp>
+        <p:nvSpPr>
+          <p:cNvPr id="14" name="Text 12"/>
+          <p:cNvSpPr/>
+          <p:nvPr/>
+        </p:nvSpPr>
+        <p:spPr>
+          <a:xfrm>
+            <a:off x="1033272" y="3794760"/>
+            <a:ext cx="2651760" cy="201168"/>
+          </a:xfrm>
+          <a:prstGeom prst="rect">
+            <a:avLst/>
+          </a:prstGeom>
+          <a:noFill/>
+          <a:ln/>
+        </p:spPr>
+        <p:txBody>
+          <a:bodyPr wrap="square" lIns="381" tIns="381" rIns="381" bIns="381" rtlCol="0" anchor="ctr">
+            <a:normAutofit/>
+          </a:bodyPr>
+          <a:lstStyle/>
+          <a:p>
+            <a:pPr algn="l" indent="0" marL="0">
+              <a:buNone/>
+            </a:pPr>
+            <a:r>
+              <a:rPr lang="en-US" sz="620" b="1" dirty="0">
+                <a:solidFill>
+                  <a:srgbClr val="B91C1C"/>
+                </a:solidFill>
+                <a:latin typeface="Aptos" pitchFamily="34" charset="0"/>
+                <a:ea typeface="Aptos" pitchFamily="34" charset="-122"/>
+                <a:cs typeface="Aptos" pitchFamily="34" charset="-120"/>
+              </a:rPr>
+              <a:t>Riesgo: aceptación y falsas alarmas.</a:t>
+            </a:r>
+            <a:endParaRPr lang="en-US" sz="620" dirty="0"/>
+          </a:p>
+        </p:txBody>
+      </p:sp>
+      <p:sp>
+        <p:nvSpPr>
+          <p:cNvPr id="15" name="Text 13"/>
+          <p:cNvSpPr/>
+          <p:nvPr/>
+        </p:nvSpPr>
+        <p:spPr>
+          <a:xfrm>
+            <a:off x="1033272" y="4224528"/>
+            <a:ext cx="2606040" cy="274320"/>
+          </a:xfrm>
+          <a:prstGeom prst="rect">
+            <a:avLst/>
+          </a:prstGeom>
+          <a:noFill/>
+          <a:ln/>
+        </p:spPr>
+        <p:txBody>
+          <a:bodyPr wrap="square" lIns="381" tIns="381" rIns="381" bIns="381" rtlCol="0" anchor="ctr">
+            <a:normAutofit/>
+          </a:bodyPr>
+          <a:lstStyle/>
+          <a:p>
+            <a:pPr algn="l" indent="0" marL="0">
+              <a:buNone/>
+            </a:pPr>
+            <a:r>
+              <a:rPr lang="en-US" sz="620" dirty="0">
                 <a:solidFill>
                   <a:srgbClr val="5D6B7A"/>
                 </a:solidFill>
@@ -5396,28 +5644,30 @@
                 <a:ea typeface="Aptos" pitchFamily="34" charset="-122"/>
                 <a:cs typeface="Aptos" pitchFamily="34" charset="-120"/>
               </a:rPr>
-              <a:t>zona acotada, rutas, RFID/QR y FOD</a:t>
-            </a:r>
-            <a:endParaRPr lang="en-US" sz="670" dirty="0"/>
-          </a:p>
-        </p:txBody>
-      </p:sp>
-      <p:sp>
-        <p:nvSpPr>
-          <p:cNvPr id="13" name="Shape 11"/>
-          <p:cNvSpPr/>
-          <p:nvPr/>
-        </p:nvSpPr>
-        <p:spPr>
-          <a:xfrm>
-            <a:off x="5486400" y="2148840"/>
-            <a:ext cx="182880" cy="182880"/>
-          </a:xfrm>
-          <a:prstGeom prst="ellipse">
-            <a:avLst/>
+              <a:t>Pasa: 95 % misiones; 98 % trazas.</a:t>
+            </a:r>
+            <a:endParaRPr lang="en-US" sz="620" dirty="0"/>
+          </a:p>
+        </p:txBody>
+      </p:sp>
+      <p:sp>
+        <p:nvSpPr>
+          <p:cNvPr id="16" name="Shape 14"/>
+          <p:cNvSpPr/>
+          <p:nvPr/>
+        </p:nvSpPr>
+        <p:spPr>
+          <a:xfrm>
+            <a:off x="4572000" y="1234440"/>
+            <a:ext cx="3337560" cy="4160520"/>
+          </a:xfrm>
+          <a:prstGeom prst="roundRect">
+            <a:avLst>
+              <a:gd name="adj" fmla="val 2192"/>
+            </a:avLst>
           </a:prstGeom>
           <a:solidFill>
-            <a:srgbClr val="F4A261"/>
+            <a:srgbClr val="FFFFFF"/>
           </a:solidFill>
           <a:ln w="12700">
             <a:solidFill>
@@ -5429,28 +5679,28 @@
       </p:sp>
       <p:sp>
         <p:nvSpPr>
-          <p:cNvPr id="14" name="Text 12"/>
-          <p:cNvSpPr/>
-          <p:nvPr/>
-        </p:nvSpPr>
-        <p:spPr>
-          <a:xfrm>
-            <a:off x="5321808" y="1508760"/>
-            <a:ext cx="512064" cy="384048"/>
-          </a:xfrm>
-          <a:prstGeom prst="rect">
-            <a:avLst/>
-          </a:prstGeom>
-          <a:noFill/>
-          <a:ln/>
-        </p:spPr>
-        <p:txBody>
-          <a:bodyPr wrap="square" lIns="381" tIns="381" rIns="381" bIns="381" rtlCol="0" anchor="ctr">
-            <a:normAutofit/>
-          </a:bodyPr>
-          <a:lstStyle/>
-          <a:p>
-            <a:pPr algn="ctr" indent="0" marL="0">
+          <p:cNvPr id="17" name="Text 15"/>
+          <p:cNvSpPr/>
+          <p:nvPr/>
+        </p:nvSpPr>
+        <p:spPr>
+          <a:xfrm>
+            <a:off x="4800600" y="1572768"/>
+            <a:ext cx="502920" cy="347472"/>
+          </a:xfrm>
+          <a:prstGeom prst="rect">
+            <a:avLst/>
+          </a:prstGeom>
+          <a:noFill/>
+          <a:ln/>
+        </p:spPr>
+        <p:txBody>
+          <a:bodyPr wrap="square" lIns="381" tIns="381" rIns="381" bIns="381" rtlCol="0" anchor="ctr">
+            <a:normAutofit/>
+          </a:bodyPr>
+          <a:lstStyle/>
+          <a:p>
+            <a:pPr algn="l" indent="0" marL="0">
               <a:buNone/>
             </a:pPr>
             <a:r>
@@ -5470,32 +5720,32 @@
       </p:sp>
       <p:sp>
         <p:nvSpPr>
-          <p:cNvPr id="15" name="Text 13"/>
-          <p:cNvSpPr/>
-          <p:nvPr/>
-        </p:nvSpPr>
-        <p:spPr>
-          <a:xfrm>
-            <a:off x="5074920" y="2487168"/>
-            <a:ext cx="822960" cy="164592"/>
-          </a:xfrm>
-          <a:prstGeom prst="rect">
-            <a:avLst/>
-          </a:prstGeom>
-          <a:noFill/>
-          <a:ln/>
-        </p:spPr>
-        <p:txBody>
-          <a:bodyPr wrap="square" lIns="381" tIns="381" rIns="381" bIns="381" rtlCol="0" anchor="ctr">
-            <a:normAutofit/>
-          </a:bodyPr>
-          <a:lstStyle/>
-          <a:p>
-            <a:pPr algn="ctr" indent="0" marL="0">
-              <a:buNone/>
-            </a:pPr>
-            <a:r>
-              <a:rPr lang="en-US" sz="720" b="1" dirty="0">
+          <p:cNvPr id="18" name="Text 16"/>
+          <p:cNvSpPr/>
+          <p:nvPr/>
+        </p:nvSpPr>
+        <p:spPr>
+          <a:xfrm>
+            <a:off x="5440680" y="1664208"/>
+            <a:ext cx="2057400" cy="201168"/>
+          </a:xfrm>
+          <a:prstGeom prst="rect">
+            <a:avLst/>
+          </a:prstGeom>
+          <a:noFill/>
+          <a:ln/>
+        </p:spPr>
+        <p:txBody>
+          <a:bodyPr wrap="square" lIns="381" tIns="381" rIns="381" bIns="381" rtlCol="0" anchor="ctr">
+            <a:normAutofit/>
+          </a:bodyPr>
+          <a:lstStyle/>
+          <a:p>
+            <a:pPr algn="l" indent="0" marL="0">
+              <a:buNone/>
+            </a:pPr>
+            <a:r>
+              <a:rPr lang="en-US" sz="820" b="1" dirty="0">
                 <a:solidFill>
                   <a:srgbClr val="1B2430"/>
                 </a:solidFill>
@@ -5505,38 +5755,38 @@
               </a:rPr>
               <a:t>Expansion</a:t>
             </a:r>
-            <a:endParaRPr lang="en-US" sz="720" dirty="0"/>
-          </a:p>
-        </p:txBody>
-      </p:sp>
-      <p:sp>
-        <p:nvSpPr>
-          <p:cNvPr id="16" name="Text 14"/>
-          <p:cNvSpPr/>
-          <p:nvPr/>
-        </p:nvSpPr>
-        <p:spPr>
-          <a:xfrm>
-            <a:off x="4892040" y="2834640"/>
-            <a:ext cx="1188720" cy="164592"/>
-          </a:xfrm>
-          <a:prstGeom prst="rect">
-            <a:avLst/>
-          </a:prstGeom>
-          <a:noFill/>
-          <a:ln/>
-        </p:spPr>
-        <p:txBody>
-          <a:bodyPr wrap="square" lIns="381" tIns="381" rIns="381" bIns="381" rtlCol="0" anchor="ctr">
-            <a:normAutofit/>
-          </a:bodyPr>
-          <a:lstStyle/>
-          <a:p>
-            <a:pPr algn="ctr" indent="0" marL="0">
-              <a:buNone/>
-            </a:pPr>
-            <a:r>
-              <a:rPr lang="en-US" sz="720" b="1" dirty="0">
+            <a:endParaRPr lang="en-US" sz="820" dirty="0"/>
+          </a:p>
+        </p:txBody>
+      </p:sp>
+      <p:sp>
+        <p:nvSpPr>
+          <p:cNvPr id="19" name="Text 17"/>
+          <p:cNvSpPr/>
+          <p:nvPr/>
+        </p:nvSpPr>
+        <p:spPr>
+          <a:xfrm>
+            <a:off x="4828032" y="2212848"/>
+            <a:ext cx="1691640" cy="201168"/>
+          </a:xfrm>
+          <a:prstGeom prst="rect">
+            <a:avLst/>
+          </a:prstGeom>
+          <a:noFill/>
+          <a:ln/>
+        </p:spPr>
+        <p:txBody>
+          <a:bodyPr wrap="square" lIns="381" tIns="381" rIns="381" bIns="381" rtlCol="0" anchor="ctr">
+            <a:normAutofit/>
+          </a:bodyPr>
+          <a:lstStyle/>
+          <a:p>
+            <a:pPr algn="l" indent="0" marL="0">
+              <a:buNone/>
+            </a:pPr>
+            <a:r>
+              <a:rPr lang="en-US" sz="830" b="1" dirty="0">
                 <a:solidFill>
                   <a:srgbClr val="F4A261"/>
                 </a:solidFill>
@@ -5544,40 +5794,163 @@
                 <a:ea typeface="Aptos" pitchFamily="34" charset="-122"/>
                 <a:cs typeface="Aptos" pitchFamily="34" charset="-120"/>
               </a:rPr>
-              <a:t>904.736 €</a:t>
-            </a:r>
-            <a:endParaRPr lang="en-US" sz="720" dirty="0"/>
-          </a:p>
-        </p:txBody>
-      </p:sp>
-      <p:sp>
-        <p:nvSpPr>
-          <p:cNvPr id="17" name="Text 15"/>
-          <p:cNvSpPr/>
-          <p:nvPr/>
-        </p:nvSpPr>
-        <p:spPr>
-          <a:xfrm>
-            <a:off x="4572000" y="3182112"/>
-            <a:ext cx="1828800" cy="384048"/>
-          </a:xfrm>
-          <a:prstGeom prst="rect">
-            <a:avLst/>
-          </a:prstGeom>
-          <a:noFill/>
-          <a:ln/>
-        </p:spPr>
-        <p:txBody>
-          <a:bodyPr wrap="square" lIns="381" tIns="381" rIns="381" bIns="381" rtlCol="0" anchor="ctr">
-            <a:normAutofit/>
-          </a:bodyPr>
-          <a:lstStyle/>
-          <a:p>
-            <a:pPr algn="ctr" indent="0" marL="0">
-              <a:buNone/>
-            </a:pPr>
-            <a:r>
-              <a:rPr lang="en-US" sz="670" dirty="0">
+              <a:t>904.736 € CAPEX</a:t>
+            </a:r>
+            <a:endParaRPr lang="en-US" sz="830" dirty="0"/>
+          </a:p>
+        </p:txBody>
+      </p:sp>
+      <p:sp>
+        <p:nvSpPr>
+          <p:cNvPr id="20" name="Text 18"/>
+          <p:cNvSpPr/>
+          <p:nvPr/>
+        </p:nvSpPr>
+        <p:spPr>
+          <a:xfrm>
+            <a:off x="4828032" y="2788920"/>
+            <a:ext cx="2606040" cy="201168"/>
+          </a:xfrm>
+          <a:prstGeom prst="rect">
+            <a:avLst/>
+          </a:prstGeom>
+          <a:noFill/>
+          <a:ln/>
+        </p:spPr>
+        <p:txBody>
+          <a:bodyPr wrap="square" lIns="381" tIns="381" rIns="381" bIns="381" rtlCol="0" anchor="ctr">
+            <a:normAutofit/>
+          </a:bodyPr>
+          <a:lstStyle/>
+          <a:p>
+            <a:pPr algn="l" indent="0" marL="0">
+              <a:buNone/>
+            </a:pPr>
+            <a:r>
+              <a:rPr lang="en-US" sz="640" dirty="0">
+                <a:solidFill>
+                  <a:srgbClr val="1B2430"/>
+                </a:solidFill>
+                <a:latin typeface="Aptos" pitchFamily="34" charset="0"/>
+                <a:ea typeface="Aptos" pitchFamily="34" charset="-122"/>
+                <a:cs typeface="Aptos" pitchFamily="34" charset="-120"/>
+              </a:rPr>
+              <a:t>Varias estaciones y gestor de flota.</a:t>
+            </a:r>
+            <a:endParaRPr lang="en-US" sz="640" dirty="0"/>
+          </a:p>
+        </p:txBody>
+      </p:sp>
+      <p:sp>
+        <p:nvSpPr>
+          <p:cNvPr id="21" name="Text 19"/>
+          <p:cNvSpPr/>
+          <p:nvPr/>
+        </p:nvSpPr>
+        <p:spPr>
+          <a:xfrm>
+            <a:off x="4828032" y="3063240"/>
+            <a:ext cx="2651760" cy="201168"/>
+          </a:xfrm>
+          <a:prstGeom prst="rect">
+            <a:avLst/>
+          </a:prstGeom>
+          <a:noFill/>
+          <a:ln/>
+        </p:spPr>
+        <p:txBody>
+          <a:bodyPr wrap="square" lIns="381" tIns="381" rIns="381" bIns="381" rtlCol="0" anchor="ctr">
+            <a:normAutofit/>
+          </a:bodyPr>
+          <a:lstStyle/>
+          <a:p>
+            <a:pPr algn="l" indent="0" marL="0">
+              <a:buNone/>
+            </a:pPr>
+            <a:r>
+              <a:rPr lang="en-US" sz="640" dirty="0">
+                <a:solidFill>
+                  <a:srgbClr val="1B2430"/>
+                </a:solidFill>
+                <a:latin typeface="Aptos" pitchFamily="34" charset="0"/>
+                <a:ea typeface="Aptos" pitchFamily="34" charset="-122"/>
+                <a:cs typeface="Aptos" pitchFamily="34" charset="-120"/>
+              </a:rPr>
+              <a:t>Retorno de útiles y tablero de incidencias.</a:t>
+            </a:r>
+            <a:endParaRPr lang="en-US" sz="640" dirty="0"/>
+          </a:p>
+        </p:txBody>
+      </p:sp>
+      <p:sp>
+        <p:nvSpPr>
+          <p:cNvPr id="22" name="Text 20"/>
+          <p:cNvSpPr/>
+          <p:nvPr/>
+        </p:nvSpPr>
+        <p:spPr>
+          <a:xfrm>
+            <a:off x="4828032" y="3794760"/>
+            <a:ext cx="2651760" cy="201168"/>
+          </a:xfrm>
+          <a:prstGeom prst="rect">
+            <a:avLst/>
+          </a:prstGeom>
+          <a:noFill/>
+          <a:ln/>
+        </p:spPr>
+        <p:txBody>
+          <a:bodyPr wrap="square" lIns="381" tIns="381" rIns="381" bIns="381" rtlCol="0" anchor="ctr">
+            <a:normAutofit/>
+          </a:bodyPr>
+          <a:lstStyle/>
+          <a:p>
+            <a:pPr algn="l" indent="0" marL="0">
+              <a:buNone/>
+            </a:pPr>
+            <a:r>
+              <a:rPr lang="en-US" sz="620" b="1" dirty="0">
+                <a:solidFill>
+                  <a:srgbClr val="B91C1C"/>
+                </a:solidFill>
+                <a:latin typeface="Aptos" pitchFamily="34" charset="0"/>
+                <a:ea typeface="Aptos" pitchFamily="34" charset="-122"/>
+                <a:cs typeface="Aptos" pitchFamily="34" charset="-120"/>
+              </a:rPr>
+              <a:t>Riesgo: pasillos y baterias.</a:t>
+            </a:r>
+            <a:endParaRPr lang="en-US" sz="620" dirty="0"/>
+          </a:p>
+        </p:txBody>
+      </p:sp>
+      <p:sp>
+        <p:nvSpPr>
+          <p:cNvPr id="23" name="Text 21"/>
+          <p:cNvSpPr/>
+          <p:nvPr/>
+        </p:nvSpPr>
+        <p:spPr>
+          <a:xfrm>
+            <a:off x="4828032" y="4224528"/>
+            <a:ext cx="2606040" cy="274320"/>
+          </a:xfrm>
+          <a:prstGeom prst="rect">
+            <a:avLst/>
+          </a:prstGeom>
+          <a:noFill/>
+          <a:ln/>
+        </p:spPr>
+        <p:txBody>
+          <a:bodyPr wrap="square" lIns="381" tIns="381" rIns="381" bIns="381" rtlCol="0" anchor="ctr">
+            <a:normAutofit/>
+          </a:bodyPr>
+          <a:lstStyle/>
+          <a:p>
+            <a:pPr algn="l" indent="0" marL="0">
+              <a:buNone/>
+            </a:pPr>
+            <a:r>
+              <a:rPr lang="en-US" sz="620" dirty="0">
                 <a:solidFill>
                   <a:srgbClr val="5D6B7A"/>
                 </a:solidFill>
@@ -5585,28 +5958,30 @@
                 <a:ea typeface="Aptos" pitchFamily="34" charset="-122"/>
                 <a:cs typeface="Aptos" pitchFamily="34" charset="-120"/>
               </a:rPr>
-              <a:t>varias estaciones, retornos y gestor de flota</a:t>
-            </a:r>
-            <a:endParaRPr lang="en-US" sz="670" dirty="0"/>
-          </a:p>
-        </p:txBody>
-      </p:sp>
-      <p:sp>
-        <p:nvSpPr>
-          <p:cNvPr id="18" name="Shape 16"/>
-          <p:cNvSpPr/>
-          <p:nvPr/>
-        </p:nvSpPr>
-        <p:spPr>
-          <a:xfrm>
-            <a:off x="8869680" y="2148840"/>
-            <a:ext cx="182880" cy="182880"/>
-          </a:xfrm>
-          <a:prstGeom prst="ellipse">
-            <a:avLst/>
+              <a:t>Pasa: disponibilidad &gt;= 90 %.</a:t>
+            </a:r>
+            <a:endParaRPr lang="en-US" sz="620" dirty="0"/>
+          </a:p>
+        </p:txBody>
+      </p:sp>
+      <p:sp>
+        <p:nvSpPr>
+          <p:cNvPr id="24" name="Shape 22"/>
+          <p:cNvSpPr/>
+          <p:nvPr/>
+        </p:nvSpPr>
+        <p:spPr>
+          <a:xfrm>
+            <a:off x="8366760" y="1234440"/>
+            <a:ext cx="3337560" cy="4160520"/>
+          </a:xfrm>
+          <a:prstGeom prst="roundRect">
+            <a:avLst>
+              <a:gd name="adj" fmla="val 2192"/>
+            </a:avLst>
           </a:prstGeom>
           <a:solidFill>
-            <a:srgbClr val="2A9D8F"/>
+            <a:srgbClr val="FFFFFF"/>
           </a:solidFill>
           <a:ln w="12700">
             <a:solidFill>
@@ -5618,28 +5993,28 @@
       </p:sp>
       <p:sp>
         <p:nvSpPr>
-          <p:cNvPr id="19" name="Text 17"/>
-          <p:cNvSpPr/>
-          <p:nvPr/>
-        </p:nvSpPr>
-        <p:spPr>
-          <a:xfrm>
-            <a:off x="8705088" y="1508760"/>
-            <a:ext cx="512064" cy="384048"/>
-          </a:xfrm>
-          <a:prstGeom prst="rect">
-            <a:avLst/>
-          </a:prstGeom>
-          <a:noFill/>
-          <a:ln/>
-        </p:spPr>
-        <p:txBody>
-          <a:bodyPr wrap="square" lIns="381" tIns="381" rIns="381" bIns="381" rtlCol="0" anchor="ctr">
-            <a:normAutofit/>
-          </a:bodyPr>
-          <a:lstStyle/>
-          <a:p>
-            <a:pPr algn="ctr" indent="0" marL="0">
+          <p:cNvPr id="25" name="Text 23"/>
+          <p:cNvSpPr/>
+          <p:nvPr/>
+        </p:nvSpPr>
+        <p:spPr>
+          <a:xfrm>
+            <a:off x="8595360" y="1572768"/>
+            <a:ext cx="502920" cy="347472"/>
+          </a:xfrm>
+          <a:prstGeom prst="rect">
+            <a:avLst/>
+          </a:prstGeom>
+          <a:noFill/>
+          <a:ln/>
+        </p:spPr>
+        <p:txBody>
+          <a:bodyPr wrap="square" lIns="381" tIns="381" rIns="381" bIns="381" rtlCol="0" anchor="ctr">
+            <a:normAutofit/>
+          </a:bodyPr>
+          <a:lstStyle/>
+          <a:p>
+            <a:pPr algn="l" indent="0" marL="0">
               <a:buNone/>
             </a:pPr>
             <a:r>
@@ -5659,32 +6034,32 @@
       </p:sp>
       <p:sp>
         <p:nvSpPr>
-          <p:cNvPr id="20" name="Text 18"/>
-          <p:cNvSpPr/>
-          <p:nvPr/>
-        </p:nvSpPr>
-        <p:spPr>
-          <a:xfrm>
-            <a:off x="8458200" y="2487168"/>
-            <a:ext cx="822960" cy="164592"/>
-          </a:xfrm>
-          <a:prstGeom prst="rect">
-            <a:avLst/>
-          </a:prstGeom>
-          <a:noFill/>
-          <a:ln/>
-        </p:spPr>
-        <p:txBody>
-          <a:bodyPr wrap="square" lIns="381" tIns="381" rIns="381" bIns="381" rtlCol="0" anchor="ctr">
-            <a:normAutofit/>
-          </a:bodyPr>
-          <a:lstStyle/>
-          <a:p>
-            <a:pPr algn="ctr" indent="0" marL="0">
-              <a:buNone/>
-            </a:pPr>
-            <a:r>
-              <a:rPr lang="en-US" sz="720" b="1" dirty="0">
+          <p:cNvPr id="26" name="Text 24"/>
+          <p:cNvSpPr/>
+          <p:nvPr/>
+        </p:nvSpPr>
+        <p:spPr>
+          <a:xfrm>
+            <a:off x="9235440" y="1664208"/>
+            <a:ext cx="2057400" cy="201168"/>
+          </a:xfrm>
+          <a:prstGeom prst="rect">
+            <a:avLst/>
+          </a:prstGeom>
+          <a:noFill/>
+          <a:ln/>
+        </p:spPr>
+        <p:txBody>
+          <a:bodyPr wrap="square" lIns="381" tIns="381" rIns="381" bIns="381" rtlCol="0" anchor="ctr">
+            <a:normAutofit/>
+          </a:bodyPr>
+          <a:lstStyle/>
+          <a:p>
+            <a:pPr algn="l" indent="0" marL="0">
+              <a:buNone/>
+            </a:pPr>
+            <a:r>
+              <a:rPr lang="en-US" sz="820" b="1" dirty="0">
                 <a:solidFill>
                   <a:srgbClr val="1B2430"/>
                 </a:solidFill>
@@ -5692,40 +6067,40 @@
                 <a:ea typeface="Aptos" pitchFamily="34" charset="-122"/>
                 <a:cs typeface="Aptos" pitchFamily="34" charset="-120"/>
               </a:rPr>
-              <a:t>Extendido</a:t>
-            </a:r>
-            <a:endParaRPr lang="en-US" sz="720" dirty="0"/>
-          </a:p>
-        </p:txBody>
-      </p:sp>
-      <p:sp>
-        <p:nvSpPr>
-          <p:cNvPr id="21" name="Text 19"/>
-          <p:cNvSpPr/>
-          <p:nvPr/>
-        </p:nvSpPr>
-        <p:spPr>
-          <a:xfrm>
-            <a:off x="8275320" y="2834640"/>
-            <a:ext cx="1188720" cy="164592"/>
-          </a:xfrm>
-          <a:prstGeom prst="rect">
-            <a:avLst/>
-          </a:prstGeom>
-          <a:noFill/>
-          <a:ln/>
-        </p:spPr>
-        <p:txBody>
-          <a:bodyPr wrap="square" lIns="381" tIns="381" rIns="381" bIns="381" rtlCol="0" anchor="ctr">
-            <a:normAutofit/>
-          </a:bodyPr>
-          <a:lstStyle/>
-          <a:p>
-            <a:pPr algn="ctr" indent="0" marL="0">
-              <a:buNone/>
-            </a:pPr>
-            <a:r>
-              <a:rPr lang="en-US" sz="720" b="1" dirty="0">
+              <a:t>Cobertura extendida</a:t>
+            </a:r>
+            <a:endParaRPr lang="en-US" sz="820" dirty="0"/>
+          </a:p>
+        </p:txBody>
+      </p:sp>
+      <p:sp>
+        <p:nvSpPr>
+          <p:cNvPr id="27" name="Text 25"/>
+          <p:cNvSpPr/>
+          <p:nvPr/>
+        </p:nvSpPr>
+        <p:spPr>
+          <a:xfrm>
+            <a:off x="8622792" y="2212848"/>
+            <a:ext cx="1691640" cy="201168"/>
+          </a:xfrm>
+          <a:prstGeom prst="rect">
+            <a:avLst/>
+          </a:prstGeom>
+          <a:noFill/>
+          <a:ln/>
+        </p:spPr>
+        <p:txBody>
+          <a:bodyPr wrap="square" lIns="381" tIns="381" rIns="381" bIns="381" rtlCol="0" anchor="ctr">
+            <a:normAutofit/>
+          </a:bodyPr>
+          <a:lstStyle/>
+          <a:p>
+            <a:pPr algn="l" indent="0" marL="0">
+              <a:buNone/>
+            </a:pPr>
+            <a:r>
+              <a:rPr lang="en-US" sz="830" b="1" dirty="0">
                 <a:solidFill>
                   <a:srgbClr val="2A9D8F"/>
                 </a:solidFill>
@@ -5733,40 +6108,163 @@
                 <a:ea typeface="Aptos" pitchFamily="34" charset="-122"/>
                 <a:cs typeface="Aptos" pitchFamily="34" charset="-120"/>
               </a:rPr>
-              <a:t>2.051.616 €</a:t>
-            </a:r>
-            <a:endParaRPr lang="en-US" sz="720" dirty="0"/>
-          </a:p>
-        </p:txBody>
-      </p:sp>
-      <p:sp>
-        <p:nvSpPr>
-          <p:cNvPr id="22" name="Text 20"/>
-          <p:cNvSpPr/>
-          <p:nvPr/>
-        </p:nvSpPr>
-        <p:spPr>
-          <a:xfrm>
-            <a:off x="7955280" y="3182112"/>
-            <a:ext cx="1828800" cy="384048"/>
-          </a:xfrm>
-          <a:prstGeom prst="rect">
-            <a:avLst/>
-          </a:prstGeom>
-          <a:noFill/>
-          <a:ln/>
-        </p:spPr>
-        <p:txBody>
-          <a:bodyPr wrap="square" lIns="381" tIns="381" rIns="381" bIns="381" rtlCol="0" anchor="ctr">
-            <a:normAutofit/>
-          </a:bodyPr>
-          <a:lstStyle/>
-          <a:p>
-            <a:pPr algn="ctr" indent="0" marL="0">
-              <a:buNone/>
-            </a:pPr>
-            <a:r>
-              <a:rPr lang="en-US" sz="670" dirty="0">
+              <a:t>2.051.616 € CAPEX</a:t>
+            </a:r>
+            <a:endParaRPr lang="en-US" sz="830" dirty="0"/>
+          </a:p>
+        </p:txBody>
+      </p:sp>
+      <p:sp>
+        <p:nvSpPr>
+          <p:cNvPr id="28" name="Text 26"/>
+          <p:cNvSpPr/>
+          <p:nvPr/>
+        </p:nvSpPr>
+        <p:spPr>
+          <a:xfrm>
+            <a:off x="8622792" y="2788920"/>
+            <a:ext cx="2606040" cy="201168"/>
+          </a:xfrm>
+          <a:prstGeom prst="rect">
+            <a:avLst/>
+          </a:prstGeom>
+          <a:noFill/>
+          <a:ln/>
+        </p:spPr>
+        <p:txBody>
+          <a:bodyPr wrap="square" lIns="381" tIns="381" rIns="381" bIns="381" rtlCol="0" anchor="ctr">
+            <a:normAutofit/>
+          </a:bodyPr>
+          <a:lstStyle/>
+          <a:p>
+            <a:pPr algn="l" indent="0" marL="0">
+              <a:buNone/>
+            </a:pPr>
+            <a:r>
+              <a:rPr lang="en-US" sz="640" dirty="0">
+                <a:solidFill>
+                  <a:srgbClr val="1B2430"/>
+                </a:solidFill>
+                <a:latin typeface="Aptos" pitchFamily="34" charset="0"/>
+                <a:ea typeface="Aptos" pitchFamily="34" charset="-122"/>
+                <a:cs typeface="Aptos" pitchFamily="34" charset="-120"/>
+              </a:rPr>
+              <a:t>Flujo auxiliar amplio e integración.</a:t>
+            </a:r>
+            <a:endParaRPr lang="en-US" sz="640" dirty="0"/>
+          </a:p>
+        </p:txBody>
+      </p:sp>
+      <p:sp>
+        <p:nvSpPr>
+          <p:cNvPr id="29" name="Text 27"/>
+          <p:cNvSpPr/>
+          <p:nvPr/>
+        </p:nvSpPr>
+        <p:spPr>
+          <a:xfrm>
+            <a:off x="8622792" y="3063240"/>
+            <a:ext cx="2651760" cy="201168"/>
+          </a:xfrm>
+          <a:prstGeom prst="rect">
+            <a:avLst/>
+          </a:prstGeom>
+          <a:noFill/>
+          <a:ln/>
+        </p:spPr>
+        <p:txBody>
+          <a:bodyPr wrap="square" lIns="381" tIns="381" rIns="381" bIns="381" rtlCol="0" anchor="ctr">
+            <a:normAutofit/>
+          </a:bodyPr>
+          <a:lstStyle/>
+          <a:p>
+            <a:pPr algn="l" indent="0" marL="0">
+              <a:buNone/>
+            </a:pPr>
+            <a:r>
+              <a:rPr lang="en-US" sz="640" dirty="0">
+                <a:solidFill>
+                  <a:srgbClr val="1B2430"/>
+                </a:solidFill>
+                <a:latin typeface="Aptos" pitchFamily="34" charset="0"/>
+                <a:ea typeface="Aptos" pitchFamily="34" charset="-122"/>
+                <a:cs typeface="Aptos" pitchFamily="34" charset="-120"/>
+              </a:rPr>
+              <a:t>KPIs por turno y reservas de flota.</a:t>
+            </a:r>
+            <a:endParaRPr lang="en-US" sz="640" dirty="0"/>
+          </a:p>
+        </p:txBody>
+      </p:sp>
+      <p:sp>
+        <p:nvSpPr>
+          <p:cNvPr id="30" name="Text 28"/>
+          <p:cNvSpPr/>
+          <p:nvPr/>
+        </p:nvSpPr>
+        <p:spPr>
+          <a:xfrm>
+            <a:off x="8622792" y="3794760"/>
+            <a:ext cx="2651760" cy="201168"/>
+          </a:xfrm>
+          <a:prstGeom prst="rect">
+            <a:avLst/>
+          </a:prstGeom>
+          <a:noFill/>
+          <a:ln/>
+        </p:spPr>
+        <p:txBody>
+          <a:bodyPr wrap="square" lIns="381" tIns="381" rIns="381" bIns="381" rtlCol="0" anchor="ctr">
+            <a:normAutofit/>
+          </a:bodyPr>
+          <a:lstStyle/>
+          <a:p>
+            <a:pPr algn="l" indent="0" marL="0">
+              <a:buNone/>
+            </a:pPr>
+            <a:r>
+              <a:rPr lang="en-US" sz="620" b="1" dirty="0">
+                <a:solidFill>
+                  <a:srgbClr val="B91C1C"/>
+                </a:solidFill>
+                <a:latin typeface="Aptos" pitchFamily="34" charset="0"/>
+                <a:ea typeface="Aptos" pitchFamily="34" charset="-122"/>
+                <a:cs typeface="Aptos" pitchFamily="34" charset="-120"/>
+              </a:rPr>
+              <a:t>Riesgo: comprar antes de medir.</a:t>
+            </a:r>
+            <a:endParaRPr lang="en-US" sz="620" dirty="0"/>
+          </a:p>
+        </p:txBody>
+      </p:sp>
+      <p:sp>
+        <p:nvSpPr>
+          <p:cNvPr id="31" name="Text 29"/>
+          <p:cNvSpPr/>
+          <p:nvPr/>
+        </p:nvSpPr>
+        <p:spPr>
+          <a:xfrm>
+            <a:off x="8622792" y="4224528"/>
+            <a:ext cx="2606040" cy="274320"/>
+          </a:xfrm>
+          <a:prstGeom prst="rect">
+            <a:avLst/>
+          </a:prstGeom>
+          <a:noFill/>
+          <a:ln/>
+        </p:spPr>
+        <p:txBody>
+          <a:bodyPr wrap="square" lIns="381" tIns="381" rIns="381" bIns="381" rtlCol="0" anchor="ctr">
+            <a:normAutofit/>
+          </a:bodyPr>
+          <a:lstStyle/>
+          <a:p>
+            <a:pPr algn="l" indent="0" marL="0">
+              <a:buNone/>
+            </a:pPr>
+            <a:r>
+              <a:rPr lang="en-US" sz="620" dirty="0">
                 <a:solidFill>
                   <a:srgbClr val="5D6B7A"/>
                 </a:solidFill>
@@ -5774,73 +6272,91 @@
                 <a:ea typeface="Aptos" pitchFamily="34" charset="-122"/>
                 <a:cs typeface="Aptos" pitchFamily="34" charset="-120"/>
               </a:rPr>
-              <a:t>cobertura amplia condicionada a KPIs</a:t>
-            </a:r>
-            <a:endParaRPr lang="en-US" sz="670" dirty="0"/>
-          </a:p>
-        </p:txBody>
-      </p:sp>
-      <p:sp>
-        <p:nvSpPr>
-          <p:cNvPr id="23" name="Shape 21"/>
-          <p:cNvSpPr/>
-          <p:nvPr/>
-        </p:nvSpPr>
-        <p:spPr>
-          <a:xfrm>
-            <a:off x="2194560" y="4224528"/>
-            <a:ext cx="6858000" cy="0"/>
-          </a:xfrm>
-          <a:prstGeom prst="line">
-            <a:avLst/>
-          </a:prstGeom>
-          <a:noFill/>
-          <a:ln w="12700">
-            <a:solidFill>
-              <a:srgbClr val="D6DEE8"/>
-            </a:solidFill>
-            <a:prstDash val="solid"/>
-          </a:ln>
-        </p:spPr>
-      </p:sp>
-      <p:sp>
-        <p:nvSpPr>
-          <p:cNvPr id="24" name="Text 22"/>
-          <p:cNvSpPr/>
-          <p:nvPr/>
-        </p:nvSpPr>
-        <p:spPr>
-          <a:xfrm>
-            <a:off x="1554480" y="4663440"/>
-            <a:ext cx="8961120" cy="292608"/>
-          </a:xfrm>
-          <a:prstGeom prst="rect">
-            <a:avLst/>
-          </a:prstGeom>
-          <a:noFill/>
-          <a:ln/>
-        </p:spPr>
-        <p:txBody>
-          <a:bodyPr wrap="square" lIns="381" tIns="381" rIns="381" bIns="381" rtlCol="0" anchor="ctr">
-            <a:normAutofit/>
-          </a:bodyPr>
-          <a:lstStyle/>
-          <a:p>
-            <a:pPr algn="ctr" indent="0" marL="0">
-              <a:buNone/>
-            </a:pPr>
-            <a:r>
-              <a:rPr lang="en-US" sz="820" dirty="0">
-                <a:solidFill>
-                  <a:srgbClr val="1B2430"/>
-                </a:solidFill>
-                <a:latin typeface="Aptos" pitchFamily="34" charset="0"/>
-                <a:ea typeface="Aptos" pitchFamily="34" charset="-122"/>
-                <a:cs typeface="Aptos" pitchFamily="34" charset="-120"/>
-              </a:rPr>
-              <a:t>Escalado por evidencia: seguridad, disponibilidad, aceptación operativa, entregas a tiempo y trazabilidad completa.</a:t>
-            </a:r>
-            <a:endParaRPr lang="en-US" sz="820" dirty="0"/>
+              <a:t>Pasa: beneficio cerca de VAN cero.</a:t>
+            </a:r>
+            <a:endParaRPr lang="en-US" sz="620" dirty="0"/>
+          </a:p>
+        </p:txBody>
+      </p:sp>
+      <p:sp>
+        <p:nvSpPr>
+          <p:cNvPr id="32" name="Text 30"/>
+          <p:cNvSpPr/>
+          <p:nvPr/>
+        </p:nvSpPr>
+        <p:spPr>
+          <a:xfrm>
+            <a:off x="914400" y="5577840"/>
+            <a:ext cx="3657600" cy="182880"/>
+          </a:xfrm>
+          <a:prstGeom prst="rect">
+            <a:avLst/>
+          </a:prstGeom>
+          <a:noFill/>
+          <a:ln/>
+        </p:spPr>
+        <p:txBody>
+          <a:bodyPr wrap="square" lIns="381" tIns="381" rIns="381" bIns="381" rtlCol="0" anchor="ctr">
+            <a:normAutofit/>
+          </a:bodyPr>
+          <a:lstStyle/>
+          <a:p>
+            <a:pPr algn="l" indent="0" marL="0">
+              <a:buNone/>
+            </a:pPr>
+            <a:r>
+              <a:rPr lang="en-US" sz="710" b="1" dirty="0">
+                <a:solidFill>
+                  <a:srgbClr val="102033"/>
+                </a:solidFill>
+                <a:latin typeface="Aptos" pitchFamily="34" charset="0"/>
+                <a:ea typeface="Aptos" pitchFamily="34" charset="-122"/>
+                <a:cs typeface="Aptos" pitchFamily="34" charset="-120"/>
+              </a:rPr>
+              <a:t>Regla comercial: no se escala por intuicion.</a:t>
+            </a:r>
+            <a:endParaRPr lang="en-US" sz="710" dirty="0"/>
+          </a:p>
+        </p:txBody>
+      </p:sp>
+      <p:sp>
+        <p:nvSpPr>
+          <p:cNvPr id="33" name="Text 31"/>
+          <p:cNvSpPr/>
+          <p:nvPr/>
+        </p:nvSpPr>
+        <p:spPr>
+          <a:xfrm>
+            <a:off x="4663440" y="5577840"/>
+            <a:ext cx="5394960" cy="182880"/>
+          </a:xfrm>
+          <a:prstGeom prst="rect">
+            <a:avLst/>
+          </a:prstGeom>
+          <a:noFill/>
+          <a:ln/>
+        </p:spPr>
+        <p:txBody>
+          <a:bodyPr wrap="square" lIns="381" tIns="381" rIns="381" bIns="381" rtlCol="0" anchor="ctr">
+            <a:normAutofit/>
+          </a:bodyPr>
+          <a:lstStyle/>
+          <a:p>
+            <a:pPr algn="l" indent="0" marL="0">
+              <a:buNone/>
+            </a:pPr>
+            <a:r>
+              <a:rPr lang="en-US" sz="710" b="1" dirty="0">
+                <a:solidFill>
+                  <a:srgbClr val="102033"/>
+                </a:solidFill>
+                <a:latin typeface="Aptos" pitchFamily="34" charset="0"/>
+                <a:ea typeface="Aptos" pitchFamily="34" charset="-122"/>
+                <a:cs typeface="Aptos" pitchFamily="34" charset="-120"/>
+              </a:rPr>
+              <a:t>Se escala con trazas, seguridad, disponibilidad y uso real de flota.</a:t>
+            </a:r>
+            <a:endParaRPr lang="en-US" sz="710" dirty="0"/>
           </a:p>
         </p:txBody>
       </p:sp>
@@ -5934,7 +6450,7 @@
                 <a:ea typeface="Aptos" pitchFamily="34" charset="-122"/>
                 <a:cs typeface="Aptos" pitchFamily="34" charset="-120"/>
               </a:rPr>
-              <a:t>Oferta</a:t>
+              <a:t>Presupuesto</a:t>
             </a:r>
             <a:endParaRPr lang="en-US" sz="670" dirty="0"/>
           </a:p>
@@ -5973,7 +6489,7 @@
                 <a:ea typeface="Aptos Display" pitchFamily="34" charset="-122"/>
                 <a:cs typeface="Aptos Display" pitchFamily="34" charset="-120"/>
               </a:rPr>
-              <a:t>La oferta separa robot, software, ingenieria y soporte</a:t>
+              <a:t>Partidas por escenario, sin caja negra</a:t>
             </a:r>
             <a:endParaRPr lang="en-US" sz="2000" dirty="0"/>
           </a:p>
@@ -6104,8 +6620,8 @@
         </p:nvSpPr>
         <p:spPr>
           <a:xfrm>
-            <a:off x="841248" y="1417320"/>
-            <a:ext cx="1828800" cy="292608"/>
+            <a:off x="777240" y="1042416"/>
+            <a:ext cx="2011680" cy="164592"/>
           </a:xfrm>
           <a:prstGeom prst="rect">
             <a:avLst/>
@@ -6123,7 +6639,48 @@
               <a:buNone/>
             </a:pPr>
             <a:r>
-              <a:rPr lang="en-US" sz="1600" b="1" dirty="0">
+              <a:rPr lang="en-US" sz="640" b="1" dirty="0">
+                <a:solidFill>
+                  <a:srgbClr val="5D6B7A"/>
+                </a:solidFill>
+                <a:latin typeface="Aptos" pitchFamily="34" charset="0"/>
+                <a:ea typeface="Aptos" pitchFamily="34" charset="-122"/>
+                <a:cs typeface="Aptos" pitchFamily="34" charset="-120"/>
+              </a:rPr>
+              <a:t>CAPEX estimado sin IVA</a:t>
+            </a:r>
+            <a:endParaRPr lang="en-US" sz="640" dirty="0"/>
+          </a:p>
+        </p:txBody>
+      </p:sp>
+      <p:sp>
+        <p:nvSpPr>
+          <p:cNvPr id="9" name="Text 7"/>
+          <p:cNvSpPr/>
+          <p:nvPr/>
+        </p:nvSpPr>
+        <p:spPr>
+          <a:xfrm>
+            <a:off x="777240" y="1353312"/>
+            <a:ext cx="2057400" cy="274320"/>
+          </a:xfrm>
+          <a:prstGeom prst="rect">
+            <a:avLst/>
+          </a:prstGeom>
+          <a:noFill/>
+          <a:ln/>
+        </p:spPr>
+        <p:txBody>
+          <a:bodyPr wrap="square" lIns="381" tIns="381" rIns="381" bIns="381" rtlCol="0" anchor="ctr">
+            <a:normAutofit/>
+          </a:bodyPr>
+          <a:lstStyle/>
+          <a:p>
+            <a:pPr algn="l" indent="0" marL="0">
+              <a:buNone/>
+            </a:pPr>
+            <a:r>
+              <a:rPr lang="en-US" sz="1380" b="1" dirty="0">
                 <a:solidFill>
                   <a:srgbClr val="1F7A8C"/>
                 </a:solidFill>
@@ -6131,22 +6688,22 @@
                 <a:ea typeface="Aptos" pitchFamily="34" charset="-122"/>
                 <a:cs typeface="Aptos" pitchFamily="34" charset="-120"/>
               </a:rPr>
-              <a:t>198.688€</a:t>
-            </a:r>
-            <a:endParaRPr lang="en-US" sz="1600" dirty="0"/>
-          </a:p>
-        </p:txBody>
-      </p:sp>
-      <p:sp>
-        <p:nvSpPr>
-          <p:cNvPr id="9" name="Text 7"/>
-          <p:cNvSpPr/>
-          <p:nvPr/>
-        </p:nvSpPr>
-        <p:spPr>
-          <a:xfrm>
-            <a:off x="877824" y="1847088"/>
-            <a:ext cx="914400" cy="164592"/>
+              <a:t>198.688 €</a:t>
+            </a:r>
+            <a:endParaRPr lang="en-US" sz="1380" dirty="0"/>
+          </a:p>
+        </p:txBody>
+      </p:sp>
+      <p:sp>
+        <p:nvSpPr>
+          <p:cNvPr id="10" name="Text 8"/>
+          <p:cNvSpPr/>
+          <p:nvPr/>
+        </p:nvSpPr>
+        <p:spPr>
+          <a:xfrm>
+            <a:off x="804672" y="1700784"/>
+            <a:ext cx="1005840" cy="146304"/>
           </a:xfrm>
           <a:prstGeom prst="rect">
             <a:avLst/>
@@ -6164,7 +6721,7 @@
               <a:buNone/>
             </a:pPr>
             <a:r>
-              <a:rPr lang="en-US" sz="680" dirty="0">
+              <a:rPr lang="en-US" sz="630" b="1" dirty="0">
                 <a:solidFill>
                   <a:srgbClr val="5D6B7A"/>
                 </a:solidFill>
@@ -6174,20 +6731,375 @@
               </a:rPr>
               <a:t>1 robot</a:t>
             </a:r>
-            <a:endParaRPr lang="en-US" sz="680" dirty="0"/>
-          </a:p>
-        </p:txBody>
-      </p:sp>
-      <p:sp>
-        <p:nvSpPr>
-          <p:cNvPr id="10" name="Shape 8"/>
-          <p:cNvSpPr/>
-          <p:nvPr/>
-        </p:nvSpPr>
-        <p:spPr>
-          <a:xfrm>
-            <a:off x="868680" y="3429000"/>
-            <a:ext cx="146304" cy="1280160"/>
+            <a:endParaRPr lang="en-US" sz="630" dirty="0"/>
+          </a:p>
+        </p:txBody>
+      </p:sp>
+      <p:sp>
+        <p:nvSpPr>
+          <p:cNvPr id="11" name="Text 9"/>
+          <p:cNvSpPr/>
+          <p:nvPr/>
+        </p:nvSpPr>
+        <p:spPr>
+          <a:xfrm>
+            <a:off x="4023360" y="1353312"/>
+            <a:ext cx="2057400" cy="274320"/>
+          </a:xfrm>
+          <a:prstGeom prst="rect">
+            <a:avLst/>
+          </a:prstGeom>
+          <a:noFill/>
+          <a:ln/>
+        </p:spPr>
+        <p:txBody>
+          <a:bodyPr wrap="square" lIns="381" tIns="381" rIns="381" bIns="381" rtlCol="0" anchor="ctr">
+            <a:normAutofit/>
+          </a:bodyPr>
+          <a:lstStyle/>
+          <a:p>
+            <a:pPr algn="l" indent="0" marL="0">
+              <a:buNone/>
+            </a:pPr>
+            <a:r>
+              <a:rPr lang="en-US" sz="1380" b="1" dirty="0">
+                <a:solidFill>
+                  <a:srgbClr val="F4A261"/>
+                </a:solidFill>
+                <a:latin typeface="Aptos" pitchFamily="34" charset="0"/>
+                <a:ea typeface="Aptos" pitchFamily="34" charset="-122"/>
+                <a:cs typeface="Aptos" pitchFamily="34" charset="-120"/>
+              </a:rPr>
+              <a:t>904.736 €</a:t>
+            </a:r>
+            <a:endParaRPr lang="en-US" sz="1380" dirty="0"/>
+          </a:p>
+        </p:txBody>
+      </p:sp>
+      <p:sp>
+        <p:nvSpPr>
+          <p:cNvPr id="12" name="Text 10"/>
+          <p:cNvSpPr/>
+          <p:nvPr/>
+        </p:nvSpPr>
+        <p:spPr>
+          <a:xfrm>
+            <a:off x="4050792" y="1700784"/>
+            <a:ext cx="1005840" cy="146304"/>
+          </a:xfrm>
+          <a:prstGeom prst="rect">
+            <a:avLst/>
+          </a:prstGeom>
+          <a:noFill/>
+          <a:ln/>
+        </p:spPr>
+        <p:txBody>
+          <a:bodyPr wrap="square" lIns="381" tIns="381" rIns="381" bIns="381" rtlCol="0" anchor="ctr">
+            <a:normAutofit/>
+          </a:bodyPr>
+          <a:lstStyle/>
+          <a:p>
+            <a:pPr algn="l" indent="0" marL="0">
+              <a:buNone/>
+            </a:pPr>
+            <a:r>
+              <a:rPr lang="en-US" sz="630" b="1" dirty="0">
+                <a:solidFill>
+                  <a:srgbClr val="5D6B7A"/>
+                </a:solidFill>
+                <a:latin typeface="Aptos" pitchFamily="34" charset="0"/>
+                <a:ea typeface="Aptos" pitchFamily="34" charset="-122"/>
+                <a:cs typeface="Aptos" pitchFamily="34" charset="-120"/>
+              </a:rPr>
+              <a:t>7 robots</a:t>
+            </a:r>
+            <a:endParaRPr lang="en-US" sz="630" dirty="0"/>
+          </a:p>
+        </p:txBody>
+      </p:sp>
+      <p:sp>
+        <p:nvSpPr>
+          <p:cNvPr id="13" name="Text 11"/>
+          <p:cNvSpPr/>
+          <p:nvPr/>
+        </p:nvSpPr>
+        <p:spPr>
+          <a:xfrm>
+            <a:off x="7269480" y="1353312"/>
+            <a:ext cx="2057400" cy="274320"/>
+          </a:xfrm>
+          <a:prstGeom prst="rect">
+            <a:avLst/>
+          </a:prstGeom>
+          <a:noFill/>
+          <a:ln/>
+        </p:spPr>
+        <p:txBody>
+          <a:bodyPr wrap="square" lIns="381" tIns="381" rIns="381" bIns="381" rtlCol="0" anchor="ctr">
+            <a:normAutofit/>
+          </a:bodyPr>
+          <a:lstStyle/>
+          <a:p>
+            <a:pPr algn="l" indent="0" marL="0">
+              <a:buNone/>
+            </a:pPr>
+            <a:r>
+              <a:rPr lang="en-US" sz="1380" b="1" dirty="0">
+                <a:solidFill>
+                  <a:srgbClr val="2A9D8F"/>
+                </a:solidFill>
+                <a:latin typeface="Aptos" pitchFamily="34" charset="0"/>
+                <a:ea typeface="Aptos" pitchFamily="34" charset="-122"/>
+                <a:cs typeface="Aptos" pitchFamily="34" charset="-120"/>
+              </a:rPr>
+              <a:t>2.051.616 €</a:t>
+            </a:r>
+            <a:endParaRPr lang="en-US" sz="1380" dirty="0"/>
+          </a:p>
+        </p:txBody>
+      </p:sp>
+      <p:sp>
+        <p:nvSpPr>
+          <p:cNvPr id="14" name="Text 12"/>
+          <p:cNvSpPr/>
+          <p:nvPr/>
+        </p:nvSpPr>
+        <p:spPr>
+          <a:xfrm>
+            <a:off x="7296912" y="1700784"/>
+            <a:ext cx="1005840" cy="146304"/>
+          </a:xfrm>
+          <a:prstGeom prst="rect">
+            <a:avLst/>
+          </a:prstGeom>
+          <a:noFill/>
+          <a:ln/>
+        </p:spPr>
+        <p:txBody>
+          <a:bodyPr wrap="square" lIns="381" tIns="381" rIns="381" bIns="381" rtlCol="0" anchor="ctr">
+            <a:normAutofit/>
+          </a:bodyPr>
+          <a:lstStyle/>
+          <a:p>
+            <a:pPr algn="l" indent="0" marL="0">
+              <a:buNone/>
+            </a:pPr>
+            <a:r>
+              <a:rPr lang="en-US" sz="630" b="1" dirty="0">
+                <a:solidFill>
+                  <a:srgbClr val="5D6B7A"/>
+                </a:solidFill>
+                <a:latin typeface="Aptos" pitchFamily="34" charset="0"/>
+                <a:ea typeface="Aptos" pitchFamily="34" charset="-122"/>
+                <a:cs typeface="Aptos" pitchFamily="34" charset="-120"/>
+              </a:rPr>
+              <a:t>17 robots</a:t>
+            </a:r>
+            <a:endParaRPr lang="en-US" sz="630" dirty="0"/>
+          </a:p>
+        </p:txBody>
+      </p:sp>
+      <p:sp>
+        <p:nvSpPr>
+          <p:cNvPr id="15" name="Shape 13"/>
+          <p:cNvSpPr/>
+          <p:nvPr/>
+        </p:nvSpPr>
+        <p:spPr>
+          <a:xfrm>
+            <a:off x="777240" y="2148840"/>
+            <a:ext cx="10652760" cy="3063240"/>
+          </a:xfrm>
+          <a:prstGeom prst="roundRect">
+            <a:avLst>
+              <a:gd name="adj" fmla="val 2388"/>
+            </a:avLst>
+          </a:prstGeom>
+          <a:solidFill>
+            <a:srgbClr val="FFFFFF"/>
+          </a:solidFill>
+          <a:ln w="12700">
+            <a:solidFill>
+              <a:srgbClr val="D6DEE8"/>
+            </a:solidFill>
+            <a:prstDash val="solid"/>
+          </a:ln>
+        </p:spPr>
+      </p:sp>
+      <p:sp>
+        <p:nvSpPr>
+          <p:cNvPr id="16" name="Text 14"/>
+          <p:cNvSpPr/>
+          <p:nvPr/>
+        </p:nvSpPr>
+        <p:spPr>
+          <a:xfrm>
+            <a:off x="941832" y="2331720"/>
+            <a:ext cx="2286000" cy="146304"/>
+          </a:xfrm>
+          <a:prstGeom prst="rect">
+            <a:avLst/>
+          </a:prstGeom>
+          <a:noFill/>
+          <a:ln/>
+        </p:spPr>
+        <p:txBody>
+          <a:bodyPr wrap="square" lIns="381" tIns="381" rIns="381" bIns="381" rtlCol="0" anchor="ctr">
+            <a:normAutofit/>
+          </a:bodyPr>
+          <a:lstStyle/>
+          <a:p>
+            <a:pPr algn="l" indent="0" marL="0">
+              <a:buNone/>
+            </a:pPr>
+            <a:r>
+              <a:rPr lang="en-US" sz="630" b="1" dirty="0">
+                <a:solidFill>
+                  <a:srgbClr val="1B2430"/>
+                </a:solidFill>
+                <a:latin typeface="Aptos" pitchFamily="34" charset="0"/>
+                <a:ea typeface="Aptos" pitchFamily="34" charset="-122"/>
+                <a:cs typeface="Aptos" pitchFamily="34" charset="-120"/>
+              </a:rPr>
+              <a:t>Partida</a:t>
+            </a:r>
+            <a:endParaRPr lang="en-US" sz="630" dirty="0"/>
+          </a:p>
+        </p:txBody>
+      </p:sp>
+      <p:sp>
+        <p:nvSpPr>
+          <p:cNvPr id="17" name="Text 15"/>
+          <p:cNvSpPr/>
+          <p:nvPr/>
+        </p:nvSpPr>
+        <p:spPr>
+          <a:xfrm>
+            <a:off x="5486400" y="2331720"/>
+            <a:ext cx="822960" cy="146304"/>
+          </a:xfrm>
+          <a:prstGeom prst="rect">
+            <a:avLst/>
+          </a:prstGeom>
+          <a:noFill/>
+          <a:ln/>
+        </p:spPr>
+        <p:txBody>
+          <a:bodyPr wrap="square" lIns="381" tIns="381" rIns="381" bIns="381" rtlCol="0" anchor="ctr">
+            <a:normAutofit/>
+          </a:bodyPr>
+          <a:lstStyle/>
+          <a:p>
+            <a:pPr algn="r" indent="0" marL="0">
+              <a:buNone/>
+            </a:pPr>
+            <a:r>
+              <a:rPr lang="en-US" sz="630" b="1" dirty="0">
+                <a:solidFill>
+                  <a:srgbClr val="1B2430"/>
+                </a:solidFill>
+                <a:latin typeface="Aptos" pitchFamily="34" charset="0"/>
+                <a:ea typeface="Aptos" pitchFamily="34" charset="-122"/>
+                <a:cs typeface="Aptos" pitchFamily="34" charset="-120"/>
+              </a:rPr>
+              <a:t>1 robot</a:t>
+            </a:r>
+            <a:endParaRPr lang="en-US" sz="630" dirty="0"/>
+          </a:p>
+        </p:txBody>
+      </p:sp>
+      <p:sp>
+        <p:nvSpPr>
+          <p:cNvPr id="18" name="Text 16"/>
+          <p:cNvSpPr/>
+          <p:nvPr/>
+        </p:nvSpPr>
+        <p:spPr>
+          <a:xfrm>
+            <a:off x="7699248" y="2331720"/>
+            <a:ext cx="868680" cy="146304"/>
+          </a:xfrm>
+          <a:prstGeom prst="rect">
+            <a:avLst/>
+          </a:prstGeom>
+          <a:noFill/>
+          <a:ln/>
+        </p:spPr>
+        <p:txBody>
+          <a:bodyPr wrap="square" lIns="381" tIns="381" rIns="381" bIns="381" rtlCol="0" anchor="ctr">
+            <a:normAutofit/>
+          </a:bodyPr>
+          <a:lstStyle/>
+          <a:p>
+            <a:pPr algn="r" indent="0" marL="0">
+              <a:buNone/>
+            </a:pPr>
+            <a:r>
+              <a:rPr lang="en-US" sz="630" b="1" dirty="0">
+                <a:solidFill>
+                  <a:srgbClr val="1B2430"/>
+                </a:solidFill>
+                <a:latin typeface="Aptos" pitchFamily="34" charset="0"/>
+                <a:ea typeface="Aptos" pitchFamily="34" charset="-122"/>
+                <a:cs typeface="Aptos" pitchFamily="34" charset="-120"/>
+              </a:rPr>
+              <a:t>7 robots</a:t>
+            </a:r>
+            <a:endParaRPr lang="en-US" sz="630" dirty="0"/>
+          </a:p>
+        </p:txBody>
+      </p:sp>
+      <p:sp>
+        <p:nvSpPr>
+          <p:cNvPr id="19" name="Text 17"/>
+          <p:cNvSpPr/>
+          <p:nvPr/>
+        </p:nvSpPr>
+        <p:spPr>
+          <a:xfrm>
+            <a:off x="10149840" y="2331720"/>
+            <a:ext cx="914400" cy="146304"/>
+          </a:xfrm>
+          <a:prstGeom prst="rect">
+            <a:avLst/>
+          </a:prstGeom>
+          <a:noFill/>
+          <a:ln/>
+        </p:spPr>
+        <p:txBody>
+          <a:bodyPr wrap="square" lIns="381" tIns="381" rIns="381" bIns="381" rtlCol="0" anchor="ctr">
+            <a:normAutofit/>
+          </a:bodyPr>
+          <a:lstStyle/>
+          <a:p>
+            <a:pPr algn="r" indent="0" marL="0">
+              <a:buNone/>
+            </a:pPr>
+            <a:r>
+              <a:rPr lang="en-US" sz="630" b="1" dirty="0">
+                <a:solidFill>
+                  <a:srgbClr val="1B2430"/>
+                </a:solidFill>
+                <a:latin typeface="Aptos" pitchFamily="34" charset="0"/>
+                <a:ea typeface="Aptos" pitchFamily="34" charset="-122"/>
+                <a:cs typeface="Aptos" pitchFamily="34" charset="-120"/>
+              </a:rPr>
+              <a:t>17 robots</a:t>
+            </a:r>
+            <a:endParaRPr lang="en-US" sz="630" dirty="0"/>
+          </a:p>
+        </p:txBody>
+      </p:sp>
+      <p:sp>
+        <p:nvSpPr>
+          <p:cNvPr id="20" name="Shape 18"/>
+          <p:cNvSpPr/>
+          <p:nvPr/>
+        </p:nvSpPr>
+        <p:spPr>
+          <a:xfrm>
+            <a:off x="941832" y="2724912"/>
+            <a:ext cx="54864" cy="54864"/>
           </a:xfrm>
           <a:prstGeom prst="rect">
             <a:avLst/>
@@ -6205,14 +7117,178 @@
       </p:sp>
       <p:sp>
         <p:nvSpPr>
-          <p:cNvPr id="11" name="Shape 9"/>
-          <p:cNvSpPr/>
-          <p:nvPr/>
-        </p:nvSpPr>
-        <p:spPr>
-          <a:xfrm>
-            <a:off x="1216152" y="3959352"/>
-            <a:ext cx="146304" cy="749808"/>
+          <p:cNvPr id="21" name="Text 19"/>
+          <p:cNvSpPr/>
+          <p:nvPr/>
+        </p:nvSpPr>
+        <p:spPr>
+          <a:xfrm>
+            <a:off x="1078992" y="2697480"/>
+            <a:ext cx="3291840" cy="146304"/>
+          </a:xfrm>
+          <a:prstGeom prst="rect">
+            <a:avLst/>
+          </a:prstGeom>
+          <a:noFill/>
+          <a:ln/>
+        </p:spPr>
+        <p:txBody>
+          <a:bodyPr wrap="square" lIns="381" tIns="381" rIns="381" bIns="381" rtlCol="0" anchor="ctr">
+            <a:normAutofit/>
+          </a:bodyPr>
+          <a:lstStyle/>
+          <a:p>
+            <a:pPr algn="l" indent="0" marL="0">
+              <a:buNone/>
+            </a:pPr>
+            <a:r>
+              <a:rPr lang="en-US" sz="580" b="1" dirty="0">
+                <a:solidFill>
+                  <a:srgbClr val="1B2430"/>
+                </a:solidFill>
+                <a:latin typeface="Aptos" pitchFamily="34" charset="0"/>
+                <a:ea typeface="Aptos" pitchFamily="34" charset="-122"/>
+                <a:cs typeface="Aptos" pitchFamily="34" charset="-120"/>
+              </a:rPr>
+              <a:t>AMR + sensores + portakits</a:t>
+            </a:r>
+            <a:endParaRPr lang="en-US" sz="580" dirty="0"/>
+          </a:p>
+        </p:txBody>
+      </p:sp>
+      <p:sp>
+        <p:nvSpPr>
+          <p:cNvPr id="22" name="Text 20"/>
+          <p:cNvSpPr/>
+          <p:nvPr/>
+        </p:nvSpPr>
+        <p:spPr>
+          <a:xfrm>
+            <a:off x="5212080" y="2697480"/>
+            <a:ext cx="1097280" cy="146304"/>
+          </a:xfrm>
+          <a:prstGeom prst="rect">
+            <a:avLst/>
+          </a:prstGeom>
+          <a:noFill/>
+          <a:ln/>
+        </p:spPr>
+        <p:txBody>
+          <a:bodyPr wrap="square" lIns="381" tIns="381" rIns="381" bIns="381" rtlCol="0" anchor="ctr">
+            <a:normAutofit/>
+          </a:bodyPr>
+          <a:lstStyle/>
+          <a:p>
+            <a:pPr algn="r" indent="0" marL="0">
+              <a:buNone/>
+            </a:pPr>
+            <a:r>
+              <a:rPr lang="en-US" sz="580" dirty="0">
+                <a:solidFill>
+                  <a:srgbClr val="1B2430"/>
+                </a:solidFill>
+                <a:latin typeface="Aptos" pitchFamily="34" charset="0"/>
+                <a:ea typeface="Aptos" pitchFamily="34" charset="-122"/>
+                <a:cs typeface="Aptos" pitchFamily="34" charset="-120"/>
+              </a:rPr>
+              <a:t>69.800</a:t>
+            </a:r>
+            <a:endParaRPr lang="en-US" sz="580" dirty="0"/>
+          </a:p>
+        </p:txBody>
+      </p:sp>
+      <p:sp>
+        <p:nvSpPr>
+          <p:cNvPr id="23" name="Text 21"/>
+          <p:cNvSpPr/>
+          <p:nvPr/>
+        </p:nvSpPr>
+        <p:spPr>
+          <a:xfrm>
+            <a:off x="7388352" y="2697480"/>
+            <a:ext cx="1188720" cy="146304"/>
+          </a:xfrm>
+          <a:prstGeom prst="rect">
+            <a:avLst/>
+          </a:prstGeom>
+          <a:noFill/>
+          <a:ln/>
+        </p:spPr>
+        <p:txBody>
+          <a:bodyPr wrap="square" lIns="381" tIns="381" rIns="381" bIns="381" rtlCol="0" anchor="ctr">
+            <a:normAutofit/>
+          </a:bodyPr>
+          <a:lstStyle/>
+          <a:p>
+            <a:pPr algn="r" indent="0" marL="0">
+              <a:buNone/>
+            </a:pPr>
+            <a:r>
+              <a:rPr lang="en-US" sz="580" dirty="0">
+                <a:solidFill>
+                  <a:srgbClr val="1B2430"/>
+                </a:solidFill>
+                <a:latin typeface="Aptos" pitchFamily="34" charset="0"/>
+                <a:ea typeface="Aptos" pitchFamily="34" charset="-122"/>
+                <a:cs typeface="Aptos" pitchFamily="34" charset="-120"/>
+              </a:rPr>
+              <a:t>488.600</a:t>
+            </a:r>
+            <a:endParaRPr lang="en-US" sz="580" dirty="0"/>
+          </a:p>
+        </p:txBody>
+      </p:sp>
+      <p:sp>
+        <p:nvSpPr>
+          <p:cNvPr id="24" name="Text 22"/>
+          <p:cNvSpPr/>
+          <p:nvPr/>
+        </p:nvSpPr>
+        <p:spPr>
+          <a:xfrm>
+            <a:off x="9802368" y="2697480"/>
+            <a:ext cx="1280160" cy="146304"/>
+          </a:xfrm>
+          <a:prstGeom prst="rect">
+            <a:avLst/>
+          </a:prstGeom>
+          <a:noFill/>
+          <a:ln/>
+        </p:spPr>
+        <p:txBody>
+          <a:bodyPr wrap="square" lIns="381" tIns="381" rIns="381" bIns="381" rtlCol="0" anchor="ctr">
+            <a:normAutofit/>
+          </a:bodyPr>
+          <a:lstStyle/>
+          <a:p>
+            <a:pPr algn="r" indent="0" marL="0">
+              <a:buNone/>
+            </a:pPr>
+            <a:r>
+              <a:rPr lang="en-US" sz="580" dirty="0">
+                <a:solidFill>
+                  <a:srgbClr val="1B2430"/>
+                </a:solidFill>
+                <a:latin typeface="Aptos" pitchFamily="34" charset="0"/>
+                <a:ea typeface="Aptos" pitchFamily="34" charset="-122"/>
+                <a:cs typeface="Aptos" pitchFamily="34" charset="-120"/>
+              </a:rPr>
+              <a:t>1.186.600</a:t>
+            </a:r>
+            <a:endParaRPr lang="en-US" sz="580" dirty="0"/>
+          </a:p>
+        </p:txBody>
+      </p:sp>
+      <p:sp>
+        <p:nvSpPr>
+          <p:cNvPr id="25" name="Shape 23"/>
+          <p:cNvSpPr/>
+          <p:nvPr/>
+        </p:nvSpPr>
+        <p:spPr>
+          <a:xfrm>
+            <a:off x="941832" y="3008376"/>
+            <a:ext cx="54864" cy="54864"/>
           </a:xfrm>
           <a:prstGeom prst="rect">
             <a:avLst/>
@@ -6230,14 +7306,178 @@
       </p:sp>
       <p:sp>
         <p:nvSpPr>
-          <p:cNvPr id="12" name="Shape 10"/>
-          <p:cNvSpPr/>
-          <p:nvPr/>
-        </p:nvSpPr>
-        <p:spPr>
-          <a:xfrm>
-            <a:off x="1563624" y="4050792"/>
-            <a:ext cx="146304" cy="658368"/>
+          <p:cNvPr id="26" name="Text 24"/>
+          <p:cNvSpPr/>
+          <p:nvPr/>
+        </p:nvSpPr>
+        <p:spPr>
+          <a:xfrm>
+            <a:off x="1078992" y="2980944"/>
+            <a:ext cx="3291840" cy="146304"/>
+          </a:xfrm>
+          <a:prstGeom prst="rect">
+            <a:avLst/>
+          </a:prstGeom>
+          <a:noFill/>
+          <a:ln/>
+        </p:spPr>
+        <p:txBody>
+          <a:bodyPr wrap="square" lIns="381" tIns="381" rIns="381" bIns="381" rtlCol="0" anchor="ctr">
+            <a:normAutofit/>
+          </a:bodyPr>
+          <a:lstStyle/>
+          <a:p>
+            <a:pPr algn="l" indent="0" marL="0">
+              <a:buNone/>
+            </a:pPr>
+            <a:r>
+              <a:rPr lang="en-US" sz="580" b="1" dirty="0">
+                <a:solidFill>
+                  <a:srgbClr val="1B2430"/>
+                </a:solidFill>
+                <a:latin typeface="Aptos" pitchFamily="34" charset="0"/>
+                <a:ea typeface="Aptos" pitchFamily="34" charset="-122"/>
+                <a:cs typeface="Aptos" pitchFamily="34" charset="-120"/>
+              </a:rPr>
+              <a:t>Software flota + trazabilidad</a:t>
+            </a:r>
+            <a:endParaRPr lang="en-US" sz="580" dirty="0"/>
+          </a:p>
+        </p:txBody>
+      </p:sp>
+      <p:sp>
+        <p:nvSpPr>
+          <p:cNvPr id="27" name="Text 25"/>
+          <p:cNvSpPr/>
+          <p:nvPr/>
+        </p:nvSpPr>
+        <p:spPr>
+          <a:xfrm>
+            <a:off x="5212080" y="2980944"/>
+            <a:ext cx="1097280" cy="146304"/>
+          </a:xfrm>
+          <a:prstGeom prst="rect">
+            <a:avLst/>
+          </a:prstGeom>
+          <a:noFill/>
+          <a:ln/>
+        </p:spPr>
+        <p:txBody>
+          <a:bodyPr wrap="square" lIns="381" tIns="381" rIns="381" bIns="381" rtlCol="0" anchor="ctr">
+            <a:normAutofit/>
+          </a:bodyPr>
+          <a:lstStyle/>
+          <a:p>
+            <a:pPr algn="r" indent="0" marL="0">
+              <a:buNone/>
+            </a:pPr>
+            <a:r>
+              <a:rPr lang="en-US" sz="580" dirty="0">
+                <a:solidFill>
+                  <a:srgbClr val="1B2430"/>
+                </a:solidFill>
+                <a:latin typeface="Aptos" pitchFamily="34" charset="0"/>
+                <a:ea typeface="Aptos" pitchFamily="34" charset="-122"/>
+                <a:cs typeface="Aptos" pitchFamily="34" charset="-120"/>
+              </a:rPr>
+              <a:t>22.000</a:t>
+            </a:r>
+            <a:endParaRPr lang="en-US" sz="580" dirty="0"/>
+          </a:p>
+        </p:txBody>
+      </p:sp>
+      <p:sp>
+        <p:nvSpPr>
+          <p:cNvPr id="28" name="Text 26"/>
+          <p:cNvSpPr/>
+          <p:nvPr/>
+        </p:nvSpPr>
+        <p:spPr>
+          <a:xfrm>
+            <a:off x="7388352" y="2980944"/>
+            <a:ext cx="1188720" cy="146304"/>
+          </a:xfrm>
+          <a:prstGeom prst="rect">
+            <a:avLst/>
+          </a:prstGeom>
+          <a:noFill/>
+          <a:ln/>
+        </p:spPr>
+        <p:txBody>
+          <a:bodyPr wrap="square" lIns="381" tIns="381" rIns="381" bIns="381" rtlCol="0" anchor="ctr">
+            <a:normAutofit/>
+          </a:bodyPr>
+          <a:lstStyle/>
+          <a:p>
+            <a:pPr algn="r" indent="0" marL="0">
+              <a:buNone/>
+            </a:pPr>
+            <a:r>
+              <a:rPr lang="en-US" sz="580" dirty="0">
+                <a:solidFill>
+                  <a:srgbClr val="1B2430"/>
+                </a:solidFill>
+                <a:latin typeface="Aptos" pitchFamily="34" charset="0"/>
+                <a:ea typeface="Aptos" pitchFamily="34" charset="-122"/>
+                <a:cs typeface="Aptos" pitchFamily="34" charset="-120"/>
+              </a:rPr>
+              <a:t>58.000</a:t>
+            </a:r>
+            <a:endParaRPr lang="en-US" sz="580" dirty="0"/>
+          </a:p>
+        </p:txBody>
+      </p:sp>
+      <p:sp>
+        <p:nvSpPr>
+          <p:cNvPr id="29" name="Text 27"/>
+          <p:cNvSpPr/>
+          <p:nvPr/>
+        </p:nvSpPr>
+        <p:spPr>
+          <a:xfrm>
+            <a:off x="9802368" y="2980944"/>
+            <a:ext cx="1280160" cy="146304"/>
+          </a:xfrm>
+          <a:prstGeom prst="rect">
+            <a:avLst/>
+          </a:prstGeom>
+          <a:noFill/>
+          <a:ln/>
+        </p:spPr>
+        <p:txBody>
+          <a:bodyPr wrap="square" lIns="381" tIns="381" rIns="381" bIns="381" rtlCol="0" anchor="ctr">
+            <a:normAutofit/>
+          </a:bodyPr>
+          <a:lstStyle/>
+          <a:p>
+            <a:pPr algn="r" indent="0" marL="0">
+              <a:buNone/>
+            </a:pPr>
+            <a:r>
+              <a:rPr lang="en-US" sz="580" dirty="0">
+                <a:solidFill>
+                  <a:srgbClr val="1B2430"/>
+                </a:solidFill>
+                <a:latin typeface="Aptos" pitchFamily="34" charset="0"/>
+                <a:ea typeface="Aptos" pitchFamily="34" charset="-122"/>
+                <a:cs typeface="Aptos" pitchFamily="34" charset="-120"/>
+              </a:rPr>
+              <a:t>105.000</a:t>
+            </a:r>
+            <a:endParaRPr lang="en-US" sz="580" dirty="0"/>
+          </a:p>
+        </p:txBody>
+      </p:sp>
+      <p:sp>
+        <p:nvSpPr>
+          <p:cNvPr id="30" name="Shape 28"/>
+          <p:cNvSpPr/>
+          <p:nvPr/>
+        </p:nvSpPr>
+        <p:spPr>
+          <a:xfrm>
+            <a:off x="941832" y="3291840"/>
+            <a:ext cx="54864" cy="54864"/>
           </a:xfrm>
           <a:prstGeom prst="rect">
             <a:avLst/>
@@ -6255,14 +7495,178 @@
       </p:sp>
       <p:sp>
         <p:nvSpPr>
-          <p:cNvPr id="13" name="Shape 11"/>
-          <p:cNvSpPr/>
-          <p:nvPr/>
-        </p:nvSpPr>
-        <p:spPr>
-          <a:xfrm>
-            <a:off x="1911096" y="3886200"/>
-            <a:ext cx="146304" cy="822960"/>
+          <p:cNvPr id="31" name="Text 29"/>
+          <p:cNvSpPr/>
+          <p:nvPr/>
+        </p:nvSpPr>
+        <p:spPr>
+          <a:xfrm>
+            <a:off x="1078992" y="3264408"/>
+            <a:ext cx="3291840" cy="146304"/>
+          </a:xfrm>
+          <a:prstGeom prst="rect">
+            <a:avLst/>
+          </a:prstGeom>
+          <a:noFill/>
+          <a:ln/>
+        </p:spPr>
+        <p:txBody>
+          <a:bodyPr wrap="square" lIns="381" tIns="381" rIns="381" bIns="381" rtlCol="0" anchor="ctr">
+            <a:normAutofit/>
+          </a:bodyPr>
+          <a:lstStyle/>
+          <a:p>
+            <a:pPr algn="l" indent="0" marL="0">
+              <a:buNone/>
+            </a:pPr>
+            <a:r>
+              <a:rPr lang="en-US" sz="580" b="1" dirty="0">
+                <a:solidFill>
+                  <a:srgbClr val="1B2430"/>
+                </a:solidFill>
+                <a:latin typeface="Aptos" pitchFamily="34" charset="0"/>
+                <a:ea typeface="Aptos" pitchFamily="34" charset="-122"/>
+                <a:cs typeface="Aptos" pitchFamily="34" charset="-120"/>
+              </a:rPr>
+              <a:t>Ingenieria + CoppeliaSim</a:t>
+            </a:r>
+            <a:endParaRPr lang="en-US" sz="580" dirty="0"/>
+          </a:p>
+        </p:txBody>
+      </p:sp>
+      <p:sp>
+        <p:nvSpPr>
+          <p:cNvPr id="32" name="Text 30"/>
+          <p:cNvSpPr/>
+          <p:nvPr/>
+        </p:nvSpPr>
+        <p:spPr>
+          <a:xfrm>
+            <a:off x="5212080" y="3264408"/>
+            <a:ext cx="1097280" cy="146304"/>
+          </a:xfrm>
+          <a:prstGeom prst="rect">
+            <a:avLst/>
+          </a:prstGeom>
+          <a:noFill/>
+          <a:ln/>
+        </p:spPr>
+        <p:txBody>
+          <a:bodyPr wrap="square" lIns="381" tIns="381" rIns="381" bIns="381" rtlCol="0" anchor="ctr">
+            <a:normAutofit/>
+          </a:bodyPr>
+          <a:lstStyle/>
+          <a:p>
+            <a:pPr algn="r" indent="0" marL="0">
+              <a:buNone/>
+            </a:pPr>
+            <a:r>
+              <a:rPr lang="en-US" sz="580" dirty="0">
+                <a:solidFill>
+                  <a:srgbClr val="1B2430"/>
+                </a:solidFill>
+                <a:latin typeface="Aptos" pitchFamily="34" charset="0"/>
+                <a:ea typeface="Aptos" pitchFamily="34" charset="-122"/>
+                <a:cs typeface="Aptos" pitchFamily="34" charset="-120"/>
+              </a:rPr>
+              <a:t>42.000</a:t>
+            </a:r>
+            <a:endParaRPr lang="en-US" sz="580" dirty="0"/>
+          </a:p>
+        </p:txBody>
+      </p:sp>
+      <p:sp>
+        <p:nvSpPr>
+          <p:cNvPr id="33" name="Text 31"/>
+          <p:cNvSpPr/>
+          <p:nvPr/>
+        </p:nvSpPr>
+        <p:spPr>
+          <a:xfrm>
+            <a:off x="7388352" y="3264408"/>
+            <a:ext cx="1188720" cy="146304"/>
+          </a:xfrm>
+          <a:prstGeom prst="rect">
+            <a:avLst/>
+          </a:prstGeom>
+          <a:noFill/>
+          <a:ln/>
+        </p:spPr>
+        <p:txBody>
+          <a:bodyPr wrap="square" lIns="381" tIns="381" rIns="381" bIns="381" rtlCol="0" anchor="ctr">
+            <a:normAutofit/>
+          </a:bodyPr>
+          <a:lstStyle/>
+          <a:p>
+            <a:pPr algn="r" indent="0" marL="0">
+              <a:buNone/>
+            </a:pPr>
+            <a:r>
+              <a:rPr lang="en-US" sz="580" dirty="0">
+                <a:solidFill>
+                  <a:srgbClr val="1B2430"/>
+                </a:solidFill>
+                <a:latin typeface="Aptos" pitchFamily="34" charset="0"/>
+                <a:ea typeface="Aptos" pitchFamily="34" charset="-122"/>
+                <a:cs typeface="Aptos" pitchFamily="34" charset="-120"/>
+              </a:rPr>
+              <a:t>112.000</a:t>
+            </a:r>
+            <a:endParaRPr lang="en-US" sz="580" dirty="0"/>
+          </a:p>
+        </p:txBody>
+      </p:sp>
+      <p:sp>
+        <p:nvSpPr>
+          <p:cNvPr id="34" name="Text 32"/>
+          <p:cNvSpPr/>
+          <p:nvPr/>
+        </p:nvSpPr>
+        <p:spPr>
+          <a:xfrm>
+            <a:off x="9802368" y="3264408"/>
+            <a:ext cx="1280160" cy="146304"/>
+          </a:xfrm>
+          <a:prstGeom prst="rect">
+            <a:avLst/>
+          </a:prstGeom>
+          <a:noFill/>
+          <a:ln/>
+        </p:spPr>
+        <p:txBody>
+          <a:bodyPr wrap="square" lIns="381" tIns="381" rIns="381" bIns="381" rtlCol="0" anchor="ctr">
+            <a:normAutofit/>
+          </a:bodyPr>
+          <a:lstStyle/>
+          <a:p>
+            <a:pPr algn="r" indent="0" marL="0">
+              <a:buNone/>
+            </a:pPr>
+            <a:r>
+              <a:rPr lang="en-US" sz="580" dirty="0">
+                <a:solidFill>
+                  <a:srgbClr val="1B2430"/>
+                </a:solidFill>
+                <a:latin typeface="Aptos" pitchFamily="34" charset="0"/>
+                <a:ea typeface="Aptos" pitchFamily="34" charset="-122"/>
+                <a:cs typeface="Aptos" pitchFamily="34" charset="-120"/>
+              </a:rPr>
+              <a:t>215.000</a:t>
+            </a:r>
+            <a:endParaRPr lang="en-US" sz="580" dirty="0"/>
+          </a:p>
+        </p:txBody>
+      </p:sp>
+      <p:sp>
+        <p:nvSpPr>
+          <p:cNvPr id="35" name="Shape 33"/>
+          <p:cNvSpPr/>
+          <p:nvPr/>
+        </p:nvSpPr>
+        <p:spPr>
+          <a:xfrm>
+            <a:off x="941832" y="3575304"/>
+            <a:ext cx="54864" cy="54864"/>
           </a:xfrm>
           <a:prstGeom prst="rect">
             <a:avLst/>
@@ -6280,14 +7684,178 @@
       </p:sp>
       <p:sp>
         <p:nvSpPr>
-          <p:cNvPr id="14" name="Shape 12"/>
-          <p:cNvSpPr/>
-          <p:nvPr/>
-        </p:nvSpPr>
-        <p:spPr>
-          <a:xfrm>
-            <a:off x="2258568" y="4178808"/>
-            <a:ext cx="146304" cy="530352"/>
+          <p:cNvPr id="36" name="Text 34"/>
+          <p:cNvSpPr/>
+          <p:nvPr/>
+        </p:nvSpPr>
+        <p:spPr>
+          <a:xfrm>
+            <a:off x="1078992" y="3547872"/>
+            <a:ext cx="3291840" cy="146304"/>
+          </a:xfrm>
+          <a:prstGeom prst="rect">
+            <a:avLst/>
+          </a:prstGeom>
+          <a:noFill/>
+          <a:ln/>
+        </p:spPr>
+        <p:txBody>
+          <a:bodyPr wrap="square" lIns="381" tIns="381" rIns="381" bIns="381" rtlCol="0" anchor="ctr">
+            <a:normAutofit/>
+          </a:bodyPr>
+          <a:lstStyle/>
+          <a:p>
+            <a:pPr algn="l" indent="0" marL="0">
+              <a:buNone/>
+            </a:pPr>
+            <a:r>
+              <a:rPr lang="en-US" sz="580" b="1" dirty="0">
+                <a:solidFill>
+                  <a:srgbClr val="1B2430"/>
+                </a:solidFill>
+                <a:latin typeface="Aptos" pitchFamily="34" charset="0"/>
+                <a:ea typeface="Aptos" pitchFamily="34" charset="-122"/>
+                <a:cs typeface="Aptos" pitchFamily="34" charset="-120"/>
+              </a:rPr>
+              <a:t>Instalacion + mapeo + SAT</a:t>
+            </a:r>
+            <a:endParaRPr lang="en-US" sz="580" dirty="0"/>
+          </a:p>
+        </p:txBody>
+      </p:sp>
+      <p:sp>
+        <p:nvSpPr>
+          <p:cNvPr id="37" name="Text 35"/>
+          <p:cNvSpPr/>
+          <p:nvPr/>
+        </p:nvSpPr>
+        <p:spPr>
+          <a:xfrm>
+            <a:off x="5212080" y="3547872"/>
+            <a:ext cx="1097280" cy="146304"/>
+          </a:xfrm>
+          <a:prstGeom prst="rect">
+            <a:avLst/>
+          </a:prstGeom>
+          <a:noFill/>
+          <a:ln/>
+        </p:spPr>
+        <p:txBody>
+          <a:bodyPr wrap="square" lIns="381" tIns="381" rIns="381" bIns="381" rtlCol="0" anchor="ctr">
+            <a:normAutofit/>
+          </a:bodyPr>
+          <a:lstStyle/>
+          <a:p>
+            <a:pPr algn="r" indent="0" marL="0">
+              <a:buNone/>
+            </a:pPr>
+            <a:r>
+              <a:rPr lang="en-US" sz="580" dirty="0">
+                <a:solidFill>
+                  <a:srgbClr val="1B2430"/>
+                </a:solidFill>
+                <a:latin typeface="Aptos" pitchFamily="34" charset="0"/>
+                <a:ea typeface="Aptos" pitchFamily="34" charset="-122"/>
+                <a:cs typeface="Aptos" pitchFamily="34" charset="-120"/>
+              </a:rPr>
+              <a:t>18.000</a:t>
+            </a:r>
+            <a:endParaRPr lang="en-US" sz="580" dirty="0"/>
+          </a:p>
+        </p:txBody>
+      </p:sp>
+      <p:sp>
+        <p:nvSpPr>
+          <p:cNvPr id="38" name="Text 36"/>
+          <p:cNvSpPr/>
+          <p:nvPr/>
+        </p:nvSpPr>
+        <p:spPr>
+          <a:xfrm>
+            <a:off x="7388352" y="3547872"/>
+            <a:ext cx="1188720" cy="146304"/>
+          </a:xfrm>
+          <a:prstGeom prst="rect">
+            <a:avLst/>
+          </a:prstGeom>
+          <a:noFill/>
+          <a:ln/>
+        </p:spPr>
+        <p:txBody>
+          <a:bodyPr wrap="square" lIns="381" tIns="381" rIns="381" bIns="381" rtlCol="0" anchor="ctr">
+            <a:normAutofit/>
+          </a:bodyPr>
+          <a:lstStyle/>
+          <a:p>
+            <a:pPr algn="r" indent="0" marL="0">
+              <a:buNone/>
+            </a:pPr>
+            <a:r>
+              <a:rPr lang="en-US" sz="580" dirty="0">
+                <a:solidFill>
+                  <a:srgbClr val="1B2430"/>
+                </a:solidFill>
+                <a:latin typeface="Aptos" pitchFamily="34" charset="0"/>
+                <a:ea typeface="Aptos" pitchFamily="34" charset="-122"/>
+                <a:cs typeface="Aptos" pitchFamily="34" charset="-120"/>
+              </a:rPr>
+              <a:t>52.000</a:t>
+            </a:r>
+            <a:endParaRPr lang="en-US" sz="580" dirty="0"/>
+          </a:p>
+        </p:txBody>
+      </p:sp>
+      <p:sp>
+        <p:nvSpPr>
+          <p:cNvPr id="39" name="Text 37"/>
+          <p:cNvSpPr/>
+          <p:nvPr/>
+        </p:nvSpPr>
+        <p:spPr>
+          <a:xfrm>
+            <a:off x="9802368" y="3547872"/>
+            <a:ext cx="1280160" cy="146304"/>
+          </a:xfrm>
+          <a:prstGeom prst="rect">
+            <a:avLst/>
+          </a:prstGeom>
+          <a:noFill/>
+          <a:ln/>
+        </p:spPr>
+        <p:txBody>
+          <a:bodyPr wrap="square" lIns="381" tIns="381" rIns="381" bIns="381" rtlCol="0" anchor="ctr">
+            <a:normAutofit/>
+          </a:bodyPr>
+          <a:lstStyle/>
+          <a:p>
+            <a:pPr algn="r" indent="0" marL="0">
+              <a:buNone/>
+            </a:pPr>
+            <a:r>
+              <a:rPr lang="en-US" sz="580" dirty="0">
+                <a:solidFill>
+                  <a:srgbClr val="1B2430"/>
+                </a:solidFill>
+                <a:latin typeface="Aptos" pitchFamily="34" charset="0"/>
+                <a:ea typeface="Aptos" pitchFamily="34" charset="-122"/>
+                <a:cs typeface="Aptos" pitchFamily="34" charset="-120"/>
+              </a:rPr>
+              <a:t>120.000</a:t>
+            </a:r>
+            <a:endParaRPr lang="en-US" sz="580" dirty="0"/>
+          </a:p>
+        </p:txBody>
+      </p:sp>
+      <p:sp>
+        <p:nvSpPr>
+          <p:cNvPr id="40" name="Shape 38"/>
+          <p:cNvSpPr/>
+          <p:nvPr/>
+        </p:nvSpPr>
+        <p:spPr>
+          <a:xfrm>
+            <a:off x="941832" y="3858768"/>
+            <a:ext cx="54864" cy="54864"/>
           </a:xfrm>
           <a:prstGeom prst="rect">
             <a:avLst/>
@@ -6305,14 +7873,14 @@
       </p:sp>
       <p:sp>
         <p:nvSpPr>
-          <p:cNvPr id="15" name="Text 13"/>
-          <p:cNvSpPr/>
-          <p:nvPr/>
-        </p:nvSpPr>
-        <p:spPr>
-          <a:xfrm>
-            <a:off x="4544568" y="1417320"/>
-            <a:ext cx="1828800" cy="292608"/>
+          <p:cNvPr id="41" name="Text 39"/>
+          <p:cNvSpPr/>
+          <p:nvPr/>
+        </p:nvSpPr>
+        <p:spPr>
+          <a:xfrm>
+            <a:off x="1078992" y="3831336"/>
+            <a:ext cx="3291840" cy="146304"/>
           </a:xfrm>
           <a:prstGeom prst="rect">
             <a:avLst/>
@@ -6330,71 +7898,153 @@
               <a:buNone/>
             </a:pPr>
             <a:r>
-              <a:rPr lang="en-US" sz="1600" b="1" dirty="0">
-                <a:solidFill>
-                  <a:srgbClr val="F4A261"/>
-                </a:solidFill>
-                <a:latin typeface="Aptos" pitchFamily="34" charset="0"/>
-                <a:ea typeface="Aptos" pitchFamily="34" charset="-122"/>
-                <a:cs typeface="Aptos" pitchFamily="34" charset="-120"/>
-              </a:rPr>
-              <a:t>904.736€</a:t>
-            </a:r>
-            <a:endParaRPr lang="en-US" sz="1600" dirty="0"/>
-          </a:p>
-        </p:txBody>
-      </p:sp>
-      <p:sp>
-        <p:nvSpPr>
-          <p:cNvPr id="16" name="Text 14"/>
-          <p:cNvSpPr/>
-          <p:nvPr/>
-        </p:nvSpPr>
-        <p:spPr>
-          <a:xfrm>
-            <a:off x="4581144" y="1847088"/>
-            <a:ext cx="914400" cy="164592"/>
-          </a:xfrm>
-          <a:prstGeom prst="rect">
-            <a:avLst/>
-          </a:prstGeom>
-          <a:noFill/>
-          <a:ln/>
-        </p:spPr>
-        <p:txBody>
-          <a:bodyPr wrap="square" lIns="381" tIns="381" rIns="381" bIns="381" rtlCol="0" anchor="ctr">
-            <a:normAutofit/>
-          </a:bodyPr>
-          <a:lstStyle/>
-          <a:p>
-            <a:pPr algn="l" indent="0" marL="0">
-              <a:buNone/>
-            </a:pPr>
-            <a:r>
-              <a:rPr lang="en-US" sz="680" dirty="0">
-                <a:solidFill>
-                  <a:srgbClr val="5D6B7A"/>
-                </a:solidFill>
-                <a:latin typeface="Aptos" pitchFamily="34" charset="0"/>
-                <a:ea typeface="Aptos" pitchFamily="34" charset="-122"/>
-                <a:cs typeface="Aptos" pitchFamily="34" charset="-120"/>
-              </a:rPr>
-              <a:t>7 robots</a:t>
-            </a:r>
-            <a:endParaRPr lang="en-US" sz="680" dirty="0"/>
-          </a:p>
-        </p:txBody>
-      </p:sp>
-      <p:sp>
-        <p:nvSpPr>
-          <p:cNvPr id="17" name="Shape 15"/>
-          <p:cNvSpPr/>
-          <p:nvPr/>
-        </p:nvSpPr>
-        <p:spPr>
-          <a:xfrm>
-            <a:off x="4572000" y="3429000"/>
-            <a:ext cx="146304" cy="1280160"/>
+              <a:rPr lang="en-US" sz="580" b="1" dirty="0">
+                <a:solidFill>
+                  <a:srgbClr val="1B2430"/>
+                </a:solidFill>
+                <a:latin typeface="Aptos" pitchFamily="34" charset="0"/>
+                <a:ea typeface="Aptos" pitchFamily="34" charset="-122"/>
+                <a:cs typeface="Aptos" pitchFamily="34" charset="-120"/>
+              </a:rPr>
+              <a:t>Formacion + cambio operativo</a:t>
+            </a:r>
+            <a:endParaRPr lang="en-US" sz="580" dirty="0"/>
+          </a:p>
+        </p:txBody>
+      </p:sp>
+      <p:sp>
+        <p:nvSpPr>
+          <p:cNvPr id="42" name="Text 40"/>
+          <p:cNvSpPr/>
+          <p:nvPr/>
+        </p:nvSpPr>
+        <p:spPr>
+          <a:xfrm>
+            <a:off x="5212080" y="3831336"/>
+            <a:ext cx="1097280" cy="146304"/>
+          </a:xfrm>
+          <a:prstGeom prst="rect">
+            <a:avLst/>
+          </a:prstGeom>
+          <a:noFill/>
+          <a:ln/>
+        </p:spPr>
+        <p:txBody>
+          <a:bodyPr wrap="square" lIns="381" tIns="381" rIns="381" bIns="381" rtlCol="0" anchor="ctr">
+            <a:normAutofit/>
+          </a:bodyPr>
+          <a:lstStyle/>
+          <a:p>
+            <a:pPr algn="r" indent="0" marL="0">
+              <a:buNone/>
+            </a:pPr>
+            <a:r>
+              <a:rPr lang="en-US" sz="580" dirty="0">
+                <a:solidFill>
+                  <a:srgbClr val="1B2430"/>
+                </a:solidFill>
+                <a:latin typeface="Aptos" pitchFamily="34" charset="0"/>
+                <a:ea typeface="Aptos" pitchFamily="34" charset="-122"/>
+                <a:cs typeface="Aptos" pitchFamily="34" charset="-120"/>
+              </a:rPr>
+              <a:t>8.500</a:t>
+            </a:r>
+            <a:endParaRPr lang="en-US" sz="580" dirty="0"/>
+          </a:p>
+        </p:txBody>
+      </p:sp>
+      <p:sp>
+        <p:nvSpPr>
+          <p:cNvPr id="43" name="Text 41"/>
+          <p:cNvSpPr/>
+          <p:nvPr/>
+        </p:nvSpPr>
+        <p:spPr>
+          <a:xfrm>
+            <a:off x="7388352" y="3831336"/>
+            <a:ext cx="1188720" cy="146304"/>
+          </a:xfrm>
+          <a:prstGeom prst="rect">
+            <a:avLst/>
+          </a:prstGeom>
+          <a:noFill/>
+          <a:ln/>
+        </p:spPr>
+        <p:txBody>
+          <a:bodyPr wrap="square" lIns="381" tIns="381" rIns="381" bIns="381" rtlCol="0" anchor="ctr">
+            <a:normAutofit/>
+          </a:bodyPr>
+          <a:lstStyle/>
+          <a:p>
+            <a:pPr algn="r" indent="0" marL="0">
+              <a:buNone/>
+            </a:pPr>
+            <a:r>
+              <a:rPr lang="en-US" sz="580" dirty="0">
+                <a:solidFill>
+                  <a:srgbClr val="1B2430"/>
+                </a:solidFill>
+                <a:latin typeface="Aptos" pitchFamily="34" charset="0"/>
+                <a:ea typeface="Aptos" pitchFamily="34" charset="-122"/>
+                <a:cs typeface="Aptos" pitchFamily="34" charset="-120"/>
+              </a:rPr>
+              <a:t>24.000</a:t>
+            </a:r>
+            <a:endParaRPr lang="en-US" sz="580" dirty="0"/>
+          </a:p>
+        </p:txBody>
+      </p:sp>
+      <p:sp>
+        <p:nvSpPr>
+          <p:cNvPr id="44" name="Text 42"/>
+          <p:cNvSpPr/>
+          <p:nvPr/>
+        </p:nvSpPr>
+        <p:spPr>
+          <a:xfrm>
+            <a:off x="9802368" y="3831336"/>
+            <a:ext cx="1280160" cy="146304"/>
+          </a:xfrm>
+          <a:prstGeom prst="rect">
+            <a:avLst/>
+          </a:prstGeom>
+          <a:noFill/>
+          <a:ln/>
+        </p:spPr>
+        <p:txBody>
+          <a:bodyPr wrap="square" lIns="381" tIns="381" rIns="381" bIns="381" rtlCol="0" anchor="ctr">
+            <a:normAutofit/>
+          </a:bodyPr>
+          <a:lstStyle/>
+          <a:p>
+            <a:pPr algn="r" indent="0" marL="0">
+              <a:buNone/>
+            </a:pPr>
+            <a:r>
+              <a:rPr lang="en-US" sz="580" dirty="0">
+                <a:solidFill>
+                  <a:srgbClr val="1B2430"/>
+                </a:solidFill>
+                <a:latin typeface="Aptos" pitchFamily="34" charset="0"/>
+                <a:ea typeface="Aptos" pitchFamily="34" charset="-122"/>
+                <a:cs typeface="Aptos" pitchFamily="34" charset="-120"/>
+              </a:rPr>
+              <a:t>42.000</a:t>
+            </a:r>
+            <a:endParaRPr lang="en-US" sz="580" dirty="0"/>
+          </a:p>
+        </p:txBody>
+      </p:sp>
+      <p:sp>
+        <p:nvSpPr>
+          <p:cNvPr id="45" name="Shape 43"/>
+          <p:cNvSpPr/>
+          <p:nvPr/>
+        </p:nvSpPr>
+        <p:spPr>
+          <a:xfrm>
+            <a:off x="941832" y="4142232"/>
+            <a:ext cx="54864" cy="54864"/>
           </a:xfrm>
           <a:prstGeom prst="rect">
             <a:avLst/>
@@ -6412,14 +8062,178 @@
       </p:sp>
       <p:sp>
         <p:nvSpPr>
-          <p:cNvPr id="18" name="Shape 16"/>
-          <p:cNvSpPr/>
-          <p:nvPr/>
-        </p:nvSpPr>
-        <p:spPr>
-          <a:xfrm>
-            <a:off x="4919472" y="3959352"/>
-            <a:ext cx="146304" cy="749808"/>
+          <p:cNvPr id="46" name="Text 44"/>
+          <p:cNvSpPr/>
+          <p:nvPr/>
+        </p:nvSpPr>
+        <p:spPr>
+          <a:xfrm>
+            <a:off x="1078992" y="4114800"/>
+            <a:ext cx="3291840" cy="146304"/>
+          </a:xfrm>
+          <a:prstGeom prst="rect">
+            <a:avLst/>
+          </a:prstGeom>
+          <a:noFill/>
+          <a:ln/>
+        </p:spPr>
+        <p:txBody>
+          <a:bodyPr wrap="square" lIns="381" tIns="381" rIns="381" bIns="381" rtlCol="0" anchor="ctr">
+            <a:normAutofit/>
+          </a:bodyPr>
+          <a:lstStyle/>
+          <a:p>
+            <a:pPr algn="l" indent="0" marL="0">
+              <a:buNone/>
+            </a:pPr>
+            <a:r>
+              <a:rPr lang="en-US" sz="580" b="1" dirty="0">
+                <a:solidFill>
+                  <a:srgbClr val="1B2430"/>
+                </a:solidFill>
+                <a:latin typeface="Aptos" pitchFamily="34" charset="0"/>
+                <a:ea typeface="Aptos" pitchFamily="34" charset="-122"/>
+                <a:cs typeface="Aptos" pitchFamily="34" charset="-120"/>
+              </a:rPr>
+              <a:t>Mantenimiento año 1</a:t>
+            </a:r>
+            <a:endParaRPr lang="en-US" sz="580" dirty="0"/>
+          </a:p>
+        </p:txBody>
+      </p:sp>
+      <p:sp>
+        <p:nvSpPr>
+          <p:cNvPr id="47" name="Text 45"/>
+          <p:cNvSpPr/>
+          <p:nvPr/>
+        </p:nvSpPr>
+        <p:spPr>
+          <a:xfrm>
+            <a:off x="5212080" y="4114800"/>
+            <a:ext cx="1097280" cy="146304"/>
+          </a:xfrm>
+          <a:prstGeom prst="rect">
+            <a:avLst/>
+          </a:prstGeom>
+          <a:noFill/>
+          <a:ln/>
+        </p:spPr>
+        <p:txBody>
+          <a:bodyPr wrap="square" lIns="381" tIns="381" rIns="381" bIns="381" rtlCol="0" anchor="ctr">
+            <a:normAutofit/>
+          </a:bodyPr>
+          <a:lstStyle/>
+          <a:p>
+            <a:pPr algn="r" indent="0" marL="0">
+              <a:buNone/>
+            </a:pPr>
+            <a:r>
+              <a:rPr lang="en-US" sz="580" dirty="0">
+                <a:solidFill>
+                  <a:srgbClr val="1B2430"/>
+                </a:solidFill>
+                <a:latin typeface="Aptos" pitchFamily="34" charset="0"/>
+                <a:ea typeface="Aptos" pitchFamily="34" charset="-122"/>
+                <a:cs typeface="Aptos" pitchFamily="34" charset="-120"/>
+              </a:rPr>
+              <a:t>5.600</a:t>
+            </a:r>
+            <a:endParaRPr lang="en-US" sz="580" dirty="0"/>
+          </a:p>
+        </p:txBody>
+      </p:sp>
+      <p:sp>
+        <p:nvSpPr>
+          <p:cNvPr id="48" name="Text 46"/>
+          <p:cNvSpPr/>
+          <p:nvPr/>
+        </p:nvSpPr>
+        <p:spPr>
+          <a:xfrm>
+            <a:off x="7388352" y="4114800"/>
+            <a:ext cx="1188720" cy="146304"/>
+          </a:xfrm>
+          <a:prstGeom prst="rect">
+            <a:avLst/>
+          </a:prstGeom>
+          <a:noFill/>
+          <a:ln/>
+        </p:spPr>
+        <p:txBody>
+          <a:bodyPr wrap="square" lIns="381" tIns="381" rIns="381" bIns="381" rtlCol="0" anchor="ctr">
+            <a:normAutofit/>
+          </a:bodyPr>
+          <a:lstStyle/>
+          <a:p>
+            <a:pPr algn="r" indent="0" marL="0">
+              <a:buNone/>
+            </a:pPr>
+            <a:r>
+              <a:rPr lang="en-US" sz="580" dirty="0">
+                <a:solidFill>
+                  <a:srgbClr val="1B2430"/>
+                </a:solidFill>
+                <a:latin typeface="Aptos" pitchFamily="34" charset="0"/>
+                <a:ea typeface="Aptos" pitchFamily="34" charset="-122"/>
+                <a:cs typeface="Aptos" pitchFamily="34" charset="-120"/>
+              </a:rPr>
+              <a:t>39.200</a:t>
+            </a:r>
+            <a:endParaRPr lang="en-US" sz="580" dirty="0"/>
+          </a:p>
+        </p:txBody>
+      </p:sp>
+      <p:sp>
+        <p:nvSpPr>
+          <p:cNvPr id="49" name="Text 47"/>
+          <p:cNvSpPr/>
+          <p:nvPr/>
+        </p:nvSpPr>
+        <p:spPr>
+          <a:xfrm>
+            <a:off x="9802368" y="4114800"/>
+            <a:ext cx="1280160" cy="146304"/>
+          </a:xfrm>
+          <a:prstGeom prst="rect">
+            <a:avLst/>
+          </a:prstGeom>
+          <a:noFill/>
+          <a:ln/>
+        </p:spPr>
+        <p:txBody>
+          <a:bodyPr wrap="square" lIns="381" tIns="381" rIns="381" bIns="381" rtlCol="0" anchor="ctr">
+            <a:normAutofit/>
+          </a:bodyPr>
+          <a:lstStyle/>
+          <a:p>
+            <a:pPr algn="r" indent="0" marL="0">
+              <a:buNone/>
+            </a:pPr>
+            <a:r>
+              <a:rPr lang="en-US" sz="580" dirty="0">
+                <a:solidFill>
+                  <a:srgbClr val="1B2430"/>
+                </a:solidFill>
+                <a:latin typeface="Aptos" pitchFamily="34" charset="0"/>
+                <a:ea typeface="Aptos" pitchFamily="34" charset="-122"/>
+                <a:cs typeface="Aptos" pitchFamily="34" charset="-120"/>
+              </a:rPr>
+              <a:t>95.200</a:t>
+            </a:r>
+            <a:endParaRPr lang="en-US" sz="580" dirty="0"/>
+          </a:p>
+        </p:txBody>
+      </p:sp>
+      <p:sp>
+        <p:nvSpPr>
+          <p:cNvPr id="50" name="Shape 48"/>
+          <p:cNvSpPr/>
+          <p:nvPr/>
+        </p:nvSpPr>
+        <p:spPr>
+          <a:xfrm>
+            <a:off x="941832" y="4425696"/>
+            <a:ext cx="54864" cy="54864"/>
           </a:xfrm>
           <a:prstGeom prst="rect">
             <a:avLst/>
@@ -6437,24 +8251,188 @@
       </p:sp>
       <p:sp>
         <p:nvSpPr>
-          <p:cNvPr id="19" name="Shape 17"/>
-          <p:cNvSpPr/>
-          <p:nvPr/>
-        </p:nvSpPr>
-        <p:spPr>
-          <a:xfrm>
-            <a:off x="5266944" y="4050792"/>
-            <a:ext cx="146304" cy="658368"/>
+          <p:cNvPr id="51" name="Text 49"/>
+          <p:cNvSpPr/>
+          <p:nvPr/>
+        </p:nvSpPr>
+        <p:spPr>
+          <a:xfrm>
+            <a:off x="1078992" y="4398264"/>
+            <a:ext cx="3291840" cy="146304"/>
+          </a:xfrm>
+          <a:prstGeom prst="rect">
+            <a:avLst/>
+          </a:prstGeom>
+          <a:noFill/>
+          <a:ln/>
+        </p:spPr>
+        <p:txBody>
+          <a:bodyPr wrap="square" lIns="381" tIns="381" rIns="381" bIns="381" rtlCol="0" anchor="ctr">
+            <a:normAutofit/>
+          </a:bodyPr>
+          <a:lstStyle/>
+          <a:p>
+            <a:pPr algn="l" indent="0" marL="0">
+              <a:buNone/>
+            </a:pPr>
+            <a:r>
+              <a:rPr lang="en-US" sz="580" b="1" dirty="0">
+                <a:solidFill>
+                  <a:srgbClr val="1B2430"/>
+                </a:solidFill>
+                <a:latin typeface="Aptos" pitchFamily="34" charset="0"/>
+                <a:ea typeface="Aptos" pitchFamily="34" charset="-122"/>
+                <a:cs typeface="Aptos" pitchFamily="34" charset="-120"/>
+              </a:rPr>
+              <a:t>Logistica + ciber + docs</a:t>
+            </a:r>
+            <a:endParaRPr lang="en-US" sz="580" dirty="0"/>
+          </a:p>
+        </p:txBody>
+      </p:sp>
+      <p:sp>
+        <p:nvSpPr>
+          <p:cNvPr id="52" name="Text 50"/>
+          <p:cNvSpPr/>
+          <p:nvPr/>
+        </p:nvSpPr>
+        <p:spPr>
+          <a:xfrm>
+            <a:off x="5212080" y="4398264"/>
+            <a:ext cx="1097280" cy="146304"/>
+          </a:xfrm>
+          <a:prstGeom prst="rect">
+            <a:avLst/>
+          </a:prstGeom>
+          <a:noFill/>
+          <a:ln/>
+        </p:spPr>
+        <p:txBody>
+          <a:bodyPr wrap="square" lIns="381" tIns="381" rIns="381" bIns="381" rtlCol="0" anchor="ctr">
+            <a:normAutofit/>
+          </a:bodyPr>
+          <a:lstStyle/>
+          <a:p>
+            <a:pPr algn="r" indent="0" marL="0">
+              <a:buNone/>
+            </a:pPr>
+            <a:r>
+              <a:rPr lang="en-US" sz="580" dirty="0">
+                <a:solidFill>
+                  <a:srgbClr val="1B2430"/>
+                </a:solidFill>
+                <a:latin typeface="Aptos" pitchFamily="34" charset="0"/>
+                <a:ea typeface="Aptos" pitchFamily="34" charset="-122"/>
+                <a:cs typeface="Aptos" pitchFamily="34" charset="-120"/>
+              </a:rPr>
+              <a:t>11.500</a:t>
+            </a:r>
+            <a:endParaRPr lang="en-US" sz="580" dirty="0"/>
+          </a:p>
+        </p:txBody>
+      </p:sp>
+      <p:sp>
+        <p:nvSpPr>
+          <p:cNvPr id="53" name="Text 51"/>
+          <p:cNvSpPr/>
+          <p:nvPr/>
+        </p:nvSpPr>
+        <p:spPr>
+          <a:xfrm>
+            <a:off x="7388352" y="4398264"/>
+            <a:ext cx="1188720" cy="146304"/>
+          </a:xfrm>
+          <a:prstGeom prst="rect">
+            <a:avLst/>
+          </a:prstGeom>
+          <a:noFill/>
+          <a:ln/>
+        </p:spPr>
+        <p:txBody>
+          <a:bodyPr wrap="square" lIns="381" tIns="381" rIns="381" bIns="381" rtlCol="0" anchor="ctr">
+            <a:normAutofit/>
+          </a:bodyPr>
+          <a:lstStyle/>
+          <a:p>
+            <a:pPr algn="r" indent="0" marL="0">
+              <a:buNone/>
+            </a:pPr>
+            <a:r>
+              <a:rPr lang="en-US" sz="580" dirty="0">
+                <a:solidFill>
+                  <a:srgbClr val="1B2430"/>
+                </a:solidFill>
+                <a:latin typeface="Aptos" pitchFamily="34" charset="0"/>
+                <a:ea typeface="Aptos" pitchFamily="34" charset="-122"/>
+                <a:cs typeface="Aptos" pitchFamily="34" charset="-120"/>
+              </a:rPr>
+              <a:t>34.000</a:t>
+            </a:r>
+            <a:endParaRPr lang="en-US" sz="580" dirty="0"/>
+          </a:p>
+        </p:txBody>
+      </p:sp>
+      <p:sp>
+        <p:nvSpPr>
+          <p:cNvPr id="54" name="Text 52"/>
+          <p:cNvSpPr/>
+          <p:nvPr/>
+        </p:nvSpPr>
+        <p:spPr>
+          <a:xfrm>
+            <a:off x="9802368" y="4398264"/>
+            <a:ext cx="1280160" cy="146304"/>
+          </a:xfrm>
+          <a:prstGeom prst="rect">
+            <a:avLst/>
+          </a:prstGeom>
+          <a:noFill/>
+          <a:ln/>
+        </p:spPr>
+        <p:txBody>
+          <a:bodyPr wrap="square" lIns="381" tIns="381" rIns="381" bIns="381" rtlCol="0" anchor="ctr">
+            <a:normAutofit/>
+          </a:bodyPr>
+          <a:lstStyle/>
+          <a:p>
+            <a:pPr algn="r" indent="0" marL="0">
+              <a:buNone/>
+            </a:pPr>
+            <a:r>
+              <a:rPr lang="en-US" sz="580" dirty="0">
+                <a:solidFill>
+                  <a:srgbClr val="1B2430"/>
+                </a:solidFill>
+                <a:latin typeface="Aptos" pitchFamily="34" charset="0"/>
+                <a:ea typeface="Aptos" pitchFamily="34" charset="-122"/>
+                <a:cs typeface="Aptos" pitchFamily="34" charset="-120"/>
+              </a:rPr>
+              <a:t>68.000</a:t>
+            </a:r>
+            <a:endParaRPr lang="en-US" sz="580" dirty="0"/>
+          </a:p>
+        </p:txBody>
+      </p:sp>
+      <p:sp>
+        <p:nvSpPr>
+          <p:cNvPr id="55" name="Shape 53"/>
+          <p:cNvSpPr/>
+          <p:nvPr/>
+        </p:nvSpPr>
+        <p:spPr>
+          <a:xfrm>
+            <a:off x="941832" y="4709160"/>
+            <a:ext cx="54864" cy="54864"/>
           </a:xfrm>
           <a:prstGeom prst="rect">
             <a:avLst/>
           </a:prstGeom>
           <a:solidFill>
-            <a:srgbClr val="2DB7E5"/>
+            <a:srgbClr val="B91C1C"/>
           </a:solidFill>
           <a:ln w="12700">
             <a:solidFill>
-              <a:srgbClr val="2DB7E5"/>
+              <a:srgbClr val="B91C1C"/>
             </a:solidFill>
             <a:prstDash val="solid"/>
           </a:ln>
@@ -6462,64 +8440,14 @@
       </p:sp>
       <p:sp>
         <p:nvSpPr>
-          <p:cNvPr id="20" name="Shape 18"/>
-          <p:cNvSpPr/>
-          <p:nvPr/>
-        </p:nvSpPr>
-        <p:spPr>
-          <a:xfrm>
-            <a:off x="5614416" y="3886200"/>
-            <a:ext cx="146304" cy="822960"/>
-          </a:xfrm>
-          <a:prstGeom prst="rect">
-            <a:avLst/>
-          </a:prstGeom>
-          <a:solidFill>
-            <a:srgbClr val="2A9D8F"/>
-          </a:solidFill>
-          <a:ln w="12700">
-            <a:solidFill>
-              <a:srgbClr val="2A9D8F"/>
-            </a:solidFill>
-            <a:prstDash val="solid"/>
-          </a:ln>
-        </p:spPr>
-      </p:sp>
-      <p:sp>
-        <p:nvSpPr>
-          <p:cNvPr id="21" name="Shape 19"/>
-          <p:cNvSpPr/>
-          <p:nvPr/>
-        </p:nvSpPr>
-        <p:spPr>
-          <a:xfrm>
-            <a:off x="5961888" y="4178808"/>
-            <a:ext cx="146304" cy="530352"/>
-          </a:xfrm>
-          <a:prstGeom prst="rect">
-            <a:avLst/>
-          </a:prstGeom>
-          <a:solidFill>
-            <a:srgbClr val="F4A261"/>
-          </a:solidFill>
-          <a:ln w="12700">
-            <a:solidFill>
-              <a:srgbClr val="F4A261"/>
-            </a:solidFill>
-            <a:prstDash val="solid"/>
-          </a:ln>
-        </p:spPr>
-      </p:sp>
-      <p:sp>
-        <p:nvSpPr>
-          <p:cNvPr id="22" name="Text 20"/>
-          <p:cNvSpPr/>
-          <p:nvPr/>
-        </p:nvSpPr>
-        <p:spPr>
-          <a:xfrm>
-            <a:off x="8247888" y="1417320"/>
-            <a:ext cx="1828800" cy="292608"/>
+          <p:cNvPr id="56" name="Text 54"/>
+          <p:cNvSpPr/>
+          <p:nvPr/>
+        </p:nvSpPr>
+        <p:spPr>
+          <a:xfrm>
+            <a:off x="1078992" y="4681728"/>
+            <a:ext cx="3291840" cy="146304"/>
           </a:xfrm>
           <a:prstGeom prst="rect">
             <a:avLst/>
@@ -6537,30 +8465,153 @@
               <a:buNone/>
             </a:pPr>
             <a:r>
-              <a:rPr lang="en-US" sz="1600" b="1" dirty="0">
-                <a:solidFill>
-                  <a:srgbClr val="2A9D8F"/>
-                </a:solidFill>
-                <a:latin typeface="Aptos" pitchFamily="34" charset="0"/>
-                <a:ea typeface="Aptos" pitchFamily="34" charset="-122"/>
-                <a:cs typeface="Aptos" pitchFamily="34" charset="-120"/>
-              </a:rPr>
-              <a:t>2.051.616€</a:t>
-            </a:r>
-            <a:endParaRPr lang="en-US" sz="1600" dirty="0"/>
-          </a:p>
-        </p:txBody>
-      </p:sp>
-      <p:sp>
-        <p:nvSpPr>
-          <p:cNvPr id="23" name="Text 21"/>
-          <p:cNvSpPr/>
-          <p:nvPr/>
-        </p:nvSpPr>
-        <p:spPr>
-          <a:xfrm>
-            <a:off x="8284464" y="1847088"/>
-            <a:ext cx="914400" cy="164592"/>
+              <a:rPr lang="en-US" sz="580" b="1" dirty="0">
+                <a:solidFill>
+                  <a:srgbClr val="1B2430"/>
+                </a:solidFill>
+                <a:latin typeface="Aptos" pitchFamily="34" charset="0"/>
+                <a:ea typeface="Aptos" pitchFamily="34" charset="-122"/>
+                <a:cs typeface="Aptos" pitchFamily="34" charset="-120"/>
+              </a:rPr>
+              <a:t>Contingencia + margen 12 %</a:t>
+            </a:r>
+            <a:endParaRPr lang="en-US" sz="580" dirty="0"/>
+          </a:p>
+        </p:txBody>
+      </p:sp>
+      <p:sp>
+        <p:nvSpPr>
+          <p:cNvPr id="57" name="Text 55"/>
+          <p:cNvSpPr/>
+          <p:nvPr/>
+        </p:nvSpPr>
+        <p:spPr>
+          <a:xfrm>
+            <a:off x="5212080" y="4681728"/>
+            <a:ext cx="1097280" cy="146304"/>
+          </a:xfrm>
+          <a:prstGeom prst="rect">
+            <a:avLst/>
+          </a:prstGeom>
+          <a:noFill/>
+          <a:ln/>
+        </p:spPr>
+        <p:txBody>
+          <a:bodyPr wrap="square" lIns="381" tIns="381" rIns="381" bIns="381" rtlCol="0" anchor="ctr">
+            <a:normAutofit/>
+          </a:bodyPr>
+          <a:lstStyle/>
+          <a:p>
+            <a:pPr algn="r" indent="0" marL="0">
+              <a:buNone/>
+            </a:pPr>
+            <a:r>
+              <a:rPr lang="en-US" sz="580" dirty="0">
+                <a:solidFill>
+                  <a:srgbClr val="1B2430"/>
+                </a:solidFill>
+                <a:latin typeface="Aptos" pitchFamily="34" charset="0"/>
+                <a:ea typeface="Aptos" pitchFamily="34" charset="-122"/>
+                <a:cs typeface="Aptos" pitchFamily="34" charset="-120"/>
+              </a:rPr>
+              <a:t>21.288</a:t>
+            </a:r>
+            <a:endParaRPr lang="en-US" sz="580" dirty="0"/>
+          </a:p>
+        </p:txBody>
+      </p:sp>
+      <p:sp>
+        <p:nvSpPr>
+          <p:cNvPr id="58" name="Text 56"/>
+          <p:cNvSpPr/>
+          <p:nvPr/>
+        </p:nvSpPr>
+        <p:spPr>
+          <a:xfrm>
+            <a:off x="7388352" y="4681728"/>
+            <a:ext cx="1188720" cy="146304"/>
+          </a:xfrm>
+          <a:prstGeom prst="rect">
+            <a:avLst/>
+          </a:prstGeom>
+          <a:noFill/>
+          <a:ln/>
+        </p:spPr>
+        <p:txBody>
+          <a:bodyPr wrap="square" lIns="381" tIns="381" rIns="381" bIns="381" rtlCol="0" anchor="ctr">
+            <a:normAutofit/>
+          </a:bodyPr>
+          <a:lstStyle/>
+          <a:p>
+            <a:pPr algn="r" indent="0" marL="0">
+              <a:buNone/>
+            </a:pPr>
+            <a:r>
+              <a:rPr lang="en-US" sz="580" dirty="0">
+                <a:solidFill>
+                  <a:srgbClr val="1B2430"/>
+                </a:solidFill>
+                <a:latin typeface="Aptos" pitchFamily="34" charset="0"/>
+                <a:ea typeface="Aptos" pitchFamily="34" charset="-122"/>
+                <a:cs typeface="Aptos" pitchFamily="34" charset="-120"/>
+              </a:rPr>
+              <a:t>96.936</a:t>
+            </a:r>
+            <a:endParaRPr lang="en-US" sz="580" dirty="0"/>
+          </a:p>
+        </p:txBody>
+      </p:sp>
+      <p:sp>
+        <p:nvSpPr>
+          <p:cNvPr id="59" name="Text 57"/>
+          <p:cNvSpPr/>
+          <p:nvPr/>
+        </p:nvSpPr>
+        <p:spPr>
+          <a:xfrm>
+            <a:off x="9802368" y="4681728"/>
+            <a:ext cx="1280160" cy="146304"/>
+          </a:xfrm>
+          <a:prstGeom prst="rect">
+            <a:avLst/>
+          </a:prstGeom>
+          <a:noFill/>
+          <a:ln/>
+        </p:spPr>
+        <p:txBody>
+          <a:bodyPr wrap="square" lIns="381" tIns="381" rIns="381" bIns="381" rtlCol="0" anchor="ctr">
+            <a:normAutofit/>
+          </a:bodyPr>
+          <a:lstStyle/>
+          <a:p>
+            <a:pPr algn="r" indent="0" marL="0">
+              <a:buNone/>
+            </a:pPr>
+            <a:r>
+              <a:rPr lang="en-US" sz="580" dirty="0">
+                <a:solidFill>
+                  <a:srgbClr val="1B2430"/>
+                </a:solidFill>
+                <a:latin typeface="Aptos" pitchFamily="34" charset="0"/>
+                <a:ea typeface="Aptos" pitchFamily="34" charset="-122"/>
+                <a:cs typeface="Aptos" pitchFamily="34" charset="-120"/>
+              </a:rPr>
+              <a:t>219.816</a:t>
+            </a:r>
+            <a:endParaRPr lang="en-US" sz="580" dirty="0"/>
+          </a:p>
+        </p:txBody>
+      </p:sp>
+      <p:sp>
+        <p:nvSpPr>
+          <p:cNvPr id="60" name="Text 58"/>
+          <p:cNvSpPr/>
+          <p:nvPr/>
+        </p:nvSpPr>
+        <p:spPr>
+          <a:xfrm>
+            <a:off x="804672" y="5532120"/>
+            <a:ext cx="6583680" cy="164592"/>
           </a:xfrm>
           <a:prstGeom prst="rect">
             <a:avLst/>
@@ -6578,7 +8629,7 @@
               <a:buNone/>
             </a:pPr>
             <a:r>
-              <a:rPr lang="en-US" sz="680" dirty="0">
+              <a:rPr lang="en-US" sz="640" dirty="0">
                 <a:solidFill>
                   <a:srgbClr val="5D6B7A"/>
                 </a:solidFill>
@@ -6586,147 +8637,22 @@
                 <a:ea typeface="Aptos" pitchFamily="34" charset="-122"/>
                 <a:cs typeface="Aptos" pitchFamily="34" charset="-120"/>
               </a:rPr>
-              <a:t>17 robots</a:t>
-            </a:r>
-            <a:endParaRPr lang="en-US" sz="680" dirty="0"/>
-          </a:p>
-        </p:txBody>
-      </p:sp>
-      <p:sp>
-        <p:nvSpPr>
-          <p:cNvPr id="24" name="Shape 22"/>
-          <p:cNvSpPr/>
-          <p:nvPr/>
-        </p:nvSpPr>
-        <p:spPr>
-          <a:xfrm>
-            <a:off x="8275320" y="3429000"/>
-            <a:ext cx="146304" cy="1280160"/>
-          </a:xfrm>
-          <a:prstGeom prst="rect">
-            <a:avLst/>
-          </a:prstGeom>
-          <a:solidFill>
-            <a:srgbClr val="1F7A8C"/>
-          </a:solidFill>
-          <a:ln w="12700">
-            <a:solidFill>
-              <a:srgbClr val="1F7A8C"/>
-            </a:solidFill>
-            <a:prstDash val="solid"/>
-          </a:ln>
-        </p:spPr>
-      </p:sp>
-      <p:sp>
-        <p:nvSpPr>
-          <p:cNvPr id="25" name="Shape 23"/>
-          <p:cNvSpPr/>
-          <p:nvPr/>
-        </p:nvSpPr>
-        <p:spPr>
-          <a:xfrm>
-            <a:off x="8622792" y="3959352"/>
-            <a:ext cx="146304" cy="749808"/>
-          </a:xfrm>
-          <a:prstGeom prst="rect">
-            <a:avLst/>
-          </a:prstGeom>
-          <a:solidFill>
-            <a:srgbClr val="6D5BD0"/>
-          </a:solidFill>
-          <a:ln w="12700">
-            <a:solidFill>
-              <a:srgbClr val="6D5BD0"/>
-            </a:solidFill>
-            <a:prstDash val="solid"/>
-          </a:ln>
-        </p:spPr>
-      </p:sp>
-      <p:sp>
-        <p:nvSpPr>
-          <p:cNvPr id="26" name="Shape 24"/>
-          <p:cNvSpPr/>
-          <p:nvPr/>
-        </p:nvSpPr>
-        <p:spPr>
-          <a:xfrm>
-            <a:off x="8970264" y="4050792"/>
-            <a:ext cx="146304" cy="658368"/>
-          </a:xfrm>
-          <a:prstGeom prst="rect">
-            <a:avLst/>
-          </a:prstGeom>
-          <a:solidFill>
-            <a:srgbClr val="2DB7E5"/>
-          </a:solidFill>
-          <a:ln w="12700">
-            <a:solidFill>
-              <a:srgbClr val="2DB7E5"/>
-            </a:solidFill>
-            <a:prstDash val="solid"/>
-          </a:ln>
-        </p:spPr>
-      </p:sp>
-      <p:sp>
-        <p:nvSpPr>
-          <p:cNvPr id="27" name="Shape 25"/>
-          <p:cNvSpPr/>
-          <p:nvPr/>
-        </p:nvSpPr>
-        <p:spPr>
-          <a:xfrm>
-            <a:off x="9317736" y="3886200"/>
-            <a:ext cx="146304" cy="822960"/>
-          </a:xfrm>
-          <a:prstGeom prst="rect">
-            <a:avLst/>
-          </a:prstGeom>
-          <a:solidFill>
-            <a:srgbClr val="2A9D8F"/>
-          </a:solidFill>
-          <a:ln w="12700">
-            <a:solidFill>
-              <a:srgbClr val="2A9D8F"/>
-            </a:solidFill>
-            <a:prstDash val="solid"/>
-          </a:ln>
-        </p:spPr>
-      </p:sp>
-      <p:sp>
-        <p:nvSpPr>
-          <p:cNvPr id="28" name="Shape 26"/>
-          <p:cNvSpPr/>
-          <p:nvPr/>
-        </p:nvSpPr>
-        <p:spPr>
-          <a:xfrm>
-            <a:off x="9665208" y="4178808"/>
-            <a:ext cx="146304" cy="530352"/>
-          </a:xfrm>
-          <a:prstGeom prst="rect">
-            <a:avLst/>
-          </a:prstGeom>
-          <a:solidFill>
-            <a:srgbClr val="F4A261"/>
-          </a:solidFill>
-          <a:ln w="12700">
-            <a:solidFill>
-              <a:srgbClr val="F4A261"/>
-            </a:solidFill>
-            <a:prstDash val="solid"/>
-          </a:ln>
-        </p:spPr>
-      </p:sp>
-      <p:sp>
-        <p:nvSpPr>
-          <p:cNvPr id="29" name="Text 27"/>
-          <p:cNvSpPr/>
-          <p:nvPr/>
-        </p:nvSpPr>
-        <p:spPr>
-          <a:xfrm>
-            <a:off x="777240" y="5532120"/>
-            <a:ext cx="10241280" cy="292608"/>
+              <a:t>Referencias publicas: MiR250, LD-250, Hokuyo, Intel RealSense y Zebra.</a:t>
+            </a:r>
+            <a:endParaRPr lang="en-US" sz="640" dirty="0"/>
+          </a:p>
+        </p:txBody>
+      </p:sp>
+      <p:sp>
+        <p:nvSpPr>
+          <p:cNvPr id="61" name="Text 59"/>
+          <p:cNvSpPr/>
+          <p:nvPr/>
+        </p:nvSpPr>
+        <p:spPr>
+          <a:xfrm>
+            <a:off x="7498080" y="5532120"/>
+            <a:ext cx="2103120" cy="164592"/>
           </a:xfrm>
           <a:prstGeom prst="rect">
             <a:avLst/>
@@ -6744,7 +8670,7 @@
               <a:buNone/>
             </a:pPr>
             <a:r>
-              <a:rPr lang="en-US" sz="710" dirty="0">
+              <a:rPr lang="en-US" sz="640" b="1" dirty="0">
                 <a:solidFill>
                   <a:srgbClr val="5D6B7A"/>
                 </a:solidFill>
@@ -6752,9 +8678,9 @@
                 <a:ea typeface="Aptos" pitchFamily="34" charset="-122"/>
                 <a:cs typeface="Aptos" pitchFamily="34" charset="-120"/>
               </a:rPr>
-              <a:t>Estimacion académica sin IVA. Referencias comerciales de AMR 250 kg usadas como benchmark de coste; la solución final mantiene base omnidireccional equivalente.</a:t>
-            </a:r>
-            <a:endParaRPr lang="en-US" sz="710" dirty="0"/>
+              <a:t>No es cotizacion vinculante.</a:t>
+            </a:r>
+            <a:endParaRPr lang="en-US" sz="640" dirty="0"/>
           </a:p>
         </p:txBody>
       </p:sp>
@@ -6887,7 +8813,7 @@
                 <a:ea typeface="Aptos Display" pitchFamily="34" charset="-122"/>
                 <a:cs typeface="Aptos Display" pitchFamily="34" charset="-120"/>
               </a:rPr>
-              <a:t>Capacidad recuperada, no reducción de plantilla</a:t>
+              <a:t>Tiempo recuperado frente a umbral financiero</a:t>
             </a:r>
             <a:endParaRPr lang="en-US" sz="2000" dirty="0"/>
           </a:p>
@@ -7012,118 +8938,23 @@
       </p:sp>
       <p:sp>
         <p:nvSpPr>
-          <p:cNvPr id="8" name="Text 6"/>
-          <p:cNvSpPr/>
-          <p:nvPr/>
-        </p:nvSpPr>
-        <p:spPr>
-          <a:xfrm>
-            <a:off x="822960" y="1234440"/>
-            <a:ext cx="3657600" cy="658368"/>
-          </a:xfrm>
-          <a:prstGeom prst="rect">
-            <a:avLst/>
-          </a:prstGeom>
-          <a:noFill/>
-          <a:ln/>
-        </p:spPr>
-        <p:txBody>
-          <a:bodyPr wrap="square" lIns="381" tIns="381" rIns="381" bIns="381" rtlCol="0" anchor="ctr">
-            <a:normAutofit/>
-          </a:bodyPr>
-          <a:lstStyle/>
-          <a:p>
-            <a:pPr algn="l" indent="0" marL="0">
-              <a:buNone/>
-            </a:pPr>
-            <a:r>
-              <a:rPr lang="en-US" sz="2100" b="1" dirty="0">
-                <a:solidFill>
-                  <a:srgbClr val="102033"/>
-                </a:solidFill>
-                <a:latin typeface="Aptos Display" pitchFamily="34" charset="0"/>
-                <a:ea typeface="Aptos Display" pitchFamily="34" charset="-122"/>
-                <a:cs typeface="Aptos Display" pitchFamily="34" charset="-120"/>
-              </a:rPr>
-              <a:t>ROI basado en</a:t>
-            </a:r>
-            <a:endParaRPr lang="en-US" sz="2100" dirty="0"/>
-          </a:p>
-          <a:p>
-            <a:pPr algn="l" indent="0" marL="0">
-              <a:buNone/>
-            </a:pPr>
-            <a:r>
-              <a:rPr lang="en-US" sz="2100" b="1" dirty="0">
-                <a:solidFill>
-                  <a:srgbClr val="102033"/>
-                </a:solidFill>
-                <a:latin typeface="Aptos Display" pitchFamily="34" charset="0"/>
-                <a:ea typeface="Aptos Display" pitchFamily="34" charset="-122"/>
-                <a:cs typeface="Aptos Display" pitchFamily="34" charset="-120"/>
-              </a:rPr>
-              <a:t>datos de planta</a:t>
-            </a:r>
-            <a:endParaRPr lang="en-US" sz="2100" dirty="0"/>
-          </a:p>
-        </p:txBody>
-      </p:sp>
-      <p:sp>
-        <p:nvSpPr>
-          <p:cNvPr id="9" name="Text 7"/>
-          <p:cNvSpPr/>
-          <p:nvPr/>
-        </p:nvSpPr>
-        <p:spPr>
-          <a:xfrm>
-            <a:off x="868680" y="2240280"/>
-            <a:ext cx="3840480" cy="566928"/>
-          </a:xfrm>
-          <a:prstGeom prst="rect">
-            <a:avLst/>
-          </a:prstGeom>
-          <a:noFill/>
-          <a:ln/>
-        </p:spPr>
-        <p:txBody>
-          <a:bodyPr wrap="square" lIns="381" tIns="381" rIns="381" bIns="381" rtlCol="0" anchor="ctr">
-            <a:normAutofit/>
-          </a:bodyPr>
-          <a:lstStyle/>
-          <a:p>
-            <a:pPr algn="l" indent="0" marL="0">
-              <a:buNone/>
-            </a:pPr>
-            <a:r>
-              <a:rPr lang="en-US" sz="810" dirty="0">
-                <a:solidFill>
-                  <a:srgbClr val="5D6B7A"/>
-                </a:solidFill>
-                <a:latin typeface="Aptos" pitchFamily="34" charset="0"/>
-                <a:ea typeface="Aptos" pitchFamily="34" charset="-122"/>
-                <a:cs typeface="Aptos" pitchFamily="34" charset="-120"/>
-              </a:rPr>
-              <a:t>El salario 20.000-28.000 €/año solo valora tiempo improductivo recuperado. La decisión real exige VAN, OPEX, riesgo FOD y continuidad de flujo.</a:t>
-            </a:r>
-            <a:endParaRPr lang="en-US" sz="810" dirty="0"/>
-          </a:p>
-        </p:txBody>
-      </p:sp>
-      <p:sp>
-        <p:nvSpPr>
-          <p:cNvPr id="10" name="Shape 8"/>
-          <p:cNvSpPr/>
-          <p:nvPr/>
-        </p:nvSpPr>
-        <p:spPr>
-          <a:xfrm>
-            <a:off x="5577840" y="1115568"/>
-            <a:ext cx="0" cy="4251960"/>
-          </a:xfrm>
-          <a:prstGeom prst="line">
-            <a:avLst/>
-          </a:prstGeom>
-          <a:noFill/>
+          <p:cNvPr id="8" name="Shape 6"/>
+          <p:cNvSpPr/>
+          <p:nvPr/>
+        </p:nvSpPr>
+        <p:spPr>
+          <a:xfrm>
+            <a:off x="777240" y="1170432"/>
+            <a:ext cx="3429000" cy="4297680"/>
+          </a:xfrm>
+          <a:prstGeom prst="roundRect">
+            <a:avLst>
+              <a:gd name="adj" fmla="val 2133"/>
+            </a:avLst>
+          </a:prstGeom>
+          <a:solidFill>
+            <a:srgbClr val="EAF7F6"/>
+          </a:solidFill>
           <a:ln w="12700">
             <a:solidFill>
               <a:srgbClr val="1F7A8C"/>
@@ -7134,14 +8965,113 @@
       </p:sp>
       <p:sp>
         <p:nvSpPr>
+          <p:cNvPr id="9" name="Text 7"/>
+          <p:cNvSpPr/>
+          <p:nvPr/>
+        </p:nvSpPr>
+        <p:spPr>
+          <a:xfrm>
+            <a:off x="960120" y="1353312"/>
+            <a:ext cx="2011680" cy="475488"/>
+          </a:xfrm>
+          <a:prstGeom prst="rect">
+            <a:avLst/>
+          </a:prstGeom>
+          <a:noFill/>
+          <a:ln/>
+        </p:spPr>
+        <p:txBody>
+          <a:bodyPr wrap="square" lIns="381" tIns="381" rIns="381" bIns="381" rtlCol="0" anchor="ctr">
+            <a:normAutofit/>
+          </a:bodyPr>
+          <a:lstStyle/>
+          <a:p>
+            <a:pPr algn="l" indent="0" marL="0">
+              <a:buNone/>
+            </a:pPr>
+            <a:r>
+              <a:rPr lang="en-US" sz="1300" b="1" dirty="0">
+                <a:solidFill>
+                  <a:srgbClr val="102033"/>
+                </a:solidFill>
+                <a:latin typeface="Aptos" pitchFamily="34" charset="0"/>
+                <a:ea typeface="Aptos" pitchFamily="34" charset="-122"/>
+                <a:cs typeface="Aptos" pitchFamily="34" charset="-120"/>
+              </a:rPr>
+              <a:t>Supuesto de</a:t>
+            </a:r>
+            <a:endParaRPr lang="en-US" sz="1300" dirty="0"/>
+          </a:p>
+          <a:p>
+            <a:pPr algn="l" indent="0" marL="0">
+              <a:buNone/>
+            </a:pPr>
+            <a:r>
+              <a:rPr lang="en-US" sz="1300" b="1" dirty="0">
+                <a:solidFill>
+                  <a:srgbClr val="102033"/>
+                </a:solidFill>
+                <a:latin typeface="Aptos" pitchFamily="34" charset="0"/>
+                <a:ea typeface="Aptos" pitchFamily="34" charset="-122"/>
+                <a:cs typeface="Aptos" pitchFamily="34" charset="-120"/>
+              </a:rPr>
+              <a:t>calculo</a:t>
+            </a:r>
+            <a:endParaRPr lang="en-US" sz="1300" dirty="0"/>
+          </a:p>
+        </p:txBody>
+      </p:sp>
+      <p:sp>
+        <p:nvSpPr>
+          <p:cNvPr id="10" name="Text 8"/>
+          <p:cNvSpPr/>
+          <p:nvPr/>
+        </p:nvSpPr>
+        <p:spPr>
+          <a:xfrm>
+            <a:off x="969264" y="2103120"/>
+            <a:ext cx="2560320" cy="182880"/>
+          </a:xfrm>
+          <a:prstGeom prst="rect">
+            <a:avLst/>
+          </a:prstGeom>
+          <a:noFill/>
+          <a:ln/>
+        </p:spPr>
+        <p:txBody>
+          <a:bodyPr wrap="square" lIns="381" tIns="381" rIns="381" bIns="381" rtlCol="0" anchor="ctr">
+            <a:normAutofit/>
+          </a:bodyPr>
+          <a:lstStyle/>
+          <a:p>
+            <a:pPr algn="l" indent="0" marL="0">
+              <a:buNone/>
+            </a:pPr>
+            <a:r>
+              <a:rPr lang="en-US" sz="700" dirty="0">
+                <a:solidFill>
+                  <a:srgbClr val="1B2430"/>
+                </a:solidFill>
+                <a:latin typeface="Aptos" pitchFamily="34" charset="0"/>
+                <a:ea typeface="Aptos" pitchFamily="34" charset="-122"/>
+                <a:cs typeface="Aptos" pitchFamily="34" charset="-120"/>
+              </a:rPr>
+              <a:t>Salario guia: 20.000-28.000 €/año.</a:t>
+            </a:r>
+            <a:endParaRPr lang="en-US" sz="700" dirty="0"/>
+          </a:p>
+        </p:txBody>
+      </p:sp>
+      <p:sp>
+        <p:nvSpPr>
           <p:cNvPr id="11" name="Text 9"/>
           <p:cNvSpPr/>
           <p:nvPr/>
         </p:nvSpPr>
         <p:spPr>
           <a:xfrm>
-            <a:off x="5897880" y="1298448"/>
-            <a:ext cx="4480560" cy="164592"/>
+            <a:off x="969264" y="2395728"/>
+            <a:ext cx="2194560" cy="182880"/>
           </a:xfrm>
           <a:prstGeom prst="rect">
             <a:avLst/>
@@ -7159,7 +9089,171 @@
               <a:buNone/>
             </a:pPr>
             <a:r>
-              <a:rPr lang="en-US" sz="650" b="1" dirty="0">
+              <a:rPr lang="en-US" sz="700" dirty="0">
+                <a:solidFill>
+                  <a:srgbClr val="1B2430"/>
+                </a:solidFill>
+                <a:latin typeface="Aptos" pitchFamily="34" charset="0"/>
+                <a:ea typeface="Aptos" pitchFamily="34" charset="-122"/>
+                <a:cs typeface="Aptos" pitchFamily="34" charset="-120"/>
+              </a:rPr>
+              <a:t>Caso central: 24.000 €.</a:t>
+            </a:r>
+            <a:endParaRPr lang="en-US" sz="700" dirty="0"/>
+          </a:p>
+        </p:txBody>
+      </p:sp>
+      <p:sp>
+        <p:nvSpPr>
+          <p:cNvPr id="12" name="Text 10"/>
+          <p:cNvSpPr/>
+          <p:nvPr/>
+        </p:nvSpPr>
+        <p:spPr>
+          <a:xfrm>
+            <a:off x="969264" y="2688336"/>
+            <a:ext cx="2651760" cy="182880"/>
+          </a:xfrm>
+          <a:prstGeom prst="rect">
+            <a:avLst/>
+          </a:prstGeom>
+          <a:noFill/>
+          <a:ln/>
+        </p:spPr>
+        <p:txBody>
+          <a:bodyPr wrap="square" lIns="381" tIns="381" rIns="381" bIns="381" rtlCol="0" anchor="ctr">
+            <a:normAutofit/>
+          </a:bodyPr>
+          <a:lstStyle/>
+          <a:p>
+            <a:pPr algn="l" indent="0" marL="0">
+              <a:buNone/>
+            </a:pPr>
+            <a:r>
+              <a:rPr lang="en-US" sz="700" dirty="0">
+                <a:solidFill>
+                  <a:srgbClr val="1B2430"/>
+                </a:solidFill>
+                <a:latin typeface="Aptos" pitchFamily="34" charset="0"/>
+                <a:ea typeface="Aptos" pitchFamily="34" charset="-122"/>
+                <a:cs typeface="Aptos" pitchFamily="34" charset="-120"/>
+              </a:rPr>
+              <a:t>Coste empresa 1,35; 1.760 h/año.</a:t>
+            </a:r>
+            <a:endParaRPr lang="en-US" sz="700" dirty="0"/>
+          </a:p>
+        </p:txBody>
+      </p:sp>
+      <p:sp>
+        <p:nvSpPr>
+          <p:cNvPr id="13" name="Text 11"/>
+          <p:cNvSpPr/>
+          <p:nvPr/>
+        </p:nvSpPr>
+        <p:spPr>
+          <a:xfrm>
+            <a:off x="960120" y="3246120"/>
+            <a:ext cx="2103120" cy="310896"/>
+          </a:xfrm>
+          <a:prstGeom prst="rect">
+            <a:avLst/>
+          </a:prstGeom>
+          <a:noFill/>
+          <a:ln/>
+        </p:spPr>
+        <p:txBody>
+          <a:bodyPr wrap="square" lIns="381" tIns="381" rIns="381" bIns="381" rtlCol="0" anchor="ctr">
+            <a:normAutofit/>
+          </a:bodyPr>
+          <a:lstStyle/>
+          <a:p>
+            <a:pPr algn="l" indent="0" marL="0">
+              <a:buNone/>
+            </a:pPr>
+            <a:r>
+              <a:rPr lang="en-US" sz="1800" b="1" dirty="0">
+                <a:solidFill>
+                  <a:srgbClr val="1F7A8C"/>
+                </a:solidFill>
+                <a:latin typeface="Aptos" pitchFamily="34" charset="0"/>
+                <a:ea typeface="Aptos" pitchFamily="34" charset="-122"/>
+                <a:cs typeface="Aptos" pitchFamily="34" charset="-120"/>
+              </a:rPr>
+              <a:t>18,4 €/h</a:t>
+            </a:r>
+            <a:endParaRPr lang="en-US" sz="1800" dirty="0"/>
+          </a:p>
+        </p:txBody>
+      </p:sp>
+      <p:sp>
+        <p:nvSpPr>
+          <p:cNvPr id="14" name="Text 12"/>
+          <p:cNvSpPr/>
+          <p:nvPr/>
+        </p:nvSpPr>
+        <p:spPr>
+          <a:xfrm>
+            <a:off x="987552" y="3913632"/>
+            <a:ext cx="2560320" cy="292608"/>
+          </a:xfrm>
+          <a:prstGeom prst="rect">
+            <a:avLst/>
+          </a:prstGeom>
+          <a:noFill/>
+          <a:ln/>
+        </p:spPr>
+        <p:txBody>
+          <a:bodyPr wrap="square" lIns="381" tIns="381" rIns="381" bIns="381" rtlCol="0" anchor="ctr">
+            <a:normAutofit/>
+          </a:bodyPr>
+          <a:lstStyle/>
+          <a:p>
+            <a:pPr algn="l" indent="0" marL="0">
+              <a:buNone/>
+            </a:pPr>
+            <a:r>
+              <a:rPr lang="en-US" sz="670" b="1" dirty="0">
+                <a:solidFill>
+                  <a:srgbClr val="B91C1C"/>
+                </a:solidFill>
+                <a:latin typeface="Aptos" pitchFamily="34" charset="0"/>
+                <a:ea typeface="Aptos" pitchFamily="34" charset="-122"/>
+                <a:cs typeface="Aptos" pitchFamily="34" charset="-120"/>
+              </a:rPr>
+              <a:t>Se monetiza tiempo improductivo; no reducción de plantilla.</a:t>
+            </a:r>
+            <a:endParaRPr lang="en-US" sz="670" dirty="0"/>
+          </a:p>
+        </p:txBody>
+      </p:sp>
+      <p:sp>
+        <p:nvSpPr>
+          <p:cNvPr id="15" name="Text 13"/>
+          <p:cNvSpPr/>
+          <p:nvPr/>
+        </p:nvSpPr>
+        <p:spPr>
+          <a:xfrm>
+            <a:off x="4617720" y="1298448"/>
+            <a:ext cx="4023360" cy="201168"/>
+          </a:xfrm>
+          <a:prstGeom prst="rect">
+            <a:avLst/>
+          </a:prstGeom>
+          <a:noFill/>
+          <a:ln/>
+        </p:spPr>
+        <p:txBody>
+          <a:bodyPr wrap="square" lIns="381" tIns="381" rIns="381" bIns="381" rtlCol="0" anchor="ctr">
+            <a:normAutofit/>
+          </a:bodyPr>
+          <a:lstStyle/>
+          <a:p>
+            <a:pPr algn="l" indent="0" marL="0">
+              <a:buNone/>
+            </a:pPr>
+            <a:r>
+              <a:rPr lang="en-US" sz="800" b="1" dirty="0">
                 <a:solidFill>
                   <a:srgbClr val="5D6B7A"/>
                 </a:solidFill>
@@ -7167,22 +9261,22 @@
                 <a:ea typeface="Aptos" pitchFamily="34" charset="-122"/>
                 <a:cs typeface="Aptos" pitchFamily="34" charset="-120"/>
               </a:rPr>
-              <a:t>BENEFICIO ANUAL BRUTO REQUERIDO PARA VAN = 0</a:t>
-            </a:r>
-            <a:endParaRPr lang="en-US" sz="650" dirty="0"/>
-          </a:p>
-        </p:txBody>
-      </p:sp>
-      <p:sp>
-        <p:nvSpPr>
-          <p:cNvPr id="12" name="Text 10"/>
-          <p:cNvSpPr/>
-          <p:nvPr/>
-        </p:nvSpPr>
-        <p:spPr>
-          <a:xfrm>
-            <a:off x="5925312" y="1847088"/>
-            <a:ext cx="1005840" cy="182880"/>
+              <a:t>Beneficio anual: recuperado vs VAN cero</a:t>
+            </a:r>
+            <a:endParaRPr lang="en-US" sz="800" dirty="0"/>
+          </a:p>
+        </p:txBody>
+      </p:sp>
+      <p:sp>
+        <p:nvSpPr>
+          <p:cNvPr id="16" name="Text 14"/>
+          <p:cNvSpPr/>
+          <p:nvPr/>
+        </p:nvSpPr>
+        <p:spPr>
+          <a:xfrm>
+            <a:off x="4617720" y="1627632"/>
+            <a:ext cx="1463040" cy="146304"/>
           </a:xfrm>
           <a:prstGeom prst="rect">
             <a:avLst/>
@@ -7200,7 +9294,48 @@
               <a:buNone/>
             </a:pPr>
             <a:r>
-              <a:rPr lang="en-US" sz="750" b="1" dirty="0">
+              <a:rPr lang="en-US" sz="570" dirty="0">
+                <a:solidFill>
+                  <a:srgbClr val="1F7A8C"/>
+                </a:solidFill>
+                <a:latin typeface="Aptos" pitchFamily="34" charset="0"/>
+                <a:ea typeface="Aptos" pitchFamily="34" charset="-122"/>
+                <a:cs typeface="Aptos" pitchFamily="34" charset="-120"/>
+              </a:rPr>
+              <a:t>horas recuperadas</a:t>
+            </a:r>
+            <a:endParaRPr lang="en-US" sz="570" dirty="0"/>
+          </a:p>
+        </p:txBody>
+      </p:sp>
+      <p:sp>
+        <p:nvSpPr>
+          <p:cNvPr id="17" name="Text 15"/>
+          <p:cNvSpPr/>
+          <p:nvPr/>
+        </p:nvSpPr>
+        <p:spPr>
+          <a:xfrm>
+            <a:off x="6446520" y="1627632"/>
+            <a:ext cx="1371600" cy="146304"/>
+          </a:xfrm>
+          <a:prstGeom prst="rect">
+            <a:avLst/>
+          </a:prstGeom>
+          <a:noFill/>
+          <a:ln/>
+        </p:spPr>
+        <p:txBody>
+          <a:bodyPr wrap="square" lIns="381" tIns="381" rIns="381" bIns="381" rtlCol="0" anchor="ctr">
+            <a:normAutofit/>
+          </a:bodyPr>
+          <a:lstStyle/>
+          <a:p>
+            <a:pPr algn="l" indent="0" marL="0">
+              <a:buNone/>
+            </a:pPr>
+            <a:r>
+              <a:rPr lang="en-US" sz="570" dirty="0">
                 <a:solidFill>
                   <a:srgbClr val="F4A261"/>
                 </a:solidFill>
@@ -7208,22 +9343,63 @@
                 <a:ea typeface="Aptos" pitchFamily="34" charset="-122"/>
                 <a:cs typeface="Aptos" pitchFamily="34" charset="-120"/>
               </a:rPr>
+              <a:t>umbral VAN cero</a:t>
+            </a:r>
+            <a:endParaRPr lang="en-US" sz="570" dirty="0"/>
+          </a:p>
+        </p:txBody>
+      </p:sp>
+      <p:sp>
+        <p:nvSpPr>
+          <p:cNvPr id="18" name="Text 16"/>
+          <p:cNvSpPr/>
+          <p:nvPr/>
+        </p:nvSpPr>
+        <p:spPr>
+          <a:xfrm>
+            <a:off x="4617720" y="2240280"/>
+            <a:ext cx="914400" cy="164592"/>
+          </a:xfrm>
+          <a:prstGeom prst="rect">
+            <a:avLst/>
+          </a:prstGeom>
+          <a:noFill/>
+          <a:ln/>
+        </p:spPr>
+        <p:txBody>
+          <a:bodyPr wrap="square" lIns="381" tIns="381" rIns="381" bIns="381" rtlCol="0" anchor="ctr">
+            <a:normAutofit/>
+          </a:bodyPr>
+          <a:lstStyle/>
+          <a:p>
+            <a:pPr algn="l" indent="0" marL="0">
+              <a:buNone/>
+            </a:pPr>
+            <a:r>
+              <a:rPr lang="en-US" sz="700" b="1" dirty="0">
+                <a:solidFill>
+                  <a:srgbClr val="F4A261"/>
+                </a:solidFill>
+                <a:latin typeface="Aptos" pitchFamily="34" charset="0"/>
+                <a:ea typeface="Aptos" pitchFamily="34" charset="-122"/>
+                <a:cs typeface="Aptos" pitchFamily="34" charset="-120"/>
+              </a:rPr>
               <a:t>1 robot</a:t>
             </a:r>
-            <a:endParaRPr lang="en-US" sz="750" dirty="0"/>
-          </a:p>
-        </p:txBody>
-      </p:sp>
-      <p:sp>
-        <p:nvSpPr>
-          <p:cNvPr id="13" name="Text 11"/>
-          <p:cNvSpPr/>
-          <p:nvPr/>
-        </p:nvSpPr>
-        <p:spPr>
-          <a:xfrm>
-            <a:off x="7452360" y="1755648"/>
-            <a:ext cx="2560320" cy="256032"/>
+            <a:endParaRPr lang="en-US" sz="700" dirty="0"/>
+          </a:p>
+        </p:txBody>
+      </p:sp>
+      <p:sp>
+        <p:nvSpPr>
+          <p:cNvPr id="19" name="Text 17"/>
+          <p:cNvSpPr/>
+          <p:nvPr/>
+        </p:nvSpPr>
+        <p:spPr>
+          <a:xfrm>
+            <a:off x="5532120" y="2240280"/>
+            <a:ext cx="1051560" cy="164592"/>
           </a:xfrm>
           <a:prstGeom prst="rect">
             <a:avLst/>
@@ -7241,38 +9417,40 @@
               <a:buNone/>
             </a:pPr>
             <a:r>
-              <a:rPr lang="en-US" sz="1300" b="1" dirty="0">
-                <a:solidFill>
-                  <a:srgbClr val="102033"/>
-                </a:solidFill>
-                <a:latin typeface="Aptos" pitchFamily="34" charset="0"/>
-                <a:ea typeface="Aptos" pitchFamily="34" charset="-122"/>
-                <a:cs typeface="Aptos" pitchFamily="34" charset="-120"/>
-              </a:rPr>
-              <a:t>62.829 € anuales</a:t>
-            </a:r>
-            <a:endParaRPr lang="en-US" sz="1300" dirty="0"/>
-          </a:p>
-        </p:txBody>
-      </p:sp>
-      <p:sp>
-        <p:nvSpPr>
-          <p:cNvPr id="14" name="Shape 12"/>
-          <p:cNvSpPr/>
-          <p:nvPr/>
-        </p:nvSpPr>
-        <p:spPr>
-          <a:xfrm>
-            <a:off x="5897880" y="2331720"/>
-            <a:ext cx="4389120" cy="0"/>
-          </a:xfrm>
-          <a:prstGeom prst="line">
-            <a:avLst/>
-          </a:prstGeom>
-          <a:noFill/>
-          <a:ln w="10160">
+              <a:rPr lang="en-US" sz="580" dirty="0">
+                <a:solidFill>
+                  <a:srgbClr val="5D6B7A"/>
+                </a:solidFill>
+                <a:latin typeface="Aptos" pitchFamily="34" charset="0"/>
+                <a:ea typeface="Aptos" pitchFamily="34" charset="-122"/>
+                <a:cs typeface="Aptos" pitchFamily="34" charset="-120"/>
+              </a:rPr>
+              <a:t>825 h/año</a:t>
+            </a:r>
+            <a:endParaRPr lang="en-US" sz="580" dirty="0"/>
+          </a:p>
+        </p:txBody>
+      </p:sp>
+      <p:sp>
+        <p:nvSpPr>
+          <p:cNvPr id="20" name="Shape 18"/>
+          <p:cNvSpPr/>
+          <p:nvPr/>
+        </p:nvSpPr>
+        <p:spPr>
+          <a:xfrm>
+            <a:off x="6812280" y="2194560"/>
+            <a:ext cx="292608" cy="109728"/>
+          </a:xfrm>
+          <a:prstGeom prst="rect">
+            <a:avLst/>
+          </a:prstGeom>
+          <a:solidFill>
+            <a:srgbClr val="1F7A8C"/>
+          </a:solidFill>
+          <a:ln w="12700">
             <a:solidFill>
-              <a:srgbClr val="D6DEE8"/>
+              <a:srgbClr val="1F7A8C"/>
             </a:solidFill>
             <a:prstDash val="solid"/>
           </a:ln>
@@ -7280,104 +9458,24 @@
       </p:sp>
       <p:sp>
         <p:nvSpPr>
-          <p:cNvPr id="15" name="Text 13"/>
-          <p:cNvSpPr/>
-          <p:nvPr/>
-        </p:nvSpPr>
-        <p:spPr>
-          <a:xfrm>
-            <a:off x="5925312" y="2807208"/>
-            <a:ext cx="1005840" cy="182880"/>
-          </a:xfrm>
-          <a:prstGeom prst="rect">
-            <a:avLst/>
-          </a:prstGeom>
-          <a:noFill/>
-          <a:ln/>
-        </p:spPr>
-        <p:txBody>
-          <a:bodyPr wrap="square" lIns="381" tIns="381" rIns="381" bIns="381" rtlCol="0" anchor="ctr">
-            <a:normAutofit/>
-          </a:bodyPr>
-          <a:lstStyle/>
-          <a:p>
-            <a:pPr algn="l" indent="0" marL="0">
-              <a:buNone/>
-            </a:pPr>
-            <a:r>
-              <a:rPr lang="en-US" sz="750" b="1" dirty="0">
-                <a:solidFill>
-                  <a:srgbClr val="1F7A8C"/>
-                </a:solidFill>
-                <a:latin typeface="Aptos" pitchFamily="34" charset="0"/>
-                <a:ea typeface="Aptos" pitchFamily="34" charset="-122"/>
-                <a:cs typeface="Aptos" pitchFamily="34" charset="-120"/>
-              </a:rPr>
-              <a:t>7 robots</a:t>
-            </a:r>
-            <a:endParaRPr lang="en-US" sz="750" dirty="0"/>
-          </a:p>
-        </p:txBody>
-      </p:sp>
-      <p:sp>
-        <p:nvSpPr>
-          <p:cNvPr id="16" name="Text 14"/>
-          <p:cNvSpPr/>
-          <p:nvPr/>
-        </p:nvSpPr>
-        <p:spPr>
-          <a:xfrm>
-            <a:off x="7452360" y="2715768"/>
-            <a:ext cx="2560320" cy="256032"/>
-          </a:xfrm>
-          <a:prstGeom prst="rect">
-            <a:avLst/>
-          </a:prstGeom>
-          <a:noFill/>
-          <a:ln/>
-        </p:spPr>
-        <p:txBody>
-          <a:bodyPr wrap="square" lIns="381" tIns="381" rIns="381" bIns="381" rtlCol="0" anchor="ctr">
-            <a:normAutofit/>
-          </a:bodyPr>
-          <a:lstStyle/>
-          <a:p>
-            <a:pPr algn="l" indent="0" marL="0">
-              <a:buNone/>
-            </a:pPr>
-            <a:r>
-              <a:rPr lang="en-US" sz="1300" b="1" dirty="0">
-                <a:solidFill>
-                  <a:srgbClr val="102033"/>
-                </a:solidFill>
-                <a:latin typeface="Aptos" pitchFamily="34" charset="0"/>
-                <a:ea typeface="Aptos" pitchFamily="34" charset="-122"/>
-                <a:cs typeface="Aptos" pitchFamily="34" charset="-120"/>
-              </a:rPr>
-              <a:t>316.429 € anuales</a:t>
-            </a:r>
-            <a:endParaRPr lang="en-US" sz="1300" dirty="0"/>
-          </a:p>
-        </p:txBody>
-      </p:sp>
-      <p:sp>
-        <p:nvSpPr>
-          <p:cNvPr id="17" name="Shape 15"/>
-          <p:cNvSpPr/>
-          <p:nvPr/>
-        </p:nvSpPr>
-        <p:spPr>
-          <a:xfrm>
-            <a:off x="5897880" y="3291840"/>
-            <a:ext cx="4389120" cy="0"/>
-          </a:xfrm>
-          <a:prstGeom prst="line">
-            <a:avLst/>
-          </a:prstGeom>
-          <a:noFill/>
-          <a:ln w="10160">
+          <p:cNvPr id="21" name="Shape 19"/>
+          <p:cNvSpPr/>
+          <p:nvPr/>
+        </p:nvSpPr>
+        <p:spPr>
+          <a:xfrm>
+            <a:off x="6812280" y="2404872"/>
+            <a:ext cx="1060704" cy="109728"/>
+          </a:xfrm>
+          <a:prstGeom prst="rect">
+            <a:avLst/>
+          </a:prstGeom>
+          <a:solidFill>
+            <a:srgbClr val="F4A261"/>
+          </a:solidFill>
+          <a:ln w="12700">
             <a:solidFill>
-              <a:srgbClr val="D6DEE8"/>
+              <a:srgbClr val="F4A261"/>
             </a:solidFill>
             <a:prstDash val="solid"/>
           </a:ln>
@@ -7385,14 +9483,14 @@
       </p:sp>
       <p:sp>
         <p:nvSpPr>
-          <p:cNvPr id="18" name="Text 16"/>
-          <p:cNvSpPr/>
-          <p:nvPr/>
-        </p:nvSpPr>
-        <p:spPr>
-          <a:xfrm>
-            <a:off x="5925312" y="3767328"/>
-            <a:ext cx="1005840" cy="182880"/>
+          <p:cNvPr id="22" name="Text 20"/>
+          <p:cNvSpPr/>
+          <p:nvPr/>
+        </p:nvSpPr>
+        <p:spPr>
+          <a:xfrm>
+            <a:off x="7150608" y="2148840"/>
+            <a:ext cx="868680" cy="146304"/>
           </a:xfrm>
           <a:prstGeom prst="rect">
             <a:avLst/>
@@ -7410,30 +9508,30 @@
               <a:buNone/>
             </a:pPr>
             <a:r>
-              <a:rPr lang="en-US" sz="750" b="1" dirty="0">
-                <a:solidFill>
-                  <a:srgbClr val="2A9D8F"/>
-                </a:solidFill>
-                <a:latin typeface="Aptos" pitchFamily="34" charset="0"/>
-                <a:ea typeface="Aptos" pitchFamily="34" charset="-122"/>
-                <a:cs typeface="Aptos" pitchFamily="34" charset="-120"/>
-              </a:rPr>
-              <a:t>17 robots</a:t>
-            </a:r>
-            <a:endParaRPr lang="en-US" sz="750" dirty="0"/>
-          </a:p>
-        </p:txBody>
-      </p:sp>
-      <p:sp>
-        <p:nvSpPr>
-          <p:cNvPr id="19" name="Text 17"/>
-          <p:cNvSpPr/>
-          <p:nvPr/>
-        </p:nvSpPr>
-        <p:spPr>
-          <a:xfrm>
-            <a:off x="7452360" y="3675888"/>
-            <a:ext cx="2560320" cy="256032"/>
+              <a:rPr lang="en-US" sz="550" dirty="0">
+                <a:solidFill>
+                  <a:srgbClr val="1B2430"/>
+                </a:solidFill>
+                <a:latin typeface="Aptos" pitchFamily="34" charset="0"/>
+                <a:ea typeface="Aptos" pitchFamily="34" charset="-122"/>
+                <a:cs typeface="Aptos" pitchFamily="34" charset="-120"/>
+              </a:rPr>
+              <a:t>15.180 €</a:t>
+            </a:r>
+            <a:endParaRPr lang="en-US" sz="550" dirty="0"/>
+          </a:p>
+        </p:txBody>
+      </p:sp>
+      <p:sp>
+        <p:nvSpPr>
+          <p:cNvPr id="23" name="Text 21"/>
+          <p:cNvSpPr/>
+          <p:nvPr/>
+        </p:nvSpPr>
+        <p:spPr>
+          <a:xfrm>
+            <a:off x="7918704" y="2359152"/>
+            <a:ext cx="868680" cy="146304"/>
           </a:xfrm>
           <a:prstGeom prst="rect">
             <a:avLst/>
@@ -7451,42 +9549,570 @@
               <a:buNone/>
             </a:pPr>
             <a:r>
-              <a:rPr lang="en-US" sz="1300" b="1" dirty="0">
-                <a:solidFill>
-                  <a:srgbClr val="102033"/>
-                </a:solidFill>
-                <a:latin typeface="Aptos" pitchFamily="34" charset="0"/>
-                <a:ea typeface="Aptos" pitchFamily="34" charset="-122"/>
-                <a:cs typeface="Aptos" pitchFamily="34" charset="-120"/>
-              </a:rPr>
-              <a:t>714.125 € anuales</a:t>
-            </a:r>
-            <a:endParaRPr lang="en-US" sz="1300" dirty="0"/>
-          </a:p>
-        </p:txBody>
-      </p:sp>
-      <p:sp>
-        <p:nvSpPr>
-          <p:cNvPr id="20" name="Shape 18"/>
-          <p:cNvSpPr/>
-          <p:nvPr/>
-        </p:nvSpPr>
-        <p:spPr>
-          <a:xfrm>
-            <a:off x="5897880" y="4251960"/>
-            <a:ext cx="4389120" cy="0"/>
-          </a:xfrm>
-          <a:prstGeom prst="line">
-            <a:avLst/>
-          </a:prstGeom>
-          <a:noFill/>
-          <a:ln w="10160">
+              <a:rPr lang="en-US" sz="550" dirty="0">
+                <a:solidFill>
+                  <a:srgbClr val="1B2430"/>
+                </a:solidFill>
+                <a:latin typeface="Aptos" pitchFamily="34" charset="0"/>
+                <a:ea typeface="Aptos" pitchFamily="34" charset="-122"/>
+                <a:cs typeface="Aptos" pitchFamily="34" charset="-120"/>
+              </a:rPr>
+              <a:t>62.829 €</a:t>
+            </a:r>
+            <a:endParaRPr lang="en-US" sz="550" dirty="0"/>
+          </a:p>
+        </p:txBody>
+      </p:sp>
+      <p:sp>
+        <p:nvSpPr>
+          <p:cNvPr id="24" name="Text 22"/>
+          <p:cNvSpPr/>
+          <p:nvPr/>
+        </p:nvSpPr>
+        <p:spPr>
+          <a:xfrm>
+            <a:off x="4617720" y="3200400"/>
+            <a:ext cx="914400" cy="164592"/>
+          </a:xfrm>
+          <a:prstGeom prst="rect">
+            <a:avLst/>
+          </a:prstGeom>
+          <a:noFill/>
+          <a:ln/>
+        </p:spPr>
+        <p:txBody>
+          <a:bodyPr wrap="square" lIns="381" tIns="381" rIns="381" bIns="381" rtlCol="0" anchor="ctr">
+            <a:normAutofit/>
+          </a:bodyPr>
+          <a:lstStyle/>
+          <a:p>
+            <a:pPr algn="l" indent="0" marL="0">
+              <a:buNone/>
+            </a:pPr>
+            <a:r>
+              <a:rPr lang="en-US" sz="700" b="1" dirty="0">
+                <a:solidFill>
+                  <a:srgbClr val="1F7A8C"/>
+                </a:solidFill>
+                <a:latin typeface="Aptos" pitchFamily="34" charset="0"/>
+                <a:ea typeface="Aptos" pitchFamily="34" charset="-122"/>
+                <a:cs typeface="Aptos" pitchFamily="34" charset="-120"/>
+              </a:rPr>
+              <a:t>7 robots</a:t>
+            </a:r>
+            <a:endParaRPr lang="en-US" sz="700" dirty="0"/>
+          </a:p>
+        </p:txBody>
+      </p:sp>
+      <p:sp>
+        <p:nvSpPr>
+          <p:cNvPr id="25" name="Text 23"/>
+          <p:cNvSpPr/>
+          <p:nvPr/>
+        </p:nvSpPr>
+        <p:spPr>
+          <a:xfrm>
+            <a:off x="5532120" y="3200400"/>
+            <a:ext cx="1051560" cy="164592"/>
+          </a:xfrm>
+          <a:prstGeom prst="rect">
+            <a:avLst/>
+          </a:prstGeom>
+          <a:noFill/>
+          <a:ln/>
+        </p:spPr>
+        <p:txBody>
+          <a:bodyPr wrap="square" lIns="381" tIns="381" rIns="381" bIns="381" rtlCol="0" anchor="ctr">
+            <a:normAutofit/>
+          </a:bodyPr>
+          <a:lstStyle/>
+          <a:p>
+            <a:pPr algn="l" indent="0" marL="0">
+              <a:buNone/>
+            </a:pPr>
+            <a:r>
+              <a:rPr lang="en-US" sz="580" dirty="0">
+                <a:solidFill>
+                  <a:srgbClr val="5D6B7A"/>
+                </a:solidFill>
+                <a:latin typeface="Aptos" pitchFamily="34" charset="0"/>
+                <a:ea typeface="Aptos" pitchFamily="34" charset="-122"/>
+                <a:cs typeface="Aptos" pitchFamily="34" charset="-120"/>
+              </a:rPr>
+              <a:t>5.940 h/año</a:t>
+            </a:r>
+            <a:endParaRPr lang="en-US" sz="580" dirty="0"/>
+          </a:p>
+        </p:txBody>
+      </p:sp>
+      <p:sp>
+        <p:nvSpPr>
+          <p:cNvPr id="26" name="Shape 24"/>
+          <p:cNvSpPr/>
+          <p:nvPr/>
+        </p:nvSpPr>
+        <p:spPr>
+          <a:xfrm>
+            <a:off x="6812280" y="3154680"/>
+            <a:ext cx="1847088" cy="109728"/>
+          </a:xfrm>
+          <a:prstGeom prst="rect">
+            <a:avLst/>
+          </a:prstGeom>
+          <a:solidFill>
+            <a:srgbClr val="1F7A8C"/>
+          </a:solidFill>
+          <a:ln w="12700">
             <a:solidFill>
-              <a:srgbClr val="D6DEE8"/>
+              <a:srgbClr val="1F7A8C"/>
             </a:solidFill>
             <a:prstDash val="solid"/>
           </a:ln>
         </p:spPr>
+      </p:sp>
+      <p:sp>
+        <p:nvSpPr>
+          <p:cNvPr id="27" name="Shape 25"/>
+          <p:cNvSpPr/>
+          <p:nvPr/>
+        </p:nvSpPr>
+        <p:spPr>
+          <a:xfrm>
+            <a:off x="6812280" y="3364992"/>
+            <a:ext cx="2880360" cy="109728"/>
+          </a:xfrm>
+          <a:prstGeom prst="rect">
+            <a:avLst/>
+          </a:prstGeom>
+          <a:solidFill>
+            <a:srgbClr val="F4A261"/>
+          </a:solidFill>
+          <a:ln w="12700">
+            <a:solidFill>
+              <a:srgbClr val="F4A261"/>
+            </a:solidFill>
+            <a:prstDash val="solid"/>
+          </a:ln>
+        </p:spPr>
+      </p:sp>
+      <p:sp>
+        <p:nvSpPr>
+          <p:cNvPr id="28" name="Text 26"/>
+          <p:cNvSpPr/>
+          <p:nvPr/>
+        </p:nvSpPr>
+        <p:spPr>
+          <a:xfrm>
+            <a:off x="8705088" y="3108960"/>
+            <a:ext cx="868680" cy="146304"/>
+          </a:xfrm>
+          <a:prstGeom prst="rect">
+            <a:avLst/>
+          </a:prstGeom>
+          <a:noFill/>
+          <a:ln/>
+        </p:spPr>
+        <p:txBody>
+          <a:bodyPr wrap="square" lIns="381" tIns="381" rIns="381" bIns="381" rtlCol="0" anchor="ctr">
+            <a:normAutofit/>
+          </a:bodyPr>
+          <a:lstStyle/>
+          <a:p>
+            <a:pPr algn="l" indent="0" marL="0">
+              <a:buNone/>
+            </a:pPr>
+            <a:r>
+              <a:rPr lang="en-US" sz="550" dirty="0">
+                <a:solidFill>
+                  <a:srgbClr val="1B2430"/>
+                </a:solidFill>
+                <a:latin typeface="Aptos" pitchFamily="34" charset="0"/>
+                <a:ea typeface="Aptos" pitchFamily="34" charset="-122"/>
+                <a:cs typeface="Aptos" pitchFamily="34" charset="-120"/>
+              </a:rPr>
+              <a:t>109.296 €</a:t>
+            </a:r>
+            <a:endParaRPr lang="en-US" sz="550" dirty="0"/>
+          </a:p>
+        </p:txBody>
+      </p:sp>
+      <p:sp>
+        <p:nvSpPr>
+          <p:cNvPr id="29" name="Text 27"/>
+          <p:cNvSpPr/>
+          <p:nvPr/>
+        </p:nvSpPr>
+        <p:spPr>
+          <a:xfrm>
+            <a:off x="9738360" y="3319272"/>
+            <a:ext cx="868680" cy="146304"/>
+          </a:xfrm>
+          <a:prstGeom prst="rect">
+            <a:avLst/>
+          </a:prstGeom>
+          <a:noFill/>
+          <a:ln/>
+        </p:spPr>
+        <p:txBody>
+          <a:bodyPr wrap="square" lIns="381" tIns="381" rIns="381" bIns="381" rtlCol="0" anchor="ctr">
+            <a:normAutofit/>
+          </a:bodyPr>
+          <a:lstStyle/>
+          <a:p>
+            <a:pPr algn="l" indent="0" marL="0">
+              <a:buNone/>
+            </a:pPr>
+            <a:r>
+              <a:rPr lang="en-US" sz="550" dirty="0">
+                <a:solidFill>
+                  <a:srgbClr val="1B2430"/>
+                </a:solidFill>
+                <a:latin typeface="Aptos" pitchFamily="34" charset="0"/>
+                <a:ea typeface="Aptos" pitchFamily="34" charset="-122"/>
+                <a:cs typeface="Aptos" pitchFamily="34" charset="-120"/>
+              </a:rPr>
+              <a:t>316.429 €</a:t>
+            </a:r>
+            <a:endParaRPr lang="en-US" sz="550" dirty="0"/>
+          </a:p>
+        </p:txBody>
+      </p:sp>
+      <p:sp>
+        <p:nvSpPr>
+          <p:cNvPr id="30" name="Text 28"/>
+          <p:cNvSpPr/>
+          <p:nvPr/>
+        </p:nvSpPr>
+        <p:spPr>
+          <a:xfrm>
+            <a:off x="4617720" y="4160520"/>
+            <a:ext cx="914400" cy="164592"/>
+          </a:xfrm>
+          <a:prstGeom prst="rect">
+            <a:avLst/>
+          </a:prstGeom>
+          <a:noFill/>
+          <a:ln/>
+        </p:spPr>
+        <p:txBody>
+          <a:bodyPr wrap="square" lIns="381" tIns="381" rIns="381" bIns="381" rtlCol="0" anchor="ctr">
+            <a:normAutofit/>
+          </a:bodyPr>
+          <a:lstStyle/>
+          <a:p>
+            <a:pPr algn="l" indent="0" marL="0">
+              <a:buNone/>
+            </a:pPr>
+            <a:r>
+              <a:rPr lang="en-US" sz="700" b="1" dirty="0">
+                <a:solidFill>
+                  <a:srgbClr val="2A9D8F"/>
+                </a:solidFill>
+                <a:latin typeface="Aptos" pitchFamily="34" charset="0"/>
+                <a:ea typeface="Aptos" pitchFamily="34" charset="-122"/>
+                <a:cs typeface="Aptos" pitchFamily="34" charset="-120"/>
+              </a:rPr>
+              <a:t>17 robots</a:t>
+            </a:r>
+            <a:endParaRPr lang="en-US" sz="700" dirty="0"/>
+          </a:p>
+        </p:txBody>
+      </p:sp>
+      <p:sp>
+        <p:nvSpPr>
+          <p:cNvPr id="31" name="Text 29"/>
+          <p:cNvSpPr/>
+          <p:nvPr/>
+        </p:nvSpPr>
+        <p:spPr>
+          <a:xfrm>
+            <a:off x="5532120" y="4160520"/>
+            <a:ext cx="1051560" cy="164592"/>
+          </a:xfrm>
+          <a:prstGeom prst="rect">
+            <a:avLst/>
+          </a:prstGeom>
+          <a:noFill/>
+          <a:ln/>
+        </p:spPr>
+        <p:txBody>
+          <a:bodyPr wrap="square" lIns="381" tIns="381" rIns="381" bIns="381" rtlCol="0" anchor="ctr">
+            <a:normAutofit/>
+          </a:bodyPr>
+          <a:lstStyle/>
+          <a:p>
+            <a:pPr algn="l" indent="0" marL="0">
+              <a:buNone/>
+            </a:pPr>
+            <a:r>
+              <a:rPr lang="en-US" sz="580" dirty="0">
+                <a:solidFill>
+                  <a:srgbClr val="5D6B7A"/>
+                </a:solidFill>
+                <a:latin typeface="Aptos" pitchFamily="34" charset="0"/>
+                <a:ea typeface="Aptos" pitchFamily="34" charset="-122"/>
+                <a:cs typeface="Aptos" pitchFamily="34" charset="-120"/>
+              </a:rPr>
+              <a:t>14.000 h/año</a:t>
+            </a:r>
+            <a:endParaRPr lang="en-US" sz="580" dirty="0"/>
+          </a:p>
+        </p:txBody>
+      </p:sp>
+      <p:sp>
+        <p:nvSpPr>
+          <p:cNvPr id="32" name="Shape 30"/>
+          <p:cNvSpPr/>
+          <p:nvPr/>
+        </p:nvSpPr>
+        <p:spPr>
+          <a:xfrm>
+            <a:off x="6812280" y="4114800"/>
+            <a:ext cx="3063240" cy="109728"/>
+          </a:xfrm>
+          <a:prstGeom prst="rect">
+            <a:avLst/>
+          </a:prstGeom>
+          <a:solidFill>
+            <a:srgbClr val="1F7A8C"/>
+          </a:solidFill>
+          <a:ln w="12700">
+            <a:solidFill>
+              <a:srgbClr val="1F7A8C"/>
+            </a:solidFill>
+            <a:prstDash val="solid"/>
+          </a:ln>
+        </p:spPr>
+      </p:sp>
+      <p:sp>
+        <p:nvSpPr>
+          <p:cNvPr id="33" name="Shape 31"/>
+          <p:cNvSpPr/>
+          <p:nvPr/>
+        </p:nvSpPr>
+        <p:spPr>
+          <a:xfrm>
+            <a:off x="6812280" y="4325112"/>
+            <a:ext cx="4160520" cy="109728"/>
+          </a:xfrm>
+          <a:prstGeom prst="rect">
+            <a:avLst/>
+          </a:prstGeom>
+          <a:solidFill>
+            <a:srgbClr val="F4A261"/>
+          </a:solidFill>
+          <a:ln w="12700">
+            <a:solidFill>
+              <a:srgbClr val="F4A261"/>
+            </a:solidFill>
+            <a:prstDash val="solid"/>
+          </a:ln>
+        </p:spPr>
+      </p:sp>
+      <p:sp>
+        <p:nvSpPr>
+          <p:cNvPr id="34" name="Text 32"/>
+          <p:cNvSpPr/>
+          <p:nvPr/>
+        </p:nvSpPr>
+        <p:spPr>
+          <a:xfrm>
+            <a:off x="9921240" y="4069080"/>
+            <a:ext cx="868680" cy="146304"/>
+          </a:xfrm>
+          <a:prstGeom prst="rect">
+            <a:avLst/>
+          </a:prstGeom>
+          <a:noFill/>
+          <a:ln/>
+        </p:spPr>
+        <p:txBody>
+          <a:bodyPr wrap="square" lIns="381" tIns="381" rIns="381" bIns="381" rtlCol="0" anchor="ctr">
+            <a:normAutofit/>
+          </a:bodyPr>
+          <a:lstStyle/>
+          <a:p>
+            <a:pPr algn="l" indent="0" marL="0">
+              <a:buNone/>
+            </a:pPr>
+            <a:r>
+              <a:rPr lang="en-US" sz="550" dirty="0">
+                <a:solidFill>
+                  <a:srgbClr val="1B2430"/>
+                </a:solidFill>
+                <a:latin typeface="Aptos" pitchFamily="34" charset="0"/>
+                <a:ea typeface="Aptos" pitchFamily="34" charset="-122"/>
+                <a:cs typeface="Aptos" pitchFamily="34" charset="-120"/>
+              </a:rPr>
+              <a:t>257.600 €</a:t>
+            </a:r>
+            <a:endParaRPr lang="en-US" sz="550" dirty="0"/>
+          </a:p>
+        </p:txBody>
+      </p:sp>
+      <p:sp>
+        <p:nvSpPr>
+          <p:cNvPr id="35" name="Text 33"/>
+          <p:cNvSpPr/>
+          <p:nvPr/>
+        </p:nvSpPr>
+        <p:spPr>
+          <a:xfrm>
+            <a:off x="11018520" y="4279392"/>
+            <a:ext cx="868680" cy="146304"/>
+          </a:xfrm>
+          <a:prstGeom prst="rect">
+            <a:avLst/>
+          </a:prstGeom>
+          <a:noFill/>
+          <a:ln/>
+        </p:spPr>
+        <p:txBody>
+          <a:bodyPr wrap="square" lIns="381" tIns="381" rIns="381" bIns="381" rtlCol="0" anchor="ctr">
+            <a:normAutofit/>
+          </a:bodyPr>
+          <a:lstStyle/>
+          <a:p>
+            <a:pPr algn="l" indent="0" marL="0">
+              <a:buNone/>
+            </a:pPr>
+            <a:r>
+              <a:rPr lang="en-US" sz="550" dirty="0">
+                <a:solidFill>
+                  <a:srgbClr val="1B2430"/>
+                </a:solidFill>
+                <a:latin typeface="Aptos" pitchFamily="34" charset="0"/>
+                <a:ea typeface="Aptos" pitchFamily="34" charset="-122"/>
+                <a:cs typeface="Aptos" pitchFamily="34" charset="-120"/>
+              </a:rPr>
+              <a:t>714.125 €</a:t>
+            </a:r>
+            <a:endParaRPr lang="en-US" sz="550" dirty="0"/>
+          </a:p>
+        </p:txBody>
+      </p:sp>
+      <p:sp>
+        <p:nvSpPr>
+          <p:cNvPr id="36" name="Text 34"/>
+          <p:cNvSpPr/>
+          <p:nvPr/>
+        </p:nvSpPr>
+        <p:spPr>
+          <a:xfrm>
+            <a:off x="4617720" y="5230368"/>
+            <a:ext cx="4846320" cy="164592"/>
+          </a:xfrm>
+          <a:prstGeom prst="rect">
+            <a:avLst/>
+          </a:prstGeom>
+          <a:noFill/>
+          <a:ln/>
+        </p:spPr>
+        <p:txBody>
+          <a:bodyPr wrap="square" lIns="381" tIns="381" rIns="381" bIns="381" rtlCol="0" anchor="ctr">
+            <a:normAutofit/>
+          </a:bodyPr>
+          <a:lstStyle/>
+          <a:p>
+            <a:pPr algn="l" indent="0" marL="0">
+              <a:buNone/>
+            </a:pPr>
+            <a:r>
+              <a:rPr lang="en-US" sz="630" b="1" dirty="0">
+                <a:solidFill>
+                  <a:srgbClr val="102033"/>
+                </a:solidFill>
+                <a:latin typeface="Aptos" pitchFamily="34" charset="0"/>
+                <a:ea typeface="Aptos" pitchFamily="34" charset="-122"/>
+                <a:cs typeface="Aptos" pitchFamily="34" charset="-120"/>
+              </a:rPr>
+              <a:t>Lectura: con solo horas recuperadas el VAN central sigue exigente.</a:t>
+            </a:r>
+            <a:endParaRPr lang="en-US" sz="630" dirty="0"/>
+          </a:p>
+        </p:txBody>
+      </p:sp>
+      <p:sp>
+        <p:nvSpPr>
+          <p:cNvPr id="37" name="Text 35"/>
+          <p:cNvSpPr/>
+          <p:nvPr/>
+        </p:nvSpPr>
+        <p:spPr>
+          <a:xfrm>
+            <a:off x="4617720" y="5468112"/>
+            <a:ext cx="5852160" cy="164592"/>
+          </a:xfrm>
+          <a:prstGeom prst="rect">
+            <a:avLst/>
+          </a:prstGeom>
+          <a:noFill/>
+          <a:ln/>
+        </p:spPr>
+        <p:txBody>
+          <a:bodyPr wrap="square" lIns="381" tIns="381" rIns="381" bIns="381" rtlCol="0" anchor="ctr">
+            <a:normAutofit/>
+          </a:bodyPr>
+          <a:lstStyle/>
+          <a:p>
+            <a:pPr algn="l" indent="0" marL="0">
+              <a:buNone/>
+            </a:pPr>
+            <a:r>
+              <a:rPr lang="en-US" sz="630" b="1" dirty="0">
+                <a:solidFill>
+                  <a:srgbClr val="102033"/>
+                </a:solidFill>
+                <a:latin typeface="Aptos" pitchFamily="34" charset="0"/>
+                <a:ea typeface="Aptos" pitchFamily="34" charset="-122"/>
+                <a:cs typeface="Aptos" pitchFamily="34" charset="-120"/>
+              </a:rPr>
+              <a:t>7 o 17 robots requieren menos esperas, continuidad de flujo y menor riesgo FOD.</a:t>
+            </a:r>
+            <a:endParaRPr lang="en-US" sz="630" dirty="0"/>
+          </a:p>
+        </p:txBody>
+      </p:sp>
+      <p:sp>
+        <p:nvSpPr>
+          <p:cNvPr id="38" name="Text 36"/>
+          <p:cNvSpPr/>
+          <p:nvPr/>
+        </p:nvSpPr>
+        <p:spPr>
+          <a:xfrm>
+            <a:off x="4617720" y="5705856"/>
+            <a:ext cx="4846320" cy="164592"/>
+          </a:xfrm>
+          <a:prstGeom prst="rect">
+            <a:avLst/>
+          </a:prstGeom>
+          <a:noFill/>
+          <a:ln/>
+        </p:spPr>
+        <p:txBody>
+          <a:bodyPr wrap="square" lIns="381" tIns="381" rIns="381" bIns="381" rtlCol="0" anchor="ctr">
+            <a:normAutofit/>
+          </a:bodyPr>
+          <a:lstStyle/>
+          <a:p>
+            <a:pPr algn="l" indent="0" marL="0">
+              <a:buNone/>
+            </a:pPr>
+            <a:r>
+              <a:rPr lang="en-US" sz="630" b="1" dirty="0">
+                <a:solidFill>
+                  <a:srgbClr val="102033"/>
+                </a:solidFill>
+                <a:latin typeface="Aptos" pitchFamily="34" charset="0"/>
+                <a:ea typeface="Aptos" pitchFamily="34" charset="-122"/>
+                <a:cs typeface="Aptos" pitchFamily="34" charset="-120"/>
+              </a:rPr>
+              <a:t>La decisión final debe usar datos reales hacia 80 HTP/mes.</a:t>
+            </a:r>
+            <a:endParaRPr lang="en-US" sz="630" dirty="0"/>
+          </a:p>
+        </p:txBody>
       </p:sp>
     </p:spTree>
   </p:cSld>
@@ -7578,7 +10204,7 @@
                 <a:ea typeface="Aptos" pitchFamily="34" charset="-122"/>
                 <a:cs typeface="Aptos" pitchFamily="34" charset="-120"/>
               </a:rPr>
-              <a:t>Oferta</a:t>
+              <a:t>Oferta comercial</a:t>
             </a:r>
             <a:endParaRPr lang="en-US" sz="670" dirty="0"/>
           </a:p>
@@ -7617,7 +10243,7 @@
                 <a:ea typeface="Aptos Display" pitchFamily="34" charset="-122"/>
                 <a:cs typeface="Aptos Display" pitchFamily="34" charset="-120"/>
               </a:rPr>
-              <a:t>Partidas visibles, sin relleno ni promesas escondidas</a:t>
+              <a:t>Entregables y condiciones de aceptación</a:t>
             </a:r>
             <a:endParaRPr lang="en-US" sz="2000" dirty="0"/>
           </a:p>
@@ -7748,8 +10374,8 @@
         </p:nvSpPr>
         <p:spPr>
           <a:xfrm>
-            <a:off x="841248" y="1207008"/>
-            <a:ext cx="2926080" cy="310896"/>
+            <a:off x="804672" y="1234440"/>
+            <a:ext cx="3017520" cy="237744"/>
           </a:xfrm>
           <a:prstGeom prst="rect">
             <a:avLst/>
@@ -7767,7 +10393,7 @@
               <a:buNone/>
             </a:pPr>
             <a:r>
-              <a:rPr lang="en-US" sz="1600" b="1" dirty="0">
+              <a:rPr lang="en-US" sz="1280" b="1" dirty="0">
                 <a:solidFill>
                   <a:srgbClr val="102033"/>
                 </a:solidFill>
@@ -7775,22 +10401,47 @@
                 <a:ea typeface="Aptos" pitchFamily="34" charset="-122"/>
                 <a:cs typeface="Aptos" pitchFamily="34" charset="-120"/>
               </a:rPr>
-              <a:t>Qué compra el cliente</a:t>
-            </a:r>
-            <a:endParaRPr lang="en-US" sz="1600" dirty="0"/>
-          </a:p>
-        </p:txBody>
-      </p:sp>
-      <p:sp>
-        <p:nvSpPr>
-          <p:cNvPr id="9" name="Text 7"/>
-          <p:cNvSpPr/>
-          <p:nvPr/>
-        </p:nvSpPr>
-        <p:spPr>
-          <a:xfrm>
-            <a:off x="868680" y="1874520"/>
-            <a:ext cx="1554480" cy="164592"/>
+              <a:t>Entregables de la fase piloto</a:t>
+            </a:r>
+            <a:endParaRPr lang="en-US" sz="1280" dirty="0"/>
+          </a:p>
+        </p:txBody>
+      </p:sp>
+      <p:sp>
+        <p:nvSpPr>
+          <p:cNvPr id="9" name="Shape 7"/>
+          <p:cNvSpPr/>
+          <p:nvPr/>
+        </p:nvSpPr>
+        <p:spPr>
+          <a:xfrm>
+            <a:off x="868680" y="1920240"/>
+            <a:ext cx="73152" cy="73152"/>
+          </a:xfrm>
+          <a:prstGeom prst="rect">
+            <a:avLst/>
+          </a:prstGeom>
+          <a:solidFill>
+            <a:srgbClr val="1F7A8C"/>
+          </a:solidFill>
+          <a:ln w="12700">
+            <a:solidFill>
+              <a:srgbClr val="1F7A8C"/>
+            </a:solidFill>
+            <a:prstDash val="solid"/>
+          </a:ln>
+        </p:spPr>
+      </p:sp>
+      <p:sp>
+        <p:nvSpPr>
+          <p:cNvPr id="10" name="Text 8"/>
+          <p:cNvSpPr/>
+          <p:nvPr/>
+        </p:nvSpPr>
+        <p:spPr>
+          <a:xfrm>
+            <a:off x="1060704" y="1837944"/>
+            <a:ext cx="2057400" cy="164592"/>
           </a:xfrm>
           <a:prstGeom prst="rect">
             <a:avLst/>
@@ -7808,7 +10459,7 @@
               <a:buNone/>
             </a:pPr>
             <a:r>
-              <a:rPr lang="en-US" sz="690" b="1" dirty="0">
+              <a:rPr lang="en-US" sz="660" b="1" dirty="0">
                 <a:solidFill>
                   <a:srgbClr val="1F7A8C"/>
                 </a:solidFill>
@@ -7816,22 +10467,22 @@
                 <a:ea typeface="Aptos" pitchFamily="34" charset="-122"/>
                 <a:cs typeface="Aptos" pitchFamily="34" charset="-120"/>
               </a:rPr>
-              <a:t>AMR + sensores</a:t>
-            </a:r>
-            <a:endParaRPr lang="en-US" sz="690" dirty="0"/>
-          </a:p>
-        </p:txBody>
-      </p:sp>
-      <p:sp>
-        <p:nvSpPr>
-          <p:cNvPr id="10" name="Text 8"/>
-          <p:cNvSpPr/>
-          <p:nvPr/>
-        </p:nvSpPr>
-        <p:spPr>
-          <a:xfrm>
-            <a:off x="2743200" y="1847088"/>
-            <a:ext cx="4572000" cy="201168"/>
+              <a:t>Mapa operativo</a:t>
+            </a:r>
+            <a:endParaRPr lang="en-US" sz="660" dirty="0"/>
+          </a:p>
+        </p:txBody>
+      </p:sp>
+      <p:sp>
+        <p:nvSpPr>
+          <p:cNvPr id="11" name="Text 9"/>
+          <p:cNvSpPr/>
+          <p:nvPr/>
+        </p:nvSpPr>
+        <p:spPr>
+          <a:xfrm>
+            <a:off x="1060704" y="2057400"/>
+            <a:ext cx="5120640" cy="164592"/>
           </a:xfrm>
           <a:prstGeom prst="rect">
             <a:avLst/>
@@ -7849,7 +10500,610 @@
               <a:buNone/>
             </a:pPr>
             <a:r>
-              <a:rPr lang="en-US" sz="680" dirty="0">
+              <a:rPr lang="en-US" sz="580" dirty="0">
+                <a:solidFill>
+                  <a:srgbClr val="1B2430"/>
+                </a:solidFill>
+                <a:latin typeface="Aptos" pitchFamily="34" charset="0"/>
+                <a:ea typeface="Aptos" pitchFamily="34" charset="-122"/>
+                <a:cs typeface="Aptos" pitchFamily="34" charset="-120"/>
+              </a:rPr>
+              <a:t>rutas, zonas lentas, carga y entrega</a:t>
+            </a:r>
+            <a:endParaRPr lang="en-US" sz="580" dirty="0"/>
+          </a:p>
+        </p:txBody>
+      </p:sp>
+      <p:sp>
+        <p:nvSpPr>
+          <p:cNvPr id="12" name="Shape 10"/>
+          <p:cNvSpPr/>
+          <p:nvPr/>
+        </p:nvSpPr>
+        <p:spPr>
+          <a:xfrm>
+            <a:off x="868680" y="2395728"/>
+            <a:ext cx="73152" cy="73152"/>
+          </a:xfrm>
+          <a:prstGeom prst="rect">
+            <a:avLst/>
+          </a:prstGeom>
+          <a:solidFill>
+            <a:srgbClr val="2A9D8F"/>
+          </a:solidFill>
+          <a:ln w="12700">
+            <a:solidFill>
+              <a:srgbClr val="2A9D8F"/>
+            </a:solidFill>
+            <a:prstDash val="solid"/>
+          </a:ln>
+        </p:spPr>
+      </p:sp>
+      <p:sp>
+        <p:nvSpPr>
+          <p:cNvPr id="13" name="Text 11"/>
+          <p:cNvSpPr/>
+          <p:nvPr/>
+        </p:nvSpPr>
+        <p:spPr>
+          <a:xfrm>
+            <a:off x="1060704" y="2313432"/>
+            <a:ext cx="2057400" cy="164592"/>
+          </a:xfrm>
+          <a:prstGeom prst="rect">
+            <a:avLst/>
+          </a:prstGeom>
+          <a:noFill/>
+          <a:ln/>
+        </p:spPr>
+        <p:txBody>
+          <a:bodyPr wrap="square" lIns="381" tIns="381" rIns="381" bIns="381" rtlCol="0" anchor="ctr">
+            <a:normAutofit/>
+          </a:bodyPr>
+          <a:lstStyle/>
+          <a:p>
+            <a:pPr algn="l" indent="0" marL="0">
+              <a:buNone/>
+            </a:pPr>
+            <a:r>
+              <a:rPr lang="en-US" sz="660" b="1" dirty="0">
+                <a:solidFill>
+                  <a:srgbClr val="2A9D8F"/>
+                </a:solidFill>
+                <a:latin typeface="Aptos" pitchFamily="34" charset="0"/>
+                <a:ea typeface="Aptos" pitchFamily="34" charset="-122"/>
+                <a:cs typeface="Aptos" pitchFamily="34" charset="-120"/>
+              </a:rPr>
+              <a:t>Configuracion AMR</a:t>
+            </a:r>
+            <a:endParaRPr lang="en-US" sz="660" dirty="0"/>
+          </a:p>
+        </p:txBody>
+      </p:sp>
+      <p:sp>
+        <p:nvSpPr>
+          <p:cNvPr id="14" name="Text 12"/>
+          <p:cNvSpPr/>
+          <p:nvPr/>
+        </p:nvSpPr>
+        <p:spPr>
+          <a:xfrm>
+            <a:off x="1060704" y="2532888"/>
+            <a:ext cx="5120640" cy="164592"/>
+          </a:xfrm>
+          <a:prstGeom prst="rect">
+            <a:avLst/>
+          </a:prstGeom>
+          <a:noFill/>
+          <a:ln/>
+        </p:spPr>
+        <p:txBody>
+          <a:bodyPr wrap="square" lIns="381" tIns="381" rIns="381" bIns="381" rtlCol="0" anchor="ctr">
+            <a:normAutofit/>
+          </a:bodyPr>
+          <a:lstStyle/>
+          <a:p>
+            <a:pPr algn="l" indent="0" marL="0">
+              <a:buNone/>
+            </a:pPr>
+            <a:r>
+              <a:rPr lang="en-US" sz="580" dirty="0">
+                <a:solidFill>
+                  <a:srgbClr val="1B2430"/>
+                </a:solidFill>
+                <a:latin typeface="Aptos" pitchFamily="34" charset="0"/>
+                <a:ea typeface="Aptos" pitchFamily="34" charset="-122"/>
+                <a:cs typeface="Aptos" pitchFamily="34" charset="-120"/>
+              </a:rPr>
+              <a:t>misiones, prioridades y reglas de bateria</a:t>
+            </a:r>
+            <a:endParaRPr lang="en-US" sz="580" dirty="0"/>
+          </a:p>
+        </p:txBody>
+      </p:sp>
+      <p:sp>
+        <p:nvSpPr>
+          <p:cNvPr id="15" name="Shape 13"/>
+          <p:cNvSpPr/>
+          <p:nvPr/>
+        </p:nvSpPr>
+        <p:spPr>
+          <a:xfrm>
+            <a:off x="868680" y="2871216"/>
+            <a:ext cx="73152" cy="73152"/>
+          </a:xfrm>
+          <a:prstGeom prst="rect">
+            <a:avLst/>
+          </a:prstGeom>
+          <a:solidFill>
+            <a:srgbClr val="6D5BD0"/>
+          </a:solidFill>
+          <a:ln w="12700">
+            <a:solidFill>
+              <a:srgbClr val="6D5BD0"/>
+            </a:solidFill>
+            <a:prstDash val="solid"/>
+          </a:ln>
+        </p:spPr>
+      </p:sp>
+      <p:sp>
+        <p:nvSpPr>
+          <p:cNvPr id="16" name="Text 14"/>
+          <p:cNvSpPr/>
+          <p:nvPr/>
+        </p:nvSpPr>
+        <p:spPr>
+          <a:xfrm>
+            <a:off x="1060704" y="2788920"/>
+            <a:ext cx="2057400" cy="164592"/>
+          </a:xfrm>
+          <a:prstGeom prst="rect">
+            <a:avLst/>
+          </a:prstGeom>
+          <a:noFill/>
+          <a:ln/>
+        </p:spPr>
+        <p:txBody>
+          <a:bodyPr wrap="square" lIns="381" tIns="381" rIns="381" bIns="381" rtlCol="0" anchor="ctr">
+            <a:normAutofit/>
+          </a:bodyPr>
+          <a:lstStyle/>
+          <a:p>
+            <a:pPr algn="l" indent="0" marL="0">
+              <a:buNone/>
+            </a:pPr>
+            <a:r>
+              <a:rPr lang="en-US" sz="660" b="1" dirty="0">
+                <a:solidFill>
+                  <a:srgbClr val="6D5BD0"/>
+                </a:solidFill>
+                <a:latin typeface="Aptos" pitchFamily="34" charset="0"/>
+                <a:ea typeface="Aptos" pitchFamily="34" charset="-122"/>
+                <a:cs typeface="Aptos" pitchFamily="34" charset="-120"/>
+              </a:rPr>
+              <a:t>Trazabilidad</a:t>
+            </a:r>
+            <a:endParaRPr lang="en-US" sz="660" dirty="0"/>
+          </a:p>
+        </p:txBody>
+      </p:sp>
+      <p:sp>
+        <p:nvSpPr>
+          <p:cNvPr id="17" name="Text 15"/>
+          <p:cNvSpPr/>
+          <p:nvPr/>
+        </p:nvSpPr>
+        <p:spPr>
+          <a:xfrm>
+            <a:off x="1060704" y="3008376"/>
+            <a:ext cx="5120640" cy="164592"/>
+          </a:xfrm>
+          <a:prstGeom prst="rect">
+            <a:avLst/>
+          </a:prstGeom>
+          <a:noFill/>
+          <a:ln/>
+        </p:spPr>
+        <p:txBody>
+          <a:bodyPr wrap="square" lIns="381" tIns="381" rIns="381" bIns="381" rtlCol="0" anchor="ctr">
+            <a:normAutofit/>
+          </a:bodyPr>
+          <a:lstStyle/>
+          <a:p>
+            <a:pPr algn="l" indent="0" marL="0">
+              <a:buNone/>
+            </a:pPr>
+            <a:r>
+              <a:rPr lang="en-US" sz="580" dirty="0">
+                <a:solidFill>
+                  <a:srgbClr val="1B2430"/>
+                </a:solidFill>
+                <a:latin typeface="Aptos" pitchFamily="34" charset="0"/>
+                <a:ea typeface="Aptos" pitchFamily="34" charset="-122"/>
+                <a:cs typeface="Aptos" pitchFamily="34" charset="-120"/>
+              </a:rPr>
+              <a:t>BD, RFID-QR, HMI y excepciones</a:t>
+            </a:r>
+            <a:endParaRPr lang="en-US" sz="580" dirty="0"/>
+          </a:p>
+        </p:txBody>
+      </p:sp>
+      <p:sp>
+        <p:nvSpPr>
+          <p:cNvPr id="18" name="Shape 16"/>
+          <p:cNvSpPr/>
+          <p:nvPr/>
+        </p:nvSpPr>
+        <p:spPr>
+          <a:xfrm>
+            <a:off x="868680" y="3346704"/>
+            <a:ext cx="73152" cy="73152"/>
+          </a:xfrm>
+          <a:prstGeom prst="rect">
+            <a:avLst/>
+          </a:prstGeom>
+          <a:solidFill>
+            <a:srgbClr val="B91C1C"/>
+          </a:solidFill>
+          <a:ln w="12700">
+            <a:solidFill>
+              <a:srgbClr val="B91C1C"/>
+            </a:solidFill>
+            <a:prstDash val="solid"/>
+          </a:ln>
+        </p:spPr>
+      </p:sp>
+      <p:sp>
+        <p:nvSpPr>
+          <p:cNvPr id="19" name="Text 17"/>
+          <p:cNvSpPr/>
+          <p:nvPr/>
+        </p:nvSpPr>
+        <p:spPr>
+          <a:xfrm>
+            <a:off x="1060704" y="3264408"/>
+            <a:ext cx="2057400" cy="164592"/>
+          </a:xfrm>
+          <a:prstGeom prst="rect">
+            <a:avLst/>
+          </a:prstGeom>
+          <a:noFill/>
+          <a:ln/>
+        </p:spPr>
+        <p:txBody>
+          <a:bodyPr wrap="square" lIns="381" tIns="381" rIns="381" bIns="381" rtlCol="0" anchor="ctr">
+            <a:normAutofit/>
+          </a:bodyPr>
+          <a:lstStyle/>
+          <a:p>
+            <a:pPr algn="l" indent="0" marL="0">
+              <a:buNone/>
+            </a:pPr>
+            <a:r>
+              <a:rPr lang="en-US" sz="660" b="1" dirty="0">
+                <a:solidFill>
+                  <a:srgbClr val="B91C1C"/>
+                </a:solidFill>
+                <a:latin typeface="Aptos" pitchFamily="34" charset="0"/>
+                <a:ea typeface="Aptos" pitchFamily="34" charset="-122"/>
+                <a:cs typeface="Aptos" pitchFamily="34" charset="-120"/>
+              </a:rPr>
+              <a:t>FOD preventivo</a:t>
+            </a:r>
+            <a:endParaRPr lang="en-US" sz="660" dirty="0"/>
+          </a:p>
+        </p:txBody>
+      </p:sp>
+      <p:sp>
+        <p:nvSpPr>
+          <p:cNvPr id="20" name="Text 18"/>
+          <p:cNvSpPr/>
+          <p:nvPr/>
+        </p:nvSpPr>
+        <p:spPr>
+          <a:xfrm>
+            <a:off x="1060704" y="3483864"/>
+            <a:ext cx="5120640" cy="164592"/>
+          </a:xfrm>
+          <a:prstGeom prst="rect">
+            <a:avLst/>
+          </a:prstGeom>
+          <a:noFill/>
+          <a:ln/>
+        </p:spPr>
+        <p:txBody>
+          <a:bodyPr wrap="square" lIns="381" tIns="381" rIns="381" bIns="381" rtlCol="0" anchor="ctr">
+            <a:normAutofit/>
+          </a:bodyPr>
+          <a:lstStyle/>
+          <a:p>
+            <a:pPr algn="l" indent="0" marL="0">
+              <a:buNone/>
+            </a:pPr>
+            <a:r>
+              <a:rPr lang="en-US" sz="580" dirty="0">
+                <a:solidFill>
+                  <a:srgbClr val="1B2430"/>
+                </a:solidFill>
+                <a:latin typeface="Aptos" pitchFamily="34" charset="0"/>
+                <a:ea typeface="Aptos" pitchFamily="34" charset="-122"/>
+                <a:cs typeface="Aptos" pitchFamily="34" charset="-120"/>
+              </a:rPr>
+              <a:t>rondas con imagen y validación humana</a:t>
+            </a:r>
+            <a:endParaRPr lang="en-US" sz="580" dirty="0"/>
+          </a:p>
+        </p:txBody>
+      </p:sp>
+      <p:sp>
+        <p:nvSpPr>
+          <p:cNvPr id="21" name="Shape 19"/>
+          <p:cNvSpPr/>
+          <p:nvPr/>
+        </p:nvSpPr>
+        <p:spPr>
+          <a:xfrm>
+            <a:off x="868680" y="3822192"/>
+            <a:ext cx="73152" cy="73152"/>
+          </a:xfrm>
+          <a:prstGeom prst="rect">
+            <a:avLst/>
+          </a:prstGeom>
+          <a:solidFill>
+            <a:srgbClr val="2DB7E5"/>
+          </a:solidFill>
+          <a:ln w="12700">
+            <a:solidFill>
+              <a:srgbClr val="2DB7E5"/>
+            </a:solidFill>
+            <a:prstDash val="solid"/>
+          </a:ln>
+        </p:spPr>
+      </p:sp>
+      <p:sp>
+        <p:nvSpPr>
+          <p:cNvPr id="22" name="Text 20"/>
+          <p:cNvSpPr/>
+          <p:nvPr/>
+        </p:nvSpPr>
+        <p:spPr>
+          <a:xfrm>
+            <a:off x="1060704" y="3739896"/>
+            <a:ext cx="2057400" cy="164592"/>
+          </a:xfrm>
+          <a:prstGeom prst="rect">
+            <a:avLst/>
+          </a:prstGeom>
+          <a:noFill/>
+          <a:ln/>
+        </p:spPr>
+        <p:txBody>
+          <a:bodyPr wrap="square" lIns="381" tIns="381" rIns="381" bIns="381" rtlCol="0" anchor="ctr">
+            <a:normAutofit/>
+          </a:bodyPr>
+          <a:lstStyle/>
+          <a:p>
+            <a:pPr algn="l" indent="0" marL="0">
+              <a:buNone/>
+            </a:pPr>
+            <a:r>
+              <a:rPr lang="en-US" sz="660" b="1" dirty="0">
+                <a:solidFill>
+                  <a:srgbClr val="2DB7E5"/>
+                </a:solidFill>
+                <a:latin typeface="Aptos" pitchFamily="34" charset="0"/>
+                <a:ea typeface="Aptos" pitchFamily="34" charset="-122"/>
+                <a:cs typeface="Aptos" pitchFamily="34" charset="-120"/>
+              </a:rPr>
+              <a:t>Validacion CoppeliaSim</a:t>
+            </a:r>
+            <a:endParaRPr lang="en-US" sz="660" dirty="0"/>
+          </a:p>
+        </p:txBody>
+      </p:sp>
+      <p:sp>
+        <p:nvSpPr>
+          <p:cNvPr id="23" name="Text 21"/>
+          <p:cNvSpPr/>
+          <p:nvPr/>
+        </p:nvSpPr>
+        <p:spPr>
+          <a:xfrm>
+            <a:off x="1060704" y="3959352"/>
+            <a:ext cx="5120640" cy="164592"/>
+          </a:xfrm>
+          <a:prstGeom prst="rect">
+            <a:avLst/>
+          </a:prstGeom>
+          <a:noFill/>
+          <a:ln/>
+        </p:spPr>
+        <p:txBody>
+          <a:bodyPr wrap="square" lIns="381" tIns="381" rIns="381" bIns="381" rtlCol="0" anchor="ctr">
+            <a:normAutofit/>
+          </a:bodyPr>
+          <a:lstStyle/>
+          <a:p>
+            <a:pPr algn="l" indent="0" marL="0">
+              <a:buNone/>
+            </a:pPr>
+            <a:r>
+              <a:rPr lang="en-US" sz="580" dirty="0">
+                <a:solidFill>
+                  <a:srgbClr val="1B2430"/>
+                </a:solidFill>
+                <a:latin typeface="Aptos" pitchFamily="34" charset="0"/>
+                <a:ea typeface="Aptos" pitchFamily="34" charset="-122"/>
+                <a:cs typeface="Aptos" pitchFamily="34" charset="-120"/>
+              </a:rPr>
+              <a:t>SLAM, ruta bloqueada, cruce y FOD</a:t>
+            </a:r>
+            <a:endParaRPr lang="en-US" sz="580" dirty="0"/>
+          </a:p>
+        </p:txBody>
+      </p:sp>
+      <p:sp>
+        <p:nvSpPr>
+          <p:cNvPr id="24" name="Shape 22"/>
+          <p:cNvSpPr/>
+          <p:nvPr/>
+        </p:nvSpPr>
+        <p:spPr>
+          <a:xfrm>
+            <a:off x="868680" y="4297680"/>
+            <a:ext cx="73152" cy="73152"/>
+          </a:xfrm>
+          <a:prstGeom prst="rect">
+            <a:avLst/>
+          </a:prstGeom>
+          <a:solidFill>
+            <a:srgbClr val="F4A261"/>
+          </a:solidFill>
+          <a:ln w="12700">
+            <a:solidFill>
+              <a:srgbClr val="F4A261"/>
+            </a:solidFill>
+            <a:prstDash val="solid"/>
+          </a:ln>
+        </p:spPr>
+      </p:sp>
+      <p:sp>
+        <p:nvSpPr>
+          <p:cNvPr id="25" name="Text 23"/>
+          <p:cNvSpPr/>
+          <p:nvPr/>
+        </p:nvSpPr>
+        <p:spPr>
+          <a:xfrm>
+            <a:off x="1060704" y="4215384"/>
+            <a:ext cx="2057400" cy="164592"/>
+          </a:xfrm>
+          <a:prstGeom prst="rect">
+            <a:avLst/>
+          </a:prstGeom>
+          <a:noFill/>
+          <a:ln/>
+        </p:spPr>
+        <p:txBody>
+          <a:bodyPr wrap="square" lIns="381" tIns="381" rIns="381" bIns="381" rtlCol="0" anchor="ctr">
+            <a:normAutofit/>
+          </a:bodyPr>
+          <a:lstStyle/>
+          <a:p>
+            <a:pPr algn="l" indent="0" marL="0">
+              <a:buNone/>
+            </a:pPr>
+            <a:r>
+              <a:rPr lang="en-US" sz="660" b="1" dirty="0">
+                <a:solidFill>
+                  <a:srgbClr val="F4A261"/>
+                </a:solidFill>
+                <a:latin typeface="Aptos" pitchFamily="34" charset="0"/>
+                <a:ea typeface="Aptos" pitchFamily="34" charset="-122"/>
+                <a:cs typeface="Aptos" pitchFamily="34" charset="-120"/>
+              </a:rPr>
+              <a:t>Formacion</a:t>
+            </a:r>
+            <a:endParaRPr lang="en-US" sz="660" dirty="0"/>
+          </a:p>
+        </p:txBody>
+      </p:sp>
+      <p:sp>
+        <p:nvSpPr>
+          <p:cNvPr id="26" name="Text 24"/>
+          <p:cNvSpPr/>
+          <p:nvPr/>
+        </p:nvSpPr>
+        <p:spPr>
+          <a:xfrm>
+            <a:off x="1060704" y="4434840"/>
+            <a:ext cx="5120640" cy="164592"/>
+          </a:xfrm>
+          <a:prstGeom prst="rect">
+            <a:avLst/>
+          </a:prstGeom>
+          <a:noFill/>
+          <a:ln/>
+        </p:spPr>
+        <p:txBody>
+          <a:bodyPr wrap="square" lIns="381" tIns="381" rIns="381" bIns="381" rtlCol="0" anchor="ctr">
+            <a:normAutofit/>
+          </a:bodyPr>
+          <a:lstStyle/>
+          <a:p>
+            <a:pPr algn="l" indent="0" marL="0">
+              <a:buNone/>
+            </a:pPr>
+            <a:r>
+              <a:rPr lang="en-US" sz="580" dirty="0">
+                <a:solidFill>
+                  <a:srgbClr val="1B2430"/>
+                </a:solidFill>
+                <a:latin typeface="Aptos" pitchFamily="34" charset="0"/>
+                <a:ea typeface="Aptos" pitchFamily="34" charset="-122"/>
+                <a:cs typeface="Aptos" pitchFamily="34" charset="-120"/>
+              </a:rPr>
+              <a:t>operarios, supervisores y mantenimiento</a:t>
+            </a:r>
+            <a:endParaRPr lang="en-US" sz="580" dirty="0"/>
+          </a:p>
+        </p:txBody>
+      </p:sp>
+      <p:sp>
+        <p:nvSpPr>
+          <p:cNvPr id="27" name="Shape 25"/>
+          <p:cNvSpPr/>
+          <p:nvPr/>
+        </p:nvSpPr>
+        <p:spPr>
+          <a:xfrm>
+            <a:off x="7315200" y="1234440"/>
+            <a:ext cx="4160520" cy="4343400"/>
+          </a:xfrm>
+          <a:prstGeom prst="roundRect">
+            <a:avLst>
+              <a:gd name="adj" fmla="val 1758"/>
+            </a:avLst>
+          </a:prstGeom>
+          <a:solidFill>
+            <a:srgbClr val="FFF7EF"/>
+          </a:solidFill>
+          <a:ln w="12700">
+            <a:solidFill>
+              <a:srgbClr val="F4A261"/>
+            </a:solidFill>
+            <a:prstDash val="solid"/>
+          </a:ln>
+        </p:spPr>
+      </p:sp>
+      <p:sp>
+        <p:nvSpPr>
+          <p:cNvPr id="28" name="Text 26"/>
+          <p:cNvSpPr/>
+          <p:nvPr/>
+        </p:nvSpPr>
+        <p:spPr>
+          <a:xfrm>
+            <a:off x="7571232" y="1572768"/>
+            <a:ext cx="1828800" cy="182880"/>
+          </a:xfrm>
+          <a:prstGeom prst="rect">
+            <a:avLst/>
+          </a:prstGeom>
+          <a:noFill/>
+          <a:ln/>
+        </p:spPr>
+        <p:txBody>
+          <a:bodyPr wrap="square" lIns="381" tIns="381" rIns="381" bIns="381" rtlCol="0" anchor="ctr">
+            <a:normAutofit/>
+          </a:bodyPr>
+          <a:lstStyle/>
+          <a:p>
+            <a:pPr algn="l" indent="0" marL="0">
+              <a:buNone/>
+            </a:pPr>
+            <a:r>
+              <a:rPr lang="en-US" sz="800" b="1" dirty="0">
                 <a:solidFill>
                   <a:srgbClr val="5D6B7A"/>
                 </a:solidFill>
@@ -7857,22 +11111,22 @@
                 <a:ea typeface="Aptos" pitchFamily="34" charset="-122"/>
                 <a:cs typeface="Aptos" pitchFamily="34" charset="-120"/>
               </a:rPr>
-              <a:t>base AMR + LiDAR + seguridad + RFID-QR + HMI</a:t>
-            </a:r>
-            <a:endParaRPr lang="en-US" sz="680" dirty="0"/>
-          </a:p>
-        </p:txBody>
-      </p:sp>
-      <p:sp>
-        <p:nvSpPr>
-          <p:cNvPr id="11" name="Text 9"/>
-          <p:cNvSpPr/>
-          <p:nvPr/>
-        </p:nvSpPr>
-        <p:spPr>
-          <a:xfrm>
-            <a:off x="868680" y="2377440"/>
-            <a:ext cx="1554480" cy="164592"/>
+              <a:t>Gate de aceptación</a:t>
+            </a:r>
+            <a:endParaRPr lang="en-US" sz="800" dirty="0"/>
+          </a:p>
+        </p:txBody>
+      </p:sp>
+      <p:sp>
+        <p:nvSpPr>
+          <p:cNvPr id="29" name="Text 27"/>
+          <p:cNvSpPr/>
+          <p:nvPr/>
+        </p:nvSpPr>
+        <p:spPr>
+          <a:xfrm>
+            <a:off x="7607808" y="2148840"/>
+            <a:ext cx="1143000" cy="146304"/>
           </a:xfrm>
           <a:prstGeom prst="rect">
             <a:avLst/>
@@ -7890,7 +11144,217 @@
               <a:buNone/>
             </a:pPr>
             <a:r>
-              <a:rPr lang="en-US" sz="690" b="1" dirty="0">
+              <a:rPr lang="en-US" sz="600" b="1" dirty="0">
+                <a:solidFill>
+                  <a:srgbClr val="B91C1C"/>
+                </a:solidFill>
+                <a:latin typeface="Aptos" pitchFamily="34" charset="0"/>
+                <a:ea typeface="Aptos" pitchFamily="34" charset="-122"/>
+                <a:cs typeface="Aptos" pitchFamily="34" charset="-120"/>
+              </a:rPr>
+              <a:t>Seguridad</a:t>
+            </a:r>
+            <a:endParaRPr lang="en-US" sz="600" dirty="0"/>
+          </a:p>
+        </p:txBody>
+      </p:sp>
+      <p:sp>
+        <p:nvSpPr>
+          <p:cNvPr id="30" name="Text 28"/>
+          <p:cNvSpPr/>
+          <p:nvPr/>
+        </p:nvSpPr>
+        <p:spPr>
+          <a:xfrm>
+            <a:off x="8942832" y="2148840"/>
+            <a:ext cx="1874520" cy="146304"/>
+          </a:xfrm>
+          <a:prstGeom prst="rect">
+            <a:avLst/>
+          </a:prstGeom>
+          <a:noFill/>
+          <a:ln/>
+        </p:spPr>
+        <p:txBody>
+          <a:bodyPr wrap="square" lIns="381" tIns="381" rIns="381" bIns="381" rtlCol="0" anchor="ctr">
+            <a:normAutofit/>
+          </a:bodyPr>
+          <a:lstStyle/>
+          <a:p>
+            <a:pPr algn="l" indent="0" marL="0">
+              <a:buNone/>
+            </a:pPr>
+            <a:r>
+              <a:rPr lang="en-US" sz="590" dirty="0">
+                <a:solidFill>
+                  <a:srgbClr val="1B2430"/>
+                </a:solidFill>
+                <a:latin typeface="Aptos" pitchFamily="34" charset="0"/>
+                <a:ea typeface="Aptos" pitchFamily="34" charset="-122"/>
+                <a:cs typeface="Aptos" pitchFamily="34" charset="-120"/>
+              </a:rPr>
+              <a:t>0 contactos o incidentes con daño</a:t>
+            </a:r>
+            <a:endParaRPr lang="en-US" sz="590" dirty="0"/>
+          </a:p>
+        </p:txBody>
+      </p:sp>
+      <p:sp>
+        <p:nvSpPr>
+          <p:cNvPr id="31" name="Shape 29"/>
+          <p:cNvSpPr/>
+          <p:nvPr/>
+        </p:nvSpPr>
+        <p:spPr>
+          <a:xfrm>
+            <a:off x="7571232" y="2404872"/>
+            <a:ext cx="3429000" cy="0"/>
+          </a:xfrm>
+          <a:prstGeom prst="line">
+            <a:avLst/>
+          </a:prstGeom>
+          <a:noFill/>
+          <a:ln w="7620">
+            <a:solidFill>
+              <a:srgbClr val="D6DEE8"/>
+            </a:solidFill>
+            <a:prstDash val="solid"/>
+          </a:ln>
+        </p:spPr>
+      </p:sp>
+      <p:sp>
+        <p:nvSpPr>
+          <p:cNvPr id="32" name="Text 30"/>
+          <p:cNvSpPr/>
+          <p:nvPr/>
+        </p:nvSpPr>
+        <p:spPr>
+          <a:xfrm>
+            <a:off x="7607808" y="2606040"/>
+            <a:ext cx="1143000" cy="146304"/>
+          </a:xfrm>
+          <a:prstGeom prst="rect">
+            <a:avLst/>
+          </a:prstGeom>
+          <a:noFill/>
+          <a:ln/>
+        </p:spPr>
+        <p:txBody>
+          <a:bodyPr wrap="square" lIns="381" tIns="381" rIns="381" bIns="381" rtlCol="0" anchor="ctr">
+            <a:normAutofit/>
+          </a:bodyPr>
+          <a:lstStyle/>
+          <a:p>
+            <a:pPr algn="l" indent="0" marL="0">
+              <a:buNone/>
+            </a:pPr>
+            <a:r>
+              <a:rPr lang="en-US" sz="600" b="1" dirty="0">
+                <a:solidFill>
+                  <a:srgbClr val="1F7A8C"/>
+                </a:solidFill>
+                <a:latin typeface="Aptos" pitchFamily="34" charset="0"/>
+                <a:ea typeface="Aptos" pitchFamily="34" charset="-122"/>
+                <a:cs typeface="Aptos" pitchFamily="34" charset="-120"/>
+              </a:rPr>
+              <a:t>Misiones</a:t>
+            </a:r>
+            <a:endParaRPr lang="en-US" sz="600" dirty="0"/>
+          </a:p>
+        </p:txBody>
+      </p:sp>
+      <p:sp>
+        <p:nvSpPr>
+          <p:cNvPr id="33" name="Text 31"/>
+          <p:cNvSpPr/>
+          <p:nvPr/>
+        </p:nvSpPr>
+        <p:spPr>
+          <a:xfrm>
+            <a:off x="8942832" y="2606040"/>
+            <a:ext cx="1874520" cy="146304"/>
+          </a:xfrm>
+          <a:prstGeom prst="rect">
+            <a:avLst/>
+          </a:prstGeom>
+          <a:noFill/>
+          <a:ln/>
+        </p:spPr>
+        <p:txBody>
+          <a:bodyPr wrap="square" lIns="381" tIns="381" rIns="381" bIns="381" rtlCol="0" anchor="ctr">
+            <a:normAutofit/>
+          </a:bodyPr>
+          <a:lstStyle/>
+          <a:p>
+            <a:pPr algn="l" indent="0" marL="0">
+              <a:buNone/>
+            </a:pPr>
+            <a:r>
+              <a:rPr lang="en-US" sz="590" dirty="0">
+                <a:solidFill>
+                  <a:srgbClr val="1B2430"/>
+                </a:solidFill>
+                <a:latin typeface="Aptos" pitchFamily="34" charset="0"/>
+                <a:ea typeface="Aptos" pitchFamily="34" charset="-122"/>
+                <a:cs typeface="Aptos" pitchFamily="34" charset="-120"/>
+              </a:rPr>
+              <a:t>&gt;= 95 % completadas</a:t>
+            </a:r>
+            <a:endParaRPr lang="en-US" sz="590" dirty="0"/>
+          </a:p>
+        </p:txBody>
+      </p:sp>
+      <p:sp>
+        <p:nvSpPr>
+          <p:cNvPr id="34" name="Shape 32"/>
+          <p:cNvSpPr/>
+          <p:nvPr/>
+        </p:nvSpPr>
+        <p:spPr>
+          <a:xfrm>
+            <a:off x="7571232" y="2862072"/>
+            <a:ext cx="3429000" cy="0"/>
+          </a:xfrm>
+          <a:prstGeom prst="line">
+            <a:avLst/>
+          </a:prstGeom>
+          <a:noFill/>
+          <a:ln w="7620">
+            <a:solidFill>
+              <a:srgbClr val="D6DEE8"/>
+            </a:solidFill>
+            <a:prstDash val="solid"/>
+          </a:ln>
+        </p:spPr>
+      </p:sp>
+      <p:sp>
+        <p:nvSpPr>
+          <p:cNvPr id="35" name="Text 33"/>
+          <p:cNvSpPr/>
+          <p:nvPr/>
+        </p:nvSpPr>
+        <p:spPr>
+          <a:xfrm>
+            <a:off x="7607808" y="3063240"/>
+            <a:ext cx="1143000" cy="146304"/>
+          </a:xfrm>
+          <a:prstGeom prst="rect">
+            <a:avLst/>
+          </a:prstGeom>
+          <a:noFill/>
+          <a:ln/>
+        </p:spPr>
+        <p:txBody>
+          <a:bodyPr wrap="square" lIns="381" tIns="381" rIns="381" bIns="381" rtlCol="0" anchor="ctr">
+            <a:normAutofit/>
+          </a:bodyPr>
+          <a:lstStyle/>
+          <a:p>
+            <a:pPr algn="l" indent="0" marL="0">
+              <a:buNone/>
+            </a:pPr>
+            <a:r>
+              <a:rPr lang="en-US" sz="600" b="1" dirty="0">
                 <a:solidFill>
                   <a:srgbClr val="6D5BD0"/>
                 </a:solidFill>
@@ -7898,22 +11362,22 @@
                 <a:ea typeface="Aptos" pitchFamily="34" charset="-122"/>
                 <a:cs typeface="Aptos" pitchFamily="34" charset="-120"/>
               </a:rPr>
-              <a:t>Software de flota</a:t>
-            </a:r>
-            <a:endParaRPr lang="en-US" sz="690" dirty="0"/>
-          </a:p>
-        </p:txBody>
-      </p:sp>
-      <p:sp>
-        <p:nvSpPr>
-          <p:cNvPr id="12" name="Text 10"/>
-          <p:cNvSpPr/>
-          <p:nvPr/>
-        </p:nvSpPr>
-        <p:spPr>
-          <a:xfrm>
-            <a:off x="2743200" y="2350008"/>
-            <a:ext cx="4572000" cy="201168"/>
+              <a:t>Trazabilidad</a:t>
+            </a:r>
+            <a:endParaRPr lang="en-US" sz="600" dirty="0"/>
+          </a:p>
+        </p:txBody>
+      </p:sp>
+      <p:sp>
+        <p:nvSpPr>
+          <p:cNvPr id="36" name="Text 34"/>
+          <p:cNvSpPr/>
+          <p:nvPr/>
+        </p:nvSpPr>
+        <p:spPr>
+          <a:xfrm>
+            <a:off x="8942832" y="3063240"/>
+            <a:ext cx="1874520" cy="146304"/>
           </a:xfrm>
           <a:prstGeom prst="rect">
             <a:avLst/>
@@ -7931,30 +11395,53 @@
               <a:buNone/>
             </a:pPr>
             <a:r>
-              <a:rPr lang="en-US" sz="680" dirty="0">
-                <a:solidFill>
-                  <a:srgbClr val="5D6B7A"/>
-                </a:solidFill>
-                <a:latin typeface="Aptos" pitchFamily="34" charset="0"/>
-                <a:ea typeface="Aptos" pitchFamily="34" charset="-122"/>
-                <a:cs typeface="Aptos" pitchFamily="34" charset="-120"/>
-              </a:rPr>
-              <a:t>trazabilidad + base de datos + conectores MES-ERP</a:t>
-            </a:r>
-            <a:endParaRPr lang="en-US" sz="680" dirty="0"/>
-          </a:p>
-        </p:txBody>
-      </p:sp>
-      <p:sp>
-        <p:nvSpPr>
-          <p:cNvPr id="13" name="Text 11"/>
-          <p:cNvSpPr/>
-          <p:nvPr/>
-        </p:nvSpPr>
-        <p:spPr>
-          <a:xfrm>
-            <a:off x="868680" y="2880360"/>
-            <a:ext cx="1554480" cy="164592"/>
+              <a:rPr lang="en-US" sz="590" dirty="0">
+                <a:solidFill>
+                  <a:srgbClr val="1B2430"/>
+                </a:solidFill>
+                <a:latin typeface="Aptos" pitchFamily="34" charset="0"/>
+                <a:ea typeface="Aptos" pitchFamily="34" charset="-122"/>
+                <a:cs typeface="Aptos" pitchFamily="34" charset="-120"/>
+              </a:rPr>
+              <a:t>&gt;= 98 % con registro completo</a:t>
+            </a:r>
+            <a:endParaRPr lang="en-US" sz="590" dirty="0"/>
+          </a:p>
+        </p:txBody>
+      </p:sp>
+      <p:sp>
+        <p:nvSpPr>
+          <p:cNvPr id="37" name="Shape 35"/>
+          <p:cNvSpPr/>
+          <p:nvPr/>
+        </p:nvSpPr>
+        <p:spPr>
+          <a:xfrm>
+            <a:off x="7571232" y="3319272"/>
+            <a:ext cx="3429000" cy="0"/>
+          </a:xfrm>
+          <a:prstGeom prst="line">
+            <a:avLst/>
+          </a:prstGeom>
+          <a:noFill/>
+          <a:ln w="7620">
+            <a:solidFill>
+              <a:srgbClr val="D6DEE8"/>
+            </a:solidFill>
+            <a:prstDash val="solid"/>
+          </a:ln>
+        </p:spPr>
+      </p:sp>
+      <p:sp>
+        <p:nvSpPr>
+          <p:cNvPr id="38" name="Text 36"/>
+          <p:cNvSpPr/>
+          <p:nvPr/>
+        </p:nvSpPr>
+        <p:spPr>
+          <a:xfrm>
+            <a:off x="7607808" y="3520440"/>
+            <a:ext cx="1143000" cy="146304"/>
           </a:xfrm>
           <a:prstGeom prst="rect">
             <a:avLst/>
@@ -7972,7 +11459,217 @@
               <a:buNone/>
             </a:pPr>
             <a:r>
-              <a:rPr lang="en-US" sz="690" b="1" dirty="0">
+              <a:rPr lang="en-US" sz="600" b="1" dirty="0">
+                <a:solidFill>
+                  <a:srgbClr val="2A9D8F"/>
+                </a:solidFill>
+                <a:latin typeface="Aptos" pitchFamily="34" charset="0"/>
+                <a:ea typeface="Aptos" pitchFamily="34" charset="-122"/>
+                <a:cs typeface="Aptos" pitchFamily="34" charset="-120"/>
+              </a:rPr>
+              <a:t>Disponibilidad</a:t>
+            </a:r>
+            <a:endParaRPr lang="en-US" sz="600" dirty="0"/>
+          </a:p>
+        </p:txBody>
+      </p:sp>
+      <p:sp>
+        <p:nvSpPr>
+          <p:cNvPr id="39" name="Text 37"/>
+          <p:cNvSpPr/>
+          <p:nvPr/>
+        </p:nvSpPr>
+        <p:spPr>
+          <a:xfrm>
+            <a:off x="8942832" y="3520440"/>
+            <a:ext cx="1874520" cy="146304"/>
+          </a:xfrm>
+          <a:prstGeom prst="rect">
+            <a:avLst/>
+          </a:prstGeom>
+          <a:noFill/>
+          <a:ln/>
+        </p:spPr>
+        <p:txBody>
+          <a:bodyPr wrap="square" lIns="381" tIns="381" rIns="381" bIns="381" rtlCol="0" anchor="ctr">
+            <a:normAutofit/>
+          </a:bodyPr>
+          <a:lstStyle/>
+          <a:p>
+            <a:pPr algn="l" indent="0" marL="0">
+              <a:buNone/>
+            </a:pPr>
+            <a:r>
+              <a:rPr lang="en-US" sz="590" dirty="0">
+                <a:solidFill>
+                  <a:srgbClr val="1B2430"/>
+                </a:solidFill>
+                <a:latin typeface="Aptos" pitchFamily="34" charset="0"/>
+                <a:ea typeface="Aptos" pitchFamily="34" charset="-122"/>
+                <a:cs typeface="Aptos" pitchFamily="34" charset="-120"/>
+              </a:rPr>
+              <a:t>&gt;= 90 % en turno piloto</a:t>
+            </a:r>
+            <a:endParaRPr lang="en-US" sz="590" dirty="0"/>
+          </a:p>
+        </p:txBody>
+      </p:sp>
+      <p:sp>
+        <p:nvSpPr>
+          <p:cNvPr id="40" name="Shape 38"/>
+          <p:cNvSpPr/>
+          <p:nvPr/>
+        </p:nvSpPr>
+        <p:spPr>
+          <a:xfrm>
+            <a:off x="7571232" y="3776472"/>
+            <a:ext cx="3429000" cy="0"/>
+          </a:xfrm>
+          <a:prstGeom prst="line">
+            <a:avLst/>
+          </a:prstGeom>
+          <a:noFill/>
+          <a:ln w="7620">
+            <a:solidFill>
+              <a:srgbClr val="D6DEE8"/>
+            </a:solidFill>
+            <a:prstDash val="solid"/>
+          </a:ln>
+        </p:spPr>
+      </p:sp>
+      <p:sp>
+        <p:nvSpPr>
+          <p:cNvPr id="41" name="Text 39"/>
+          <p:cNvSpPr/>
+          <p:nvPr/>
+        </p:nvSpPr>
+        <p:spPr>
+          <a:xfrm>
+            <a:off x="7607808" y="3977640"/>
+            <a:ext cx="1143000" cy="146304"/>
+          </a:xfrm>
+          <a:prstGeom prst="rect">
+            <a:avLst/>
+          </a:prstGeom>
+          <a:noFill/>
+          <a:ln/>
+        </p:spPr>
+        <p:txBody>
+          <a:bodyPr wrap="square" lIns="381" tIns="381" rIns="381" bIns="381" rtlCol="0" anchor="ctr">
+            <a:normAutofit/>
+          </a:bodyPr>
+          <a:lstStyle/>
+          <a:p>
+            <a:pPr algn="l" indent="0" marL="0">
+              <a:buNone/>
+            </a:pPr>
+            <a:r>
+              <a:rPr lang="en-US" sz="600" b="1" dirty="0">
+                <a:solidFill>
+                  <a:srgbClr val="F4A261"/>
+                </a:solidFill>
+                <a:latin typeface="Aptos" pitchFamily="34" charset="0"/>
+                <a:ea typeface="Aptos" pitchFamily="34" charset="-122"/>
+                <a:cs typeface="Aptos" pitchFamily="34" charset="-120"/>
+              </a:rPr>
+              <a:t>FOD</a:t>
+            </a:r>
+            <a:endParaRPr lang="en-US" sz="600" dirty="0"/>
+          </a:p>
+        </p:txBody>
+      </p:sp>
+      <p:sp>
+        <p:nvSpPr>
+          <p:cNvPr id="42" name="Text 40"/>
+          <p:cNvSpPr/>
+          <p:nvPr/>
+        </p:nvSpPr>
+        <p:spPr>
+          <a:xfrm>
+            <a:off x="8942832" y="3977640"/>
+            <a:ext cx="1874520" cy="146304"/>
+          </a:xfrm>
+          <a:prstGeom prst="rect">
+            <a:avLst/>
+          </a:prstGeom>
+          <a:noFill/>
+          <a:ln/>
+        </p:spPr>
+        <p:txBody>
+          <a:bodyPr wrap="square" lIns="381" tIns="381" rIns="381" bIns="381" rtlCol="0" anchor="ctr">
+            <a:normAutofit/>
+          </a:bodyPr>
+          <a:lstStyle/>
+          <a:p>
+            <a:pPr algn="l" indent="0" marL="0">
+              <a:buNone/>
+            </a:pPr>
+            <a:r>
+              <a:rPr lang="en-US" sz="590" dirty="0">
+                <a:solidFill>
+                  <a:srgbClr val="1B2430"/>
+                </a:solidFill>
+                <a:latin typeface="Aptos" pitchFamily="34" charset="0"/>
+                <a:ea typeface="Aptos" pitchFamily="34" charset="-122"/>
+                <a:cs typeface="Aptos" pitchFamily="34" charset="-120"/>
+              </a:rPr>
+              <a:t>100 % eventos revisables</a:t>
+            </a:r>
+            <a:endParaRPr lang="en-US" sz="590" dirty="0"/>
+          </a:p>
+        </p:txBody>
+      </p:sp>
+      <p:sp>
+        <p:nvSpPr>
+          <p:cNvPr id="43" name="Shape 41"/>
+          <p:cNvSpPr/>
+          <p:nvPr/>
+        </p:nvSpPr>
+        <p:spPr>
+          <a:xfrm>
+            <a:off x="7571232" y="4233672"/>
+            <a:ext cx="3429000" cy="0"/>
+          </a:xfrm>
+          <a:prstGeom prst="line">
+            <a:avLst/>
+          </a:prstGeom>
+          <a:noFill/>
+          <a:ln w="7620">
+            <a:solidFill>
+              <a:srgbClr val="D6DEE8"/>
+            </a:solidFill>
+            <a:prstDash val="solid"/>
+          </a:ln>
+        </p:spPr>
+      </p:sp>
+      <p:sp>
+        <p:nvSpPr>
+          <p:cNvPr id="44" name="Text 42"/>
+          <p:cNvSpPr/>
+          <p:nvPr/>
+        </p:nvSpPr>
+        <p:spPr>
+          <a:xfrm>
+            <a:off x="7607808" y="4434840"/>
+            <a:ext cx="1143000" cy="146304"/>
+          </a:xfrm>
+          <a:prstGeom prst="rect">
+            <a:avLst/>
+          </a:prstGeom>
+          <a:noFill/>
+          <a:ln/>
+        </p:spPr>
+        <p:txBody>
+          <a:bodyPr wrap="square" lIns="381" tIns="381" rIns="381" bIns="381" rtlCol="0" anchor="ctr">
+            <a:normAutofit/>
+          </a:bodyPr>
+          <a:lstStyle/>
+          <a:p>
+            <a:pPr algn="l" indent="0" marL="0">
+              <a:buNone/>
+            </a:pPr>
+            <a:r>
+              <a:rPr lang="en-US" sz="600" b="1" dirty="0">
                 <a:solidFill>
                   <a:srgbClr val="2DB7E5"/>
                 </a:solidFill>
@@ -7980,22 +11677,22 @@
                 <a:ea typeface="Aptos" pitchFamily="34" charset="-122"/>
                 <a:cs typeface="Aptos" pitchFamily="34" charset="-120"/>
               </a:rPr>
-              <a:t>Ingenieria</a:t>
-            </a:r>
-            <a:endParaRPr lang="en-US" sz="690" dirty="0"/>
-          </a:p>
-        </p:txBody>
-      </p:sp>
-      <p:sp>
-        <p:nvSpPr>
-          <p:cNvPr id="14" name="Text 12"/>
-          <p:cNvSpPr/>
-          <p:nvPr/>
-        </p:nvSpPr>
-        <p:spPr>
-          <a:xfrm>
-            <a:off x="2743200" y="2852928"/>
-            <a:ext cx="4572000" cy="201168"/>
+              <a:t>Escalado</a:t>
+            </a:r>
+            <a:endParaRPr lang="en-US" sz="600" dirty="0"/>
+          </a:p>
+        </p:txBody>
+      </p:sp>
+      <p:sp>
+        <p:nvSpPr>
+          <p:cNvPr id="45" name="Text 43"/>
+          <p:cNvSpPr/>
+          <p:nvPr/>
+        </p:nvSpPr>
+        <p:spPr>
+          <a:xfrm>
+            <a:off x="8942832" y="4434840"/>
+            <a:ext cx="1874520" cy="146304"/>
           </a:xfrm>
           <a:prstGeom prst="rect">
             <a:avLst/>
@@ -8013,30 +11710,53 @@
               <a:buNone/>
             </a:pPr>
             <a:r>
-              <a:rPr lang="en-US" sz="680" dirty="0">
-                <a:solidFill>
-                  <a:srgbClr val="5D6B7A"/>
-                </a:solidFill>
-                <a:latin typeface="Aptos" pitchFamily="34" charset="0"/>
-                <a:ea typeface="Aptos" pitchFamily="34" charset="-122"/>
-                <a:cs typeface="Aptos" pitchFamily="34" charset="-120"/>
-              </a:rPr>
-              <a:t>levantamiento + simulación CoppeliaSim + configuración + pruebas</a:t>
-            </a:r>
-            <a:endParaRPr lang="en-US" sz="680" dirty="0"/>
-          </a:p>
-        </p:txBody>
-      </p:sp>
-      <p:sp>
-        <p:nvSpPr>
-          <p:cNvPr id="15" name="Text 13"/>
-          <p:cNvSpPr/>
-          <p:nvPr/>
-        </p:nvSpPr>
-        <p:spPr>
-          <a:xfrm>
-            <a:off x="868680" y="3383280"/>
-            <a:ext cx="1554480" cy="164592"/>
+              <a:rPr lang="en-US" sz="590" dirty="0">
+                <a:solidFill>
+                  <a:srgbClr val="1B2430"/>
+                </a:solidFill>
+                <a:latin typeface="Aptos" pitchFamily="34" charset="0"/>
+                <a:ea typeface="Aptos" pitchFamily="34" charset="-122"/>
+                <a:cs typeface="Aptos" pitchFamily="34" charset="-120"/>
+              </a:rPr>
+              <a:t>solo con VAN y datos de flujo</a:t>
+            </a:r>
+            <a:endParaRPr lang="en-US" sz="590" dirty="0"/>
+          </a:p>
+        </p:txBody>
+      </p:sp>
+      <p:sp>
+        <p:nvSpPr>
+          <p:cNvPr id="46" name="Shape 44"/>
+          <p:cNvSpPr/>
+          <p:nvPr/>
+        </p:nvSpPr>
+        <p:spPr>
+          <a:xfrm>
+            <a:off x="7571232" y="4690872"/>
+            <a:ext cx="3429000" cy="0"/>
+          </a:xfrm>
+          <a:prstGeom prst="line">
+            <a:avLst/>
+          </a:prstGeom>
+          <a:noFill/>
+          <a:ln w="7620">
+            <a:solidFill>
+              <a:srgbClr val="D6DEE8"/>
+            </a:solidFill>
+            <a:prstDash val="solid"/>
+          </a:ln>
+        </p:spPr>
+      </p:sp>
+      <p:sp>
+        <p:nvSpPr>
+          <p:cNvPr id="47" name="Text 45"/>
+          <p:cNvSpPr/>
+          <p:nvPr/>
+        </p:nvSpPr>
+        <p:spPr>
+          <a:xfrm>
+            <a:off x="7571232" y="5047488"/>
+            <a:ext cx="3383280" cy="164592"/>
           </a:xfrm>
           <a:prstGeom prst="rect">
             <a:avLst/>
@@ -8054,30 +11774,30 @@
               <a:buNone/>
             </a:pPr>
             <a:r>
-              <a:rPr lang="en-US" sz="690" b="1" dirty="0">
-                <a:solidFill>
-                  <a:srgbClr val="2A9D8F"/>
-                </a:solidFill>
-                <a:latin typeface="Aptos" pitchFamily="34" charset="0"/>
-                <a:ea typeface="Aptos" pitchFamily="34" charset="-122"/>
-                <a:cs typeface="Aptos" pitchFamily="34" charset="-120"/>
-              </a:rPr>
-              <a:t>Implantacion</a:t>
-            </a:r>
-            <a:endParaRPr lang="en-US" sz="690" dirty="0"/>
-          </a:p>
-        </p:txBody>
-      </p:sp>
-      <p:sp>
-        <p:nvSpPr>
-          <p:cNvPr id="16" name="Text 14"/>
-          <p:cNvSpPr/>
-          <p:nvPr/>
-        </p:nvSpPr>
-        <p:spPr>
-          <a:xfrm>
-            <a:off x="2743200" y="3355848"/>
-            <a:ext cx="4572000" cy="201168"/>
+              <a:rPr lang="en-US" sz="600" b="1" dirty="0">
+                <a:solidFill>
+                  <a:srgbClr val="B91C1C"/>
+                </a:solidFill>
+                <a:latin typeface="Aptos" pitchFamily="34" charset="0"/>
+                <a:ea typeface="Aptos" pitchFamily="34" charset="-122"/>
+                <a:cs typeface="Aptos" pitchFamily="34" charset="-120"/>
+              </a:rPr>
+              <a:t>Exclusion explicita: no se certifica montaje HTP.</a:t>
+            </a:r>
+            <a:endParaRPr lang="en-US" sz="600" dirty="0"/>
+          </a:p>
+        </p:txBody>
+      </p:sp>
+      <p:sp>
+        <p:nvSpPr>
+          <p:cNvPr id="48" name="Text 46"/>
+          <p:cNvSpPr/>
+          <p:nvPr/>
+        </p:nvSpPr>
+        <p:spPr>
+          <a:xfrm>
+            <a:off x="7571232" y="5266944"/>
+            <a:ext cx="3383280" cy="164592"/>
           </a:xfrm>
           <a:prstGeom prst="rect">
             <a:avLst/>
@@ -8095,345 +11815,17 @@
               <a:buNone/>
             </a:pPr>
             <a:r>
-              <a:rPr lang="en-US" sz="680" dirty="0">
-                <a:solidFill>
-                  <a:srgbClr val="5D6B7A"/>
-                </a:solidFill>
-                <a:latin typeface="Aptos" pitchFamily="34" charset="0"/>
-                <a:ea typeface="Aptos" pitchFamily="34" charset="-122"/>
-                <a:cs typeface="Aptos" pitchFamily="34" charset="-120"/>
-              </a:rPr>
-              <a:t>instalacion + formacion + mantenimiento + logística + soporte</a:t>
-            </a:r>
-            <a:endParaRPr lang="en-US" sz="680" dirty="0"/>
-          </a:p>
-        </p:txBody>
-      </p:sp>
-      <p:sp>
-        <p:nvSpPr>
-          <p:cNvPr id="17" name="Text 15"/>
-          <p:cNvSpPr/>
-          <p:nvPr/>
-        </p:nvSpPr>
-        <p:spPr>
-          <a:xfrm>
-            <a:off x="868680" y="3886200"/>
-            <a:ext cx="1554480" cy="164592"/>
-          </a:xfrm>
-          <a:prstGeom prst="rect">
-            <a:avLst/>
-          </a:prstGeom>
-          <a:noFill/>
-          <a:ln/>
-        </p:spPr>
-        <p:txBody>
-          <a:bodyPr wrap="square" lIns="381" tIns="381" rIns="381" bIns="381" rtlCol="0" anchor="ctr">
-            <a:normAutofit/>
-          </a:bodyPr>
-          <a:lstStyle/>
-          <a:p>
-            <a:pPr algn="l" indent="0" marL="0">
-              <a:buNone/>
-            </a:pPr>
-            <a:r>
-              <a:rPr lang="en-US" sz="690" b="1" dirty="0">
-                <a:solidFill>
-                  <a:srgbClr val="F4A261"/>
-                </a:solidFill>
-                <a:latin typeface="Aptos" pitchFamily="34" charset="0"/>
-                <a:ea typeface="Aptos" pitchFamily="34" charset="-122"/>
-                <a:cs typeface="Aptos" pitchFamily="34" charset="-120"/>
-              </a:rPr>
-              <a:t>Margen y riesgo</a:t>
-            </a:r>
-            <a:endParaRPr lang="en-US" sz="690" dirty="0"/>
-          </a:p>
-        </p:txBody>
-      </p:sp>
-      <p:sp>
-        <p:nvSpPr>
-          <p:cNvPr id="18" name="Text 16"/>
-          <p:cNvSpPr/>
-          <p:nvPr/>
-        </p:nvSpPr>
-        <p:spPr>
-          <a:xfrm>
-            <a:off x="2743200" y="3858768"/>
-            <a:ext cx="4572000" cy="201168"/>
-          </a:xfrm>
-          <a:prstGeom prst="rect">
-            <a:avLst/>
-          </a:prstGeom>
-          <a:noFill/>
-          <a:ln/>
-        </p:spPr>
-        <p:txBody>
-          <a:bodyPr wrap="square" lIns="381" tIns="381" rIns="381" bIns="381" rtlCol="0" anchor="ctr">
-            <a:normAutofit/>
-          </a:bodyPr>
-          <a:lstStyle/>
-          <a:p>
-            <a:pPr algn="l" indent="0" marL="0">
-              <a:buNone/>
-            </a:pPr>
-            <a:r>
-              <a:rPr lang="en-US" sz="680" dirty="0">
-                <a:solidFill>
-                  <a:srgbClr val="5D6B7A"/>
-                </a:solidFill>
-                <a:latin typeface="Aptos" pitchFamily="34" charset="0"/>
-                <a:ea typeface="Aptos" pitchFamily="34" charset="-122"/>
-                <a:cs typeface="Aptos" pitchFamily="34" charset="-120"/>
-              </a:rPr>
-              <a:t>contingencia académica y margen comercial explicito</a:t>
-            </a:r>
-            <a:endParaRPr lang="en-US" sz="680" dirty="0"/>
-          </a:p>
-        </p:txBody>
-      </p:sp>
-      <p:sp>
-        <p:nvSpPr>
-          <p:cNvPr id="19" name="Text 17"/>
-          <p:cNvSpPr/>
-          <p:nvPr/>
-        </p:nvSpPr>
-        <p:spPr>
-          <a:xfrm>
-            <a:off x="8458200" y="1508760"/>
-            <a:ext cx="1737360" cy="310896"/>
-          </a:xfrm>
-          <a:prstGeom prst="rect">
-            <a:avLst/>
-          </a:prstGeom>
-          <a:noFill/>
-          <a:ln/>
-        </p:spPr>
-        <p:txBody>
-          <a:bodyPr wrap="square" lIns="381" tIns="381" rIns="381" bIns="381" rtlCol="0" anchor="ctr">
-            <a:normAutofit/>
-          </a:bodyPr>
-          <a:lstStyle/>
-          <a:p>
-            <a:pPr algn="ctr" indent="0" marL="0">
-              <a:buNone/>
-            </a:pPr>
-            <a:r>
-              <a:rPr lang="en-US" sz="1800" b="1" dirty="0">
-                <a:solidFill>
-                  <a:srgbClr val="1F7A8C"/>
-                </a:solidFill>
-                <a:latin typeface="Aptos" pitchFamily="34" charset="0"/>
-                <a:ea typeface="Aptos" pitchFamily="34" charset="-122"/>
-                <a:cs typeface="Aptos" pitchFamily="34" charset="-120"/>
-              </a:rPr>
-              <a:t>69.800 €</a:t>
-            </a:r>
-            <a:endParaRPr lang="en-US" sz="1800" dirty="0"/>
-          </a:p>
-        </p:txBody>
-      </p:sp>
-      <p:sp>
-        <p:nvSpPr>
-          <p:cNvPr id="20" name="Text 18"/>
-          <p:cNvSpPr/>
-          <p:nvPr/>
-        </p:nvSpPr>
-        <p:spPr>
-          <a:xfrm>
-            <a:off x="8366760" y="1920240"/>
-            <a:ext cx="2103120" cy="329184"/>
-          </a:xfrm>
-          <a:prstGeom prst="rect">
-            <a:avLst/>
-          </a:prstGeom>
-          <a:noFill/>
-          <a:ln/>
-        </p:spPr>
-        <p:txBody>
-          <a:bodyPr wrap="square" lIns="381" tIns="381" rIns="381" bIns="381" rtlCol="0" anchor="ctr">
-            <a:normAutofit/>
-          </a:bodyPr>
-          <a:lstStyle/>
-          <a:p>
-            <a:pPr algn="ctr" indent="0" marL="0">
-              <a:buNone/>
-            </a:pPr>
-            <a:r>
-              <a:rPr lang="en-US" sz="710" dirty="0">
-                <a:solidFill>
-                  <a:srgbClr val="5D6B7A"/>
-                </a:solidFill>
-                <a:latin typeface="Aptos" pitchFamily="34" charset="0"/>
-                <a:ea typeface="Aptos" pitchFamily="34" charset="-122"/>
-                <a:cs typeface="Aptos" pitchFamily="34" charset="-120"/>
-              </a:rPr>
-              <a:t>paquete AMR-FOD-Kitting por robot, con sensores y seguridad.</a:t>
-            </a:r>
-            <a:endParaRPr lang="en-US" sz="710" dirty="0"/>
-          </a:p>
-        </p:txBody>
-      </p:sp>
-      <p:sp>
-        <p:nvSpPr>
-          <p:cNvPr id="21" name="Text 19"/>
-          <p:cNvSpPr/>
-          <p:nvPr/>
-        </p:nvSpPr>
-        <p:spPr>
-          <a:xfrm>
-            <a:off x="8686800" y="2971800"/>
-            <a:ext cx="1325880" cy="310896"/>
-          </a:xfrm>
-          <a:prstGeom prst="rect">
-            <a:avLst/>
-          </a:prstGeom>
-          <a:noFill/>
-          <a:ln/>
-        </p:spPr>
-        <p:txBody>
-          <a:bodyPr wrap="square" lIns="381" tIns="381" rIns="381" bIns="381" rtlCol="0" anchor="ctr">
-            <a:normAutofit/>
-          </a:bodyPr>
-          <a:lstStyle/>
-          <a:p>
-            <a:pPr algn="ctr" indent="0" marL="0">
-              <a:buNone/>
-            </a:pPr>
-            <a:r>
-              <a:rPr lang="en-US" sz="1800" b="1" dirty="0">
-                <a:solidFill>
-                  <a:srgbClr val="F4A261"/>
-                </a:solidFill>
-                <a:latin typeface="Aptos" pitchFamily="34" charset="0"/>
-                <a:ea typeface="Aptos" pitchFamily="34" charset="-122"/>
-                <a:cs typeface="Aptos" pitchFamily="34" charset="-120"/>
-              </a:rPr>
-              <a:t>12 %</a:t>
-            </a:r>
-            <a:endParaRPr lang="en-US" sz="1800" dirty="0"/>
-          </a:p>
-        </p:txBody>
-      </p:sp>
-      <p:sp>
-        <p:nvSpPr>
-          <p:cNvPr id="22" name="Text 20"/>
-          <p:cNvSpPr/>
-          <p:nvPr/>
-        </p:nvSpPr>
-        <p:spPr>
-          <a:xfrm>
-            <a:off x="8357616" y="3401568"/>
-            <a:ext cx="2103120" cy="310896"/>
-          </a:xfrm>
-          <a:prstGeom prst="rect">
-            <a:avLst/>
-          </a:prstGeom>
-          <a:noFill/>
-          <a:ln/>
-        </p:spPr>
-        <p:txBody>
-          <a:bodyPr wrap="square" lIns="381" tIns="381" rIns="381" bIns="381" rtlCol="0" anchor="ctr">
-            <a:normAutofit/>
-          </a:bodyPr>
-          <a:lstStyle/>
-          <a:p>
-            <a:pPr algn="ctr" indent="0" marL="0">
-              <a:buNone/>
-            </a:pPr>
-            <a:r>
-              <a:rPr lang="en-US" sz="710" dirty="0">
-                <a:solidFill>
-                  <a:srgbClr val="5D6B7A"/>
-                </a:solidFill>
-                <a:latin typeface="Aptos" pitchFamily="34" charset="0"/>
-                <a:ea typeface="Aptos" pitchFamily="34" charset="-122"/>
-                <a:cs typeface="Aptos" pitchFamily="34" charset="-120"/>
-              </a:rPr>
-              <a:t>contingencia y margen comercial declarado.</a:t>
-            </a:r>
-            <a:endParaRPr lang="en-US" sz="710" dirty="0"/>
-          </a:p>
-        </p:txBody>
-      </p:sp>
-      <p:sp>
-        <p:nvSpPr>
-          <p:cNvPr id="23" name="Text 21"/>
-          <p:cNvSpPr/>
-          <p:nvPr/>
-        </p:nvSpPr>
-        <p:spPr>
-          <a:xfrm>
-            <a:off x="8686800" y="4434840"/>
-            <a:ext cx="1325880" cy="310896"/>
-          </a:xfrm>
-          <a:prstGeom prst="rect">
-            <a:avLst/>
-          </a:prstGeom>
-          <a:noFill/>
-          <a:ln/>
-        </p:spPr>
-        <p:txBody>
-          <a:bodyPr wrap="square" lIns="381" tIns="381" rIns="381" bIns="381" rtlCol="0" anchor="ctr">
-            <a:normAutofit/>
-          </a:bodyPr>
-          <a:lstStyle/>
-          <a:p>
-            <a:pPr algn="ctr" indent="0" marL="0">
-              <a:buNone/>
-            </a:pPr>
-            <a:r>
-              <a:rPr lang="en-US" sz="1800" b="1" dirty="0">
-                <a:solidFill>
-                  <a:srgbClr val="6D5BD0"/>
-                </a:solidFill>
-                <a:latin typeface="Aptos" pitchFamily="34" charset="0"/>
-                <a:ea typeface="Aptos" pitchFamily="34" charset="-122"/>
-                <a:cs typeface="Aptos" pitchFamily="34" charset="-120"/>
-              </a:rPr>
-              <a:t>5 años</a:t>
-            </a:r>
-            <a:endParaRPr lang="en-US" sz="1800" dirty="0"/>
-          </a:p>
-        </p:txBody>
-      </p:sp>
-      <p:sp>
-        <p:nvSpPr>
-          <p:cNvPr id="24" name="Text 22"/>
-          <p:cNvSpPr/>
-          <p:nvPr/>
-        </p:nvSpPr>
-        <p:spPr>
-          <a:xfrm>
-            <a:off x="8321040" y="4864608"/>
-            <a:ext cx="2194560" cy="310896"/>
-          </a:xfrm>
-          <a:prstGeom prst="rect">
-            <a:avLst/>
-          </a:prstGeom>
-          <a:noFill/>
-          <a:ln/>
-        </p:spPr>
-        <p:txBody>
-          <a:bodyPr wrap="square" lIns="381" tIns="381" rIns="381" bIns="381" rtlCol="0" anchor="ctr">
-            <a:normAutofit/>
-          </a:bodyPr>
-          <a:lstStyle/>
-          <a:p>
-            <a:pPr algn="ctr" indent="0" marL="0">
-              <a:buNone/>
-            </a:pPr>
-            <a:r>
-              <a:rPr lang="en-US" sz="710" dirty="0">
-                <a:solidFill>
-                  <a:srgbClr val="5D6B7A"/>
-                </a:solidFill>
-                <a:latin typeface="Aptos" pitchFamily="34" charset="0"/>
-                <a:ea typeface="Aptos" pitchFamily="34" charset="-122"/>
-                <a:cs typeface="Aptos" pitchFamily="34" charset="-120"/>
-              </a:rPr>
-              <a:t>VAN y sensibilidad financiera para decidir escalado.</a:t>
-            </a:r>
-            <a:endParaRPr lang="en-US" sz="710" dirty="0"/>
+              <a:rPr lang="en-US" sz="600" b="1" dirty="0">
+                <a:solidFill>
+                  <a:srgbClr val="B91C1C"/>
+                </a:solidFill>
+                <a:latin typeface="Aptos" pitchFamily="34" charset="0"/>
+                <a:ea typeface="Aptos" pitchFamily="34" charset="-122"/>
+                <a:cs typeface="Aptos" pitchFamily="34" charset="-120"/>
+              </a:rPr>
+              <a:t>Tampoco sustituye inspección aeronautica obligatoria.</a:t>
+            </a:r>
+            <a:endParaRPr lang="en-US" sz="600" dirty="0"/>
           </a:p>
         </p:txBody>
       </p:sp>
@@ -8738,8 +12130,8 @@
         </p:nvSpPr>
         <p:spPr>
           <a:xfrm>
-            <a:off x="868680" y="2048256"/>
-            <a:ext cx="3840480" cy="475488"/>
+            <a:off x="868680" y="1975104"/>
+            <a:ext cx="3017520" cy="219456"/>
           </a:xfrm>
           <a:prstGeom prst="rect">
             <a:avLst/>
@@ -8765,7 +12157,7 @@
                 <a:ea typeface="Aptos" pitchFamily="34" charset="-122"/>
                 <a:cs typeface="Aptos" pitchFamily="34" charset="-120"/>
               </a:rPr>
-              <a:t>Validar rutas, seguridad, entregas, trazabilidad, FOD y aceptación operativa. Escalar solo con datos.</a:t>
+              <a:t>Validar rutas, seguridad y entregas.</a:t>
             </a:r>
             <a:endParaRPr lang="en-US" sz="900" dirty="0"/>
           </a:p>
@@ -8773,7 +12165,89 @@
       </p:sp>
       <p:sp>
         <p:nvSpPr>
-          <p:cNvPr id="10" name="Shape 8"/>
+          <p:cNvPr id="10" name="Text 8"/>
+          <p:cNvSpPr/>
+          <p:nvPr/>
+        </p:nvSpPr>
+        <p:spPr>
+          <a:xfrm>
+            <a:off x="868680" y="2286000"/>
+            <a:ext cx="3017520" cy="219456"/>
+          </a:xfrm>
+          <a:prstGeom prst="rect">
+            <a:avLst/>
+          </a:prstGeom>
+          <a:noFill/>
+          <a:ln/>
+        </p:spPr>
+        <p:txBody>
+          <a:bodyPr wrap="square" lIns="381" tIns="381" rIns="381" bIns="381" rtlCol="0" anchor="ctr">
+            <a:normAutofit/>
+          </a:bodyPr>
+          <a:lstStyle/>
+          <a:p>
+            <a:pPr algn="l" indent="0" marL="0">
+              <a:buNone/>
+            </a:pPr>
+            <a:r>
+              <a:rPr lang="en-US" sz="900" dirty="0">
+                <a:solidFill>
+                  <a:srgbClr val="1B2430"/>
+                </a:solidFill>
+                <a:latin typeface="Aptos" pitchFamily="34" charset="0"/>
+                <a:ea typeface="Aptos" pitchFamily="34" charset="-122"/>
+                <a:cs typeface="Aptos" pitchFamily="34" charset="-120"/>
+              </a:rPr>
+              <a:t>Medir trazabilidad, FOD y aceptación.</a:t>
+            </a:r>
+            <a:endParaRPr lang="en-US" sz="900" dirty="0"/>
+          </a:p>
+        </p:txBody>
+      </p:sp>
+      <p:sp>
+        <p:nvSpPr>
+          <p:cNvPr id="11" name="Text 9"/>
+          <p:cNvSpPr/>
+          <p:nvPr/>
+        </p:nvSpPr>
+        <p:spPr>
+          <a:xfrm>
+            <a:off x="868680" y="2596896"/>
+            <a:ext cx="2194560" cy="219456"/>
+          </a:xfrm>
+          <a:prstGeom prst="rect">
+            <a:avLst/>
+          </a:prstGeom>
+          <a:noFill/>
+          <a:ln/>
+        </p:spPr>
+        <p:txBody>
+          <a:bodyPr wrap="square" lIns="381" tIns="381" rIns="381" bIns="381" rtlCol="0" anchor="ctr">
+            <a:normAutofit/>
+          </a:bodyPr>
+          <a:lstStyle/>
+          <a:p>
+            <a:pPr algn="l" indent="0" marL="0">
+              <a:buNone/>
+            </a:pPr>
+            <a:r>
+              <a:rPr lang="en-US" sz="900" b="1" dirty="0">
+                <a:solidFill>
+                  <a:srgbClr val="102033"/>
+                </a:solidFill>
+                <a:latin typeface="Aptos" pitchFamily="34" charset="0"/>
+                <a:ea typeface="Aptos" pitchFamily="34" charset="-122"/>
+                <a:cs typeface="Aptos" pitchFamily="34" charset="-120"/>
+              </a:rPr>
+              <a:t>Escalar solo con datos.</a:t>
+            </a:r>
+            <a:endParaRPr lang="en-US" sz="900" dirty="0"/>
+          </a:p>
+        </p:txBody>
+      </p:sp>
+      <p:sp>
+        <p:nvSpPr>
+          <p:cNvPr id="12" name="Shape 10"/>
           <p:cNvSpPr/>
           <p:nvPr/>
         </p:nvSpPr>
@@ -8800,7 +12274,7 @@
       </p:sp>
       <p:sp>
         <p:nvSpPr>
-          <p:cNvPr id="11" name="Shape 9"/>
+          <p:cNvPr id="13" name="Shape 11"/>
           <p:cNvSpPr/>
           <p:nvPr/>
         </p:nvSpPr>
@@ -8825,7 +12299,7 @@
       </p:sp>
       <p:sp>
         <p:nvSpPr>
-          <p:cNvPr id="12" name="Shape 10"/>
+          <p:cNvPr id="14" name="Shape 12"/>
           <p:cNvSpPr/>
           <p:nvPr/>
         </p:nvSpPr>
@@ -8850,7 +12324,7 @@
       </p:sp>
       <p:sp>
         <p:nvSpPr>
-          <p:cNvPr id="13" name="Shape 11"/>
+          <p:cNvPr id="15" name="Shape 13"/>
           <p:cNvSpPr/>
           <p:nvPr/>
         </p:nvSpPr>
@@ -8875,7 +12349,7 @@
       </p:sp>
       <p:sp>
         <p:nvSpPr>
-          <p:cNvPr id="14" name="Shape 12"/>
+          <p:cNvPr id="16" name="Shape 14"/>
           <p:cNvSpPr/>
           <p:nvPr/>
         </p:nvSpPr>
@@ -8900,7 +12374,7 @@
       </p:sp>
       <p:sp>
         <p:nvSpPr>
-          <p:cNvPr id="15" name="Shape 13"/>
+          <p:cNvPr id="17" name="Shape 15"/>
           <p:cNvSpPr/>
           <p:nvPr/>
         </p:nvSpPr>
@@ -8924,7 +12398,7 @@
       </p:sp>
       <p:sp>
         <p:nvSpPr>
-          <p:cNvPr id="16" name="Shape 14"/>
+          <p:cNvPr id="18" name="Shape 16"/>
           <p:cNvSpPr/>
           <p:nvPr/>
         </p:nvSpPr>
@@ -8949,7 +12423,7 @@
       </p:sp>
       <p:sp>
         <p:nvSpPr>
-          <p:cNvPr id="17" name="Shape 15"/>
+          <p:cNvPr id="19" name="Shape 17"/>
           <p:cNvSpPr/>
           <p:nvPr/>
         </p:nvSpPr>
@@ -8974,7 +12448,7 @@
       </p:sp>
       <p:sp>
         <p:nvSpPr>
-          <p:cNvPr id="18" name="Text 16"/>
+          <p:cNvPr id="20" name="Text 18"/>
           <p:cNvSpPr/>
           <p:nvPr/>
         </p:nvSpPr>
@@ -9015,7 +12489,7 @@
       </p:sp>
       <p:sp>
         <p:nvSpPr>
-          <p:cNvPr id="19" name="Text 17"/>
+          <p:cNvPr id="21" name="Text 19"/>
           <p:cNvSpPr/>
           <p:nvPr/>
         </p:nvSpPr>
@@ -9056,7 +12530,7 @@
       </p:sp>
       <p:sp>
         <p:nvSpPr>
-          <p:cNvPr id="20" name="Text 18"/>
+          <p:cNvPr id="22" name="Text 20"/>
           <p:cNvSpPr/>
           <p:nvPr/>
         </p:nvSpPr>
@@ -9097,7 +12571,7 @@
       </p:sp>
       <p:sp>
         <p:nvSpPr>
-          <p:cNvPr id="21" name="Text 19"/>
+          <p:cNvPr id="23" name="Text 21"/>
           <p:cNvSpPr/>
           <p:nvPr/>
         </p:nvSpPr>
@@ -9471,8 +12945,8 @@
         </p:nvSpPr>
         <p:spPr>
           <a:xfrm>
-            <a:off x="768096" y="2816352"/>
-            <a:ext cx="4297680" cy="621792"/>
+            <a:off x="768096" y="2761488"/>
+            <a:ext cx="3840480" cy="256032"/>
           </a:xfrm>
           <a:prstGeom prst="rect">
             <a:avLst/>
@@ -9498,7 +12972,7 @@
                 <a:ea typeface="Aptos" pitchFamily="34" charset="-122"/>
                 <a:cs typeface="Aptos" pitchFamily="34" charset="-120"/>
               </a:rPr>
-              <a:t>La solución AMR-FOD-Kitting automatiza transporte, confirmación y evidencia; no invade procesos certificados de montaje aeronáutico.</a:t>
+              <a:t>Automatiza transporte, confirmación y evidencia.</a:t>
             </a:r>
             <a:endParaRPr lang="en-US" sz="900" dirty="0"/>
           </a:p>
@@ -9506,7 +12980,48 @@
       </p:sp>
       <p:sp>
         <p:nvSpPr>
-          <p:cNvPr id="10" name="Shape 8"/>
+          <p:cNvPr id="10" name="Text 8"/>
+          <p:cNvSpPr/>
+          <p:nvPr/>
+        </p:nvSpPr>
+        <p:spPr>
+          <a:xfrm>
+            <a:off x="768096" y="3090672"/>
+            <a:ext cx="3840480" cy="256032"/>
+          </a:xfrm>
+          <a:prstGeom prst="rect">
+            <a:avLst/>
+          </a:prstGeom>
+          <a:noFill/>
+          <a:ln/>
+        </p:spPr>
+        <p:txBody>
+          <a:bodyPr wrap="square" lIns="381" tIns="381" rIns="381" bIns="381" rtlCol="0" anchor="ctr">
+            <a:normAutofit/>
+          </a:bodyPr>
+          <a:lstStyle/>
+          <a:p>
+            <a:pPr algn="l" indent="0" marL="0">
+              <a:buNone/>
+            </a:pPr>
+            <a:r>
+              <a:rPr lang="en-US" sz="900" b="1" dirty="0">
+                <a:solidFill>
+                  <a:srgbClr val="102033"/>
+                </a:solidFill>
+                <a:latin typeface="Aptos" pitchFamily="34" charset="0"/>
+                <a:ea typeface="Aptos" pitchFamily="34" charset="-122"/>
+                <a:cs typeface="Aptos" pitchFamily="34" charset="-120"/>
+              </a:rPr>
+              <a:t>No invade montaje aeronáutico certificado.</a:t>
+            </a:r>
+            <a:endParaRPr lang="en-US" sz="900" dirty="0"/>
+          </a:p>
+        </p:txBody>
+      </p:sp>
+      <p:sp>
+        <p:nvSpPr>
+          <p:cNvPr id="11" name="Shape 9"/>
           <p:cNvSpPr/>
           <p:nvPr/>
         </p:nvSpPr>
@@ -9529,7 +13044,7 @@
       </p:sp>
       <p:sp>
         <p:nvSpPr>
-          <p:cNvPr id="11" name="Text 9"/>
+          <p:cNvPr id="12" name="Text 10"/>
           <p:cNvSpPr/>
           <p:nvPr/>
         </p:nvSpPr>
@@ -9570,7 +13085,7 @@
       </p:sp>
       <p:sp>
         <p:nvSpPr>
-          <p:cNvPr id="12" name="Text 10"/>
+          <p:cNvPr id="13" name="Text 11"/>
           <p:cNvSpPr/>
           <p:nvPr/>
         </p:nvSpPr>
@@ -9611,7 +13126,7 @@
       </p:sp>
       <p:sp>
         <p:nvSpPr>
-          <p:cNvPr id="13" name="Text 11"/>
+          <p:cNvPr id="14" name="Text 12"/>
           <p:cNvSpPr/>
           <p:nvPr/>
         </p:nvSpPr>
@@ -9652,7 +13167,7 @@
       </p:sp>
       <p:sp>
         <p:nvSpPr>
-          <p:cNvPr id="14" name="Text 12"/>
+          <p:cNvPr id="15" name="Text 13"/>
           <p:cNvSpPr/>
           <p:nvPr/>
         </p:nvSpPr>
@@ -9693,7 +13208,7 @@
       </p:sp>
       <p:sp>
         <p:nvSpPr>
-          <p:cNvPr id="15" name="Text 13"/>
+          <p:cNvPr id="16" name="Text 14"/>
           <p:cNvSpPr/>
           <p:nvPr/>
         </p:nvSpPr>
@@ -9734,7 +13249,7 @@
       </p:sp>
       <p:sp>
         <p:nvSpPr>
-          <p:cNvPr id="16" name="Text 14"/>
+          <p:cNvPr id="17" name="Text 15"/>
           <p:cNvSpPr/>
           <p:nvPr/>
         </p:nvSpPr>
@@ -10921,8 +14436,8 @@
         </p:nvSpPr>
         <p:spPr>
           <a:xfrm>
-            <a:off x="1115568" y="2487168"/>
-            <a:ext cx="3886200" cy="530352"/>
+            <a:off x="1115568" y="2432304"/>
+            <a:ext cx="3886200" cy="219456"/>
           </a:xfrm>
           <a:prstGeom prst="rect">
             <a:avLst/>
@@ -10940,7 +14455,48 @@
               <a:buNone/>
             </a:pPr>
             <a:r>
-              <a:rPr lang="en-US" sz="850" dirty="0">
+              <a:rPr lang="en-US" sz="840" b="1" dirty="0">
+                <a:solidFill>
+                  <a:srgbClr val="102033"/>
+                </a:solidFill>
+                <a:latin typeface="Aptos" pitchFamily="34" charset="0"/>
+                <a:ea typeface="Aptos" pitchFamily="34" charset="-122"/>
+                <a:cs typeface="Aptos" pitchFamily="34" charset="-120"/>
+              </a:rPr>
+              <a:t>El AMR no toca montaje certificado.</a:t>
+            </a:r>
+            <a:endParaRPr lang="en-US" sz="840" dirty="0"/>
+          </a:p>
+        </p:txBody>
+      </p:sp>
+      <p:sp>
+        <p:nvSpPr>
+          <p:cNvPr id="11" name="Text 9"/>
+          <p:cNvSpPr/>
+          <p:nvPr/>
+        </p:nvSpPr>
+        <p:spPr>
+          <a:xfrm>
+            <a:off x="1115568" y="2724912"/>
+            <a:ext cx="3886200" cy="219456"/>
+          </a:xfrm>
+          <a:prstGeom prst="rect">
+            <a:avLst/>
+          </a:prstGeom>
+          <a:noFill/>
+          <a:ln/>
+        </p:spPr>
+        <p:txBody>
+          <a:bodyPr wrap="square" lIns="381" tIns="381" rIns="381" bIns="381" rtlCol="0" anchor="ctr">
+            <a:normAutofit/>
+          </a:bodyPr>
+          <a:lstStyle/>
+          <a:p>
+            <a:pPr algn="l" indent="0" marL="0">
+              <a:buNone/>
+            </a:pPr>
+            <a:r>
+              <a:rPr lang="en-US" sz="810" dirty="0">
                 <a:solidFill>
                   <a:srgbClr val="5D6B7A"/>
                 </a:solidFill>
@@ -10948,15 +14504,15 @@
                 <a:ea typeface="Aptos" pitchFamily="34" charset="-122"/>
                 <a:cs typeface="Aptos" pitchFamily="34" charset="-120"/>
               </a:rPr>
-              <a:t>El AMR no toca montaje certificado: estabiliza entregas, retorno de útiles, FOD y trazabilidad alrededor de la estación.</a:t>
-            </a:r>
-            <a:endParaRPr lang="en-US" sz="850" dirty="0"/>
-          </a:p>
-        </p:txBody>
-      </p:sp>
-      <p:sp>
-        <p:nvSpPr>
-          <p:cNvPr id="11" name="Shape 9"/>
+              <a:t>Estabiliza entregas, retornos, FOD y trazabilidad.</a:t>
+            </a:r>
+            <a:endParaRPr lang="en-US" sz="810" dirty="0"/>
+          </a:p>
+        </p:txBody>
+      </p:sp>
+      <p:sp>
+        <p:nvSpPr>
+          <p:cNvPr id="12" name="Shape 10"/>
           <p:cNvSpPr/>
           <p:nvPr/>
         </p:nvSpPr>
@@ -10979,7 +14535,7 @@
       </p:sp>
       <p:sp>
         <p:nvSpPr>
-          <p:cNvPr id="12" name="Shape 10"/>
+          <p:cNvPr id="13" name="Shape 11"/>
           <p:cNvSpPr/>
           <p:nvPr/>
         </p:nvSpPr>
@@ -11004,7 +14560,7 @@
       </p:sp>
       <p:sp>
         <p:nvSpPr>
-          <p:cNvPr id="13" name="Shape 11"/>
+          <p:cNvPr id="14" name="Shape 12"/>
           <p:cNvSpPr/>
           <p:nvPr/>
         </p:nvSpPr>
@@ -11029,7 +14585,7 @@
       </p:sp>
       <p:sp>
         <p:nvSpPr>
-          <p:cNvPr id="14" name="Text 12"/>
+          <p:cNvPr id="15" name="Text 13"/>
           <p:cNvSpPr/>
           <p:nvPr/>
         </p:nvSpPr>
@@ -11070,7 +14626,7 @@
       </p:sp>
       <p:sp>
         <p:nvSpPr>
-          <p:cNvPr id="15" name="Text 13"/>
+          <p:cNvPr id="16" name="Text 14"/>
           <p:cNvSpPr/>
           <p:nvPr/>
         </p:nvSpPr>
@@ -11111,7 +14667,7 @@
       </p:sp>
       <p:sp>
         <p:nvSpPr>
-          <p:cNvPr id="16" name="Shape 14"/>
+          <p:cNvPr id="17" name="Shape 15"/>
           <p:cNvSpPr/>
           <p:nvPr/>
         </p:nvSpPr>
@@ -11138,7 +14694,7 @@
       </p:sp>
       <p:sp>
         <p:nvSpPr>
-          <p:cNvPr id="17" name="Text 15"/>
+          <p:cNvPr id="18" name="Text 16"/>
           <p:cNvSpPr/>
           <p:nvPr/>
         </p:nvSpPr>
@@ -11196,7 +14752,7 @@
       </p:sp>
       <p:sp>
         <p:nvSpPr>
-          <p:cNvPr id="18" name="Shape 16"/>
+          <p:cNvPr id="19" name="Shape 17"/>
           <p:cNvSpPr/>
           <p:nvPr/>
         </p:nvSpPr>
@@ -11220,7 +14776,7 @@
       </p:sp>
       <p:sp>
         <p:nvSpPr>
-          <p:cNvPr id="19" name="Shape 17"/>
+          <p:cNvPr id="20" name="Shape 18"/>
           <p:cNvSpPr/>
           <p:nvPr/>
         </p:nvSpPr>
@@ -11247,7 +14803,7 @@
       </p:sp>
       <p:sp>
         <p:nvSpPr>
-          <p:cNvPr id="20" name="Text 18"/>
+          <p:cNvPr id="21" name="Text 19"/>
           <p:cNvSpPr/>
           <p:nvPr/>
         </p:nvSpPr>
@@ -11305,7 +14861,7 @@
       </p:sp>
       <p:sp>
         <p:nvSpPr>
-          <p:cNvPr id="21" name="Shape 19"/>
+          <p:cNvPr id="22" name="Shape 20"/>
           <p:cNvSpPr/>
           <p:nvPr/>
         </p:nvSpPr>
@@ -11329,7 +14885,7 @@
       </p:sp>
       <p:sp>
         <p:nvSpPr>
-          <p:cNvPr id="22" name="Shape 20"/>
+          <p:cNvPr id="23" name="Shape 21"/>
           <p:cNvSpPr/>
           <p:nvPr/>
         </p:nvSpPr>
@@ -11356,7 +14912,7 @@
       </p:sp>
       <p:sp>
         <p:nvSpPr>
-          <p:cNvPr id="23" name="Text 21"/>
+          <p:cNvPr id="24" name="Text 22"/>
           <p:cNvSpPr/>
           <p:nvPr/>
         </p:nvSpPr>
@@ -11414,14 +14970,14 @@
       </p:sp>
       <p:sp>
         <p:nvSpPr>
-          <p:cNvPr id="24" name="Text 22"/>
-          <p:cNvSpPr/>
-          <p:nvPr/>
-        </p:nvSpPr>
-        <p:spPr>
-          <a:xfrm>
-            <a:off x="6181344" y="4315968"/>
-            <a:ext cx="4937760" cy="502920"/>
+          <p:cNvPr id="25" name="Text 23"/>
+          <p:cNvSpPr/>
+          <p:nvPr/>
+        </p:nvSpPr>
+        <p:spPr>
+          <a:xfrm>
+            <a:off x="6181344" y="4187952"/>
+            <a:ext cx="2926080" cy="182880"/>
           </a:xfrm>
           <a:prstGeom prst="rect">
             <a:avLst/>
@@ -11439,7 +14995,48 @@
               <a:buNone/>
             </a:pPr>
             <a:r>
-              <a:rPr lang="en-US" sz="740" dirty="0">
+              <a:rPr lang="en-US" sz="740" b="1" dirty="0">
+                <a:solidFill>
+                  <a:srgbClr val="102033"/>
+                </a:solidFill>
+                <a:latin typeface="Aptos" pitchFamily="34" charset="0"/>
+                <a:ea typeface="Aptos" pitchFamily="34" charset="-122"/>
+                <a:cs typeface="Aptos" pitchFamily="34" charset="-120"/>
+              </a:rPr>
+              <a:t>Lectura clave para la propuesta</a:t>
+            </a:r>
+            <a:endParaRPr lang="en-US" sz="740" dirty="0"/>
+          </a:p>
+        </p:txBody>
+      </p:sp>
+      <p:sp>
+        <p:nvSpPr>
+          <p:cNvPr id="26" name="Text 24"/>
+          <p:cNvSpPr/>
+          <p:nvPr/>
+        </p:nvSpPr>
+        <p:spPr>
+          <a:xfrm>
+            <a:off x="6181344" y="4462272"/>
+            <a:ext cx="4572000" cy="219456"/>
+          </a:xfrm>
+          <a:prstGeom prst="rect">
+            <a:avLst/>
+          </a:prstGeom>
+          <a:noFill/>
+          <a:ln/>
+        </p:spPr>
+        <p:txBody>
+          <a:bodyPr wrap="square" lIns="381" tIns="381" rIns="381" bIns="381" rtlCol="0" anchor="ctr">
+            <a:normAutofit/>
+          </a:bodyPr>
+          <a:lstStyle/>
+          <a:p>
+            <a:pPr algn="l" indent="0" marL="0">
+              <a:buNone/>
+            </a:pPr>
+            <a:r>
+              <a:rPr lang="en-US" sz="690" dirty="0">
                 <a:solidFill>
                   <a:srgbClr val="1B2430"/>
                 </a:solidFill>
@@ -11447,9 +15044,50 @@
                 <a:ea typeface="Aptos" pitchFamily="34" charset="-122"/>
                 <a:cs typeface="Aptos" pitchFamily="34" charset="-120"/>
               </a:rPr>
-              <a:t>Lectura clave para la propuesta: la sección 19.1 concentra dependencia de kits, herramientas, documentación y disciplina FOD. Ahi el AMR reduce esperas y deja trazas, sin fabricar el HTP.</a:t>
-            </a:r>
-            <a:endParaRPr lang="en-US" sz="740" dirty="0"/>
+              <a:t>La sección 19.1 depende de kits, herramientas y disciplina FOD.</a:t>
+            </a:r>
+            <a:endParaRPr lang="en-US" sz="690" dirty="0"/>
+          </a:p>
+        </p:txBody>
+      </p:sp>
+      <p:sp>
+        <p:nvSpPr>
+          <p:cNvPr id="27" name="Text 25"/>
+          <p:cNvSpPr/>
+          <p:nvPr/>
+        </p:nvSpPr>
+        <p:spPr>
+          <a:xfrm>
+            <a:off x="6181344" y="4718304"/>
+            <a:ext cx="4572000" cy="219456"/>
+          </a:xfrm>
+          <a:prstGeom prst="rect">
+            <a:avLst/>
+          </a:prstGeom>
+          <a:noFill/>
+          <a:ln/>
+        </p:spPr>
+        <p:txBody>
+          <a:bodyPr wrap="square" lIns="381" tIns="381" rIns="381" bIns="381" rtlCol="0" anchor="ctr">
+            <a:normAutofit/>
+          </a:bodyPr>
+          <a:lstStyle/>
+          <a:p>
+            <a:pPr algn="l" indent="0" marL="0">
+              <a:buNone/>
+            </a:pPr>
+            <a:r>
+              <a:rPr lang="en-US" sz="690" dirty="0">
+                <a:solidFill>
+                  <a:srgbClr val="1B2430"/>
+                </a:solidFill>
+                <a:latin typeface="Aptos" pitchFamily="34" charset="0"/>
+                <a:ea typeface="Aptos" pitchFamily="34" charset="-122"/>
+                <a:cs typeface="Aptos" pitchFamily="34" charset="-120"/>
+              </a:rPr>
+              <a:t>El AMR reduce esperas y deja trazas; no fabrica el HTP.</a:t>
+            </a:r>
+            <a:endParaRPr lang="en-US" sz="690" dirty="0"/>
           </a:p>
         </p:txBody>
       </p:sp>
@@ -16152,7 +19790,7 @@
         </p:nvSpPr>
         <p:spPr>
           <a:xfrm>
-            <a:off x="749808" y="4160520"/>
+            <a:off x="749808" y="4114800"/>
             <a:ext cx="2011680" cy="182880"/>
           </a:xfrm>
           <a:prstGeom prst="rect">
@@ -16193,8 +19831,8 @@
         </p:nvSpPr>
         <p:spPr>
           <a:xfrm>
-            <a:off x="749808" y="4498848"/>
-            <a:ext cx="9692640" cy="329184"/>
+            <a:off x="749808" y="4462272"/>
+            <a:ext cx="2926080" cy="201168"/>
           </a:xfrm>
           <a:prstGeom prst="rect">
             <a:avLst/>
@@ -16212,7 +19850,7 @@
               <a:buNone/>
             </a:pPr>
             <a:r>
-              <a:rPr lang="en-US" sz="740" dirty="0">
+              <a:rPr lang="en-US" sz="710" dirty="0">
                 <a:solidFill>
                   <a:srgbClr val="1B2430"/>
                 </a:solidFill>
@@ -16220,9 +19858,91 @@
                 <a:ea typeface="Aptos" pitchFamily="34" charset="-122"/>
                 <a:cs typeface="Aptos" pitchFamily="34" charset="-120"/>
               </a:rPr>
-              <a:t>robot, kit, origen, destino, ruta prevista, ruta ejecutada, lectura RFID/QR, parada de seguridad, confirmación e incidencia FOD si aplica.</a:t>
-            </a:r>
-            <a:endParaRPr lang="en-US" sz="740" dirty="0"/>
+              <a:t>Robot, kit, origen, destino y estación.</a:t>
+            </a:r>
+            <a:endParaRPr lang="en-US" sz="710" dirty="0"/>
+          </a:p>
+        </p:txBody>
+      </p:sp>
+      <p:sp>
+        <p:nvSpPr>
+          <p:cNvPr id="31" name="Text 29"/>
+          <p:cNvSpPr/>
+          <p:nvPr/>
+        </p:nvSpPr>
+        <p:spPr>
+          <a:xfrm>
+            <a:off x="3886200" y="4462272"/>
+            <a:ext cx="2468880" cy="201168"/>
+          </a:xfrm>
+          <a:prstGeom prst="rect">
+            <a:avLst/>
+          </a:prstGeom>
+          <a:noFill/>
+          <a:ln/>
+        </p:spPr>
+        <p:txBody>
+          <a:bodyPr wrap="square" lIns="381" tIns="381" rIns="381" bIns="381" rtlCol="0" anchor="ctr">
+            <a:normAutofit/>
+          </a:bodyPr>
+          <a:lstStyle/>
+          <a:p>
+            <a:pPr algn="l" indent="0" marL="0">
+              <a:buNone/>
+            </a:pPr>
+            <a:r>
+              <a:rPr lang="en-US" sz="710" dirty="0">
+                <a:solidFill>
+                  <a:srgbClr val="1B2430"/>
+                </a:solidFill>
+                <a:latin typeface="Aptos" pitchFamily="34" charset="0"/>
+                <a:ea typeface="Aptos" pitchFamily="34" charset="-122"/>
+                <a:cs typeface="Aptos" pitchFamily="34" charset="-120"/>
+              </a:rPr>
+              <a:t>Ruta prevista y ruta ejecutada.</a:t>
+            </a:r>
+            <a:endParaRPr lang="en-US" sz="710" dirty="0"/>
+          </a:p>
+        </p:txBody>
+      </p:sp>
+      <p:sp>
+        <p:nvSpPr>
+          <p:cNvPr id="32" name="Text 30"/>
+          <p:cNvSpPr/>
+          <p:nvPr/>
+        </p:nvSpPr>
+        <p:spPr>
+          <a:xfrm>
+            <a:off x="6492240" y="4462272"/>
+            <a:ext cx="3840480" cy="201168"/>
+          </a:xfrm>
+          <a:prstGeom prst="rect">
+            <a:avLst/>
+          </a:prstGeom>
+          <a:noFill/>
+          <a:ln/>
+        </p:spPr>
+        <p:txBody>
+          <a:bodyPr wrap="square" lIns="381" tIns="381" rIns="381" bIns="381" rtlCol="0" anchor="ctr">
+            <a:normAutofit/>
+          </a:bodyPr>
+          <a:lstStyle/>
+          <a:p>
+            <a:pPr algn="l" indent="0" marL="0">
+              <a:buNone/>
+            </a:pPr>
+            <a:r>
+              <a:rPr lang="en-US" sz="710" dirty="0">
+                <a:solidFill>
+                  <a:srgbClr val="1B2430"/>
+                </a:solidFill>
+                <a:latin typeface="Aptos" pitchFamily="34" charset="0"/>
+                <a:ea typeface="Aptos" pitchFamily="34" charset="-122"/>
+                <a:cs typeface="Aptos" pitchFamily="34" charset="-120"/>
+              </a:rPr>
+              <a:t>RFID/QR, seguridad, confirmación e incidencia FOD.</a:t>
+            </a:r>
+            <a:endParaRPr lang="en-US" sz="710" dirty="0"/>
           </a:p>
         </p:txBody>
       </p:sp>

--- a/actividad1/slides/Actividad1_AMR_FOD_Kitting_editable.pptx
+++ b/actividad1/slides/Actividad1_AMR_FOD_Kitting_editable.pptx
@@ -5480,7 +5480,7 @@
                 <a:ea typeface="Aptos" pitchFamily="34" charset="-122"/>
                 <a:cs typeface="Aptos" pitchFamily="34" charset="-120"/>
               </a:rPr>
-              <a:t>198.688 € CAPEX</a:t>
+              <a:t>219.856 € CAPEX</a:t>
             </a:r>
             <a:endParaRPr lang="en-US" sz="830" dirty="0"/>
           </a:p>
@@ -5794,7 +5794,7 @@
                 <a:ea typeface="Aptos" pitchFamily="34" charset="-122"/>
                 <a:cs typeface="Aptos" pitchFamily="34" charset="-120"/>
               </a:rPr>
-              <a:t>904.736 € CAPEX</a:t>
+              <a:t>1.018.752 € CAPEX</a:t>
             </a:r>
             <a:endParaRPr lang="en-US" sz="830" dirty="0"/>
           </a:p>
@@ -6108,7 +6108,7 @@
                 <a:ea typeface="Aptos" pitchFamily="34" charset="-122"/>
                 <a:cs typeface="Aptos" pitchFamily="34" charset="-120"/>
               </a:rPr>
-              <a:t>2.051.616 € CAPEX</a:t>
+              <a:t>2.310.896 € CAPEX</a:t>
             </a:r>
             <a:endParaRPr lang="en-US" sz="830" dirty="0"/>
           </a:p>
@@ -6688,7 +6688,7 @@
                 <a:ea typeface="Aptos" pitchFamily="34" charset="-122"/>
                 <a:cs typeface="Aptos" pitchFamily="34" charset="-120"/>
               </a:rPr>
-              <a:t>198.688 €</a:t>
+              <a:t>219.856 €</a:t>
             </a:r>
             <a:endParaRPr lang="en-US" sz="1380" dirty="0"/>
           </a:p>
@@ -6770,7 +6770,7 @@
                 <a:ea typeface="Aptos" pitchFamily="34" charset="-122"/>
                 <a:cs typeface="Aptos" pitchFamily="34" charset="-120"/>
               </a:rPr>
-              <a:t>904.736 €</a:t>
+              <a:t>1.018.752 €</a:t>
             </a:r>
             <a:endParaRPr lang="en-US" sz="1380" dirty="0"/>
           </a:p>
@@ -6852,7 +6852,7 @@
                 <a:ea typeface="Aptos" pitchFamily="34" charset="-122"/>
                 <a:cs typeface="Aptos" pitchFamily="34" charset="-120"/>
               </a:rPr>
-              <a:t>2.051.616 €</a:t>
+              <a:t>2.310.896 €</a:t>
             </a:r>
             <a:endParaRPr lang="en-US" sz="1380" dirty="0"/>
           </a:p>
@@ -7150,7 +7150,7 @@
                 <a:ea typeface="Aptos" pitchFamily="34" charset="-122"/>
                 <a:cs typeface="Aptos" pitchFamily="34" charset="-120"/>
               </a:rPr>
-              <a:t>AMR + sensores + portakits</a:t>
+              <a:t>AMR omni + sensores + portakits</a:t>
             </a:r>
             <a:endParaRPr lang="en-US" sz="580" dirty="0"/>
           </a:p>
@@ -7191,7 +7191,7 @@
                 <a:ea typeface="Aptos" pitchFamily="34" charset="-122"/>
                 <a:cs typeface="Aptos" pitchFamily="34" charset="-120"/>
               </a:rPr>
-              <a:t>69.800</a:t>
+              <a:t>78.500</a:t>
             </a:r>
             <a:endParaRPr lang="en-US" sz="580" dirty="0"/>
           </a:p>
@@ -7232,7 +7232,7 @@
                 <a:ea typeface="Aptos" pitchFamily="34" charset="-122"/>
                 <a:cs typeface="Aptos" pitchFamily="34" charset="-120"/>
               </a:rPr>
-              <a:t>488.600</a:t>
+              <a:t>549.500</a:t>
             </a:r>
             <a:endParaRPr lang="en-US" sz="580" dirty="0"/>
           </a:p>
@@ -7273,7 +7273,7 @@
                 <a:ea typeface="Aptos" pitchFamily="34" charset="-122"/>
                 <a:cs typeface="Aptos" pitchFamily="34" charset="-120"/>
               </a:rPr>
-              <a:t>1.186.600</a:t>
+              <a:t>1.334.500</a:t>
             </a:r>
             <a:endParaRPr lang="en-US" sz="580" dirty="0"/>
           </a:p>
@@ -7380,7 +7380,7 @@
                 <a:ea typeface="Aptos" pitchFamily="34" charset="-122"/>
                 <a:cs typeface="Aptos" pitchFamily="34" charset="-120"/>
               </a:rPr>
-              <a:t>22.000</a:t>
+              <a:t>24.000</a:t>
             </a:r>
             <a:endParaRPr lang="en-US" sz="580" dirty="0"/>
           </a:p>
@@ -7421,7 +7421,7 @@
                 <a:ea typeface="Aptos" pitchFamily="34" charset="-122"/>
                 <a:cs typeface="Aptos" pitchFamily="34" charset="-120"/>
               </a:rPr>
-              <a:t>58.000</a:t>
+              <a:t>65.000</a:t>
             </a:r>
             <a:endParaRPr lang="en-US" sz="580" dirty="0"/>
           </a:p>
@@ -7462,7 +7462,7 @@
                 <a:ea typeface="Aptos" pitchFamily="34" charset="-122"/>
                 <a:cs typeface="Aptos" pitchFamily="34" charset="-120"/>
               </a:rPr>
-              <a:t>105.000</a:t>
+              <a:t>120.000</a:t>
             </a:r>
             <a:endParaRPr lang="en-US" sz="580" dirty="0"/>
           </a:p>
@@ -7569,7 +7569,7 @@
                 <a:ea typeface="Aptos" pitchFamily="34" charset="-122"/>
                 <a:cs typeface="Aptos" pitchFamily="34" charset="-120"/>
               </a:rPr>
-              <a:t>42.000</a:t>
+              <a:t>46.000</a:t>
             </a:r>
             <a:endParaRPr lang="en-US" sz="580" dirty="0"/>
           </a:p>
@@ -7610,7 +7610,7 @@
                 <a:ea typeface="Aptos" pitchFamily="34" charset="-122"/>
                 <a:cs typeface="Aptos" pitchFamily="34" charset="-120"/>
               </a:rPr>
-              <a:t>112.000</a:t>
+              <a:t>126.000</a:t>
             </a:r>
             <a:endParaRPr lang="en-US" sz="580" dirty="0"/>
           </a:p>
@@ -7651,7 +7651,7 @@
                 <a:ea typeface="Aptos" pitchFamily="34" charset="-122"/>
                 <a:cs typeface="Aptos" pitchFamily="34" charset="-120"/>
               </a:rPr>
-              <a:t>215.000</a:t>
+              <a:t>245.000</a:t>
             </a:r>
             <a:endParaRPr lang="en-US" sz="580" dirty="0"/>
           </a:p>
@@ -7758,7 +7758,7 @@
                 <a:ea typeface="Aptos" pitchFamily="34" charset="-122"/>
                 <a:cs typeface="Aptos" pitchFamily="34" charset="-120"/>
               </a:rPr>
-              <a:t>18.000</a:t>
+              <a:t>20.000</a:t>
             </a:r>
             <a:endParaRPr lang="en-US" sz="580" dirty="0"/>
           </a:p>
@@ -7799,7 +7799,7 @@
                 <a:ea typeface="Aptos" pitchFamily="34" charset="-122"/>
                 <a:cs typeface="Aptos" pitchFamily="34" charset="-120"/>
               </a:rPr>
-              <a:t>52.000</a:t>
+              <a:t>60.000</a:t>
             </a:r>
             <a:endParaRPr lang="en-US" sz="580" dirty="0"/>
           </a:p>
@@ -7840,7 +7840,7 @@
                 <a:ea typeface="Aptos" pitchFamily="34" charset="-122"/>
                 <a:cs typeface="Aptos" pitchFamily="34" charset="-120"/>
               </a:rPr>
-              <a:t>120.000</a:t>
+              <a:t>135.000</a:t>
             </a:r>
             <a:endParaRPr lang="en-US" sz="580" dirty="0"/>
           </a:p>
@@ -7947,7 +7947,7 @@
                 <a:ea typeface="Aptos" pitchFamily="34" charset="-122"/>
                 <a:cs typeface="Aptos" pitchFamily="34" charset="-120"/>
               </a:rPr>
-              <a:t>8.500</a:t>
+              <a:t>9.500</a:t>
             </a:r>
             <a:endParaRPr lang="en-US" sz="580" dirty="0"/>
           </a:p>
@@ -7988,7 +7988,7 @@
                 <a:ea typeface="Aptos" pitchFamily="34" charset="-122"/>
                 <a:cs typeface="Aptos" pitchFamily="34" charset="-120"/>
               </a:rPr>
-              <a:t>24.000</a:t>
+              <a:t>27.000</a:t>
             </a:r>
             <a:endParaRPr lang="en-US" sz="580" dirty="0"/>
           </a:p>
@@ -8029,7 +8029,7 @@
                 <a:ea typeface="Aptos" pitchFamily="34" charset="-122"/>
                 <a:cs typeface="Aptos" pitchFamily="34" charset="-120"/>
               </a:rPr>
-              <a:t>42.000</a:t>
+              <a:t>46.000</a:t>
             </a:r>
             <a:endParaRPr lang="en-US" sz="580" dirty="0"/>
           </a:p>
@@ -8136,7 +8136,7 @@
                 <a:ea typeface="Aptos" pitchFamily="34" charset="-122"/>
                 <a:cs typeface="Aptos" pitchFamily="34" charset="-120"/>
               </a:rPr>
-              <a:t>5.600</a:t>
+              <a:t>6.300</a:t>
             </a:r>
             <a:endParaRPr lang="en-US" sz="580" dirty="0"/>
           </a:p>
@@ -8177,7 +8177,7 @@
                 <a:ea typeface="Aptos" pitchFamily="34" charset="-122"/>
                 <a:cs typeface="Aptos" pitchFamily="34" charset="-120"/>
               </a:rPr>
-              <a:t>39.200</a:t>
+              <a:t>44.100</a:t>
             </a:r>
             <a:endParaRPr lang="en-US" sz="580" dirty="0"/>
           </a:p>
@@ -8218,7 +8218,7 @@
                 <a:ea typeface="Aptos" pitchFamily="34" charset="-122"/>
                 <a:cs typeface="Aptos" pitchFamily="34" charset="-120"/>
               </a:rPr>
-              <a:t>95.200</a:t>
+              <a:t>106.800</a:t>
             </a:r>
             <a:endParaRPr lang="en-US" sz="580" dirty="0"/>
           </a:p>
@@ -8325,7 +8325,7 @@
                 <a:ea typeface="Aptos" pitchFamily="34" charset="-122"/>
                 <a:cs typeface="Aptos" pitchFamily="34" charset="-120"/>
               </a:rPr>
-              <a:t>11.500</a:t>
+              <a:t>12.000</a:t>
             </a:r>
             <a:endParaRPr lang="en-US" sz="580" dirty="0"/>
           </a:p>
@@ -8366,7 +8366,7 @@
                 <a:ea typeface="Aptos" pitchFamily="34" charset="-122"/>
                 <a:cs typeface="Aptos" pitchFamily="34" charset="-120"/>
               </a:rPr>
-              <a:t>34.000</a:t>
+              <a:t>38.000</a:t>
             </a:r>
             <a:endParaRPr lang="en-US" sz="580" dirty="0"/>
           </a:p>
@@ -8407,7 +8407,7 @@
                 <a:ea typeface="Aptos" pitchFamily="34" charset="-122"/>
                 <a:cs typeface="Aptos" pitchFamily="34" charset="-120"/>
               </a:rPr>
-              <a:t>68.000</a:t>
+              <a:t>76.000</a:t>
             </a:r>
             <a:endParaRPr lang="en-US" sz="580" dirty="0"/>
           </a:p>
@@ -8514,7 +8514,7 @@
                 <a:ea typeface="Aptos" pitchFamily="34" charset="-122"/>
                 <a:cs typeface="Aptos" pitchFamily="34" charset="-120"/>
               </a:rPr>
-              <a:t>21.288</a:t>
+              <a:t>23.556</a:t>
             </a:r>
             <a:endParaRPr lang="en-US" sz="580" dirty="0"/>
           </a:p>
@@ -8555,7 +8555,7 @@
                 <a:ea typeface="Aptos" pitchFamily="34" charset="-122"/>
                 <a:cs typeface="Aptos" pitchFamily="34" charset="-120"/>
               </a:rPr>
-              <a:t>96.936</a:t>
+              <a:t>109.152</a:t>
             </a:r>
             <a:endParaRPr lang="en-US" sz="580" dirty="0"/>
           </a:p>
@@ -8596,7 +8596,7 @@
                 <a:ea typeface="Aptos" pitchFamily="34" charset="-122"/>
                 <a:cs typeface="Aptos" pitchFamily="34" charset="-120"/>
               </a:rPr>
-              <a:t>219.816</a:t>
+              <a:t>247.596</a:t>
             </a:r>
             <a:endParaRPr lang="en-US" sz="580" dirty="0"/>
           </a:p>
@@ -8637,7 +8637,7 @@
                 <a:ea typeface="Aptos" pitchFamily="34" charset="-122"/>
                 <a:cs typeface="Aptos" pitchFamily="34" charset="-120"/>
               </a:rPr>
-              <a:t>Referencias publicas: MiR250, LD-250, Hokuyo, Intel RealSense y Zebra.</a:t>
+              <a:t>Referencias publicas: RB-KAIROS/AGILOX, MiR250/LD-250, Hokuyo, Intel, Zebra y SICK.</a:t>
             </a:r>
             <a:endParaRPr lang="en-US" sz="640" dirty="0"/>
           </a:p>
@@ -9557,7 +9557,7 @@
                 <a:ea typeface="Aptos" pitchFamily="34" charset="-122"/>
                 <a:cs typeface="Aptos" pitchFamily="34" charset="-120"/>
               </a:rPr>
-              <a:t>62.829 €</a:t>
+              <a:t>80.260 €</a:t>
             </a:r>
             <a:endParaRPr lang="en-US" sz="550" dirty="0"/>
           </a:p>
@@ -9679,7 +9679,7 @@
         <p:spPr>
           <a:xfrm>
             <a:off x="6812280" y="3364992"/>
-            <a:ext cx="2880360" cy="109728"/>
+            <a:ext cx="3017520" cy="109728"/>
           </a:xfrm>
           <a:prstGeom prst="rect">
             <a:avLst/>
@@ -9744,7 +9744,7 @@
         </p:nvSpPr>
         <p:spPr>
           <a:xfrm>
-            <a:off x="9738360" y="3319272"/>
+            <a:off x="9875520" y="3319272"/>
             <a:ext cx="868680" cy="146304"/>
           </a:xfrm>
           <a:prstGeom prst="rect">
@@ -9771,7 +9771,7 @@
                 <a:ea typeface="Aptos" pitchFamily="34" charset="-122"/>
                 <a:cs typeface="Aptos" pitchFamily="34" charset="-120"/>
               </a:rPr>
-              <a:t>316.429 €</a:t>
+              <a:t>359.263 €</a:t>
             </a:r>
             <a:endParaRPr lang="en-US" sz="550" dirty="0"/>
           </a:p>
@@ -9893,7 +9893,7 @@
         <p:spPr>
           <a:xfrm>
             <a:off x="6812280" y="4325112"/>
-            <a:ext cx="4160520" cy="109728"/>
+            <a:ext cx="4389120" cy="109728"/>
           </a:xfrm>
           <a:prstGeom prst="rect">
             <a:avLst/>
@@ -9958,7 +9958,7 @@
         </p:nvSpPr>
         <p:spPr>
           <a:xfrm>
-            <a:off x="11018520" y="4279392"/>
+            <a:off x="11247120" y="4279392"/>
             <a:ext cx="868680" cy="146304"/>
           </a:xfrm>
           <a:prstGeom prst="rect">
@@ -9985,7 +9985,7 @@
                 <a:ea typeface="Aptos" pitchFamily="34" charset="-122"/>
                 <a:cs typeface="Aptos" pitchFamily="34" charset="-120"/>
               </a:rPr>
-              <a:t>714.125 €</a:t>
+              <a:t>814.017 €</a:t>
             </a:r>
             <a:endParaRPr lang="en-US" sz="550" dirty="0"/>
           </a:p>
@@ -17406,7 +17406,7 @@
                 <a:ea typeface="Aptos Display" pitchFamily="34" charset="-122"/>
                 <a:cs typeface="Aptos Display" pitchFamily="34" charset="-120"/>
               </a:rPr>
-              <a:t>Por que AMR omnidireccional</a:t>
+              <a:t>Matriz de decisión, no seleccion por intuicion</a:t>
             </a:r>
             <a:endParaRPr lang="en-US" sz="2000" dirty="0"/>
           </a:p>
@@ -17537,36 +17537,36 @@
         </p:nvSpPr>
         <p:spPr>
           <a:xfrm>
-            <a:off x="822960" y="1234440"/>
-            <a:ext cx="2926080" cy="320040"/>
-          </a:xfrm>
-          <a:prstGeom prst="rect">
-            <a:avLst/>
-          </a:prstGeom>
-          <a:noFill/>
-          <a:ln/>
-        </p:spPr>
-        <p:txBody>
-          <a:bodyPr wrap="square" lIns="381" tIns="381" rIns="381" bIns="381" rtlCol="0" anchor="ctr">
-            <a:normAutofit/>
-          </a:bodyPr>
-          <a:lstStyle/>
-          <a:p>
-            <a:pPr algn="l" indent="0" marL="0">
-              <a:buNone/>
-            </a:pPr>
-            <a:r>
-              <a:rPr lang="en-US" sz="1900" b="1" dirty="0">
-                <a:solidFill>
-                  <a:srgbClr val="1F7A8C"/>
-                </a:solidFill>
-                <a:latin typeface="Aptos" pitchFamily="34" charset="0"/>
-                <a:ea typeface="Aptos" pitchFamily="34" charset="-122"/>
-                <a:cs typeface="Aptos" pitchFamily="34" charset="-120"/>
-              </a:rPr>
-              <a:t>Seleccionado</a:t>
-            </a:r>
-            <a:endParaRPr lang="en-US" sz="1900" dirty="0"/>
+            <a:off x="777240" y="1005840"/>
+            <a:ext cx="2468880" cy="155448"/>
+          </a:xfrm>
+          <a:prstGeom prst="rect">
+            <a:avLst/>
+          </a:prstGeom>
+          <a:noFill/>
+          <a:ln/>
+        </p:spPr>
+        <p:txBody>
+          <a:bodyPr wrap="square" lIns="381" tIns="381" rIns="381" bIns="381" rtlCol="0" anchor="ctr">
+            <a:normAutofit/>
+          </a:bodyPr>
+          <a:lstStyle/>
+          <a:p>
+            <a:pPr algn="l" indent="0" marL="0">
+              <a:buNone/>
+            </a:pPr>
+            <a:r>
+              <a:rPr lang="en-US" sz="650" b="1" dirty="0">
+                <a:solidFill>
+                  <a:srgbClr val="5D6B7A"/>
+                </a:solidFill>
+                <a:latin typeface="Aptos" pitchFamily="34" charset="0"/>
+                <a:ea typeface="Aptos" pitchFamily="34" charset="-122"/>
+                <a:cs typeface="Aptos" pitchFamily="34" charset="-120"/>
+              </a:rPr>
+              <a:t>PUNTUACION PONDERADA SOBRE 5</a:t>
+            </a:r>
+            <a:endParaRPr lang="en-US" sz="650" dirty="0"/>
           </a:p>
         </p:txBody>
       </p:sp>
@@ -17578,26 +17578,67 @@
         </p:nvSpPr>
         <p:spPr>
           <a:xfrm>
-            <a:off x="841248" y="1700784"/>
-            <a:ext cx="3200400" cy="347472"/>
-          </a:xfrm>
-          <a:prstGeom prst="rect">
-            <a:avLst/>
-          </a:prstGeom>
-          <a:noFill/>
-          <a:ln/>
-        </p:spPr>
-        <p:txBody>
-          <a:bodyPr wrap="square" lIns="381" tIns="381" rIns="381" bIns="381" rtlCol="0" anchor="ctr">
-            <a:normAutofit/>
-          </a:bodyPr>
-          <a:lstStyle/>
-          <a:p>
-            <a:pPr algn="l" indent="0" marL="0">
-              <a:buNone/>
-            </a:pPr>
-            <a:r>
-              <a:rPr lang="en-US" sz="840" b="1" dirty="0">
+            <a:off x="777240" y="1298448"/>
+            <a:ext cx="1143000" cy="329184"/>
+          </a:xfrm>
+          <a:prstGeom prst="rect">
+            <a:avLst/>
+          </a:prstGeom>
+          <a:noFill/>
+          <a:ln/>
+        </p:spPr>
+        <p:txBody>
+          <a:bodyPr wrap="square" lIns="381" tIns="381" rIns="381" bIns="381" rtlCol="0" anchor="ctr">
+            <a:normAutofit/>
+          </a:bodyPr>
+          <a:lstStyle/>
+          <a:p>
+            <a:pPr algn="l" indent="0" marL="0">
+              <a:buNone/>
+            </a:pPr>
+            <a:r>
+              <a:rPr lang="en-US" sz="2300" b="1" dirty="0">
+                <a:solidFill>
+                  <a:srgbClr val="2A9D8F"/>
+                </a:solidFill>
+                <a:latin typeface="Aptos" pitchFamily="34" charset="0"/>
+                <a:ea typeface="Aptos" pitchFamily="34" charset="-122"/>
+                <a:cs typeface="Aptos" pitchFamily="34" charset="-120"/>
+              </a:rPr>
+              <a:t>4,25</a:t>
+            </a:r>
+            <a:endParaRPr lang="en-US" sz="2300" dirty="0"/>
+          </a:p>
+        </p:txBody>
+      </p:sp>
+      <p:sp>
+        <p:nvSpPr>
+          <p:cNvPr id="10" name="Text 8"/>
+          <p:cNvSpPr/>
+          <p:nvPr/>
+        </p:nvSpPr>
+        <p:spPr>
+          <a:xfrm>
+            <a:off x="2331720" y="1261872"/>
+            <a:ext cx="3383280" cy="457200"/>
+          </a:xfrm>
+          <a:prstGeom prst="rect">
+            <a:avLst/>
+          </a:prstGeom>
+          <a:noFill/>
+          <a:ln/>
+        </p:spPr>
+        <p:txBody>
+          <a:bodyPr wrap="square" lIns="381" tIns="381" rIns="381" bIns="381" rtlCol="0" anchor="ctr">
+            <a:normAutofit/>
+          </a:bodyPr>
+          <a:lstStyle/>
+          <a:p>
+            <a:pPr algn="l" indent="0" marL="0">
+              <a:buNone/>
+            </a:pPr>
+            <a:r>
+              <a:rPr lang="en-US" sz="870" b="1" dirty="0">
                 <a:solidFill>
                   <a:srgbClr val="102033"/>
                 </a:solidFill>
@@ -17605,34 +17646,131 @@
                 <a:ea typeface="Aptos" pitchFamily="34" charset="-122"/>
                 <a:cs typeface="Aptos" pitchFamily="34" charset="-120"/>
               </a:rPr>
-              <a:t>AMR omnidireccional representable en CoppeliaSim</a:t>
-            </a:r>
-            <a:endParaRPr lang="en-US" sz="840" dirty="0"/>
-          </a:p>
-        </p:txBody>
-      </p:sp>
-      <p:sp>
-        <p:nvSpPr>
-          <p:cNvPr id="10" name="Shape 8"/>
-          <p:cNvSpPr/>
-          <p:nvPr/>
-        </p:nvSpPr>
-        <p:spPr>
-          <a:xfrm>
-            <a:off x="1261872" y="2606040"/>
-            <a:ext cx="1623060" cy="1051560"/>
-          </a:xfrm>
-          <a:prstGeom prst="roundRect">
-            <a:avLst>
-              <a:gd name="adj" fmla="val 6957"/>
-            </a:avLst>
+              <a:t>AMR omnidireccional</a:t>
+            </a:r>
+            <a:endParaRPr lang="en-US" sz="870" dirty="0"/>
+          </a:p>
+          <a:p>
+            <a:pPr algn="l" indent="0" marL="0">
+              <a:buNone/>
+            </a:pPr>
+            <a:r>
+              <a:rPr lang="en-US" sz="870" b="1" dirty="0">
+                <a:solidFill>
+                  <a:srgbClr val="102033"/>
+                </a:solidFill>
+                <a:latin typeface="Aptos" pitchFamily="34" charset="0"/>
+                <a:ea typeface="Aptos" pitchFamily="34" charset="-122"/>
+                <a:cs typeface="Aptos" pitchFamily="34" charset="-120"/>
+              </a:rPr>
+              <a:t>RB-KAIROS/AGILOX-class</a:t>
+            </a:r>
+            <a:endParaRPr lang="en-US" sz="870" dirty="0"/>
+          </a:p>
+        </p:txBody>
+      </p:sp>
+      <p:sp>
+        <p:nvSpPr>
+          <p:cNvPr id="11" name="Text 9"/>
+          <p:cNvSpPr/>
+          <p:nvPr/>
+        </p:nvSpPr>
+        <p:spPr>
+          <a:xfrm>
+            <a:off x="804672" y="1901952"/>
+            <a:ext cx="4663440" cy="384048"/>
+          </a:xfrm>
+          <a:prstGeom prst="rect">
+            <a:avLst/>
+          </a:prstGeom>
+          <a:noFill/>
+          <a:ln/>
+        </p:spPr>
+        <p:txBody>
+          <a:bodyPr wrap="square" lIns="381" tIns="381" rIns="381" bIns="381" rtlCol="0" anchor="ctr">
+            <a:normAutofit/>
+          </a:bodyPr>
+          <a:lstStyle/>
+          <a:p>
+            <a:pPr algn="l" indent="0" marL="0">
+              <a:buNone/>
+            </a:pPr>
+            <a:r>
+              <a:rPr lang="en-US" sz="640" dirty="0">
+                <a:solidFill>
+                  <a:srgbClr val="5D6B7A"/>
+                </a:solidFill>
+                <a:latin typeface="Aptos" pitchFamily="34" charset="0"/>
+                <a:ea typeface="Aptos" pitchFamily="34" charset="-122"/>
+                <a:cs typeface="Aptos" pitchFamily="34" charset="-120"/>
+              </a:rPr>
+              <a:t>Gana por maniobra en estación y representabilidad en CoppeliaSim; no por ser la opcion mas barata.</a:t>
+            </a:r>
+            <a:endParaRPr lang="en-US" sz="640" dirty="0"/>
+          </a:p>
+        </p:txBody>
+      </p:sp>
+      <p:sp>
+        <p:nvSpPr>
+          <p:cNvPr id="12" name="Text 10"/>
+          <p:cNvSpPr/>
+          <p:nvPr/>
+        </p:nvSpPr>
+        <p:spPr>
+          <a:xfrm>
+            <a:off x="822960" y="2633472"/>
+            <a:ext cx="2331720" cy="164592"/>
+          </a:xfrm>
+          <a:prstGeom prst="rect">
+            <a:avLst/>
+          </a:prstGeom>
+          <a:noFill/>
+          <a:ln/>
+        </p:spPr>
+        <p:txBody>
+          <a:bodyPr wrap="square" lIns="381" tIns="381" rIns="381" bIns="381" rtlCol="0" anchor="ctr">
+            <a:normAutofit/>
+          </a:bodyPr>
+          <a:lstStyle/>
+          <a:p>
+            <a:pPr algn="l" indent="0" marL="0">
+              <a:buNone/>
+            </a:pPr>
+            <a:r>
+              <a:rPr lang="en-US" sz="660" b="1" dirty="0">
+                <a:solidFill>
+                  <a:srgbClr val="1B2430"/>
+                </a:solidFill>
+                <a:latin typeface="Aptos" pitchFamily="34" charset="0"/>
+                <a:ea typeface="Aptos" pitchFamily="34" charset="-122"/>
+                <a:cs typeface="Aptos" pitchFamily="34" charset="-120"/>
+              </a:rPr>
+              <a:t>AMR omnidireccional</a:t>
+            </a:r>
+            <a:endParaRPr lang="en-US" sz="660" dirty="0"/>
+          </a:p>
+        </p:txBody>
+      </p:sp>
+      <p:sp>
+        <p:nvSpPr>
+          <p:cNvPr id="13" name="Shape 11"/>
+          <p:cNvSpPr/>
+          <p:nvPr/>
+        </p:nvSpPr>
+        <p:spPr>
+          <a:xfrm>
+            <a:off x="3493008" y="2670048"/>
+            <a:ext cx="3749040" cy="128016"/>
+          </a:xfrm>
+          <a:prstGeom prst="rect">
+            <a:avLst/>
           </a:prstGeom>
           <a:solidFill>
-            <a:srgbClr val="E9F5FA"/>
+            <a:srgbClr val="E8EEF4"/>
           </a:solidFill>
           <a:ln w="12700">
             <a:solidFill>
-              <a:srgbClr val="102033"/>
+              <a:srgbClr val="E8EEF4"/>
             </a:solidFill>
             <a:prstDash val="solid"/>
           </a:ln>
@@ -17640,24 +17778,24 @@
       </p:sp>
       <p:sp>
         <p:nvSpPr>
-          <p:cNvPr id="11" name="Shape 9"/>
-          <p:cNvSpPr/>
-          <p:nvPr/>
-        </p:nvSpPr>
-        <p:spPr>
-          <a:xfrm>
-            <a:off x="1399032" y="2754630"/>
-            <a:ext cx="160020" cy="754380"/>
+          <p:cNvPr id="14" name="Shape 12"/>
+          <p:cNvSpPr/>
+          <p:nvPr/>
+        </p:nvSpPr>
+        <p:spPr>
+          <a:xfrm>
+            <a:off x="3493008" y="2670048"/>
+            <a:ext cx="3520440" cy="128016"/>
           </a:xfrm>
           <a:prstGeom prst="rect">
             <a:avLst/>
           </a:prstGeom>
           <a:solidFill>
-            <a:srgbClr val="1B2430"/>
+            <a:srgbClr val="2A9D8F"/>
           </a:solidFill>
           <a:ln w="12700">
             <a:solidFill>
-              <a:srgbClr val="1B2430"/>
+              <a:srgbClr val="2A9D8F"/>
             </a:solidFill>
             <a:prstDash val="solid"/>
           </a:ln>
@@ -17665,24 +17803,106 @@
       </p:sp>
       <p:sp>
         <p:nvSpPr>
-          <p:cNvPr id="12" name="Shape 10"/>
-          <p:cNvSpPr/>
-          <p:nvPr/>
-        </p:nvSpPr>
-        <p:spPr>
-          <a:xfrm>
-            <a:off x="2587752" y="2754630"/>
-            <a:ext cx="160020" cy="754380"/>
+          <p:cNvPr id="15" name="Text 13"/>
+          <p:cNvSpPr/>
+          <p:nvPr/>
+        </p:nvSpPr>
+        <p:spPr>
+          <a:xfrm>
+            <a:off x="7452360" y="2624328"/>
+            <a:ext cx="384048" cy="164592"/>
+          </a:xfrm>
+          <a:prstGeom prst="rect">
+            <a:avLst/>
+          </a:prstGeom>
+          <a:noFill/>
+          <a:ln/>
+        </p:spPr>
+        <p:txBody>
+          <a:bodyPr wrap="square" lIns="381" tIns="381" rIns="381" bIns="381" rtlCol="0" anchor="ctr">
+            <a:normAutofit/>
+          </a:bodyPr>
+          <a:lstStyle/>
+          <a:p>
+            <a:pPr algn="l" indent="0" marL="0">
+              <a:buNone/>
+            </a:pPr>
+            <a:r>
+              <a:rPr lang="en-US" sz="660" b="1" dirty="0">
+                <a:solidFill>
+                  <a:srgbClr val="2A9D8F"/>
+                </a:solidFill>
+                <a:latin typeface="Aptos" pitchFamily="34" charset="0"/>
+                <a:ea typeface="Aptos" pitchFamily="34" charset="-122"/>
+                <a:cs typeface="Aptos" pitchFamily="34" charset="-120"/>
+              </a:rPr>
+              <a:t>4,25</a:t>
+            </a:r>
+            <a:endParaRPr lang="en-US" sz="660" dirty="0"/>
+          </a:p>
+        </p:txBody>
+      </p:sp>
+      <p:sp>
+        <p:nvSpPr>
+          <p:cNvPr id="16" name="Text 14"/>
+          <p:cNvSpPr/>
+          <p:nvPr/>
+        </p:nvSpPr>
+        <p:spPr>
+          <a:xfrm>
+            <a:off x="822960" y="3054096"/>
+            <a:ext cx="2331720" cy="164592"/>
+          </a:xfrm>
+          <a:prstGeom prst="rect">
+            <a:avLst/>
+          </a:prstGeom>
+          <a:noFill/>
+          <a:ln/>
+        </p:spPr>
+        <p:txBody>
+          <a:bodyPr wrap="square" lIns="381" tIns="381" rIns="381" bIns="381" rtlCol="0" anchor="ctr">
+            <a:normAutofit/>
+          </a:bodyPr>
+          <a:lstStyle/>
+          <a:p>
+            <a:pPr algn="l" indent="0" marL="0">
+              <a:buNone/>
+            </a:pPr>
+            <a:r>
+              <a:rPr lang="en-US" sz="660" b="1" dirty="0">
+                <a:solidFill>
+                  <a:srgbClr val="1B2430"/>
+                </a:solidFill>
+                <a:latin typeface="Aptos" pitchFamily="34" charset="0"/>
+                <a:ea typeface="Aptos" pitchFamily="34" charset="-122"/>
+                <a:cs typeface="Aptos" pitchFamily="34" charset="-120"/>
+              </a:rPr>
+              <a:t>AMR diferencial MiR/Omron</a:t>
+            </a:r>
+            <a:endParaRPr lang="en-US" sz="660" dirty="0"/>
+          </a:p>
+        </p:txBody>
+      </p:sp>
+      <p:sp>
+        <p:nvSpPr>
+          <p:cNvPr id="17" name="Shape 15"/>
+          <p:cNvSpPr/>
+          <p:nvPr/>
+        </p:nvSpPr>
+        <p:spPr>
+          <a:xfrm>
+            <a:off x="3493008" y="3090672"/>
+            <a:ext cx="3749040" cy="128016"/>
           </a:xfrm>
           <a:prstGeom prst="rect">
             <a:avLst/>
           </a:prstGeom>
           <a:solidFill>
-            <a:srgbClr val="1B2430"/>
+            <a:srgbClr val="E8EEF4"/>
           </a:solidFill>
           <a:ln w="12700">
             <a:solidFill>
-              <a:srgbClr val="1B2430"/>
+              <a:srgbClr val="E8EEF4"/>
             </a:solidFill>
             <a:prstDash val="solid"/>
           </a:ln>
@@ -17690,105 +17910,14 @@
       </p:sp>
       <p:sp>
         <p:nvSpPr>
-          <p:cNvPr id="13" name="Shape 11"/>
-          <p:cNvSpPr/>
-          <p:nvPr/>
-        </p:nvSpPr>
-        <p:spPr>
-          <a:xfrm>
-            <a:off x="1810512" y="2857500"/>
-            <a:ext cx="548640" cy="548640"/>
-          </a:xfrm>
-          <a:prstGeom prst="ellipse">
-            <a:avLst/>
-          </a:prstGeom>
-          <a:solidFill>
-            <a:srgbClr val="BDEAF6"/>
-          </a:solidFill>
-          <a:ln w="13970">
-            <a:solidFill>
-              <a:srgbClr val="2DB7E5"/>
-            </a:solidFill>
-            <a:prstDash val="solid"/>
-          </a:ln>
-        </p:spPr>
-      </p:sp>
-      <p:sp>
-        <p:nvSpPr>
-          <p:cNvPr id="14" name="Shape 12"/>
-          <p:cNvSpPr/>
-          <p:nvPr/>
-        </p:nvSpPr>
-        <p:spPr>
-          <a:xfrm>
-            <a:off x="1981962" y="3028950"/>
-            <a:ext cx="205740" cy="205740"/>
-          </a:xfrm>
-          <a:prstGeom prst="ellipse">
-            <a:avLst/>
-          </a:prstGeom>
-          <a:solidFill>
-            <a:srgbClr val="2DB7E5"/>
-          </a:solidFill>
-          <a:ln w="12700">
-            <a:solidFill>
-              <a:srgbClr val="2DB7E5"/>
-            </a:solidFill>
-            <a:prstDash val="solid"/>
-          </a:ln>
-        </p:spPr>
-      </p:sp>
-      <p:sp>
-        <p:nvSpPr>
-          <p:cNvPr id="15" name="Text 13"/>
-          <p:cNvSpPr/>
-          <p:nvPr/>
-        </p:nvSpPr>
-        <p:spPr>
-          <a:xfrm>
-            <a:off x="841248" y="4069080"/>
-            <a:ext cx="3291840" cy="502920"/>
-          </a:xfrm>
-          <a:prstGeom prst="rect">
-            <a:avLst/>
-          </a:prstGeom>
-          <a:noFill/>
-          <a:ln/>
-        </p:spPr>
-        <p:txBody>
-          <a:bodyPr wrap="square" lIns="381" tIns="381" rIns="381" bIns="381" rtlCol="0" anchor="ctr">
-            <a:normAutofit/>
-          </a:bodyPr>
-          <a:lstStyle/>
-          <a:p>
-            <a:pPr algn="l" indent="0" marL="0">
-              <a:buNone/>
-            </a:pPr>
-            <a:r>
-              <a:rPr lang="en-US" sz="760" dirty="0">
-                <a:solidFill>
-                  <a:srgbClr val="5D6B7A"/>
-                </a:solidFill>
-                <a:latin typeface="Aptos" pitchFamily="34" charset="0"/>
-                <a:ea typeface="Aptos" pitchFamily="34" charset="-122"/>
-                <a:cs typeface="Aptos" pitchFamily="34" charset="-120"/>
-              </a:rPr>
-              <a:t>Movimiento lateral sin reorientar carga; mejor cerca de útiles, estaciones y operarios.</a:t>
-            </a:r>
-            <a:endParaRPr lang="en-US" sz="760" dirty="0"/>
-          </a:p>
-        </p:txBody>
-      </p:sp>
-      <p:sp>
-        <p:nvSpPr>
-          <p:cNvPr id="16" name="Shape 14"/>
-          <p:cNvSpPr/>
-          <p:nvPr/>
-        </p:nvSpPr>
-        <p:spPr>
-          <a:xfrm>
-            <a:off x="5669280" y="1417320"/>
-            <a:ext cx="109728" cy="109728"/>
+          <p:cNvPr id="18" name="Shape 16"/>
+          <p:cNvSpPr/>
+          <p:nvPr/>
+        </p:nvSpPr>
+        <p:spPr>
+          <a:xfrm>
+            <a:off x="3493008" y="3090672"/>
+            <a:ext cx="3200400" cy="128016"/>
           </a:xfrm>
           <a:prstGeom prst="rect">
             <a:avLst/>
@@ -17806,32 +17935,73 @@
       </p:sp>
       <p:sp>
         <p:nvSpPr>
-          <p:cNvPr id="17" name="Text 15"/>
-          <p:cNvSpPr/>
-          <p:nvPr/>
-        </p:nvSpPr>
-        <p:spPr>
-          <a:xfrm>
-            <a:off x="5925312" y="1298448"/>
-            <a:ext cx="4480560" cy="329184"/>
-          </a:xfrm>
-          <a:prstGeom prst="rect">
-            <a:avLst/>
-          </a:prstGeom>
-          <a:noFill/>
-          <a:ln/>
-        </p:spPr>
-        <p:txBody>
-          <a:bodyPr wrap="square" lIns="381" tIns="381" rIns="381" bIns="381" rtlCol="0" anchor="ctr">
-            <a:normAutofit/>
-          </a:bodyPr>
-          <a:lstStyle/>
-          <a:p>
-            <a:pPr algn="l" indent="0" marL="0">
-              <a:buNone/>
-            </a:pPr>
-            <a:r>
-              <a:rPr lang="en-US" sz="820" dirty="0">
+          <p:cNvPr id="19" name="Text 17"/>
+          <p:cNvSpPr/>
+          <p:nvPr/>
+        </p:nvSpPr>
+        <p:spPr>
+          <a:xfrm>
+            <a:off x="7452360" y="3044952"/>
+            <a:ext cx="384048" cy="164592"/>
+          </a:xfrm>
+          <a:prstGeom prst="rect">
+            <a:avLst/>
+          </a:prstGeom>
+          <a:noFill/>
+          <a:ln/>
+        </p:spPr>
+        <p:txBody>
+          <a:bodyPr wrap="square" lIns="381" tIns="381" rIns="381" bIns="381" rtlCol="0" anchor="ctr">
+            <a:normAutofit/>
+          </a:bodyPr>
+          <a:lstStyle/>
+          <a:p>
+            <a:pPr algn="l" indent="0" marL="0">
+              <a:buNone/>
+            </a:pPr>
+            <a:r>
+              <a:rPr lang="en-US" sz="660" b="1" dirty="0">
+                <a:solidFill>
+                  <a:srgbClr val="1F7A8C"/>
+                </a:solidFill>
+                <a:latin typeface="Aptos" pitchFamily="34" charset="0"/>
+                <a:ea typeface="Aptos" pitchFamily="34" charset="-122"/>
+                <a:cs typeface="Aptos" pitchFamily="34" charset="-120"/>
+              </a:rPr>
+              <a:t>3,85</a:t>
+            </a:r>
+            <a:endParaRPr lang="en-US" sz="660" dirty="0"/>
+          </a:p>
+        </p:txBody>
+      </p:sp>
+      <p:sp>
+        <p:nvSpPr>
+          <p:cNvPr id="20" name="Text 18"/>
+          <p:cNvSpPr/>
+          <p:nvPr/>
+        </p:nvSpPr>
+        <p:spPr>
+          <a:xfrm>
+            <a:off x="822960" y="3474720"/>
+            <a:ext cx="2331720" cy="164592"/>
+          </a:xfrm>
+          <a:prstGeom prst="rect">
+            <a:avLst/>
+          </a:prstGeom>
+          <a:noFill/>
+          <a:ln/>
+        </p:spPr>
+        <p:txBody>
+          <a:bodyPr wrap="square" lIns="381" tIns="381" rIns="381" bIns="381" rtlCol="0" anchor="ctr">
+            <a:normAutofit/>
+          </a:bodyPr>
+          <a:lstStyle/>
+          <a:p>
+            <a:pPr algn="l" indent="0" marL="0">
+              <a:buNone/>
+            </a:pPr>
+            <a:r>
+              <a:rPr lang="en-US" sz="660" b="1" dirty="0">
                 <a:solidFill>
                   <a:srgbClr val="1B2430"/>
                 </a:solidFill>
@@ -17839,22 +18009,47 @@
                 <a:ea typeface="Aptos" pitchFamily="34" charset="-122"/>
                 <a:cs typeface="Aptos" pitchFamily="34" charset="-120"/>
               </a:rPr>
-              <a:t>AGV: fiable, pero rigido si cambian rutas.</a:t>
-            </a:r>
-            <a:endParaRPr lang="en-US" sz="820" dirty="0"/>
-          </a:p>
-        </p:txBody>
-      </p:sp>
-      <p:sp>
-        <p:nvSpPr>
-          <p:cNvPr id="18" name="Shape 16"/>
-          <p:cNvSpPr/>
-          <p:nvPr/>
-        </p:nvSpPr>
-        <p:spPr>
-          <a:xfrm>
-            <a:off x="5669280" y="2075688"/>
-            <a:ext cx="109728" cy="109728"/>
+              <a:t>AGV</a:t>
+            </a:r>
+            <a:endParaRPr lang="en-US" sz="660" dirty="0"/>
+          </a:p>
+        </p:txBody>
+      </p:sp>
+      <p:sp>
+        <p:nvSpPr>
+          <p:cNvPr id="21" name="Shape 19"/>
+          <p:cNvSpPr/>
+          <p:nvPr/>
+        </p:nvSpPr>
+        <p:spPr>
+          <a:xfrm>
+            <a:off x="3493008" y="3511296"/>
+            <a:ext cx="3749040" cy="128016"/>
+          </a:xfrm>
+          <a:prstGeom prst="rect">
+            <a:avLst/>
+          </a:prstGeom>
+          <a:solidFill>
+            <a:srgbClr val="E8EEF4"/>
+          </a:solidFill>
+          <a:ln w="12700">
+            <a:solidFill>
+              <a:srgbClr val="E8EEF4"/>
+            </a:solidFill>
+            <a:prstDash val="solid"/>
+          </a:ln>
+        </p:spPr>
+      </p:sp>
+      <p:sp>
+        <p:nvSpPr>
+          <p:cNvPr id="22" name="Shape 20"/>
+          <p:cNvSpPr/>
+          <p:nvPr/>
+        </p:nvSpPr>
+        <p:spPr>
+          <a:xfrm>
+            <a:off x="3493008" y="3511296"/>
+            <a:ext cx="2542032" cy="128016"/>
           </a:xfrm>
           <a:prstGeom prst="rect">
             <a:avLst/>
@@ -17872,32 +18067,73 @@
       </p:sp>
       <p:sp>
         <p:nvSpPr>
-          <p:cNvPr id="19" name="Text 17"/>
-          <p:cNvSpPr/>
-          <p:nvPr/>
-        </p:nvSpPr>
-        <p:spPr>
-          <a:xfrm>
-            <a:off x="5925312" y="1956816"/>
-            <a:ext cx="4480560" cy="329184"/>
-          </a:xfrm>
-          <a:prstGeom prst="rect">
-            <a:avLst/>
-          </a:prstGeom>
-          <a:noFill/>
-          <a:ln/>
-        </p:spPr>
-        <p:txBody>
-          <a:bodyPr wrap="square" lIns="381" tIns="381" rIns="381" bIns="381" rtlCol="0" anchor="ctr">
-            <a:normAutofit/>
-          </a:bodyPr>
-          <a:lstStyle/>
-          <a:p>
-            <a:pPr algn="l" indent="0" marL="0">
-              <a:buNone/>
-            </a:pPr>
-            <a:r>
-              <a:rPr lang="en-US" sz="820" dirty="0">
+          <p:cNvPr id="23" name="Text 21"/>
+          <p:cNvSpPr/>
+          <p:nvPr/>
+        </p:nvSpPr>
+        <p:spPr>
+          <a:xfrm>
+            <a:off x="7452360" y="3465576"/>
+            <a:ext cx="384048" cy="164592"/>
+          </a:xfrm>
+          <a:prstGeom prst="rect">
+            <a:avLst/>
+          </a:prstGeom>
+          <a:noFill/>
+          <a:ln/>
+        </p:spPr>
+        <p:txBody>
+          <a:bodyPr wrap="square" lIns="381" tIns="381" rIns="381" bIns="381" rtlCol="0" anchor="ctr">
+            <a:normAutofit/>
+          </a:bodyPr>
+          <a:lstStyle/>
+          <a:p>
+            <a:pPr algn="l" indent="0" marL="0">
+              <a:buNone/>
+            </a:pPr>
+            <a:r>
+              <a:rPr lang="en-US" sz="660" b="1" dirty="0">
+                <a:solidFill>
+                  <a:srgbClr val="F4A261"/>
+                </a:solidFill>
+                <a:latin typeface="Aptos" pitchFamily="34" charset="0"/>
+                <a:ea typeface="Aptos" pitchFamily="34" charset="-122"/>
+                <a:cs typeface="Aptos" pitchFamily="34" charset="-120"/>
+              </a:rPr>
+              <a:t>3,05</a:t>
+            </a:r>
+            <a:endParaRPr lang="en-US" sz="660" dirty="0"/>
+          </a:p>
+        </p:txBody>
+      </p:sp>
+      <p:sp>
+        <p:nvSpPr>
+          <p:cNvPr id="24" name="Text 22"/>
+          <p:cNvSpPr/>
+          <p:nvPr/>
+        </p:nvSpPr>
+        <p:spPr>
+          <a:xfrm>
+            <a:off x="822960" y="3895344"/>
+            <a:ext cx="2331720" cy="164592"/>
+          </a:xfrm>
+          <a:prstGeom prst="rect">
+            <a:avLst/>
+          </a:prstGeom>
+          <a:noFill/>
+          <a:ln/>
+        </p:spPr>
+        <p:txBody>
+          <a:bodyPr wrap="square" lIns="381" tIns="381" rIns="381" bIns="381" rtlCol="0" anchor="ctr">
+            <a:normAutofit/>
+          </a:bodyPr>
+          <a:lstStyle/>
+          <a:p>
+            <a:pPr algn="l" indent="0" marL="0">
+              <a:buNone/>
+            </a:pPr>
+            <a:r>
+              <a:rPr lang="en-US" sz="660" b="1" dirty="0">
                 <a:solidFill>
                   <a:srgbClr val="1B2430"/>
                 </a:solidFill>
@@ -17905,22 +18141,179 @@
                 <a:ea typeface="Aptos" pitchFamily="34" charset="-122"/>
                 <a:cs typeface="Aptos" pitchFamily="34" charset="-120"/>
               </a:rPr>
-              <a:t>Dron: baja carga y riesgo en interior industrial.</a:t>
-            </a:r>
-            <a:endParaRPr lang="en-US" sz="820" dirty="0"/>
-          </a:p>
-        </p:txBody>
-      </p:sp>
-      <p:sp>
-        <p:nvSpPr>
-          <p:cNvPr id="20" name="Shape 18"/>
-          <p:cNvSpPr/>
-          <p:nvPr/>
-        </p:nvSpPr>
-        <p:spPr>
-          <a:xfrm>
-            <a:off x="5669280" y="2734056"/>
-            <a:ext cx="109728" cy="109728"/>
+              <a:t>robot con patas</a:t>
+            </a:r>
+            <a:endParaRPr lang="en-US" sz="660" dirty="0"/>
+          </a:p>
+        </p:txBody>
+      </p:sp>
+      <p:sp>
+        <p:nvSpPr>
+          <p:cNvPr id="25" name="Shape 23"/>
+          <p:cNvSpPr/>
+          <p:nvPr/>
+        </p:nvSpPr>
+        <p:spPr>
+          <a:xfrm>
+            <a:off x="3493008" y="3931920"/>
+            <a:ext cx="3749040" cy="128016"/>
+          </a:xfrm>
+          <a:prstGeom prst="rect">
+            <a:avLst/>
+          </a:prstGeom>
+          <a:solidFill>
+            <a:srgbClr val="E8EEF4"/>
+          </a:solidFill>
+          <a:ln w="12700">
+            <a:solidFill>
+              <a:srgbClr val="E8EEF4"/>
+            </a:solidFill>
+            <a:prstDash val="solid"/>
+          </a:ln>
+        </p:spPr>
+      </p:sp>
+      <p:sp>
+        <p:nvSpPr>
+          <p:cNvPr id="26" name="Shape 24"/>
+          <p:cNvSpPr/>
+          <p:nvPr/>
+        </p:nvSpPr>
+        <p:spPr>
+          <a:xfrm>
+            <a:off x="3493008" y="3931920"/>
+            <a:ext cx="1517904" cy="128016"/>
+          </a:xfrm>
+          <a:prstGeom prst="rect">
+            <a:avLst/>
+          </a:prstGeom>
+          <a:solidFill>
+            <a:srgbClr val="6D5BD0"/>
+          </a:solidFill>
+          <a:ln w="12700">
+            <a:solidFill>
+              <a:srgbClr val="6D5BD0"/>
+            </a:solidFill>
+            <a:prstDash val="solid"/>
+          </a:ln>
+        </p:spPr>
+      </p:sp>
+      <p:sp>
+        <p:nvSpPr>
+          <p:cNvPr id="27" name="Text 25"/>
+          <p:cNvSpPr/>
+          <p:nvPr/>
+        </p:nvSpPr>
+        <p:spPr>
+          <a:xfrm>
+            <a:off x="7452360" y="3886200"/>
+            <a:ext cx="384048" cy="164592"/>
+          </a:xfrm>
+          <a:prstGeom prst="rect">
+            <a:avLst/>
+          </a:prstGeom>
+          <a:noFill/>
+          <a:ln/>
+        </p:spPr>
+        <p:txBody>
+          <a:bodyPr wrap="square" lIns="381" tIns="381" rIns="381" bIns="381" rtlCol="0" anchor="ctr">
+            <a:normAutofit/>
+          </a:bodyPr>
+          <a:lstStyle/>
+          <a:p>
+            <a:pPr algn="l" indent="0" marL="0">
+              <a:buNone/>
+            </a:pPr>
+            <a:r>
+              <a:rPr lang="en-US" sz="660" b="1" dirty="0">
+                <a:solidFill>
+                  <a:srgbClr val="6D5BD0"/>
+                </a:solidFill>
+                <a:latin typeface="Aptos" pitchFamily="34" charset="0"/>
+                <a:ea typeface="Aptos" pitchFamily="34" charset="-122"/>
+                <a:cs typeface="Aptos" pitchFamily="34" charset="-120"/>
+              </a:rPr>
+              <a:t>1,85</a:t>
+            </a:r>
+            <a:endParaRPr lang="en-US" sz="660" dirty="0"/>
+          </a:p>
+        </p:txBody>
+      </p:sp>
+      <p:sp>
+        <p:nvSpPr>
+          <p:cNvPr id="28" name="Text 26"/>
+          <p:cNvSpPr/>
+          <p:nvPr/>
+        </p:nvSpPr>
+        <p:spPr>
+          <a:xfrm>
+            <a:off x="822960" y="4315968"/>
+            <a:ext cx="2331720" cy="164592"/>
+          </a:xfrm>
+          <a:prstGeom prst="rect">
+            <a:avLst/>
+          </a:prstGeom>
+          <a:noFill/>
+          <a:ln/>
+        </p:spPr>
+        <p:txBody>
+          <a:bodyPr wrap="square" lIns="381" tIns="381" rIns="381" bIns="381" rtlCol="0" anchor="ctr">
+            <a:normAutofit/>
+          </a:bodyPr>
+          <a:lstStyle/>
+          <a:p>
+            <a:pPr algn="l" indent="0" marL="0">
+              <a:buNone/>
+            </a:pPr>
+            <a:r>
+              <a:rPr lang="en-US" sz="660" b="1" dirty="0">
+                <a:solidFill>
+                  <a:srgbClr val="1B2430"/>
+                </a:solidFill>
+                <a:latin typeface="Aptos" pitchFamily="34" charset="0"/>
+                <a:ea typeface="Aptos" pitchFamily="34" charset="-122"/>
+                <a:cs typeface="Aptos" pitchFamily="34" charset="-120"/>
+              </a:rPr>
+              <a:t>dron</a:t>
+            </a:r>
+            <a:endParaRPr lang="en-US" sz="660" dirty="0"/>
+          </a:p>
+        </p:txBody>
+      </p:sp>
+      <p:sp>
+        <p:nvSpPr>
+          <p:cNvPr id="29" name="Shape 27"/>
+          <p:cNvSpPr/>
+          <p:nvPr/>
+        </p:nvSpPr>
+        <p:spPr>
+          <a:xfrm>
+            <a:off x="3493008" y="4352544"/>
+            <a:ext cx="3749040" cy="128016"/>
+          </a:xfrm>
+          <a:prstGeom prst="rect">
+            <a:avLst/>
+          </a:prstGeom>
+          <a:solidFill>
+            <a:srgbClr val="E8EEF4"/>
+          </a:solidFill>
+          <a:ln w="12700">
+            <a:solidFill>
+              <a:srgbClr val="E8EEF4"/>
+            </a:solidFill>
+            <a:prstDash val="solid"/>
+          </a:ln>
+        </p:spPr>
+      </p:sp>
+      <p:sp>
+        <p:nvSpPr>
+          <p:cNvPr id="30" name="Shape 28"/>
+          <p:cNvSpPr/>
+          <p:nvPr/>
+        </p:nvSpPr>
+        <p:spPr>
+          <a:xfrm>
+            <a:off x="3493008" y="4352544"/>
+            <a:ext cx="1444752" cy="128016"/>
           </a:xfrm>
           <a:prstGeom prst="rect">
             <a:avLst/>
@@ -17938,32 +18331,73 @@
       </p:sp>
       <p:sp>
         <p:nvSpPr>
-          <p:cNvPr id="21" name="Text 19"/>
-          <p:cNvSpPr/>
-          <p:nvPr/>
-        </p:nvSpPr>
-        <p:spPr>
-          <a:xfrm>
-            <a:off x="5925312" y="2615184"/>
-            <a:ext cx="4480560" cy="329184"/>
-          </a:xfrm>
-          <a:prstGeom prst="rect">
-            <a:avLst/>
-          </a:prstGeom>
-          <a:noFill/>
-          <a:ln/>
-        </p:spPr>
-        <p:txBody>
-          <a:bodyPr wrap="square" lIns="381" tIns="381" rIns="381" bIns="381" rtlCol="0" anchor="ctr">
-            <a:normAutofit/>
-          </a:bodyPr>
-          <a:lstStyle/>
-          <a:p>
-            <a:pPr algn="l" indent="0" marL="0">
-              <a:buNone/>
-            </a:pPr>
-            <a:r>
-              <a:rPr lang="en-US" sz="820" dirty="0">
+          <p:cNvPr id="31" name="Text 29"/>
+          <p:cNvSpPr/>
+          <p:nvPr/>
+        </p:nvSpPr>
+        <p:spPr>
+          <a:xfrm>
+            <a:off x="7452360" y="4306824"/>
+            <a:ext cx="384048" cy="164592"/>
+          </a:xfrm>
+          <a:prstGeom prst="rect">
+            <a:avLst/>
+          </a:prstGeom>
+          <a:noFill/>
+          <a:ln/>
+        </p:spPr>
+        <p:txBody>
+          <a:bodyPr wrap="square" lIns="381" tIns="381" rIns="381" bIns="381" rtlCol="0" anchor="ctr">
+            <a:normAutofit/>
+          </a:bodyPr>
+          <a:lstStyle/>
+          <a:p>
+            <a:pPr algn="l" indent="0" marL="0">
+              <a:buNone/>
+            </a:pPr>
+            <a:r>
+              <a:rPr lang="en-US" sz="660" b="1" dirty="0">
+                <a:solidFill>
+                  <a:srgbClr val="B91C1C"/>
+                </a:solidFill>
+                <a:latin typeface="Aptos" pitchFamily="34" charset="0"/>
+                <a:ea typeface="Aptos" pitchFamily="34" charset="-122"/>
+                <a:cs typeface="Aptos" pitchFamily="34" charset="-120"/>
+              </a:rPr>
+              <a:t>1,75</a:t>
+            </a:r>
+            <a:endParaRPr lang="en-US" sz="660" dirty="0"/>
+          </a:p>
+        </p:txBody>
+      </p:sp>
+      <p:sp>
+        <p:nvSpPr>
+          <p:cNvPr id="32" name="Text 30"/>
+          <p:cNvSpPr/>
+          <p:nvPr/>
+        </p:nvSpPr>
+        <p:spPr>
+          <a:xfrm>
+            <a:off x="822960" y="4736592"/>
+            <a:ext cx="2331720" cy="164592"/>
+          </a:xfrm>
+          <a:prstGeom prst="rect">
+            <a:avLst/>
+          </a:prstGeom>
+          <a:noFill/>
+          <a:ln/>
+        </p:spPr>
+        <p:txBody>
+          <a:bodyPr wrap="square" lIns="381" tIns="381" rIns="381" bIns="381" rtlCol="0" anchor="ctr">
+            <a:normAutofit/>
+          </a:bodyPr>
+          <a:lstStyle/>
+          <a:p>
+            <a:pPr algn="l" indent="0" marL="0">
+              <a:buNone/>
+            </a:pPr>
+            <a:r>
+              <a:rPr lang="en-US" sz="660" b="1" dirty="0">
                 <a:solidFill>
                   <a:srgbClr val="1B2430"/>
                 </a:solidFill>
@@ -17971,24 +18405,288 @@
                 <a:ea typeface="Aptos" pitchFamily="34" charset="-122"/>
                 <a:cs typeface="Aptos" pitchFamily="34" charset="-120"/>
               </a:rPr>
-              <a:t>Orugas: innecesarias sobre pavimento regular.</a:t>
-            </a:r>
-            <a:endParaRPr lang="en-US" sz="820" dirty="0"/>
-          </a:p>
-        </p:txBody>
-      </p:sp>
-      <p:sp>
-        <p:nvSpPr>
-          <p:cNvPr id="22" name="Shape 20"/>
-          <p:cNvSpPr/>
-          <p:nvPr/>
-        </p:nvSpPr>
-        <p:spPr>
-          <a:xfrm>
-            <a:off x="5669280" y="3392424"/>
+              <a:t>orugas</a:t>
+            </a:r>
+            <a:endParaRPr lang="en-US" sz="660" dirty="0"/>
+          </a:p>
+        </p:txBody>
+      </p:sp>
+      <p:sp>
+        <p:nvSpPr>
+          <p:cNvPr id="33" name="Shape 31"/>
+          <p:cNvSpPr/>
+          <p:nvPr/>
+        </p:nvSpPr>
+        <p:spPr>
+          <a:xfrm>
+            <a:off x="3493008" y="4773168"/>
+            <a:ext cx="3749040" cy="128016"/>
+          </a:xfrm>
+          <a:prstGeom prst="rect">
+            <a:avLst/>
+          </a:prstGeom>
+          <a:solidFill>
+            <a:srgbClr val="E8EEF4"/>
+          </a:solidFill>
+          <a:ln w="12700">
+            <a:solidFill>
+              <a:srgbClr val="E8EEF4"/>
+            </a:solidFill>
+            <a:prstDash val="solid"/>
+          </a:ln>
+        </p:spPr>
+      </p:sp>
+      <p:sp>
+        <p:nvSpPr>
+          <p:cNvPr id="34" name="Shape 32"/>
+          <p:cNvSpPr/>
+          <p:nvPr/>
+        </p:nvSpPr>
+        <p:spPr>
+          <a:xfrm>
+            <a:off x="3493008" y="4773168"/>
+            <a:ext cx="1188720" cy="128016"/>
+          </a:xfrm>
+          <a:prstGeom prst="rect">
+            <a:avLst/>
+          </a:prstGeom>
+          <a:solidFill>
+            <a:srgbClr val="5D6B7A"/>
+          </a:solidFill>
+          <a:ln w="12700">
+            <a:solidFill>
+              <a:srgbClr val="5D6B7A"/>
+            </a:solidFill>
+            <a:prstDash val="solid"/>
+          </a:ln>
+        </p:spPr>
+      </p:sp>
+      <p:sp>
+        <p:nvSpPr>
+          <p:cNvPr id="35" name="Text 33"/>
+          <p:cNvSpPr/>
+          <p:nvPr/>
+        </p:nvSpPr>
+        <p:spPr>
+          <a:xfrm>
+            <a:off x="7452360" y="4727448"/>
+            <a:ext cx="384048" cy="164592"/>
+          </a:xfrm>
+          <a:prstGeom prst="rect">
+            <a:avLst/>
+          </a:prstGeom>
+          <a:noFill/>
+          <a:ln/>
+        </p:spPr>
+        <p:txBody>
+          <a:bodyPr wrap="square" lIns="381" tIns="381" rIns="381" bIns="381" rtlCol="0" anchor="ctr">
+            <a:normAutofit/>
+          </a:bodyPr>
+          <a:lstStyle/>
+          <a:p>
+            <a:pPr algn="l" indent="0" marL="0">
+              <a:buNone/>
+            </a:pPr>
+            <a:r>
+              <a:rPr lang="en-US" sz="660" b="1" dirty="0">
+                <a:solidFill>
+                  <a:srgbClr val="5D6B7A"/>
+                </a:solidFill>
+                <a:latin typeface="Aptos" pitchFamily="34" charset="0"/>
+                <a:ea typeface="Aptos" pitchFamily="34" charset="-122"/>
+                <a:cs typeface="Aptos" pitchFamily="34" charset="-120"/>
+              </a:rPr>
+              <a:t>1,45</a:t>
+            </a:r>
+            <a:endParaRPr lang="en-US" sz="660" dirty="0"/>
+          </a:p>
+        </p:txBody>
+      </p:sp>
+      <p:sp>
+        <p:nvSpPr>
+          <p:cNvPr id="36" name="Text 34"/>
+          <p:cNvSpPr/>
+          <p:nvPr/>
+        </p:nvSpPr>
+        <p:spPr>
+          <a:xfrm>
+            <a:off x="8366760" y="1234440"/>
+            <a:ext cx="2194560" cy="228600"/>
+          </a:xfrm>
+          <a:prstGeom prst="rect">
+            <a:avLst/>
+          </a:prstGeom>
+          <a:noFill/>
+          <a:ln/>
+        </p:spPr>
+        <p:txBody>
+          <a:bodyPr wrap="square" lIns="381" tIns="381" rIns="381" bIns="381" rtlCol="0" anchor="ctr">
+            <a:normAutofit/>
+          </a:bodyPr>
+          <a:lstStyle/>
+          <a:p>
+            <a:pPr algn="l" indent="0" marL="0">
+              <a:buNone/>
+            </a:pPr>
+            <a:r>
+              <a:rPr lang="en-US" sz="950" b="1" dirty="0">
+                <a:solidFill>
+                  <a:srgbClr val="102033"/>
+                </a:solidFill>
+                <a:latin typeface="Aptos" pitchFamily="34" charset="0"/>
+                <a:ea typeface="Aptos" pitchFamily="34" charset="-122"/>
+                <a:cs typeface="Aptos" pitchFamily="34" charset="-120"/>
+              </a:rPr>
+              <a:t>criterios con peso</a:t>
+            </a:r>
+            <a:endParaRPr lang="en-US" sz="950" dirty="0"/>
+          </a:p>
+        </p:txBody>
+      </p:sp>
+      <p:sp>
+        <p:nvSpPr>
+          <p:cNvPr id="37" name="Shape 35"/>
+          <p:cNvSpPr/>
+          <p:nvPr/>
+        </p:nvSpPr>
+        <p:spPr>
+          <a:xfrm>
+            <a:off x="8412480" y="1773936"/>
             <a:ext cx="109728" cy="109728"/>
           </a:xfrm>
-          <a:prstGeom prst="rect">
+          <a:prstGeom prst="ellipse">
+            <a:avLst/>
+          </a:prstGeom>
+          <a:solidFill>
+            <a:srgbClr val="2A9D8F"/>
+          </a:solidFill>
+          <a:ln w="12700">
+            <a:solidFill>
+              <a:srgbClr val="2A9D8F"/>
+            </a:solidFill>
+            <a:prstDash val="solid"/>
+          </a:ln>
+        </p:spPr>
+      </p:sp>
+      <p:sp>
+        <p:nvSpPr>
+          <p:cNvPr id="38" name="Text 36"/>
+          <p:cNvSpPr/>
+          <p:nvPr/>
+        </p:nvSpPr>
+        <p:spPr>
+          <a:xfrm>
+            <a:off x="8641080" y="1719072"/>
+            <a:ext cx="2560320" cy="182880"/>
+          </a:xfrm>
+          <a:prstGeom prst="rect">
+            <a:avLst/>
+          </a:prstGeom>
+          <a:noFill/>
+          <a:ln/>
+        </p:spPr>
+        <p:txBody>
+          <a:bodyPr wrap="square" lIns="381" tIns="381" rIns="381" bIns="381" rtlCol="0" anchor="ctr">
+            <a:normAutofit/>
+          </a:bodyPr>
+          <a:lstStyle/>
+          <a:p>
+            <a:pPr algn="l" indent="0" marL="0">
+              <a:buNone/>
+            </a:pPr>
+            <a:r>
+              <a:rPr lang="en-US" sz="710" b="1" dirty="0">
+                <a:solidFill>
+                  <a:srgbClr val="1B2430"/>
+                </a:solidFill>
+                <a:latin typeface="Aptos" pitchFamily="34" charset="0"/>
+                <a:ea typeface="Aptos" pitchFamily="34" charset="-122"/>
+                <a:cs typeface="Aptos" pitchFamily="34" charset="-120"/>
+              </a:rPr>
+              <a:t>25 % maniobra en estación</a:t>
+            </a:r>
+            <a:endParaRPr lang="en-US" sz="710" dirty="0"/>
+          </a:p>
+        </p:txBody>
+      </p:sp>
+      <p:sp>
+        <p:nvSpPr>
+          <p:cNvPr id="39" name="Shape 37"/>
+          <p:cNvSpPr/>
+          <p:nvPr/>
+        </p:nvSpPr>
+        <p:spPr>
+          <a:xfrm>
+            <a:off x="8412480" y="2377440"/>
+            <a:ext cx="109728" cy="109728"/>
+          </a:xfrm>
+          <a:prstGeom prst="ellipse">
+            <a:avLst/>
+          </a:prstGeom>
+          <a:solidFill>
+            <a:srgbClr val="B91C1C"/>
+          </a:solidFill>
+          <a:ln w="12700">
+            <a:solidFill>
+              <a:srgbClr val="B91C1C"/>
+            </a:solidFill>
+            <a:prstDash val="solid"/>
+          </a:ln>
+        </p:spPr>
+      </p:sp>
+      <p:sp>
+        <p:nvSpPr>
+          <p:cNvPr id="40" name="Text 38"/>
+          <p:cNvSpPr/>
+          <p:nvPr/>
+        </p:nvSpPr>
+        <p:spPr>
+          <a:xfrm>
+            <a:off x="8641080" y="2322576"/>
+            <a:ext cx="2560320" cy="182880"/>
+          </a:xfrm>
+          <a:prstGeom prst="rect">
+            <a:avLst/>
+          </a:prstGeom>
+          <a:noFill/>
+          <a:ln/>
+        </p:spPr>
+        <p:txBody>
+          <a:bodyPr wrap="square" lIns="381" tIns="381" rIns="381" bIns="381" rtlCol="0" anchor="ctr">
+            <a:normAutofit/>
+          </a:bodyPr>
+          <a:lstStyle/>
+          <a:p>
+            <a:pPr algn="l" indent="0" marL="0">
+              <a:buNone/>
+            </a:pPr>
+            <a:r>
+              <a:rPr lang="en-US" sz="710" b="1" dirty="0">
+                <a:solidFill>
+                  <a:srgbClr val="1B2430"/>
+                </a:solidFill>
+                <a:latin typeface="Aptos" pitchFamily="34" charset="0"/>
+                <a:ea typeface="Aptos" pitchFamily="34" charset="-122"/>
+                <a:cs typeface="Aptos" pitchFamily="34" charset="-120"/>
+              </a:rPr>
+              <a:t>20 % seguridad con operarios</a:t>
+            </a:r>
+            <a:endParaRPr lang="en-US" sz="710" dirty="0"/>
+          </a:p>
+        </p:txBody>
+      </p:sp>
+      <p:sp>
+        <p:nvSpPr>
+          <p:cNvPr id="41" name="Shape 39"/>
+          <p:cNvSpPr/>
+          <p:nvPr/>
+        </p:nvSpPr>
+        <p:spPr>
+          <a:xfrm>
+            <a:off x="8412480" y="2980944"/>
+            <a:ext cx="109728" cy="109728"/>
+          </a:xfrm>
+          <a:prstGeom prst="ellipse">
             <a:avLst/>
           </a:prstGeom>
           <a:solidFill>
@@ -18004,32 +18702,32 @@
       </p:sp>
       <p:sp>
         <p:nvSpPr>
-          <p:cNvPr id="23" name="Text 21"/>
-          <p:cNvSpPr/>
-          <p:nvPr/>
-        </p:nvSpPr>
-        <p:spPr>
-          <a:xfrm>
-            <a:off x="5925312" y="3273552"/>
-            <a:ext cx="4480560" cy="329184"/>
-          </a:xfrm>
-          <a:prstGeom prst="rect">
-            <a:avLst/>
-          </a:prstGeom>
-          <a:noFill/>
-          <a:ln/>
-        </p:spPr>
-        <p:txBody>
-          <a:bodyPr wrap="square" lIns="381" tIns="381" rIns="381" bIns="381" rtlCol="0" anchor="ctr">
-            <a:normAutofit/>
-          </a:bodyPr>
-          <a:lstStyle/>
-          <a:p>
-            <a:pPr algn="l" indent="0" marL="0">
-              <a:buNone/>
-            </a:pPr>
-            <a:r>
-              <a:rPr lang="en-US" sz="820" dirty="0">
+          <p:cNvPr id="42" name="Text 40"/>
+          <p:cNvSpPr/>
+          <p:nvPr/>
+        </p:nvSpPr>
+        <p:spPr>
+          <a:xfrm>
+            <a:off x="8641080" y="2926080"/>
+            <a:ext cx="2560320" cy="182880"/>
+          </a:xfrm>
+          <a:prstGeom prst="rect">
+            <a:avLst/>
+          </a:prstGeom>
+          <a:noFill/>
+          <a:ln/>
+        </p:spPr>
+        <p:txBody>
+          <a:bodyPr wrap="square" lIns="381" tIns="381" rIns="381" bIns="381" rtlCol="0" anchor="ctr">
+            <a:normAutofit/>
+          </a:bodyPr>
+          <a:lstStyle/>
+          <a:p>
+            <a:pPr algn="l" indent="0" marL="0">
+              <a:buNone/>
+            </a:pPr>
+            <a:r>
+              <a:rPr lang="en-US" sz="710" b="1" dirty="0">
                 <a:solidFill>
                   <a:srgbClr val="1B2430"/>
                 </a:solidFill>
@@ -18037,9 +18735,141 @@
                 <a:ea typeface="Aptos" pitchFamily="34" charset="-122"/>
                 <a:cs typeface="Aptos" pitchFamily="34" charset="-120"/>
               </a:rPr>
-              <a:t>Patas: coste y complejidad sin ventaja operativa clara.</a:t>
-            </a:r>
-            <a:endParaRPr lang="en-US" sz="820" dirty="0"/>
+              <a:t>15 % trazabilidad e integración</a:t>
+            </a:r>
+            <a:endParaRPr lang="en-US" sz="710" dirty="0"/>
+          </a:p>
+        </p:txBody>
+      </p:sp>
+      <p:sp>
+        <p:nvSpPr>
+          <p:cNvPr id="43" name="Shape 41"/>
+          <p:cNvSpPr/>
+          <p:nvPr/>
+        </p:nvSpPr>
+        <p:spPr>
+          <a:xfrm>
+            <a:off x="8412480" y="3584448"/>
+            <a:ext cx="109728" cy="109728"/>
+          </a:xfrm>
+          <a:prstGeom prst="ellipse">
+            <a:avLst/>
+          </a:prstGeom>
+          <a:solidFill>
+            <a:srgbClr val="1F7A8C"/>
+          </a:solidFill>
+          <a:ln w="12700">
+            <a:solidFill>
+              <a:srgbClr val="1F7A8C"/>
+            </a:solidFill>
+            <a:prstDash val="solid"/>
+          </a:ln>
+        </p:spPr>
+      </p:sp>
+      <p:sp>
+        <p:nvSpPr>
+          <p:cNvPr id="44" name="Text 42"/>
+          <p:cNvSpPr/>
+          <p:nvPr/>
+        </p:nvSpPr>
+        <p:spPr>
+          <a:xfrm>
+            <a:off x="8641080" y="3529584"/>
+            <a:ext cx="2560320" cy="182880"/>
+          </a:xfrm>
+          <a:prstGeom prst="rect">
+            <a:avLst/>
+          </a:prstGeom>
+          <a:noFill/>
+          <a:ln/>
+        </p:spPr>
+        <p:txBody>
+          <a:bodyPr wrap="square" lIns="381" tIns="381" rIns="381" bIns="381" rtlCol="0" anchor="ctr">
+            <a:normAutofit/>
+          </a:bodyPr>
+          <a:lstStyle/>
+          <a:p>
+            <a:pPr algn="l" indent="0" marL="0">
+              <a:buNone/>
+            </a:pPr>
+            <a:r>
+              <a:rPr lang="en-US" sz="710" b="1" dirty="0">
+                <a:solidFill>
+                  <a:srgbClr val="1B2430"/>
+                </a:solidFill>
+                <a:latin typeface="Aptos" pitchFamily="34" charset="0"/>
+                <a:ea typeface="Aptos" pitchFamily="34" charset="-122"/>
+                <a:cs typeface="Aptos" pitchFamily="34" charset="-120"/>
+              </a:rPr>
+              <a:t>15 % madurez comercial</a:t>
+            </a:r>
+            <a:endParaRPr lang="en-US" sz="710" dirty="0"/>
+          </a:p>
+        </p:txBody>
+      </p:sp>
+      <p:sp>
+        <p:nvSpPr>
+          <p:cNvPr id="45" name="Shape 43"/>
+          <p:cNvSpPr/>
+          <p:nvPr/>
+        </p:nvSpPr>
+        <p:spPr>
+          <a:xfrm>
+            <a:off x="8412480" y="4187952"/>
+            <a:ext cx="109728" cy="109728"/>
+          </a:xfrm>
+          <a:prstGeom prst="ellipse">
+            <a:avLst/>
+          </a:prstGeom>
+          <a:solidFill>
+            <a:srgbClr val="F4A261"/>
+          </a:solidFill>
+          <a:ln w="12700">
+            <a:solidFill>
+              <a:srgbClr val="F4A261"/>
+            </a:solidFill>
+            <a:prstDash val="solid"/>
+          </a:ln>
+        </p:spPr>
+      </p:sp>
+      <p:sp>
+        <p:nvSpPr>
+          <p:cNvPr id="46" name="Text 44"/>
+          <p:cNvSpPr/>
+          <p:nvPr/>
+        </p:nvSpPr>
+        <p:spPr>
+          <a:xfrm>
+            <a:off x="8641080" y="4133088"/>
+            <a:ext cx="2560320" cy="182880"/>
+          </a:xfrm>
+          <a:prstGeom prst="rect">
+            <a:avLst/>
+          </a:prstGeom>
+          <a:noFill/>
+          <a:ln/>
+        </p:spPr>
+        <p:txBody>
+          <a:bodyPr wrap="square" lIns="381" tIns="381" rIns="381" bIns="381" rtlCol="0" anchor="ctr">
+            <a:normAutofit/>
+          </a:bodyPr>
+          <a:lstStyle/>
+          <a:p>
+            <a:pPr algn="l" indent="0" marL="0">
+              <a:buNone/>
+            </a:pPr>
+            <a:r>
+              <a:rPr lang="en-US" sz="710" b="1" dirty="0">
+                <a:solidFill>
+                  <a:srgbClr val="1B2430"/>
+                </a:solidFill>
+                <a:latin typeface="Aptos" pitchFamily="34" charset="0"/>
+                <a:ea typeface="Aptos" pitchFamily="34" charset="-122"/>
+                <a:cs typeface="Aptos" pitchFamily="34" charset="-120"/>
+              </a:rPr>
+              <a:t>15 % coste/riesgo de integración</a:t>
+            </a:r>
+            <a:endParaRPr lang="en-US" sz="710" dirty="0"/>
           </a:p>
         </p:txBody>
       </p:sp>
@@ -18172,7 +19002,7 @@
                 <a:ea typeface="Aptos Display" pitchFamily="34" charset="-122"/>
                 <a:cs typeface="Aptos Display" pitchFamily="34" charset="-120"/>
               </a:rPr>
-              <a:t>AMR omnidireccional objetivo</a:t>
+              <a:t>Modelo elegido y opciones reales de compra</a:t>
             </a:r>
             <a:endParaRPr lang="en-US" sz="2000" dirty="0"/>
           </a:p>
@@ -18613,7 +19443,7 @@
               <a:buNone/>
             </a:pPr>
             <a:r>
-              <a:rPr lang="en-US" sz="1600" b="1" dirty="0">
+              <a:rPr lang="en-US" sz="1500" b="1" dirty="0">
                 <a:solidFill>
                   <a:srgbClr val="102033"/>
                 </a:solidFill>
@@ -18621,9 +19451,9 @@
                 <a:ea typeface="Aptos" pitchFamily="34" charset="-122"/>
                 <a:cs typeface="Aptos" pitchFamily="34" charset="-120"/>
               </a:rPr>
-              <a:t>tres niveles, una decisión</a:t>
-            </a:r>
-            <a:endParaRPr lang="en-US" sz="1600" dirty="0"/>
+              <a:t>shortlist defendible</a:t>
+            </a:r>
+            <a:endParaRPr lang="en-US" sz="1500" dirty="0"/>
           </a:p>
         </p:txBody>
       </p:sp>
@@ -18635,7 +19465,73 @@
         </p:nvSpPr>
         <p:spPr>
           <a:xfrm>
-            <a:off x="6446520" y="1920240"/>
+            <a:off x="6446520" y="1874520"/>
+            <a:ext cx="128016" cy="128016"/>
+          </a:xfrm>
+          <a:prstGeom prst="ellipse">
+            <a:avLst/>
+          </a:prstGeom>
+          <a:solidFill>
+            <a:srgbClr val="2A9D8F"/>
+          </a:solidFill>
+          <a:ln w="12700">
+            <a:solidFill>
+              <a:srgbClr val="2A9D8F"/>
+            </a:solidFill>
+            <a:prstDash val="solid"/>
+          </a:ln>
+        </p:spPr>
+      </p:sp>
+      <p:sp>
+        <p:nvSpPr>
+          <p:cNvPr id="19" name="Text 17"/>
+          <p:cNvSpPr/>
+          <p:nvPr/>
+        </p:nvSpPr>
+        <p:spPr>
+          <a:xfrm>
+            <a:off x="6720840" y="1746504"/>
+            <a:ext cx="4480560" cy="292608"/>
+          </a:xfrm>
+          <a:prstGeom prst="rect">
+            <a:avLst/>
+          </a:prstGeom>
+          <a:noFill/>
+          <a:ln/>
+        </p:spPr>
+        <p:txBody>
+          <a:bodyPr wrap="square" lIns="381" tIns="381" rIns="381" bIns="381" rtlCol="0" anchor="ctr">
+            <a:normAutofit/>
+          </a:bodyPr>
+          <a:lstStyle/>
+          <a:p>
+            <a:pPr algn="l" indent="0" marL="0">
+              <a:buNone/>
+            </a:pPr>
+            <a:r>
+              <a:rPr lang="en-US" sz="750" dirty="0">
+                <a:solidFill>
+                  <a:srgbClr val="1B2430"/>
+                </a:solidFill>
+                <a:latin typeface="Aptos" pitchFamily="34" charset="0"/>
+                <a:ea typeface="Aptos" pitchFamily="34" charset="-122"/>
+                <a:cs typeface="Aptos" pitchFamily="34" charset="-120"/>
+              </a:rPr>
+              <a:t>Recomendado: RB-KAIROS-class: 250 kg, 1,5 m/s, ROS 2, omni.</a:t>
+            </a:r>
+            <a:endParaRPr lang="en-US" sz="750" dirty="0"/>
+          </a:p>
+        </p:txBody>
+      </p:sp>
+      <p:sp>
+        <p:nvSpPr>
+          <p:cNvPr id="20" name="Shape 18"/>
+          <p:cNvSpPr/>
+          <p:nvPr/>
+        </p:nvSpPr>
+        <p:spPr>
+          <a:xfrm>
+            <a:off x="6446520" y="2441448"/>
             <a:ext cx="128016" cy="128016"/>
           </a:xfrm>
           <a:prstGeom prst="ellipse">
@@ -18654,32 +19550,32 @@
       </p:sp>
       <p:sp>
         <p:nvSpPr>
-          <p:cNvPr id="19" name="Text 17"/>
-          <p:cNvSpPr/>
-          <p:nvPr/>
-        </p:nvSpPr>
-        <p:spPr>
-          <a:xfrm>
-            <a:off x="6720840" y="1792224"/>
-            <a:ext cx="4206240" cy="329184"/>
-          </a:xfrm>
-          <a:prstGeom prst="rect">
-            <a:avLst/>
-          </a:prstGeom>
-          <a:noFill/>
-          <a:ln/>
-        </p:spPr>
-        <p:txBody>
-          <a:bodyPr wrap="square" lIns="381" tIns="381" rIns="381" bIns="381" rtlCol="0" anchor="ctr">
-            <a:normAutofit/>
-          </a:bodyPr>
-          <a:lstStyle/>
-          <a:p>
-            <a:pPr algn="l" indent="0" marL="0">
-              <a:buNone/>
-            </a:pPr>
-            <a:r>
-              <a:rPr lang="en-US" sz="800" dirty="0">
+          <p:cNvPr id="21" name="Text 19"/>
+          <p:cNvSpPr/>
+          <p:nvPr/>
+        </p:nvSpPr>
+        <p:spPr>
+          <a:xfrm>
+            <a:off x="6720840" y="2313432"/>
+            <a:ext cx="4480560" cy="292608"/>
+          </a:xfrm>
+          <a:prstGeom prst="rect">
+            <a:avLst/>
+          </a:prstGeom>
+          <a:noFill/>
+          <a:ln/>
+        </p:spPr>
+        <p:txBody>
+          <a:bodyPr wrap="square" lIns="381" tIns="381" rIns="381" bIns="381" rtlCol="0" anchor="ctr">
+            <a:normAutofit/>
+          </a:bodyPr>
+          <a:lstStyle/>
+          <a:p>
+            <a:pPr algn="l" indent="0" marL="0">
+              <a:buNone/>
+            </a:pPr>
+            <a:r>
+              <a:rPr lang="en-US" sz="750" dirty="0">
                 <a:solidFill>
                   <a:srgbClr val="1B2430"/>
                 </a:solidFill>
@@ -18687,21 +19583,21 @@
                 <a:ea typeface="Aptos" pitchFamily="34" charset="-122"/>
                 <a:cs typeface="Aptos" pitchFamily="34" charset="-120"/>
               </a:rPr>
-              <a:t>Simulacion: YouBot/Omnirob o base mecanum equivalente.</a:t>
-            </a:r>
-            <a:endParaRPr lang="en-US" sz="800" dirty="0"/>
-          </a:p>
-        </p:txBody>
-      </p:sp>
-      <p:sp>
-        <p:nvSpPr>
-          <p:cNvPr id="20" name="Shape 18"/>
-          <p:cNvSpPr/>
-          <p:nvPr/>
-        </p:nvSpPr>
-        <p:spPr>
-          <a:xfrm>
-            <a:off x="6446520" y="2606040"/>
+              <a:t>Alternativa: AGILOX ODM: 300 kg, 1,4 m/s, intralogística.</a:t>
+            </a:r>
+            <a:endParaRPr lang="en-US" sz="750" dirty="0"/>
+          </a:p>
+        </p:txBody>
+      </p:sp>
+      <p:sp>
+        <p:nvSpPr>
+          <p:cNvPr id="22" name="Shape 20"/>
+          <p:cNvSpPr/>
+          <p:nvPr/>
+        </p:nvSpPr>
+        <p:spPr>
+          <a:xfrm>
+            <a:off x="6446520" y="3008376"/>
             <a:ext cx="128016" cy="128016"/>
           </a:xfrm>
           <a:prstGeom prst="ellipse">
@@ -18720,32 +19616,32 @@
       </p:sp>
       <p:sp>
         <p:nvSpPr>
-          <p:cNvPr id="21" name="Text 19"/>
-          <p:cNvSpPr/>
-          <p:nvPr/>
-        </p:nvSpPr>
-        <p:spPr>
-          <a:xfrm>
-            <a:off x="6720840" y="2478024"/>
-            <a:ext cx="4206240" cy="329184"/>
-          </a:xfrm>
-          <a:prstGeom prst="rect">
-            <a:avLst/>
-          </a:prstGeom>
-          <a:noFill/>
-          <a:ln/>
-        </p:spPr>
-        <p:txBody>
-          <a:bodyPr wrap="square" lIns="381" tIns="381" rIns="381" bIns="381" rtlCol="0" anchor="ctr">
-            <a:normAutofit/>
-          </a:bodyPr>
-          <a:lstStyle/>
-          <a:p>
-            <a:pPr algn="l" indent="0" marL="0">
-              <a:buNone/>
-            </a:pPr>
-            <a:r>
-              <a:rPr lang="en-US" sz="800" dirty="0">
+          <p:cNvPr id="23" name="Text 21"/>
+          <p:cNvSpPr/>
+          <p:nvPr/>
+        </p:nvSpPr>
+        <p:spPr>
+          <a:xfrm>
+            <a:off x="6720840" y="2880360"/>
+            <a:ext cx="4480560" cy="292608"/>
+          </a:xfrm>
+          <a:prstGeom prst="rect">
+            <a:avLst/>
+          </a:prstGeom>
+          <a:noFill/>
+          <a:ln/>
+        </p:spPr>
+        <p:txBody>
+          <a:bodyPr wrap="square" lIns="381" tIns="381" rIns="381" bIns="381" rtlCol="0" anchor="ctr">
+            <a:normAutofit/>
+          </a:bodyPr>
+          <a:lstStyle/>
+          <a:p>
+            <a:pPr algn="l" indent="0" marL="0">
+              <a:buNone/>
+            </a:pPr>
+            <a:r>
+              <a:rPr lang="en-US" sz="750" dirty="0">
                 <a:solidFill>
                   <a:srgbClr val="1B2430"/>
                 </a:solidFill>
@@ -18753,32 +19649,32 @@
                 <a:ea typeface="Aptos" pitchFamily="34" charset="-122"/>
                 <a:cs typeface="Aptos" pitchFamily="34" charset="-120"/>
               </a:rPr>
-              <a:t>Benchmark: MiR250 y LD-250 solo para coste AMR 250 kg.</a:t>
-            </a:r>
-            <a:endParaRPr lang="en-US" sz="800" dirty="0"/>
-          </a:p>
-        </p:txBody>
-      </p:sp>
-      <p:sp>
-        <p:nvSpPr>
-          <p:cNvPr id="22" name="Shape 20"/>
-          <p:cNvSpPr/>
-          <p:nvPr/>
-        </p:nvSpPr>
-        <p:spPr>
-          <a:xfrm>
-            <a:off x="6446520" y="3291840"/>
+              <a:t>Benchmark: MiR250 y LD-250 solo para coste/carga AMR 250 kg.</a:t>
+            </a:r>
+            <a:endParaRPr lang="en-US" sz="750" dirty="0"/>
+          </a:p>
+        </p:txBody>
+      </p:sp>
+      <p:sp>
+        <p:nvSpPr>
+          <p:cNvPr id="24" name="Shape 22"/>
+          <p:cNvSpPr/>
+          <p:nvPr/>
+        </p:nvSpPr>
+        <p:spPr>
+          <a:xfrm>
+            <a:off x="6446520" y="3575304"/>
             <a:ext cx="128016" cy="128016"/>
           </a:xfrm>
           <a:prstGeom prst="ellipse">
             <a:avLst/>
           </a:prstGeom>
           <a:solidFill>
-            <a:srgbClr val="2A9D8F"/>
+            <a:srgbClr val="B91C1C"/>
           </a:solidFill>
           <a:ln w="12700">
             <a:solidFill>
-              <a:srgbClr val="2A9D8F"/>
+              <a:srgbClr val="B91C1C"/>
             </a:solidFill>
             <a:prstDash val="solid"/>
           </a:ln>
@@ -18786,32 +19682,32 @@
       </p:sp>
       <p:sp>
         <p:nvSpPr>
-          <p:cNvPr id="23" name="Text 21"/>
-          <p:cNvSpPr/>
-          <p:nvPr/>
-        </p:nvSpPr>
-        <p:spPr>
-          <a:xfrm>
-            <a:off x="6720840" y="3163824"/>
-            <a:ext cx="4206240" cy="329184"/>
-          </a:xfrm>
-          <a:prstGeom prst="rect">
-            <a:avLst/>
-          </a:prstGeom>
-          <a:noFill/>
-          <a:ln/>
-        </p:spPr>
-        <p:txBody>
-          <a:bodyPr wrap="square" lIns="381" tIns="381" rIns="381" bIns="381" rtlCol="0" anchor="ctr">
-            <a:normAutofit/>
-          </a:bodyPr>
-          <a:lstStyle/>
-          <a:p>
-            <a:pPr algn="l" indent="0" marL="0">
-              <a:buNone/>
-            </a:pPr>
-            <a:r>
-              <a:rPr lang="en-US" sz="800" dirty="0">
+          <p:cNvPr id="25" name="Text 23"/>
+          <p:cNvSpPr/>
+          <p:nvPr/>
+        </p:nvSpPr>
+        <p:spPr>
+          <a:xfrm>
+            <a:off x="6720840" y="3447288"/>
+            <a:ext cx="4480560" cy="292608"/>
+          </a:xfrm>
+          <a:prstGeom prst="rect">
+            <a:avLst/>
+          </a:prstGeom>
+          <a:noFill/>
+          <a:ln/>
+        </p:spPr>
+        <p:txBody>
+          <a:bodyPr wrap="square" lIns="381" tIns="381" rIns="381" bIns="381" rtlCol="0" anchor="ctr">
+            <a:normAutofit/>
+          </a:bodyPr>
+          <a:lstStyle/>
+          <a:p>
+            <a:pPr algn="l" indent="0" marL="0">
+              <a:buNone/>
+            </a:pPr>
+            <a:r>
+              <a:rPr lang="en-US" sz="750" dirty="0">
                 <a:solidFill>
                   <a:srgbClr val="1B2430"/>
                 </a:solidFill>
@@ -18819,9 +19715,50 @@
                 <a:ea typeface="Aptos" pitchFamily="34" charset="-122"/>
                 <a:cs typeface="Aptos" pitchFamily="34" charset="-120"/>
               </a:rPr>
-              <a:t>Implantacion: plataforma holonomica 200-300 kg con portakits.</a:t>
-            </a:r>
-            <a:endParaRPr lang="en-US" sz="800" dirty="0"/>
+              <a:t>Descartado: KUKA omniMove: XXL y caro para kits.</a:t>
+            </a:r>
+            <a:endParaRPr lang="en-US" sz="750" dirty="0"/>
+          </a:p>
+        </p:txBody>
+      </p:sp>
+      <p:sp>
+        <p:nvSpPr>
+          <p:cNvPr id="26" name="Text 24"/>
+          <p:cNvSpPr/>
+          <p:nvPr/>
+        </p:nvSpPr>
+        <p:spPr>
+          <a:xfrm>
+            <a:off x="6419088" y="4498848"/>
+            <a:ext cx="4663440" cy="438912"/>
+          </a:xfrm>
+          <a:prstGeom prst="rect">
+            <a:avLst/>
+          </a:prstGeom>
+          <a:noFill/>
+          <a:ln/>
+        </p:spPr>
+        <p:txBody>
+          <a:bodyPr wrap="square" lIns="381" tIns="381" rIns="381" bIns="381" rtlCol="0" anchor="ctr">
+            <a:normAutofit/>
+          </a:bodyPr>
+          <a:lstStyle/>
+          <a:p>
+            <a:pPr algn="l" indent="0" marL="0">
+              <a:buNone/>
+            </a:pPr>
+            <a:r>
+              <a:rPr lang="en-US" sz="650" dirty="0">
+                <a:solidFill>
+                  <a:srgbClr val="5D6B7A"/>
+                </a:solidFill>
+                <a:latin typeface="Aptos" pitchFamily="34" charset="0"/>
+                <a:ea typeface="Aptos" pitchFamily="34" charset="-122"/>
+                <a:cs typeface="Aptos" pitchFamily="34" charset="-120"/>
+              </a:rPr>
+              <a:t>La licitacion exige base holonomica, safety pack, portakits, vx/vy/w, trazabilidad y pruebas FAT/SAT.</a:t>
+            </a:r>
+            <a:endParaRPr lang="en-US" sz="650" dirty="0"/>
           </a:p>
         </p:txBody>
       </p:sp>

--- a/actividad1/slides/Actividad1_AMR_FOD_Kitting_editable.pptx
+++ b/actividad1/slides/Actividad1_AMR_FOD_Kitting_editable.pptx
@@ -4157,7 +4157,7 @@
                 <a:ea typeface="Aptos" pitchFamily="34" charset="-122"/>
                 <a:cs typeface="Aptos" pitchFamily="34" charset="-120"/>
               </a:rPr>
-              <a:t>La misión termina con evidencia:</a:t>
+              <a:t>Cierre con evidencia:</a:t>
             </a:r>
             <a:endParaRPr lang="en-US" sz="800" dirty="0"/>
           </a:p>
@@ -10000,7 +10000,7 @@
         <p:spPr>
           <a:xfrm>
             <a:off x="4617720" y="5230368"/>
-            <a:ext cx="4846320" cy="164592"/>
+            <a:ext cx="5852160" cy="164592"/>
           </a:xfrm>
           <a:prstGeom prst="rect">
             <a:avLst/>
@@ -10026,7 +10026,7 @@
                 <a:ea typeface="Aptos" pitchFamily="34" charset="-122"/>
                 <a:cs typeface="Aptos" pitchFamily="34" charset="-120"/>
               </a:rPr>
-              <a:t>Lectura: con solo horas recuperadas el VAN central sigue exigente.</a:t>
+              <a:t>Lectura financiera: las horas recuperadas no venden por si solas 7 o 17 robots.</a:t>
             </a:r>
             <a:endParaRPr lang="en-US" sz="630" dirty="0"/>
           </a:p>
@@ -10067,7 +10067,7 @@
                 <a:ea typeface="Aptos" pitchFamily="34" charset="-122"/>
                 <a:cs typeface="Aptos" pitchFamily="34" charset="-120"/>
               </a:rPr>
-              <a:t>7 o 17 robots requieren menos esperas, continuidad de flujo y menor riesgo FOD.</a:t>
+              <a:t>La ampliacion exige datos de espera, continuidad de flujo y riesgo FOD.</a:t>
             </a:r>
             <a:endParaRPr lang="en-US" sz="630" dirty="0"/>
           </a:p>
@@ -12739,7 +12739,7 @@
                 <a:ea typeface="Aptos Display" pitchFamily="34" charset="-122"/>
                 <a:cs typeface="Aptos Display" pitchFamily="34" charset="-120"/>
               </a:rPr>
-              <a:t>La propuesta no robotiza el HTP: ordena el flujo que lo rodea</a:t>
+              <a:t>No se robotiza el HTP; se estabiliza el flujo que lo rodea</a:t>
             </a:r>
             <a:endParaRPr lang="en-US" sz="2000" dirty="0"/>
           </a:p>
@@ -12972,7 +12972,7 @@
                 <a:ea typeface="Aptos" pitchFamily="34" charset="-122"/>
                 <a:cs typeface="Aptos" pitchFamily="34" charset="-120"/>
               </a:rPr>
-              <a:t>Automatiza transporte, confirmación y evidencia.</a:t>
+              <a:t>Cubre transporte, confirmación y evidencia.</a:t>
             </a:r>
             <a:endParaRPr lang="en-US" sz="900" dirty="0"/>
           </a:p>
@@ -13013,7 +13013,7 @@
                 <a:ea typeface="Aptos" pitchFamily="34" charset="-122"/>
                 <a:cs typeface="Aptos" pitchFamily="34" charset="-120"/>
               </a:rPr>
-              <a:t>No invade montaje aeronáutico certificado.</a:t>
+              <a:t>No toca montaje aeronáutico certificado.</a:t>
             </a:r>
             <a:endParaRPr lang="en-US" sz="900" dirty="0"/>
           </a:p>
@@ -15003,7 +15003,7 @@
                 <a:ea typeface="Aptos" pitchFamily="34" charset="-122"/>
                 <a:cs typeface="Aptos" pitchFamily="34" charset="-120"/>
               </a:rPr>
-              <a:t>Lectura clave para la propuesta</a:t>
+              <a:t>Lectura clave de planta</a:t>
             </a:r>
             <a:endParaRPr lang="en-US" sz="740" dirty="0"/>
           </a:p>

--- a/actividad1/slides/Actividad1_AMR_FOD_Kitting_editable.pptx
+++ b/actividad1/slides/Actividad1_AMR_FOD_Kitting_editable.pptx
@@ -4198,7 +4198,7 @@
                 <a:ea typeface="Aptos" pitchFamily="34" charset="-122"/>
                 <a:cs typeface="Aptos" pitchFamily="34" charset="-120"/>
               </a:rPr>
-              <a:t>entrega confirmada + ruta registrada + excepcion documentada.</a:t>
+              <a:t>entrega confirmada + ruta registrada + excepcion justificada.</a:t>
             </a:r>
             <a:endParaRPr lang="en-US" sz="800" dirty="0"/>
           </a:p>
@@ -6231,7 +6231,7 @@
                 <a:ea typeface="Aptos" pitchFamily="34" charset="-122"/>
                 <a:cs typeface="Aptos" pitchFamily="34" charset="-120"/>
               </a:rPr>
-              <a:t>Riesgo: comprar antes de medir.</a:t>
+              <a:t>Riesgo: ampliar antes de medir.</a:t>
             </a:r>
             <a:endParaRPr lang="en-US" sz="620" dirty="0"/>
           </a:p>
@@ -8678,7 +8678,7 @@
                 <a:ea typeface="Aptos" pitchFamily="34" charset="-122"/>
                 <a:cs typeface="Aptos" pitchFamily="34" charset="-120"/>
               </a:rPr>
-              <a:t>No es cotizacion vinculante.</a:t>
+              <a:t>Estimacion preliminar.</a:t>
             </a:r>
             <a:endParaRPr lang="en-US" sz="640" dirty="0"/>
           </a:p>
@@ -9220,7 +9220,7 @@
                 <a:ea typeface="Aptos" pitchFamily="34" charset="-122"/>
                 <a:cs typeface="Aptos" pitchFamily="34" charset="-120"/>
               </a:rPr>
-              <a:t>Se monetiza tiempo improductivo; no reducción de plantilla.</a:t>
+              <a:t>Se monetiza tiempo recuperado y continuidad de flujo.</a:t>
             </a:r>
             <a:endParaRPr lang="en-US" sz="670" dirty="0"/>
           </a:p>
@@ -10026,7 +10026,7 @@
                 <a:ea typeface="Aptos" pitchFamily="34" charset="-122"/>
                 <a:cs typeface="Aptos" pitchFamily="34" charset="-120"/>
               </a:rPr>
-              <a:t>Lectura financiera: las horas recuperadas no venden por si solas 7 o 17 robots.</a:t>
+              <a:t>Lectura financiera: las horas recuperadas abren el caso de 7 o 17 robots.</a:t>
             </a:r>
             <a:endParaRPr lang="en-US" sz="630" dirty="0"/>
           </a:p>
@@ -10829,7 +10829,7 @@
                 <a:ea typeface="Aptos" pitchFamily="34" charset="-122"/>
                 <a:cs typeface="Aptos" pitchFamily="34" charset="-120"/>
               </a:rPr>
-              <a:t>rondas con imagen y validación humana</a:t>
+              <a:t>rondas con imagen y revision humana</a:t>
             </a:r>
             <a:endParaRPr lang="en-US" sz="580" dirty="0"/>
           </a:p>
@@ -13978,7 +13978,7 @@
                 <a:ea typeface="Aptos" pitchFamily="34" charset="-122"/>
                 <a:cs typeface="Aptos" pitchFamily="34" charset="-120"/>
               </a:rPr>
-              <a:t>FOD exige inspección, disciplina y evidencia documentada.</a:t>
+              <a:t>FOD exige inspección, disciplina y evidencia revisable.</a:t>
             </a:r>
             <a:endParaRPr lang="en-US" sz="840" dirty="0"/>
           </a:p>

--- a/actividad1/slides/Actividad1_AMR_FOD_Kitting_editable.pptx
+++ b/actividad1/slides/Actividad1_AMR_FOD_Kitting_editable.pptx
@@ -15220,7 +15220,7 @@
                 <a:ea typeface="Aptos Display" pitchFamily="34" charset="-122"/>
                 <a:cs typeface="Aptos Display" pitchFamily="34" charset="-120"/>
               </a:rPr>
-              <a:t>De conversación simulada a requisitos trazables</a:t>
+              <a:t>De conversación guiada a requisitos trazables</a:t>
             </a:r>
             <a:endParaRPr lang="en-US" sz="2000" dirty="0"/>
           </a:p>

--- a/actividad1/slides/Actividad1_AMR_FOD_Kitting_editable.pptx
+++ b/actividad1/slides/Actividad1_AMR_FOD_Kitting_editable.pptx
@@ -5521,7 +5521,7 @@
                 <a:ea typeface="Aptos" pitchFamily="34" charset="-122"/>
                 <a:cs typeface="Aptos" pitchFamily="34" charset="-120"/>
               </a:rPr>
-              <a:t>Zona acotada y 1-2 estaciones.</a:t>
+              <a:t>Zona reducida y 1-2 estaciones.</a:t>
             </a:r>
             <a:endParaRPr lang="en-US" sz="640" dirty="0"/>
           </a:p>
@@ -6313,7 +6313,7 @@
                 <a:ea typeface="Aptos" pitchFamily="34" charset="-122"/>
                 <a:cs typeface="Aptos" pitchFamily="34" charset="-120"/>
               </a:rPr>
-              <a:t>Regla comercial: no se escala por intuicion.</a:t>
+              <a:t>Regla comercial: escalar con trazas.</a:t>
             </a:r>
             <a:endParaRPr lang="en-US" sz="710" dirty="0"/>
           </a:p>
@@ -7339,7 +7339,7 @@
                 <a:ea typeface="Aptos" pitchFamily="34" charset="-122"/>
                 <a:cs typeface="Aptos" pitchFamily="34" charset="-120"/>
               </a:rPr>
-              <a:t>Software flota + trazabilidad</a:t>
+              <a:t>Software flota + registro</a:t>
             </a:r>
             <a:endParaRPr lang="en-US" sz="580" dirty="0"/>
           </a:p>
@@ -10681,7 +10681,7 @@
                 <a:ea typeface="Aptos" pitchFamily="34" charset="-122"/>
                 <a:cs typeface="Aptos" pitchFamily="34" charset="-120"/>
               </a:rPr>
-              <a:t>Trazabilidad</a:t>
+              <a:t>Registro</a:t>
             </a:r>
             <a:endParaRPr lang="en-US" sz="660" dirty="0"/>
           </a:p>
@@ -11362,7 +11362,7 @@
                 <a:ea typeface="Aptos" pitchFamily="34" charset="-122"/>
                 <a:cs typeface="Aptos" pitchFamily="34" charset="-120"/>
               </a:rPr>
-              <a:t>Trazabilidad</a:t>
+              <a:t>Registro</a:t>
             </a:r>
             <a:endParaRPr lang="en-US" sz="600" dirty="0"/>
           </a:p>
@@ -11403,7 +11403,7 @@
                 <a:ea typeface="Aptos" pitchFamily="34" charset="-122"/>
                 <a:cs typeface="Aptos" pitchFamily="34" charset="-120"/>
               </a:rPr>
-              <a:t>&gt;= 98 % con registro completo</a:t>
+              <a:t>&gt;= 98 % completo</a:t>
             </a:r>
             <a:endParaRPr lang="en-US" sz="590" dirty="0"/>
           </a:p>
@@ -11756,7 +11756,7 @@
         <p:spPr>
           <a:xfrm>
             <a:off x="7571232" y="5047488"/>
-            <a:ext cx="3383280" cy="164592"/>
+            <a:ext cx="3931920" cy="164592"/>
           </a:xfrm>
           <a:prstGeom prst="rect">
             <a:avLst/>
@@ -11782,7 +11782,7 @@
                 <a:ea typeface="Aptos" pitchFamily="34" charset="-122"/>
                 <a:cs typeface="Aptos" pitchFamily="34" charset="-120"/>
               </a:rPr>
-              <a:t>Exclusion explicita: no se certifica montaje HTP.</a:t>
+              <a:t>Alcance del piloto: entregas, retorno, FOD y registro.</a:t>
             </a:r>
             <a:endParaRPr lang="en-US" sz="600" dirty="0"/>
           </a:p>
@@ -12198,7 +12198,7 @@
                 <a:ea typeface="Aptos" pitchFamily="34" charset="-122"/>
                 <a:cs typeface="Aptos" pitchFamily="34" charset="-120"/>
               </a:rPr>
-              <a:t>Medir trazabilidad, FOD y aceptación.</a:t>
+              <a:t>Medir registro, FOD y aceptación.</a:t>
             </a:r>
             <a:endParaRPr lang="en-US" sz="900" dirty="0"/>
           </a:p>
@@ -12522,7 +12522,7 @@
                 <a:ea typeface="Aptos" pitchFamily="34" charset="-122"/>
                 <a:cs typeface="Aptos" pitchFamily="34" charset="-120"/>
               </a:rPr>
-              <a:t>sin tocar montaje</a:t>
+              <a:t>logística auxiliar</a:t>
             </a:r>
             <a:endParaRPr lang="en-US" sz="680" dirty="0"/>
           </a:p>
@@ -12739,7 +12739,7 @@
                 <a:ea typeface="Aptos Display" pitchFamily="34" charset="-122"/>
                 <a:cs typeface="Aptos Display" pitchFamily="34" charset="-120"/>
               </a:rPr>
-              <a:t>No se robotiza el HTP; se estabiliza el flujo que lo rodea</a:t>
+              <a:t>Estabilizar el flujo que rodea al HTP</a:t>
             </a:r>
             <a:endParaRPr lang="en-US" sz="2000" dirty="0"/>
           </a:p>
@@ -12914,7 +12914,7 @@
                 <a:ea typeface="Aptos Display" pitchFamily="34" charset="-122"/>
                 <a:cs typeface="Aptos Display" pitchFamily="34" charset="-120"/>
               </a:rPr>
-              <a:t>Más trazabilidad.</a:t>
+              <a:t>Mejor registro.</a:t>
             </a:r>
             <a:endParaRPr lang="en-US" sz="2000" dirty="0"/>
           </a:p>
@@ -14044,7 +14044,7 @@
                 <a:ea typeface="Aptos" pitchFamily="34" charset="-122"/>
                 <a:cs typeface="Aptos" pitchFamily="34" charset="-120"/>
               </a:rPr>
-              <a:t>La trazabilidad fina se pierde si la entrega no queda ligada a misión.</a:t>
+              <a:t>El registro se pierde si la entrega no queda ligada a una misión.</a:t>
             </a:r>
             <a:endParaRPr lang="en-US" sz="840" dirty="0"/>
           </a:p>
@@ -14463,7 +14463,7 @@
                 <a:ea typeface="Aptos" pitchFamily="34" charset="-122"/>
                 <a:cs typeface="Aptos" pitchFamily="34" charset="-120"/>
               </a:rPr>
-              <a:t>El AMR no toca montaje certificado.</a:t>
+              <a:t>El AMR trabaja en logística auxiliar.</a:t>
             </a:r>
             <a:endParaRPr lang="en-US" sz="840" dirty="0"/>
           </a:p>
@@ -14504,7 +14504,7 @@
                 <a:ea typeface="Aptos" pitchFamily="34" charset="-122"/>
                 <a:cs typeface="Aptos" pitchFamily="34" charset="-120"/>
               </a:rPr>
-              <a:t>Estabiliza entregas, retornos, FOD y trazabilidad.</a:t>
+              <a:t>Estabiliza entregas, retornos, FOD y registro.</a:t>
             </a:r>
             <a:endParaRPr lang="en-US" sz="810" dirty="0"/>
           </a:p>
@@ -15085,7 +15085,7 @@
                 <a:ea typeface="Aptos" pitchFamily="34" charset="-122"/>
                 <a:cs typeface="Aptos" pitchFamily="34" charset="-120"/>
               </a:rPr>
-              <a:t>El AMR reduce esperas y deja trazas; no fabrica el HTP.</a:t>
+              <a:t>El AMR reduce esperas y deja trazas de entrega.</a:t>
             </a:r>
             <a:endParaRPr lang="en-US" sz="690" dirty="0"/>
           </a:p>
@@ -15453,7 +15453,7 @@
                 <a:ea typeface="Aptos Display" pitchFamily="34" charset="-122"/>
                 <a:cs typeface="Aptos Display" pitchFamily="34" charset="-120"/>
               </a:rPr>
-              <a:t>El alcance correcto no es fabricar: es asegurar flujo, FOD y trazabilidad.</a:t>
+              <a:t>El alcance correcto: asegurar flujo, FOD y registro.</a:t>
             </a:r>
             <a:endParaRPr lang="en-US" sz="1750" dirty="0"/>
           </a:p>
@@ -17406,7 +17406,7 @@
                 <a:ea typeface="Aptos Display" pitchFamily="34" charset="-122"/>
                 <a:cs typeface="Aptos Display" pitchFamily="34" charset="-120"/>
               </a:rPr>
-              <a:t>Matriz de decisión, no seleccion por intuicion</a:t>
+              <a:t>Matriz de decisión con criterios ponderados</a:t>
             </a:r>
             <a:endParaRPr lang="en-US" sz="2000" dirty="0"/>
           </a:p>
@@ -17704,7 +17704,7 @@
                 <a:ea typeface="Aptos" pitchFamily="34" charset="-122"/>
                 <a:cs typeface="Aptos" pitchFamily="34" charset="-120"/>
               </a:rPr>
-              <a:t>Gana por maniobra en estación y representabilidad en CoppeliaSim; no por ser la opcion mas barata.</a:t>
+              <a:t>Se prioriza maniobra en estación y representabilidad en CoppeliaSim, aunque no sea la opcion mas barata.</a:t>
             </a:r>
             <a:endParaRPr lang="en-US" sz="640" dirty="0"/>
           </a:p>
@@ -18735,7 +18735,7 @@
                 <a:ea typeface="Aptos" pitchFamily="34" charset="-122"/>
                 <a:cs typeface="Aptos" pitchFamily="34" charset="-120"/>
               </a:rPr>
-              <a:t>15 % trazabilidad e integración</a:t>
+              <a:t>15 % registro e integración</a:t>
             </a:r>
             <a:endParaRPr lang="en-US" sz="710" dirty="0"/>
           </a:p>
@@ -19756,7 +19756,7 @@
                 <a:ea typeface="Aptos" pitchFamily="34" charset="-122"/>
                 <a:cs typeface="Aptos" pitchFamily="34" charset="-120"/>
               </a:rPr>
-              <a:t>La licitacion exige base holonomica, safety pack, portakits, vx/vy/w, trazabilidad y pruebas FAT/SAT.</a:t>
+              <a:t>La licitacion exige base holonomica, safety pack, portakits, vx/vy/w, registro de entregas y pruebas FAT/SAT.</a:t>
             </a:r>
             <a:endParaRPr lang="en-US" sz="650" dirty="0"/>
           </a:p>

--- a/actividad1/slides/Actividad1_AMR_FOD_Kitting_editable.pptx
+++ b/actividad1/slides/Actividad1_AMR_FOD_Kitting_editable.pptx
@@ -2977,6 +2977,89 @@
           </a:p>
         </p:txBody>
       </p:sp>
+      <p:sp>
+        <p:nvSpPr>
+          <p:cNvPr id="26" name="Shape 24"/>
+          <p:cNvSpPr/>
+          <p:nvPr/>
+        </p:nvSpPr>
+        <p:spPr>
+          <a:xfrm>
+            <a:off x="11155680" y="5632704"/>
+            <a:ext cx="841248" cy="841248"/>
+          </a:xfrm>
+          <a:prstGeom prst="ellipse">
+            <a:avLst/>
+          </a:prstGeom>
+          <a:solidFill>
+            <a:srgbClr val="1B2430">
+              <a:alpha val="14000"/>
+            </a:srgbClr>
+          </a:solidFill>
+          <a:ln w="12700">
+            <a:solidFill>
+              <a:srgbClr val="1B2430">
+                <a:alpha val="0"/>
+              </a:srgbClr>
+            </a:solidFill>
+            <a:prstDash val="solid"/>
+          </a:ln>
+        </p:spPr>
+      </p:sp>
+      <p:sp>
+        <p:nvSpPr>
+          <p:cNvPr id="27" name="Shape 25"/>
+          <p:cNvSpPr/>
+          <p:nvPr/>
+        </p:nvSpPr>
+        <p:spPr>
+          <a:xfrm>
+            <a:off x="11100816" y="5577840"/>
+            <a:ext cx="822960" cy="822960"/>
+          </a:xfrm>
+          <a:prstGeom prst="ellipse">
+            <a:avLst/>
+          </a:prstGeom>
+          <a:solidFill>
+            <a:srgbClr val="FFFFFF">
+              <a:alpha val="94000"/>
+            </a:srgbClr>
+          </a:solidFill>
+          <a:ln w="15240">
+            <a:solidFill>
+              <a:srgbClr val="1F7A8C"/>
+            </a:solidFill>
+            <a:prstDash val="solid"/>
+          </a:ln>
+        </p:spPr>
+      </p:sp>
+      <p:sp>
+        <p:nvSpPr>
+          <p:cNvPr id="28" name="Shape 26"/>
+          <p:cNvSpPr/>
+          <p:nvPr/>
+        </p:nvSpPr>
+        <p:spPr>
+          <a:xfrm>
+            <a:off x="11247120" y="5724144"/>
+            <a:ext cx="530352" cy="530352"/>
+          </a:xfrm>
+          <a:prstGeom prst="ellipse">
+            <a:avLst/>
+          </a:prstGeom>
+          <a:solidFill>
+            <a:srgbClr val="FFFFFF">
+              <a:alpha val="0"/>
+            </a:srgbClr>
+          </a:solidFill>
+          <a:ln w="7620">
+            <a:solidFill>
+              <a:srgbClr val="D6DEE8"/>
+            </a:solidFill>
+            <a:prstDash val="solid"/>
+          </a:ln>
+        </p:spPr>
+      </p:sp>
     </p:spTree>
   </p:cSld>
   <p:clrMapOvr>
@@ -3159,8 +3242,8 @@
         </p:nvSpPr>
         <p:spPr>
           <a:xfrm>
-            <a:off x="7635240" y="6528816"/>
-            <a:ext cx="3977640" cy="164592"/>
+            <a:off x="6720840" y="6528816"/>
+            <a:ext cx="4069080" cy="164592"/>
           </a:xfrm>
           <a:prstGeom prst="rect">
             <a:avLst/>
@@ -4203,6 +4286,89 @@
             <a:endParaRPr lang="en-US" sz="800" dirty="0"/>
           </a:p>
         </p:txBody>
+      </p:sp>
+      <p:sp>
+        <p:nvSpPr>
+          <p:cNvPr id="37" name="Shape 35"/>
+          <p:cNvSpPr/>
+          <p:nvPr/>
+        </p:nvSpPr>
+        <p:spPr>
+          <a:xfrm>
+            <a:off x="11155680" y="5632704"/>
+            <a:ext cx="841248" cy="841248"/>
+          </a:xfrm>
+          <a:prstGeom prst="ellipse">
+            <a:avLst/>
+          </a:prstGeom>
+          <a:solidFill>
+            <a:srgbClr val="1B2430">
+              <a:alpha val="14000"/>
+            </a:srgbClr>
+          </a:solidFill>
+          <a:ln w="12700">
+            <a:solidFill>
+              <a:srgbClr val="1B2430">
+                <a:alpha val="0"/>
+              </a:srgbClr>
+            </a:solidFill>
+            <a:prstDash val="solid"/>
+          </a:ln>
+        </p:spPr>
+      </p:sp>
+      <p:sp>
+        <p:nvSpPr>
+          <p:cNvPr id="38" name="Shape 36"/>
+          <p:cNvSpPr/>
+          <p:nvPr/>
+        </p:nvSpPr>
+        <p:spPr>
+          <a:xfrm>
+            <a:off x="11100816" y="5577840"/>
+            <a:ext cx="822960" cy="822960"/>
+          </a:xfrm>
+          <a:prstGeom prst="ellipse">
+            <a:avLst/>
+          </a:prstGeom>
+          <a:solidFill>
+            <a:srgbClr val="FFFFFF">
+              <a:alpha val="94000"/>
+            </a:srgbClr>
+          </a:solidFill>
+          <a:ln w="15240">
+            <a:solidFill>
+              <a:srgbClr val="1F7A8C"/>
+            </a:solidFill>
+            <a:prstDash val="solid"/>
+          </a:ln>
+        </p:spPr>
+      </p:sp>
+      <p:sp>
+        <p:nvSpPr>
+          <p:cNvPr id="39" name="Shape 37"/>
+          <p:cNvSpPr/>
+          <p:nvPr/>
+        </p:nvSpPr>
+        <p:spPr>
+          <a:xfrm>
+            <a:off x="11247120" y="5724144"/>
+            <a:ext cx="530352" cy="530352"/>
+          </a:xfrm>
+          <a:prstGeom prst="ellipse">
+            <a:avLst/>
+          </a:prstGeom>
+          <a:solidFill>
+            <a:srgbClr val="FFFFFF">
+              <a:alpha val="0"/>
+            </a:srgbClr>
+          </a:solidFill>
+          <a:ln w="7620">
+            <a:solidFill>
+              <a:srgbClr val="D6DEE8"/>
+            </a:solidFill>
+            <a:prstDash val="solid"/>
+          </a:ln>
+        </p:spPr>
       </p:sp>
     </p:spTree>
   </p:cSld>
@@ -4386,8 +4552,8 @@
         </p:nvSpPr>
         <p:spPr>
           <a:xfrm>
-            <a:off x="7635240" y="6528816"/>
-            <a:ext cx="3977640" cy="164592"/>
+            <a:off x="6720840" y="6528816"/>
+            <a:ext cx="4069080" cy="164592"/>
           </a:xfrm>
           <a:prstGeom prst="rect">
             <a:avLst/>
@@ -5083,6 +5249,89 @@
             <a:endParaRPr lang="en-US" sz="670" dirty="0"/>
           </a:p>
         </p:txBody>
+      </p:sp>
+      <p:sp>
+        <p:nvSpPr>
+          <p:cNvPr id="28" name="Shape 26"/>
+          <p:cNvSpPr/>
+          <p:nvPr/>
+        </p:nvSpPr>
+        <p:spPr>
+          <a:xfrm>
+            <a:off x="11155680" y="5632704"/>
+            <a:ext cx="841248" cy="841248"/>
+          </a:xfrm>
+          <a:prstGeom prst="ellipse">
+            <a:avLst/>
+          </a:prstGeom>
+          <a:solidFill>
+            <a:srgbClr val="1B2430">
+              <a:alpha val="14000"/>
+            </a:srgbClr>
+          </a:solidFill>
+          <a:ln w="12700">
+            <a:solidFill>
+              <a:srgbClr val="1B2430">
+                <a:alpha val="0"/>
+              </a:srgbClr>
+            </a:solidFill>
+            <a:prstDash val="solid"/>
+          </a:ln>
+        </p:spPr>
+      </p:sp>
+      <p:sp>
+        <p:nvSpPr>
+          <p:cNvPr id="29" name="Shape 27"/>
+          <p:cNvSpPr/>
+          <p:nvPr/>
+        </p:nvSpPr>
+        <p:spPr>
+          <a:xfrm>
+            <a:off x="11100816" y="5577840"/>
+            <a:ext cx="822960" cy="822960"/>
+          </a:xfrm>
+          <a:prstGeom prst="ellipse">
+            <a:avLst/>
+          </a:prstGeom>
+          <a:solidFill>
+            <a:srgbClr val="FFFFFF">
+              <a:alpha val="94000"/>
+            </a:srgbClr>
+          </a:solidFill>
+          <a:ln w="15240">
+            <a:solidFill>
+              <a:srgbClr val="1F7A8C"/>
+            </a:solidFill>
+            <a:prstDash val="solid"/>
+          </a:ln>
+        </p:spPr>
+      </p:sp>
+      <p:sp>
+        <p:nvSpPr>
+          <p:cNvPr id="30" name="Shape 28"/>
+          <p:cNvSpPr/>
+          <p:nvPr/>
+        </p:nvSpPr>
+        <p:spPr>
+          <a:xfrm>
+            <a:off x="11247120" y="5724144"/>
+            <a:ext cx="530352" cy="530352"/>
+          </a:xfrm>
+          <a:prstGeom prst="ellipse">
+            <a:avLst/>
+          </a:prstGeom>
+          <a:solidFill>
+            <a:srgbClr val="FFFFFF">
+              <a:alpha val="0"/>
+            </a:srgbClr>
+          </a:solidFill>
+          <a:ln w="7620">
+            <a:solidFill>
+              <a:srgbClr val="D6DEE8"/>
+            </a:solidFill>
+            <a:prstDash val="solid"/>
+          </a:ln>
+        </p:spPr>
       </p:sp>
     </p:spTree>
   </p:cSld>
@@ -5266,8 +5515,8 @@
         </p:nvSpPr>
         <p:spPr>
           <a:xfrm>
-            <a:off x="7635240" y="6528816"/>
-            <a:ext cx="3977640" cy="164592"/>
+            <a:off x="6720840" y="6528816"/>
+            <a:ext cx="4069080" cy="164592"/>
           </a:xfrm>
           <a:prstGeom prst="rect">
             <a:avLst/>
@@ -6359,6 +6608,89 @@
             <a:endParaRPr lang="en-US" sz="710" dirty="0"/>
           </a:p>
         </p:txBody>
+      </p:sp>
+      <p:sp>
+        <p:nvSpPr>
+          <p:cNvPr id="34" name="Shape 32"/>
+          <p:cNvSpPr/>
+          <p:nvPr/>
+        </p:nvSpPr>
+        <p:spPr>
+          <a:xfrm>
+            <a:off x="11155680" y="5632704"/>
+            <a:ext cx="841248" cy="841248"/>
+          </a:xfrm>
+          <a:prstGeom prst="ellipse">
+            <a:avLst/>
+          </a:prstGeom>
+          <a:solidFill>
+            <a:srgbClr val="1B2430">
+              <a:alpha val="14000"/>
+            </a:srgbClr>
+          </a:solidFill>
+          <a:ln w="12700">
+            <a:solidFill>
+              <a:srgbClr val="1B2430">
+                <a:alpha val="0"/>
+              </a:srgbClr>
+            </a:solidFill>
+            <a:prstDash val="solid"/>
+          </a:ln>
+        </p:spPr>
+      </p:sp>
+      <p:sp>
+        <p:nvSpPr>
+          <p:cNvPr id="35" name="Shape 33"/>
+          <p:cNvSpPr/>
+          <p:nvPr/>
+        </p:nvSpPr>
+        <p:spPr>
+          <a:xfrm>
+            <a:off x="11100816" y="5577840"/>
+            <a:ext cx="822960" cy="822960"/>
+          </a:xfrm>
+          <a:prstGeom prst="ellipse">
+            <a:avLst/>
+          </a:prstGeom>
+          <a:solidFill>
+            <a:srgbClr val="FFFFFF">
+              <a:alpha val="94000"/>
+            </a:srgbClr>
+          </a:solidFill>
+          <a:ln w="15240">
+            <a:solidFill>
+              <a:srgbClr val="1F7A8C"/>
+            </a:solidFill>
+            <a:prstDash val="solid"/>
+          </a:ln>
+        </p:spPr>
+      </p:sp>
+      <p:sp>
+        <p:nvSpPr>
+          <p:cNvPr id="36" name="Shape 34"/>
+          <p:cNvSpPr/>
+          <p:nvPr/>
+        </p:nvSpPr>
+        <p:spPr>
+          <a:xfrm>
+            <a:off x="11247120" y="5724144"/>
+            <a:ext cx="530352" cy="530352"/>
+          </a:xfrm>
+          <a:prstGeom prst="ellipse">
+            <a:avLst/>
+          </a:prstGeom>
+          <a:solidFill>
+            <a:srgbClr val="FFFFFF">
+              <a:alpha val="0"/>
+            </a:srgbClr>
+          </a:solidFill>
+          <a:ln w="7620">
+            <a:solidFill>
+              <a:srgbClr val="D6DEE8"/>
+            </a:solidFill>
+            <a:prstDash val="solid"/>
+          </a:ln>
+        </p:spPr>
       </p:sp>
     </p:spTree>
   </p:cSld>
@@ -6542,8 +6874,8 @@
         </p:nvSpPr>
         <p:spPr>
           <a:xfrm>
-            <a:off x="7635240" y="6528816"/>
-            <a:ext cx="3977640" cy="164592"/>
+            <a:off x="6720840" y="6528816"/>
+            <a:ext cx="4069080" cy="164592"/>
           </a:xfrm>
           <a:prstGeom prst="rect">
             <a:avLst/>
@@ -8683,6 +9015,89 @@
             <a:endParaRPr lang="en-US" sz="640" dirty="0"/>
           </a:p>
         </p:txBody>
+      </p:sp>
+      <p:sp>
+        <p:nvSpPr>
+          <p:cNvPr id="62" name="Shape 60"/>
+          <p:cNvSpPr/>
+          <p:nvPr/>
+        </p:nvSpPr>
+        <p:spPr>
+          <a:xfrm>
+            <a:off x="11155680" y="5632704"/>
+            <a:ext cx="841248" cy="841248"/>
+          </a:xfrm>
+          <a:prstGeom prst="ellipse">
+            <a:avLst/>
+          </a:prstGeom>
+          <a:solidFill>
+            <a:srgbClr val="1B2430">
+              <a:alpha val="14000"/>
+            </a:srgbClr>
+          </a:solidFill>
+          <a:ln w="12700">
+            <a:solidFill>
+              <a:srgbClr val="1B2430">
+                <a:alpha val="0"/>
+              </a:srgbClr>
+            </a:solidFill>
+            <a:prstDash val="solid"/>
+          </a:ln>
+        </p:spPr>
+      </p:sp>
+      <p:sp>
+        <p:nvSpPr>
+          <p:cNvPr id="63" name="Shape 61"/>
+          <p:cNvSpPr/>
+          <p:nvPr/>
+        </p:nvSpPr>
+        <p:spPr>
+          <a:xfrm>
+            <a:off x="11100816" y="5577840"/>
+            <a:ext cx="822960" cy="822960"/>
+          </a:xfrm>
+          <a:prstGeom prst="ellipse">
+            <a:avLst/>
+          </a:prstGeom>
+          <a:solidFill>
+            <a:srgbClr val="FFFFFF">
+              <a:alpha val="94000"/>
+            </a:srgbClr>
+          </a:solidFill>
+          <a:ln w="15240">
+            <a:solidFill>
+              <a:srgbClr val="1F7A8C"/>
+            </a:solidFill>
+            <a:prstDash val="solid"/>
+          </a:ln>
+        </p:spPr>
+      </p:sp>
+      <p:sp>
+        <p:nvSpPr>
+          <p:cNvPr id="64" name="Shape 62"/>
+          <p:cNvSpPr/>
+          <p:nvPr/>
+        </p:nvSpPr>
+        <p:spPr>
+          <a:xfrm>
+            <a:off x="11247120" y="5724144"/>
+            <a:ext cx="530352" cy="530352"/>
+          </a:xfrm>
+          <a:prstGeom prst="ellipse">
+            <a:avLst/>
+          </a:prstGeom>
+          <a:solidFill>
+            <a:srgbClr val="FFFFFF">
+              <a:alpha val="0"/>
+            </a:srgbClr>
+          </a:solidFill>
+          <a:ln w="7620">
+            <a:solidFill>
+              <a:srgbClr val="D6DEE8"/>
+            </a:solidFill>
+            <a:prstDash val="solid"/>
+          </a:ln>
+        </p:spPr>
       </p:sp>
     </p:spTree>
   </p:cSld>
@@ -8866,8 +9281,8 @@
         </p:nvSpPr>
         <p:spPr>
           <a:xfrm>
-            <a:off x="7635240" y="6528816"/>
-            <a:ext cx="3977640" cy="164592"/>
+            <a:off x="6720840" y="6528816"/>
+            <a:ext cx="4069080" cy="164592"/>
           </a:xfrm>
           <a:prstGeom prst="rect">
             <a:avLst/>
@@ -10113,6 +10528,89 @@
             <a:endParaRPr lang="en-US" sz="630" dirty="0"/>
           </a:p>
         </p:txBody>
+      </p:sp>
+      <p:sp>
+        <p:nvSpPr>
+          <p:cNvPr id="39" name="Shape 37"/>
+          <p:cNvSpPr/>
+          <p:nvPr/>
+        </p:nvSpPr>
+        <p:spPr>
+          <a:xfrm>
+            <a:off x="11155680" y="5632704"/>
+            <a:ext cx="841248" cy="841248"/>
+          </a:xfrm>
+          <a:prstGeom prst="ellipse">
+            <a:avLst/>
+          </a:prstGeom>
+          <a:solidFill>
+            <a:srgbClr val="1B2430">
+              <a:alpha val="14000"/>
+            </a:srgbClr>
+          </a:solidFill>
+          <a:ln w="12700">
+            <a:solidFill>
+              <a:srgbClr val="1B2430">
+                <a:alpha val="0"/>
+              </a:srgbClr>
+            </a:solidFill>
+            <a:prstDash val="solid"/>
+          </a:ln>
+        </p:spPr>
+      </p:sp>
+      <p:sp>
+        <p:nvSpPr>
+          <p:cNvPr id="40" name="Shape 38"/>
+          <p:cNvSpPr/>
+          <p:nvPr/>
+        </p:nvSpPr>
+        <p:spPr>
+          <a:xfrm>
+            <a:off x="11100816" y="5577840"/>
+            <a:ext cx="822960" cy="822960"/>
+          </a:xfrm>
+          <a:prstGeom prst="ellipse">
+            <a:avLst/>
+          </a:prstGeom>
+          <a:solidFill>
+            <a:srgbClr val="FFFFFF">
+              <a:alpha val="94000"/>
+            </a:srgbClr>
+          </a:solidFill>
+          <a:ln w="15240">
+            <a:solidFill>
+              <a:srgbClr val="1F7A8C"/>
+            </a:solidFill>
+            <a:prstDash val="solid"/>
+          </a:ln>
+        </p:spPr>
+      </p:sp>
+      <p:sp>
+        <p:nvSpPr>
+          <p:cNvPr id="41" name="Shape 39"/>
+          <p:cNvSpPr/>
+          <p:nvPr/>
+        </p:nvSpPr>
+        <p:spPr>
+          <a:xfrm>
+            <a:off x="11247120" y="5724144"/>
+            <a:ext cx="530352" cy="530352"/>
+          </a:xfrm>
+          <a:prstGeom prst="ellipse">
+            <a:avLst/>
+          </a:prstGeom>
+          <a:solidFill>
+            <a:srgbClr val="FFFFFF">
+              <a:alpha val="0"/>
+            </a:srgbClr>
+          </a:solidFill>
+          <a:ln w="7620">
+            <a:solidFill>
+              <a:srgbClr val="D6DEE8"/>
+            </a:solidFill>
+            <a:prstDash val="solid"/>
+          </a:ln>
+        </p:spPr>
       </p:sp>
     </p:spTree>
   </p:cSld>
@@ -10296,8 +10794,8 @@
         </p:nvSpPr>
         <p:spPr>
           <a:xfrm>
-            <a:off x="7635240" y="6528816"/>
-            <a:ext cx="3977640" cy="164592"/>
+            <a:off x="6720840" y="6528816"/>
+            <a:ext cx="4069080" cy="164592"/>
           </a:xfrm>
           <a:prstGeom prst="rect">
             <a:avLst/>
@@ -11828,6 +12326,89 @@
             <a:endParaRPr lang="en-US" sz="600" dirty="0"/>
           </a:p>
         </p:txBody>
+      </p:sp>
+      <p:sp>
+        <p:nvSpPr>
+          <p:cNvPr id="49" name="Shape 47"/>
+          <p:cNvSpPr/>
+          <p:nvPr/>
+        </p:nvSpPr>
+        <p:spPr>
+          <a:xfrm>
+            <a:off x="11155680" y="5632704"/>
+            <a:ext cx="841248" cy="841248"/>
+          </a:xfrm>
+          <a:prstGeom prst="ellipse">
+            <a:avLst/>
+          </a:prstGeom>
+          <a:solidFill>
+            <a:srgbClr val="1B2430">
+              <a:alpha val="14000"/>
+            </a:srgbClr>
+          </a:solidFill>
+          <a:ln w="12700">
+            <a:solidFill>
+              <a:srgbClr val="1B2430">
+                <a:alpha val="0"/>
+              </a:srgbClr>
+            </a:solidFill>
+            <a:prstDash val="solid"/>
+          </a:ln>
+        </p:spPr>
+      </p:sp>
+      <p:sp>
+        <p:nvSpPr>
+          <p:cNvPr id="50" name="Shape 48"/>
+          <p:cNvSpPr/>
+          <p:nvPr/>
+        </p:nvSpPr>
+        <p:spPr>
+          <a:xfrm>
+            <a:off x="11100816" y="5577840"/>
+            <a:ext cx="822960" cy="822960"/>
+          </a:xfrm>
+          <a:prstGeom prst="ellipse">
+            <a:avLst/>
+          </a:prstGeom>
+          <a:solidFill>
+            <a:srgbClr val="FFFFFF">
+              <a:alpha val="94000"/>
+            </a:srgbClr>
+          </a:solidFill>
+          <a:ln w="15240">
+            <a:solidFill>
+              <a:srgbClr val="1F7A8C"/>
+            </a:solidFill>
+            <a:prstDash val="solid"/>
+          </a:ln>
+        </p:spPr>
+      </p:sp>
+      <p:sp>
+        <p:nvSpPr>
+          <p:cNvPr id="51" name="Shape 49"/>
+          <p:cNvSpPr/>
+          <p:nvPr/>
+        </p:nvSpPr>
+        <p:spPr>
+          <a:xfrm>
+            <a:off x="11247120" y="5724144"/>
+            <a:ext cx="530352" cy="530352"/>
+          </a:xfrm>
+          <a:prstGeom prst="ellipse">
+            <a:avLst/>
+          </a:prstGeom>
+          <a:solidFill>
+            <a:srgbClr val="FFFFFF">
+              <a:alpha val="0"/>
+            </a:srgbClr>
+          </a:solidFill>
+          <a:ln w="7620">
+            <a:solidFill>
+              <a:srgbClr val="D6DEE8"/>
+            </a:solidFill>
+            <a:prstDash val="solid"/>
+          </a:ln>
+        </p:spPr>
       </p:sp>
     </p:spTree>
   </p:cSld>
@@ -12011,8 +12592,8 @@
         </p:nvSpPr>
         <p:spPr>
           <a:xfrm>
-            <a:off x="7635240" y="6528816"/>
-            <a:ext cx="3977640" cy="164592"/>
+            <a:off x="6720840" y="6528816"/>
+            <a:ext cx="4069080" cy="164592"/>
           </a:xfrm>
           <a:prstGeom prst="rect">
             <a:avLst/>
@@ -12609,6 +13190,89 @@
             <a:endParaRPr lang="en-US" sz="680" dirty="0"/>
           </a:p>
         </p:txBody>
+      </p:sp>
+      <p:sp>
+        <p:nvSpPr>
+          <p:cNvPr id="24" name="Shape 22"/>
+          <p:cNvSpPr/>
+          <p:nvPr/>
+        </p:nvSpPr>
+        <p:spPr>
+          <a:xfrm>
+            <a:off x="11155680" y="5632704"/>
+            <a:ext cx="841248" cy="841248"/>
+          </a:xfrm>
+          <a:prstGeom prst="ellipse">
+            <a:avLst/>
+          </a:prstGeom>
+          <a:solidFill>
+            <a:srgbClr val="1B2430">
+              <a:alpha val="14000"/>
+            </a:srgbClr>
+          </a:solidFill>
+          <a:ln w="12700">
+            <a:solidFill>
+              <a:srgbClr val="1B2430">
+                <a:alpha val="0"/>
+              </a:srgbClr>
+            </a:solidFill>
+            <a:prstDash val="solid"/>
+          </a:ln>
+        </p:spPr>
+      </p:sp>
+      <p:sp>
+        <p:nvSpPr>
+          <p:cNvPr id="25" name="Shape 23"/>
+          <p:cNvSpPr/>
+          <p:nvPr/>
+        </p:nvSpPr>
+        <p:spPr>
+          <a:xfrm>
+            <a:off x="11100816" y="5577840"/>
+            <a:ext cx="822960" cy="822960"/>
+          </a:xfrm>
+          <a:prstGeom prst="ellipse">
+            <a:avLst/>
+          </a:prstGeom>
+          <a:solidFill>
+            <a:srgbClr val="FFFFFF">
+              <a:alpha val="94000"/>
+            </a:srgbClr>
+          </a:solidFill>
+          <a:ln w="15240">
+            <a:solidFill>
+              <a:srgbClr val="1F7A8C"/>
+            </a:solidFill>
+            <a:prstDash val="solid"/>
+          </a:ln>
+        </p:spPr>
+      </p:sp>
+      <p:sp>
+        <p:nvSpPr>
+          <p:cNvPr id="26" name="Shape 24"/>
+          <p:cNvSpPr/>
+          <p:nvPr/>
+        </p:nvSpPr>
+        <p:spPr>
+          <a:xfrm>
+            <a:off x="11247120" y="5724144"/>
+            <a:ext cx="530352" cy="530352"/>
+          </a:xfrm>
+          <a:prstGeom prst="ellipse">
+            <a:avLst/>
+          </a:prstGeom>
+          <a:solidFill>
+            <a:srgbClr val="FFFFFF">
+              <a:alpha val="0"/>
+            </a:srgbClr>
+          </a:solidFill>
+          <a:ln w="7620">
+            <a:solidFill>
+              <a:srgbClr val="D6DEE8"/>
+            </a:solidFill>
+            <a:prstDash val="solid"/>
+          </a:ln>
+        </p:spPr>
       </p:sp>
     </p:spTree>
   </p:cSld>
@@ -12792,8 +13456,8 @@
         </p:nvSpPr>
         <p:spPr>
           <a:xfrm>
-            <a:off x="7635240" y="6528816"/>
-            <a:ext cx="3977640" cy="164592"/>
+            <a:off x="6720840" y="6528816"/>
+            <a:ext cx="4069080" cy="164592"/>
           </a:xfrm>
           <a:prstGeom prst="rect">
             <a:avLst/>
@@ -13287,6 +13951,89 @@
             <a:endParaRPr lang="en-US" sz="650" dirty="0"/>
           </a:p>
         </p:txBody>
+      </p:sp>
+      <p:sp>
+        <p:nvSpPr>
+          <p:cNvPr id="18" name="Shape 16"/>
+          <p:cNvSpPr/>
+          <p:nvPr/>
+        </p:nvSpPr>
+        <p:spPr>
+          <a:xfrm>
+            <a:off x="11155680" y="5632704"/>
+            <a:ext cx="841248" cy="841248"/>
+          </a:xfrm>
+          <a:prstGeom prst="ellipse">
+            <a:avLst/>
+          </a:prstGeom>
+          <a:solidFill>
+            <a:srgbClr val="1B2430">
+              <a:alpha val="14000"/>
+            </a:srgbClr>
+          </a:solidFill>
+          <a:ln w="12700">
+            <a:solidFill>
+              <a:srgbClr val="1B2430">
+                <a:alpha val="0"/>
+              </a:srgbClr>
+            </a:solidFill>
+            <a:prstDash val="solid"/>
+          </a:ln>
+        </p:spPr>
+      </p:sp>
+      <p:sp>
+        <p:nvSpPr>
+          <p:cNvPr id="19" name="Shape 17"/>
+          <p:cNvSpPr/>
+          <p:nvPr/>
+        </p:nvSpPr>
+        <p:spPr>
+          <a:xfrm>
+            <a:off x="11100816" y="5577840"/>
+            <a:ext cx="822960" cy="822960"/>
+          </a:xfrm>
+          <a:prstGeom prst="ellipse">
+            <a:avLst/>
+          </a:prstGeom>
+          <a:solidFill>
+            <a:srgbClr val="FFFFFF">
+              <a:alpha val="94000"/>
+            </a:srgbClr>
+          </a:solidFill>
+          <a:ln w="15240">
+            <a:solidFill>
+              <a:srgbClr val="1F7A8C"/>
+            </a:solidFill>
+            <a:prstDash val="solid"/>
+          </a:ln>
+        </p:spPr>
+      </p:sp>
+      <p:sp>
+        <p:nvSpPr>
+          <p:cNvPr id="20" name="Shape 18"/>
+          <p:cNvSpPr/>
+          <p:nvPr/>
+        </p:nvSpPr>
+        <p:spPr>
+          <a:xfrm>
+            <a:off x="11247120" y="5724144"/>
+            <a:ext cx="530352" cy="530352"/>
+          </a:xfrm>
+          <a:prstGeom prst="ellipse">
+            <a:avLst/>
+          </a:prstGeom>
+          <a:solidFill>
+            <a:srgbClr val="FFFFFF">
+              <a:alpha val="0"/>
+            </a:srgbClr>
+          </a:solidFill>
+          <a:ln w="7620">
+            <a:solidFill>
+              <a:srgbClr val="D6DEE8"/>
+            </a:solidFill>
+            <a:prstDash val="solid"/>
+          </a:ln>
+        </p:spPr>
       </p:sp>
     </p:spTree>
   </p:cSld>
@@ -13470,8 +14217,8 @@
         </p:nvSpPr>
         <p:spPr>
           <a:xfrm>
-            <a:off x="7635240" y="6528816"/>
-            <a:ext cx="3977640" cy="164592"/>
+            <a:off x="6720840" y="6528816"/>
+            <a:ext cx="4069080" cy="164592"/>
           </a:xfrm>
           <a:prstGeom prst="rect">
             <a:avLst/>
@@ -14090,6 +14837,89 @@
             <a:endParaRPr lang="en-US" sz="640" dirty="0"/>
           </a:p>
         </p:txBody>
+      </p:sp>
+      <p:sp>
+        <p:nvSpPr>
+          <p:cNvPr id="27" name="Shape 25"/>
+          <p:cNvSpPr/>
+          <p:nvPr/>
+        </p:nvSpPr>
+        <p:spPr>
+          <a:xfrm>
+            <a:off x="11155680" y="5632704"/>
+            <a:ext cx="841248" cy="841248"/>
+          </a:xfrm>
+          <a:prstGeom prst="ellipse">
+            <a:avLst/>
+          </a:prstGeom>
+          <a:solidFill>
+            <a:srgbClr val="1B2430">
+              <a:alpha val="14000"/>
+            </a:srgbClr>
+          </a:solidFill>
+          <a:ln w="12700">
+            <a:solidFill>
+              <a:srgbClr val="1B2430">
+                <a:alpha val="0"/>
+              </a:srgbClr>
+            </a:solidFill>
+            <a:prstDash val="solid"/>
+          </a:ln>
+        </p:spPr>
+      </p:sp>
+      <p:sp>
+        <p:nvSpPr>
+          <p:cNvPr id="28" name="Shape 26"/>
+          <p:cNvSpPr/>
+          <p:nvPr/>
+        </p:nvSpPr>
+        <p:spPr>
+          <a:xfrm>
+            <a:off x="11100816" y="5577840"/>
+            <a:ext cx="822960" cy="822960"/>
+          </a:xfrm>
+          <a:prstGeom prst="ellipse">
+            <a:avLst/>
+          </a:prstGeom>
+          <a:solidFill>
+            <a:srgbClr val="FFFFFF">
+              <a:alpha val="94000"/>
+            </a:srgbClr>
+          </a:solidFill>
+          <a:ln w="15240">
+            <a:solidFill>
+              <a:srgbClr val="1F7A8C"/>
+            </a:solidFill>
+            <a:prstDash val="solid"/>
+          </a:ln>
+        </p:spPr>
+      </p:sp>
+      <p:sp>
+        <p:nvSpPr>
+          <p:cNvPr id="29" name="Shape 27"/>
+          <p:cNvSpPr/>
+          <p:nvPr/>
+        </p:nvSpPr>
+        <p:spPr>
+          <a:xfrm>
+            <a:off x="11247120" y="5724144"/>
+            <a:ext cx="530352" cy="530352"/>
+          </a:xfrm>
+          <a:prstGeom prst="ellipse">
+            <a:avLst/>
+          </a:prstGeom>
+          <a:solidFill>
+            <a:srgbClr val="FFFFFF">
+              <a:alpha val="0"/>
+            </a:srgbClr>
+          </a:solidFill>
+          <a:ln w="7620">
+            <a:solidFill>
+              <a:srgbClr val="D6DEE8"/>
+            </a:solidFill>
+            <a:prstDash val="solid"/>
+          </a:ln>
+        </p:spPr>
       </p:sp>
     </p:spTree>
   </p:cSld>
@@ -14273,8 +15103,8 @@
         </p:nvSpPr>
         <p:spPr>
           <a:xfrm>
-            <a:off x="7635240" y="6528816"/>
-            <a:ext cx="3977640" cy="164592"/>
+            <a:off x="6720840" y="6528816"/>
+            <a:ext cx="4069080" cy="164592"/>
           </a:xfrm>
           <a:prstGeom prst="rect">
             <a:avLst/>
@@ -15090,6 +15920,89 @@
             <a:endParaRPr lang="en-US" sz="690" dirty="0"/>
           </a:p>
         </p:txBody>
+      </p:sp>
+      <p:sp>
+        <p:nvSpPr>
+          <p:cNvPr id="28" name="Shape 26"/>
+          <p:cNvSpPr/>
+          <p:nvPr/>
+        </p:nvSpPr>
+        <p:spPr>
+          <a:xfrm>
+            <a:off x="11155680" y="5632704"/>
+            <a:ext cx="841248" cy="841248"/>
+          </a:xfrm>
+          <a:prstGeom prst="ellipse">
+            <a:avLst/>
+          </a:prstGeom>
+          <a:solidFill>
+            <a:srgbClr val="1B2430">
+              <a:alpha val="14000"/>
+            </a:srgbClr>
+          </a:solidFill>
+          <a:ln w="12700">
+            <a:solidFill>
+              <a:srgbClr val="1B2430">
+                <a:alpha val="0"/>
+              </a:srgbClr>
+            </a:solidFill>
+            <a:prstDash val="solid"/>
+          </a:ln>
+        </p:spPr>
+      </p:sp>
+      <p:sp>
+        <p:nvSpPr>
+          <p:cNvPr id="29" name="Shape 27"/>
+          <p:cNvSpPr/>
+          <p:nvPr/>
+        </p:nvSpPr>
+        <p:spPr>
+          <a:xfrm>
+            <a:off x="11100816" y="5577840"/>
+            <a:ext cx="822960" cy="822960"/>
+          </a:xfrm>
+          <a:prstGeom prst="ellipse">
+            <a:avLst/>
+          </a:prstGeom>
+          <a:solidFill>
+            <a:srgbClr val="FFFFFF">
+              <a:alpha val="94000"/>
+            </a:srgbClr>
+          </a:solidFill>
+          <a:ln w="15240">
+            <a:solidFill>
+              <a:srgbClr val="1F7A8C"/>
+            </a:solidFill>
+            <a:prstDash val="solid"/>
+          </a:ln>
+        </p:spPr>
+      </p:sp>
+      <p:sp>
+        <p:nvSpPr>
+          <p:cNvPr id="30" name="Shape 28"/>
+          <p:cNvSpPr/>
+          <p:nvPr/>
+        </p:nvSpPr>
+        <p:spPr>
+          <a:xfrm>
+            <a:off x="11247120" y="5724144"/>
+            <a:ext cx="530352" cy="530352"/>
+          </a:xfrm>
+          <a:prstGeom prst="ellipse">
+            <a:avLst/>
+          </a:prstGeom>
+          <a:solidFill>
+            <a:srgbClr val="FFFFFF">
+              <a:alpha val="0"/>
+            </a:srgbClr>
+          </a:solidFill>
+          <a:ln w="7620">
+            <a:solidFill>
+              <a:srgbClr val="D6DEE8"/>
+            </a:solidFill>
+            <a:prstDash val="solid"/>
+          </a:ln>
+        </p:spPr>
       </p:sp>
     </p:spTree>
   </p:cSld>
@@ -15273,8 +16186,8 @@
         </p:nvSpPr>
         <p:spPr>
           <a:xfrm>
-            <a:off x="7635240" y="6528816"/>
-            <a:ext cx="3977640" cy="164592"/>
+            <a:off x="6720840" y="6528816"/>
+            <a:ext cx="4069080" cy="164592"/>
           </a:xfrm>
           <a:prstGeom prst="rect">
             <a:avLst/>
@@ -16345,6 +17258,89 @@
             <a:endParaRPr lang="en-US" sz="620" dirty="0"/>
           </a:p>
         </p:txBody>
+      </p:sp>
+      <p:sp>
+        <p:nvSpPr>
+          <p:cNvPr id="33" name="Shape 31"/>
+          <p:cNvSpPr/>
+          <p:nvPr/>
+        </p:nvSpPr>
+        <p:spPr>
+          <a:xfrm>
+            <a:off x="11155680" y="5632704"/>
+            <a:ext cx="841248" cy="841248"/>
+          </a:xfrm>
+          <a:prstGeom prst="ellipse">
+            <a:avLst/>
+          </a:prstGeom>
+          <a:solidFill>
+            <a:srgbClr val="1B2430">
+              <a:alpha val="14000"/>
+            </a:srgbClr>
+          </a:solidFill>
+          <a:ln w="12700">
+            <a:solidFill>
+              <a:srgbClr val="1B2430">
+                <a:alpha val="0"/>
+              </a:srgbClr>
+            </a:solidFill>
+            <a:prstDash val="solid"/>
+          </a:ln>
+        </p:spPr>
+      </p:sp>
+      <p:sp>
+        <p:nvSpPr>
+          <p:cNvPr id="34" name="Shape 32"/>
+          <p:cNvSpPr/>
+          <p:nvPr/>
+        </p:nvSpPr>
+        <p:spPr>
+          <a:xfrm>
+            <a:off x="11100816" y="5577840"/>
+            <a:ext cx="822960" cy="822960"/>
+          </a:xfrm>
+          <a:prstGeom prst="ellipse">
+            <a:avLst/>
+          </a:prstGeom>
+          <a:solidFill>
+            <a:srgbClr val="FFFFFF">
+              <a:alpha val="94000"/>
+            </a:srgbClr>
+          </a:solidFill>
+          <a:ln w="15240">
+            <a:solidFill>
+              <a:srgbClr val="1F7A8C"/>
+            </a:solidFill>
+            <a:prstDash val="solid"/>
+          </a:ln>
+        </p:spPr>
+      </p:sp>
+      <p:sp>
+        <p:nvSpPr>
+          <p:cNvPr id="35" name="Shape 33"/>
+          <p:cNvSpPr/>
+          <p:nvPr/>
+        </p:nvSpPr>
+        <p:spPr>
+          <a:xfrm>
+            <a:off x="11247120" y="5724144"/>
+            <a:ext cx="530352" cy="530352"/>
+          </a:xfrm>
+          <a:prstGeom prst="ellipse">
+            <a:avLst/>
+          </a:prstGeom>
+          <a:solidFill>
+            <a:srgbClr val="FFFFFF">
+              <a:alpha val="0"/>
+            </a:srgbClr>
+          </a:solidFill>
+          <a:ln w="7620">
+            <a:solidFill>
+              <a:srgbClr val="D6DEE8"/>
+            </a:solidFill>
+            <a:prstDash val="solid"/>
+          </a:ln>
+        </p:spPr>
       </p:sp>
     </p:spTree>
   </p:cSld>
@@ -16528,8 +17524,8 @@
         </p:nvSpPr>
         <p:spPr>
           <a:xfrm>
-            <a:off x="7635240" y="6528816"/>
-            <a:ext cx="3977640" cy="164592"/>
+            <a:off x="6720840" y="6528816"/>
+            <a:ext cx="4069080" cy="164592"/>
           </a:xfrm>
           <a:prstGeom prst="rect">
             <a:avLst/>
@@ -17276,6 +18272,89 @@
             <a:endParaRPr lang="en-US" sz="730" dirty="0"/>
           </a:p>
         </p:txBody>
+      </p:sp>
+      <p:sp>
+        <p:nvSpPr>
+          <p:cNvPr id="25" name="Shape 23"/>
+          <p:cNvSpPr/>
+          <p:nvPr/>
+        </p:nvSpPr>
+        <p:spPr>
+          <a:xfrm>
+            <a:off x="11155680" y="5632704"/>
+            <a:ext cx="841248" cy="841248"/>
+          </a:xfrm>
+          <a:prstGeom prst="ellipse">
+            <a:avLst/>
+          </a:prstGeom>
+          <a:solidFill>
+            <a:srgbClr val="1B2430">
+              <a:alpha val="14000"/>
+            </a:srgbClr>
+          </a:solidFill>
+          <a:ln w="12700">
+            <a:solidFill>
+              <a:srgbClr val="1B2430">
+                <a:alpha val="0"/>
+              </a:srgbClr>
+            </a:solidFill>
+            <a:prstDash val="solid"/>
+          </a:ln>
+        </p:spPr>
+      </p:sp>
+      <p:sp>
+        <p:nvSpPr>
+          <p:cNvPr id="26" name="Shape 24"/>
+          <p:cNvSpPr/>
+          <p:nvPr/>
+        </p:nvSpPr>
+        <p:spPr>
+          <a:xfrm>
+            <a:off x="11100816" y="5577840"/>
+            <a:ext cx="822960" cy="822960"/>
+          </a:xfrm>
+          <a:prstGeom prst="ellipse">
+            <a:avLst/>
+          </a:prstGeom>
+          <a:solidFill>
+            <a:srgbClr val="FFFFFF">
+              <a:alpha val="94000"/>
+            </a:srgbClr>
+          </a:solidFill>
+          <a:ln w="15240">
+            <a:solidFill>
+              <a:srgbClr val="1F7A8C"/>
+            </a:solidFill>
+            <a:prstDash val="solid"/>
+          </a:ln>
+        </p:spPr>
+      </p:sp>
+      <p:sp>
+        <p:nvSpPr>
+          <p:cNvPr id="27" name="Shape 25"/>
+          <p:cNvSpPr/>
+          <p:nvPr/>
+        </p:nvSpPr>
+        <p:spPr>
+          <a:xfrm>
+            <a:off x="11247120" y="5724144"/>
+            <a:ext cx="530352" cy="530352"/>
+          </a:xfrm>
+          <a:prstGeom prst="ellipse">
+            <a:avLst/>
+          </a:prstGeom>
+          <a:solidFill>
+            <a:srgbClr val="FFFFFF">
+              <a:alpha val="0"/>
+            </a:srgbClr>
+          </a:solidFill>
+          <a:ln w="7620">
+            <a:solidFill>
+              <a:srgbClr val="D6DEE8"/>
+            </a:solidFill>
+            <a:prstDash val="solid"/>
+          </a:ln>
+        </p:spPr>
       </p:sp>
     </p:spTree>
   </p:cSld>
@@ -17459,8 +18538,8 @@
         </p:nvSpPr>
         <p:spPr>
           <a:xfrm>
-            <a:off x="7635240" y="6528816"/>
-            <a:ext cx="3977640" cy="164592"/>
+            <a:off x="6720840" y="6528816"/>
+            <a:ext cx="4069080" cy="164592"/>
           </a:xfrm>
           <a:prstGeom prst="rect">
             <a:avLst/>
@@ -18872,6 +19951,89 @@
             <a:endParaRPr lang="en-US" sz="710" dirty="0"/>
           </a:p>
         </p:txBody>
+      </p:sp>
+      <p:sp>
+        <p:nvSpPr>
+          <p:cNvPr id="47" name="Shape 45"/>
+          <p:cNvSpPr/>
+          <p:nvPr/>
+        </p:nvSpPr>
+        <p:spPr>
+          <a:xfrm>
+            <a:off x="11155680" y="5632704"/>
+            <a:ext cx="841248" cy="841248"/>
+          </a:xfrm>
+          <a:prstGeom prst="ellipse">
+            <a:avLst/>
+          </a:prstGeom>
+          <a:solidFill>
+            <a:srgbClr val="1B2430">
+              <a:alpha val="14000"/>
+            </a:srgbClr>
+          </a:solidFill>
+          <a:ln w="12700">
+            <a:solidFill>
+              <a:srgbClr val="1B2430">
+                <a:alpha val="0"/>
+              </a:srgbClr>
+            </a:solidFill>
+            <a:prstDash val="solid"/>
+          </a:ln>
+        </p:spPr>
+      </p:sp>
+      <p:sp>
+        <p:nvSpPr>
+          <p:cNvPr id="48" name="Shape 46"/>
+          <p:cNvSpPr/>
+          <p:nvPr/>
+        </p:nvSpPr>
+        <p:spPr>
+          <a:xfrm>
+            <a:off x="11100816" y="5577840"/>
+            <a:ext cx="822960" cy="822960"/>
+          </a:xfrm>
+          <a:prstGeom prst="ellipse">
+            <a:avLst/>
+          </a:prstGeom>
+          <a:solidFill>
+            <a:srgbClr val="FFFFFF">
+              <a:alpha val="94000"/>
+            </a:srgbClr>
+          </a:solidFill>
+          <a:ln w="15240">
+            <a:solidFill>
+              <a:srgbClr val="1F7A8C"/>
+            </a:solidFill>
+            <a:prstDash val="solid"/>
+          </a:ln>
+        </p:spPr>
+      </p:sp>
+      <p:sp>
+        <p:nvSpPr>
+          <p:cNvPr id="49" name="Shape 47"/>
+          <p:cNvSpPr/>
+          <p:nvPr/>
+        </p:nvSpPr>
+        <p:spPr>
+          <a:xfrm>
+            <a:off x="11247120" y="5724144"/>
+            <a:ext cx="530352" cy="530352"/>
+          </a:xfrm>
+          <a:prstGeom prst="ellipse">
+            <a:avLst/>
+          </a:prstGeom>
+          <a:solidFill>
+            <a:srgbClr val="FFFFFF">
+              <a:alpha val="0"/>
+            </a:srgbClr>
+          </a:solidFill>
+          <a:ln w="7620">
+            <a:solidFill>
+              <a:srgbClr val="D6DEE8"/>
+            </a:solidFill>
+            <a:prstDash val="solid"/>
+          </a:ln>
+        </p:spPr>
       </p:sp>
     </p:spTree>
   </p:cSld>
@@ -19055,8 +20217,8 @@
         </p:nvSpPr>
         <p:spPr>
           <a:xfrm>
-            <a:off x="7635240" y="6528816"/>
-            <a:ext cx="3977640" cy="164592"/>
+            <a:off x="6720840" y="6528816"/>
+            <a:ext cx="4069080" cy="164592"/>
           </a:xfrm>
           <a:prstGeom prst="rect">
             <a:avLst/>
@@ -19761,6 +20923,89 @@
             <a:endParaRPr lang="en-US" sz="650" dirty="0"/>
           </a:p>
         </p:txBody>
+      </p:sp>
+      <p:sp>
+        <p:nvSpPr>
+          <p:cNvPr id="27" name="Shape 25"/>
+          <p:cNvSpPr/>
+          <p:nvPr/>
+        </p:nvSpPr>
+        <p:spPr>
+          <a:xfrm>
+            <a:off x="11155680" y="5632704"/>
+            <a:ext cx="841248" cy="841248"/>
+          </a:xfrm>
+          <a:prstGeom prst="ellipse">
+            <a:avLst/>
+          </a:prstGeom>
+          <a:solidFill>
+            <a:srgbClr val="1B2430">
+              <a:alpha val="14000"/>
+            </a:srgbClr>
+          </a:solidFill>
+          <a:ln w="12700">
+            <a:solidFill>
+              <a:srgbClr val="1B2430">
+                <a:alpha val="0"/>
+              </a:srgbClr>
+            </a:solidFill>
+            <a:prstDash val="solid"/>
+          </a:ln>
+        </p:spPr>
+      </p:sp>
+      <p:sp>
+        <p:nvSpPr>
+          <p:cNvPr id="28" name="Shape 26"/>
+          <p:cNvSpPr/>
+          <p:nvPr/>
+        </p:nvSpPr>
+        <p:spPr>
+          <a:xfrm>
+            <a:off x="11100816" y="5577840"/>
+            <a:ext cx="822960" cy="822960"/>
+          </a:xfrm>
+          <a:prstGeom prst="ellipse">
+            <a:avLst/>
+          </a:prstGeom>
+          <a:solidFill>
+            <a:srgbClr val="FFFFFF">
+              <a:alpha val="94000"/>
+            </a:srgbClr>
+          </a:solidFill>
+          <a:ln w="15240">
+            <a:solidFill>
+              <a:srgbClr val="1F7A8C"/>
+            </a:solidFill>
+            <a:prstDash val="solid"/>
+          </a:ln>
+        </p:spPr>
+      </p:sp>
+      <p:sp>
+        <p:nvSpPr>
+          <p:cNvPr id="29" name="Shape 27"/>
+          <p:cNvSpPr/>
+          <p:nvPr/>
+        </p:nvSpPr>
+        <p:spPr>
+          <a:xfrm>
+            <a:off x="11247120" y="5724144"/>
+            <a:ext cx="530352" cy="530352"/>
+          </a:xfrm>
+          <a:prstGeom prst="ellipse">
+            <a:avLst/>
+          </a:prstGeom>
+          <a:solidFill>
+            <a:srgbClr val="FFFFFF">
+              <a:alpha val="0"/>
+            </a:srgbClr>
+          </a:solidFill>
+          <a:ln w="7620">
+            <a:solidFill>
+              <a:srgbClr val="D6DEE8"/>
+            </a:solidFill>
+            <a:prstDash val="solid"/>
+          </a:ln>
+        </p:spPr>
       </p:sp>
     </p:spTree>
   </p:cSld>
@@ -19944,8 +21189,8 @@
         </p:nvSpPr>
         <p:spPr>
           <a:xfrm>
-            <a:off x="7635240" y="6528816"/>
-            <a:ext cx="3977640" cy="164592"/>
+            <a:off x="6720840" y="6528816"/>
+            <a:ext cx="4069080" cy="164592"/>
           </a:xfrm>
           <a:prstGeom prst="rect">
             <a:avLst/>
@@ -20882,6 +22127,89 @@
             <a:endParaRPr lang="en-US" sz="710" dirty="0"/>
           </a:p>
         </p:txBody>
+      </p:sp>
+      <p:sp>
+        <p:nvSpPr>
+          <p:cNvPr id="33" name="Shape 31"/>
+          <p:cNvSpPr/>
+          <p:nvPr/>
+        </p:nvSpPr>
+        <p:spPr>
+          <a:xfrm>
+            <a:off x="11155680" y="5632704"/>
+            <a:ext cx="841248" cy="841248"/>
+          </a:xfrm>
+          <a:prstGeom prst="ellipse">
+            <a:avLst/>
+          </a:prstGeom>
+          <a:solidFill>
+            <a:srgbClr val="1B2430">
+              <a:alpha val="14000"/>
+            </a:srgbClr>
+          </a:solidFill>
+          <a:ln w="12700">
+            <a:solidFill>
+              <a:srgbClr val="1B2430">
+                <a:alpha val="0"/>
+              </a:srgbClr>
+            </a:solidFill>
+            <a:prstDash val="solid"/>
+          </a:ln>
+        </p:spPr>
+      </p:sp>
+      <p:sp>
+        <p:nvSpPr>
+          <p:cNvPr id="34" name="Shape 32"/>
+          <p:cNvSpPr/>
+          <p:nvPr/>
+        </p:nvSpPr>
+        <p:spPr>
+          <a:xfrm>
+            <a:off x="11100816" y="5577840"/>
+            <a:ext cx="822960" cy="822960"/>
+          </a:xfrm>
+          <a:prstGeom prst="ellipse">
+            <a:avLst/>
+          </a:prstGeom>
+          <a:solidFill>
+            <a:srgbClr val="FFFFFF">
+              <a:alpha val="94000"/>
+            </a:srgbClr>
+          </a:solidFill>
+          <a:ln w="15240">
+            <a:solidFill>
+              <a:srgbClr val="1F7A8C"/>
+            </a:solidFill>
+            <a:prstDash val="solid"/>
+          </a:ln>
+        </p:spPr>
+      </p:sp>
+      <p:sp>
+        <p:nvSpPr>
+          <p:cNvPr id="35" name="Shape 33"/>
+          <p:cNvSpPr/>
+          <p:nvPr/>
+        </p:nvSpPr>
+        <p:spPr>
+          <a:xfrm>
+            <a:off x="11247120" y="5724144"/>
+            <a:ext cx="530352" cy="530352"/>
+          </a:xfrm>
+          <a:prstGeom prst="ellipse">
+            <a:avLst/>
+          </a:prstGeom>
+          <a:solidFill>
+            <a:srgbClr val="FFFFFF">
+              <a:alpha val="0"/>
+            </a:srgbClr>
+          </a:solidFill>
+          <a:ln w="7620">
+            <a:solidFill>
+              <a:srgbClr val="D6DEE8"/>
+            </a:solidFill>
+            <a:prstDash val="solid"/>
+          </a:ln>
+        </p:spPr>
       </p:sp>
     </p:spTree>
   </p:cSld>
